--- a/decks/Day 2/Day2-Section2-Streaming-Tools-Thinking.pptx
+++ b/decks/Day 2/Day2-Section2-Streaming-Tools-Thinking.pptx
@@ -18,10 +18,7 @@
     <p:sldId id="266" r:id="rId12"/>
     <p:sldId id="267" r:id="rId13"/>
   </p:sldIdLst>
-  <p:notesMasterIdLst>
-    <p:notesMasterId r:id="rId14"/>
-  </p:notesMasterIdLst>
-  <p:sldSz cx="9144000" cy="5143500"/>
+  <p:sldSz cx="9144000" cy="5143500" type="screen16x9"/>
   <p:notesSz cx="5143500" cy="9144000"/>
   <p:defaultTextStyle>
     <a:lvl1pPr marL="0" algn="l" defTabSz="914400" rtl="0" eaLnBrk="1" latinLnBrk="0" hangingPunct="1">
@@ -115,356 +112,12 @@
       </a:defRPr>
     </a:lvl9pPr>
   </p:defaultTextStyle>
+  <p:extLst>
+    <p:ext uri="{EFAFB233-063F-42B5-8137-9DF3F51BA10A}">
+      <p15:sldGuideLst xmlns:p15="http://schemas.microsoft.com/office/powerpoint/2012/main"/>
+    </p:ext>
+  </p:extLst>
 </p:presentation>
-</file>
-
-<file path=ppt/notesMasters/notesMaster1.xml><?xml version="1.0" encoding="utf-8"?>
-<p:notesMaster xmlns:a="http://schemas.openxmlformats.org/drawingml/2006/main" xmlns:r="http://schemas.openxmlformats.org/officeDocument/2006/relationships" xmlns:p="http://schemas.openxmlformats.org/presentationml/2006/main">
-  <p:cSld>
-    <p:bg>
-      <p:bgRef idx="1001">
-        <a:schemeClr val="bg1"/>
-      </p:bgRef>
-    </p:bg>
-    <p:spTree>
-      <p:nvGrpSpPr>
-        <p:cNvPr id="1" name=""/>
-        <p:cNvGrpSpPr/>
-        <p:nvPr/>
-      </p:nvGrpSpPr>
-      <p:grpSpPr>
-        <a:xfrm>
-          <a:off x="0" y="0"/>
-          <a:ext cx="0" cy="0"/>
-          <a:chOff x="0" y="0"/>
-          <a:chExt cx="0" cy="0"/>
-        </a:xfrm>
-      </p:grpSpPr>
-      <p:sp>
-        <p:nvSpPr>
-          <p:cNvPr id="2" name="Header Placeholder 1"/>
-          <p:cNvSpPr>
-            <a:spLocks noGrp="1"/>
-          </p:cNvSpPr>
-          <p:nvPr>
-            <p:ph type="hdr" sz="quarter"/>
-          </p:nvPr>
-        </p:nvSpPr>
-        <p:spPr>
-          <a:xfrm>
-            <a:off x="0" y="0"/>
-            <a:ext cx="2971800" cy="458788"/>
-          </a:xfrm>
-          <a:prstGeom prst="rect">
-            <a:avLst/>
-          </a:prstGeom>
-        </p:spPr>
-        <p:txBody>
-          <a:bodyPr vert="horz" lIns="91440" tIns="45720" rIns="91440" bIns="45720" rtlCol="0"/>
-          <a:lstStyle>
-            <a:lvl1pPr algn="l">
-              <a:defRPr sz="1200"/>
-            </a:lvl1pPr>
-          </a:lstStyle>
-          <a:p>
-            <a:endParaRPr lang="en-US"/>
-          </a:p>
-        </p:txBody>
-      </p:sp>
-      <p:sp>
-        <p:nvSpPr>
-          <p:cNvPr id="3" name="Date Placeholder 2"/>
-          <p:cNvSpPr>
-            <a:spLocks noGrp="1"/>
-          </p:cNvSpPr>
-          <p:nvPr>
-            <p:ph type="dt" idx="1"/>
-          </p:nvPr>
-        </p:nvSpPr>
-        <p:spPr>
-          <a:xfrm>
-            <a:off x="3884613" y="0"/>
-            <a:ext cx="2971800" cy="458788"/>
-          </a:xfrm>
-          <a:prstGeom prst="rect">
-            <a:avLst/>
-          </a:prstGeom>
-        </p:spPr>
-        <p:txBody>
-          <a:bodyPr vert="horz" lIns="91440" tIns="45720" rIns="91440" bIns="45720" rtlCol="0"/>
-          <a:lstStyle>
-            <a:lvl1pPr algn="r">
-              <a:defRPr sz="1200"/>
-            </a:lvl1pPr>
-          </a:lstStyle>
-          <a:p>
-            <a:fld id="{5282F153-3F37-0F45-9E97-73ACFA13230C}" type="datetimeFigureOut">
-              <a:rPr lang="en-US"/>
-              <a:t>7/23/19</a:t>
-            </a:fld>
-            <a:endParaRPr lang="en-US"/>
-          </a:p>
-        </p:txBody>
-      </p:sp>
-      <p:sp>
-        <p:nvSpPr>
-          <p:cNvPr id="4" name="Slide Image Placeholder 3"/>
-          <p:cNvSpPr>
-            <a:spLocks noGrp="1" noRot="1" noChangeAspect="1"/>
-          </p:cNvSpPr>
-          <p:nvPr>
-            <p:ph type="sldImg" idx="2"/>
-          </p:nvPr>
-        </p:nvSpPr>
-        <p:spPr>
-          <a:xfrm>
-            <a:off x="685800" y="1143000"/>
-            <a:ext cx="5486400" cy="3086100"/>
-          </a:xfrm>
-          <a:prstGeom prst="rect">
-            <a:avLst/>
-          </a:prstGeom>
-          <a:noFill/>
-          <a:ln w="12700">
-            <a:solidFill>
-              <a:prstClr val="black"/>
-            </a:solidFill>
-          </a:ln>
-        </p:spPr>
-        <p:txBody>
-          <a:bodyPr vert="horz" lIns="91440" tIns="45720" rIns="91440" bIns="45720" rtlCol="0" anchor="ctr"/>
-          <a:lstStyle/>
-          <a:p>
-            <a:endParaRPr lang="en-US"/>
-          </a:p>
-        </p:txBody>
-      </p:sp>
-      <p:sp>
-        <p:nvSpPr>
-          <p:cNvPr id="5" name="Notes Placeholder 4"/>
-          <p:cNvSpPr>
-            <a:spLocks noGrp="1"/>
-          </p:cNvSpPr>
-          <p:nvPr>
-            <p:ph type="body" sz="quarter" idx="3"/>
-          </p:nvPr>
-        </p:nvSpPr>
-        <p:spPr>
-          <a:xfrm>
-            <a:off x="685800" y="4400550"/>
-            <a:ext cx="5486400" cy="3600450"/>
-          </a:xfrm>
-          <a:prstGeom prst="rect">
-            <a:avLst/>
-          </a:prstGeom>
-        </p:spPr>
-        <p:txBody>
-          <a:bodyPr vert="horz" lIns="91440" tIns="45720" rIns="91440" bIns="45720" rtlCol="0"/>
-          <a:lstStyle/>
-          <a:p>
-            <a:pPr lvl="0"/>
-            <a:r>
-              <a:rPr lang="en-US"/>
-              <a:t>Click to edit Master text styles</a:t>
-            </a:r>
-          </a:p>
-          <a:p>
-            <a:pPr lvl="1"/>
-            <a:r>
-              <a:rPr lang="en-US"/>
-              <a:t>Second level</a:t>
-            </a:r>
-          </a:p>
-          <a:p>
-            <a:pPr lvl="2"/>
-            <a:r>
-              <a:rPr lang="en-US"/>
-              <a:t>Third level</a:t>
-            </a:r>
-          </a:p>
-          <a:p>
-            <a:pPr lvl="3"/>
-            <a:r>
-              <a:rPr lang="en-US"/>
-              <a:t>Fourth level</a:t>
-            </a:r>
-          </a:p>
-          <a:p>
-            <a:pPr lvl="4"/>
-            <a:r>
-              <a:rPr lang="en-US"/>
-              <a:t>Fifth level</a:t>
-            </a:r>
-          </a:p>
-        </p:txBody>
-      </p:sp>
-      <p:sp>
-        <p:nvSpPr>
-          <p:cNvPr id="6" name="Footer Placeholder 5"/>
-          <p:cNvSpPr>
-            <a:spLocks noGrp="1"/>
-          </p:cNvSpPr>
-          <p:nvPr>
-            <p:ph type="ftr" sz="quarter" idx="4"/>
-          </p:nvPr>
-        </p:nvSpPr>
-        <p:spPr>
-          <a:xfrm>
-            <a:off x="0" y="8685213"/>
-            <a:ext cx="2971800" cy="458787"/>
-          </a:xfrm>
-          <a:prstGeom prst="rect">
-            <a:avLst/>
-          </a:prstGeom>
-        </p:spPr>
-        <p:txBody>
-          <a:bodyPr vert="horz" lIns="91440" tIns="45720" rIns="91440" bIns="45720" rtlCol="0" anchor="b"/>
-          <a:lstStyle>
-            <a:lvl1pPr algn="l">
-              <a:defRPr sz="1200"/>
-            </a:lvl1pPr>
-          </a:lstStyle>
-          <a:p>
-            <a:endParaRPr lang="en-US"/>
-          </a:p>
-        </p:txBody>
-      </p:sp>
-      <p:sp>
-        <p:nvSpPr>
-          <p:cNvPr id="7" name="Slide Number Placeholder 6"/>
-          <p:cNvSpPr>
-            <a:spLocks noGrp="1"/>
-          </p:cNvSpPr>
-          <p:nvPr>
-            <p:ph type="sldNum" sz="quarter" idx="5"/>
-          </p:nvPr>
-        </p:nvSpPr>
-        <p:spPr>
-          <a:xfrm>
-            <a:off x="3884613" y="8685213"/>
-            <a:ext cx="2971800" cy="458787"/>
-          </a:xfrm>
-          <a:prstGeom prst="rect">
-            <a:avLst/>
-          </a:prstGeom>
-        </p:spPr>
-        <p:txBody>
-          <a:bodyPr vert="horz" lIns="91440" tIns="45720" rIns="91440" bIns="45720" rtlCol="0" anchor="b"/>
-          <a:lstStyle>
-            <a:lvl1pPr algn="r">
-              <a:defRPr sz="1200"/>
-            </a:lvl1pPr>
-          </a:lstStyle>
-          <a:p>
-            <a:fld id="{CE5E9CC1-C706-0F49-92D6-E571CC5EEA8F}" type="slidenum">
-              <a:rPr lang="en-US"/>
-              <a:t>‹#›</a:t>
-            </a:fld>
-            <a:endParaRPr lang="en-US"/>
-          </a:p>
-        </p:txBody>
-      </p:sp>
-    </p:spTree>
-    <p:extLst>
-      <p:ext uri="{BB962C8B-B14F-4D97-AF65-F5344CB8AC3E}">
-        <p14:creationId xmlns:p14="http://schemas.microsoft.com/office/powerpoint/2010/main" val="1024086991"/>
-      </p:ext>
-    </p:extLst>
-  </p:cSld>
-  <p:clrMap bg1="lt1" tx1="dk1" bg2="lt2" tx2="dk2" accent1="accent1" accent2="accent2" accent3="accent3" accent4="accent4" accent5="accent5" accent6="accent6" hlink="hlink" folHlink="folHlink"/>
-  <p:notesStyle>
-    <a:lvl1pPr marL="0" algn="l" defTabSz="914400" rtl="0" eaLnBrk="1" latinLnBrk="0" hangingPunct="1">
-      <a:defRPr sz="1200" kern="1200">
-        <a:solidFill>
-          <a:schemeClr val="tx1"/>
-        </a:solidFill>
-        <a:latin typeface="+mn-lt"/>
-        <a:ea typeface="+mn-ea"/>
-        <a:cs typeface="+mn-cs"/>
-      </a:defRPr>
-    </a:lvl1pPr>
-    <a:lvl2pPr marL="457200" algn="l" defTabSz="914400" rtl="0" eaLnBrk="1" latinLnBrk="0" hangingPunct="1">
-      <a:defRPr sz="1200" kern="1200">
-        <a:solidFill>
-          <a:schemeClr val="tx1"/>
-        </a:solidFill>
-        <a:latin typeface="+mn-lt"/>
-        <a:ea typeface="+mn-ea"/>
-        <a:cs typeface="+mn-cs"/>
-      </a:defRPr>
-    </a:lvl2pPr>
-    <a:lvl3pPr marL="914400" algn="l" defTabSz="914400" rtl="0" eaLnBrk="1" latinLnBrk="0" hangingPunct="1">
-      <a:defRPr sz="1200" kern="1200">
-        <a:solidFill>
-          <a:schemeClr val="tx1"/>
-        </a:solidFill>
-        <a:latin typeface="+mn-lt"/>
-        <a:ea typeface="+mn-ea"/>
-        <a:cs typeface="+mn-cs"/>
-      </a:defRPr>
-    </a:lvl3pPr>
-    <a:lvl4pPr marL="1371600" algn="l" defTabSz="914400" rtl="0" eaLnBrk="1" latinLnBrk="0" hangingPunct="1">
-      <a:defRPr sz="1200" kern="1200">
-        <a:solidFill>
-          <a:schemeClr val="tx1"/>
-        </a:solidFill>
-        <a:latin typeface="+mn-lt"/>
-        <a:ea typeface="+mn-ea"/>
-        <a:cs typeface="+mn-cs"/>
-      </a:defRPr>
-    </a:lvl4pPr>
-    <a:lvl5pPr marL="1828800" algn="l" defTabSz="914400" rtl="0" eaLnBrk="1" latinLnBrk="0" hangingPunct="1">
-      <a:defRPr sz="1200" kern="1200">
-        <a:solidFill>
-          <a:schemeClr val="tx1"/>
-        </a:solidFill>
-        <a:latin typeface="+mn-lt"/>
-        <a:ea typeface="+mn-ea"/>
-        <a:cs typeface="+mn-cs"/>
-      </a:defRPr>
-    </a:lvl5pPr>
-    <a:lvl6pPr marL="2286000" algn="l" defTabSz="914400" rtl="0" eaLnBrk="1" latinLnBrk="0" hangingPunct="1">
-      <a:defRPr sz="1200" kern="1200">
-        <a:solidFill>
-          <a:schemeClr val="tx1"/>
-        </a:solidFill>
-        <a:latin typeface="+mn-lt"/>
-        <a:ea typeface="+mn-ea"/>
-        <a:cs typeface="+mn-cs"/>
-      </a:defRPr>
-    </a:lvl6pPr>
-    <a:lvl7pPr marL="2743200" algn="l" defTabSz="914400" rtl="0" eaLnBrk="1" latinLnBrk="0" hangingPunct="1">
-      <a:defRPr sz="1200" kern="1200">
-        <a:solidFill>
-          <a:schemeClr val="tx1"/>
-        </a:solidFill>
-        <a:latin typeface="+mn-lt"/>
-        <a:ea typeface="+mn-ea"/>
-        <a:cs typeface="+mn-cs"/>
-      </a:defRPr>
-    </a:lvl7pPr>
-    <a:lvl8pPr marL="3200400" algn="l" defTabSz="914400" rtl="0" eaLnBrk="1" latinLnBrk="0" hangingPunct="1">
-      <a:defRPr sz="1200" kern="1200">
-        <a:solidFill>
-          <a:schemeClr val="tx1"/>
-        </a:solidFill>
-        <a:latin typeface="+mn-lt"/>
-        <a:ea typeface="+mn-ea"/>
-        <a:cs typeface="+mn-cs"/>
-      </a:defRPr>
-    </a:lvl8pPr>
-    <a:lvl9pPr marL="3657600" algn="l" defTabSz="914400" rtl="0" eaLnBrk="1" latinLnBrk="0" hangingPunct="1">
-      <a:defRPr sz="1200" kern="1200">
-        <a:solidFill>
-          <a:schemeClr val="tx1"/>
-        </a:solidFill>
-        <a:latin typeface="+mn-lt"/>
-        <a:ea typeface="+mn-ea"/>
-        <a:cs typeface="+mn-cs"/>
-      </a:defRPr>
-    </a:lvl9pPr>
-  </p:notesStyle>
-</p:notesMaster>
 </file>
 
 <file path=ppt/slideLayouts/slideLayout1.xml><?xml version="1.0" encoding="utf-8"?>
@@ -500,6 +153,11 @@
 <file path=ppt/slideMasters/slideMaster1.xml><?xml version="1.0" encoding="utf-8"?>
 <p:sldMaster xmlns:a="http://schemas.openxmlformats.org/drawingml/2006/main" xmlns:r="http://schemas.openxmlformats.org/officeDocument/2006/relationships" xmlns:p="http://schemas.openxmlformats.org/presentationml/2006/main">
   <p:cSld>
+    <p:bg>
+      <p:bgRef idx="1001">
+        <a:schemeClr val="bg1"/>
+      </p:bgRef>
+    </p:bg>
     <p:spTree>
       <p:nvGrpSpPr>
         <p:cNvPr id="1" name=""/>
@@ -782,6 +440,7 @@
         <a:solidFill>
           <a:srgbClr val="F0EEE6"/>
         </a:solidFill>
+        <a:effectLst/>
       </p:bgPr>
     </p:bg>
     <p:spTree>
@@ -817,6 +476,13 @@
           </a:solidFill>
           <a:ln/>
         </p:spPr>
+        <p:txBody>
+          <a:bodyPr/>
+          <a:lstStyle/>
+          <a:p>
+            <a:endParaRPr lang="en-US"/>
+          </a:p>
+        </p:txBody>
       </p:sp>
       <p:sp>
         <p:nvSpPr>
@@ -837,17 +503,24 @@
           </a:solidFill>
           <a:ln/>
         </p:spPr>
+        <p:txBody>
+          <a:bodyPr/>
+          <a:lstStyle/>
+          <a:p>
+            <a:endParaRPr lang="en-US"/>
+          </a:p>
+        </p:txBody>
       </p:sp>
       <p:pic>
         <p:nvPicPr>
-          <p:cNvPr id="4" name="Image 0" descr="preencoded.png">    </p:cNvPr>
+          <p:cNvPr id="4" name="Image 0" descr="preencoded.png"/>
           <p:cNvPicPr>
             <a:picLocks noChangeAspect="1"/>
           </p:cNvPicPr>
           <p:nvPr/>
         </p:nvPicPr>
         <p:blipFill>
-          <a:blip r:embed="rId1"/>
+          <a:blip r:embed="rId2"/>
           <a:stretch>
             <a:fillRect/>
           </a:stretch>
@@ -883,11 +556,11 @@
           <a:bodyPr wrap="square" lIns="0" tIns="0" rIns="0" bIns="0" rtlCol="0" anchor="ctr"/>
           <a:lstStyle/>
           <a:p>
-            <a:pPr indent="0" marL="0">
-              <a:buNone/>
-            </a:pPr>
-            <a:r>
-              <a:rPr lang="en-US" sz="1400" b="1" spc="300" kern="0" dirty="0">
+            <a:pPr marL="0" indent="0">
+              <a:buNone/>
+            </a:pPr>
+            <a:r>
+              <a:rPr lang="en-US" sz="1400" b="1" kern="0" spc="300" dirty="0">
                 <a:solidFill>
                   <a:srgbClr val="C25E40"/>
                 </a:solidFill>
@@ -922,7 +595,7 @@
           <a:bodyPr wrap="square" lIns="0" tIns="0" rIns="0" bIns="0" rtlCol="0" anchor="ctr"/>
           <a:lstStyle/>
           <a:p>
-            <a:pPr indent="0" marL="0">
+            <a:pPr marL="0" indent="0">
               <a:lnSpc>
                 <a:spcPct val="100000"/>
               </a:lnSpc>
@@ -942,7 +615,7 @@
             <a:endParaRPr lang="en-US" sz="4000" dirty="0"/>
           </a:p>
           <a:p>
-            <a:pPr indent="0" marL="0">
+            <a:pPr marL="0" indent="0">
               <a:lnSpc>
                 <a:spcPct val="100000"/>
               </a:lnSpc>
@@ -985,6 +658,13 @@
             <a:prstDash val="solid"/>
           </a:ln>
         </p:spPr>
+        <p:txBody>
+          <a:bodyPr/>
+          <a:lstStyle/>
+          <a:p>
+            <a:endParaRPr lang="en-US"/>
+          </a:p>
+        </p:txBody>
       </p:sp>
       <p:sp>
         <p:nvSpPr>
@@ -1007,7 +687,7 @@
           <a:bodyPr wrap="square" lIns="0" tIns="0" rIns="0" bIns="0" rtlCol="0" anchor="ctr"/>
           <a:lstStyle/>
           <a:p>
-            <a:pPr indent="0" marL="0">
+            <a:pPr marL="0" indent="0">
               <a:buNone/>
             </a:pPr>
             <a:r>
@@ -1022,45 +702,6 @@
               <a:t>75 min  ·  40 lecture / demo  +  35 lab</a:t>
             </a:r>
             <a:endParaRPr lang="en-US" sz="1600" dirty="0"/>
-          </a:p>
-        </p:txBody>
-      </p:sp>
-      <p:sp>
-        <p:nvSpPr>
-          <p:cNvPr id="9" name="Text 6"/>
-          <p:cNvSpPr/>
-          <p:nvPr/>
-        </p:nvSpPr>
-        <p:spPr>
-          <a:xfrm>
-            <a:off x="640080" y="4462272"/>
-            <a:ext cx="8046720" cy="292608"/>
-          </a:xfrm>
-          <a:prstGeom prst="rect">
-            <a:avLst/>
-          </a:prstGeom>
-          <a:noFill/>
-          <a:ln/>
-        </p:spPr>
-        <p:txBody>
-          <a:bodyPr wrap="square" lIns="0" tIns="0" rIns="0" bIns="0" rtlCol="0" anchor="ctr"/>
-          <a:lstStyle/>
-          <a:p>
-            <a:pPr indent="0" marL="0">
-              <a:buNone/>
-            </a:pPr>
-            <a:r>
-              <a:rPr lang="en-US" sz="1000" i="1" dirty="0">
-                <a:solidFill>
-                  <a:srgbClr val="615C52"/>
-                </a:solidFill>
-                <a:latin typeface="Inter" pitchFamily="34" charset="0"/>
-                <a:ea typeface="Inter" pitchFamily="34" charset="-122"/>
-                <a:cs typeface="Inter" pitchFamily="34" charset="-120"/>
-              </a:rPr>
-              <a:t>dotnetclaude.com  ·  .NET AI with Claude Workshop</a:t>
-            </a:r>
-            <a:endParaRPr lang="en-US" sz="1000" dirty="0"/>
           </a:p>
         </p:txBody>
       </p:sp>
@@ -1080,6 +721,7 @@
         <a:solidFill>
           <a:srgbClr val="F0EEE6"/>
         </a:solidFill>
+        <a:effectLst/>
       </p:bgPr>
     </p:bg>
     <p:spTree>
@@ -1117,11 +759,11 @@
           <a:bodyPr wrap="square" lIns="0" tIns="0" rIns="0" bIns="0" rtlCol="0" anchor="ctr"/>
           <a:lstStyle/>
           <a:p>
-            <a:pPr indent="0" marL="0">
-              <a:buNone/>
-            </a:pPr>
-            <a:r>
-              <a:rPr lang="en-US" sz="1100" b="1" spc="200" kern="0" dirty="0">
+            <a:pPr marL="0" indent="0">
+              <a:buNone/>
+            </a:pPr>
+            <a:r>
+              <a:rPr lang="en-US" sz="1100" b="1" kern="0" spc="200" dirty="0">
                 <a:solidFill>
                   <a:srgbClr val="C25E40"/>
                 </a:solidFill>
@@ -1156,7 +798,7 @@
           <a:bodyPr wrap="square" lIns="0" tIns="0" rIns="0" bIns="0" rtlCol="0" anchor="ctr"/>
           <a:lstStyle/>
           <a:p>
-            <a:pPr indent="0" marL="0">
+            <a:pPr marL="0" indent="0">
               <a:buNone/>
             </a:pPr>
             <a:r>
@@ -1176,14 +818,14 @@
       </p:sp>
       <p:pic>
         <p:nvPicPr>
-          <p:cNvPr id="4" name="Image 0" descr="preencoded.png">    </p:cNvPr>
+          <p:cNvPr id="4" name="Image 0" descr="preencoded.png"/>
           <p:cNvPicPr>
             <a:picLocks noChangeAspect="1"/>
           </p:cNvPicPr>
           <p:nvPr/>
         </p:nvPicPr>
         <p:blipFill>
-          <a:blip r:embed="rId1"/>
+          <a:blip r:embed="rId2"/>
           <a:stretch>
             <a:fillRect/>
           </a:stretch>
@@ -1224,13 +866,20 @@
             <a:prstDash val="solid"/>
           </a:ln>
           <a:effectLst>
-            <a:outerShdw sx="100000" sy="100000" kx="0" ky="0" algn="bl" rotWithShape="0" blurRad="88900" dist="38100" dir="5400000">
+            <a:outerShdw blurRad="88900" dist="38100" dir="5400000" algn="bl" rotWithShape="0">
               <a:srgbClr val="000000">
                 <a:alpha val="10000"/>
               </a:srgbClr>
             </a:outerShdw>
           </a:effectLst>
         </p:spPr>
+        <p:txBody>
+          <a:bodyPr/>
+          <a:lstStyle/>
+          <a:p>
+            <a:endParaRPr lang="en-US"/>
+          </a:p>
+        </p:txBody>
       </p:sp>
       <p:sp>
         <p:nvSpPr>
@@ -1251,17 +900,24 @@
           </a:solidFill>
           <a:ln/>
         </p:spPr>
+        <p:txBody>
+          <a:bodyPr/>
+          <a:lstStyle/>
+          <a:p>
+            <a:endParaRPr lang="en-US"/>
+          </a:p>
+        </p:txBody>
       </p:sp>
       <p:pic>
         <p:nvPicPr>
-          <p:cNvPr id="7" name="Image 1" descr="preencoded.png">    </p:cNvPr>
+          <p:cNvPr id="7" name="Image 1" descr="preencoded.png"/>
           <p:cNvPicPr>
             <a:picLocks noChangeAspect="1"/>
           </p:cNvPicPr>
           <p:nvPr/>
         </p:nvPicPr>
         <p:blipFill>
-          <a:blip r:embed="rId2"/>
+          <a:blip r:embed="rId3"/>
           <a:stretch>
             <a:fillRect/>
           </a:stretch>
@@ -1297,7 +953,7 @@
           <a:bodyPr wrap="square" lIns="0" tIns="0" rIns="0" bIns="0" rtlCol="0" anchor="ctr"/>
           <a:lstStyle/>
           <a:p>
-            <a:pPr indent="0" marL="0">
+            <a:pPr marL="0" indent="0">
               <a:buNone/>
             </a:pPr>
             <a:r>
@@ -1336,7 +992,7 @@
           <a:bodyPr wrap="square" lIns="0" tIns="0" rIns="0" bIns="0" rtlCol="0" anchor="ctr"/>
           <a:lstStyle/>
           <a:p>
-            <a:pPr indent="0" marL="0">
+            <a:pPr marL="0" indent="0">
               <a:buNone/>
             </a:pPr>
             <a:r>
@@ -1380,13 +1036,20 @@
             <a:prstDash val="solid"/>
           </a:ln>
           <a:effectLst>
-            <a:outerShdw sx="100000" sy="100000" kx="0" ky="0" algn="bl" rotWithShape="0" blurRad="88900" dist="38100" dir="5400000">
+            <a:outerShdw blurRad="88900" dist="38100" dir="5400000" algn="bl" rotWithShape="0">
               <a:srgbClr val="000000">
                 <a:alpha val="10000"/>
               </a:srgbClr>
             </a:outerShdw>
           </a:effectLst>
         </p:spPr>
+        <p:txBody>
+          <a:bodyPr/>
+          <a:lstStyle/>
+          <a:p>
+            <a:endParaRPr lang="en-US"/>
+          </a:p>
+        </p:txBody>
       </p:sp>
       <p:sp>
         <p:nvSpPr>
@@ -1407,17 +1070,24 @@
           </a:solidFill>
           <a:ln/>
         </p:spPr>
+        <p:txBody>
+          <a:bodyPr/>
+          <a:lstStyle/>
+          <a:p>
+            <a:endParaRPr lang="en-US"/>
+          </a:p>
+        </p:txBody>
       </p:sp>
       <p:pic>
         <p:nvPicPr>
-          <p:cNvPr id="12" name="Image 2" descr="preencoded.png">    </p:cNvPr>
+          <p:cNvPr id="12" name="Image 2" descr="preencoded.png"/>
           <p:cNvPicPr>
             <a:picLocks noChangeAspect="1"/>
           </p:cNvPicPr>
           <p:nvPr/>
         </p:nvPicPr>
         <p:blipFill>
-          <a:blip r:embed="rId3"/>
+          <a:blip r:embed="rId4"/>
           <a:stretch>
             <a:fillRect/>
           </a:stretch>
@@ -1453,7 +1123,7 @@
           <a:bodyPr wrap="square" lIns="0" tIns="0" rIns="0" bIns="0" rtlCol="0" anchor="ctr"/>
           <a:lstStyle/>
           <a:p>
-            <a:pPr indent="0" marL="0">
+            <a:pPr marL="0" indent="0">
               <a:buNone/>
             </a:pPr>
             <a:r>
@@ -1492,7 +1162,7 @@
           <a:bodyPr wrap="square" lIns="0" tIns="0" rIns="0" bIns="0" rtlCol="0" anchor="ctr"/>
           <a:lstStyle/>
           <a:p>
-            <a:pPr indent="0" marL="0">
+            <a:pPr marL="0" indent="0">
               <a:buNone/>
             </a:pPr>
             <a:r>
@@ -1536,13 +1206,20 @@
             <a:prstDash val="solid"/>
           </a:ln>
           <a:effectLst>
-            <a:outerShdw sx="100000" sy="100000" kx="0" ky="0" algn="bl" rotWithShape="0" blurRad="88900" dist="38100" dir="5400000">
+            <a:outerShdw blurRad="88900" dist="38100" dir="5400000" algn="bl" rotWithShape="0">
               <a:srgbClr val="000000">
                 <a:alpha val="10000"/>
               </a:srgbClr>
             </a:outerShdw>
           </a:effectLst>
         </p:spPr>
+        <p:txBody>
+          <a:bodyPr/>
+          <a:lstStyle/>
+          <a:p>
+            <a:endParaRPr lang="en-US"/>
+          </a:p>
+        </p:txBody>
       </p:sp>
       <p:sp>
         <p:nvSpPr>
@@ -1563,17 +1240,24 @@
           </a:solidFill>
           <a:ln/>
         </p:spPr>
+        <p:txBody>
+          <a:bodyPr/>
+          <a:lstStyle/>
+          <a:p>
+            <a:endParaRPr lang="en-US"/>
+          </a:p>
+        </p:txBody>
       </p:sp>
       <p:pic>
         <p:nvPicPr>
-          <p:cNvPr id="17" name="Image 3" descr="preencoded.png">    </p:cNvPr>
+          <p:cNvPr id="17" name="Image 3" descr="preencoded.png"/>
           <p:cNvPicPr>
             <a:picLocks noChangeAspect="1"/>
           </p:cNvPicPr>
           <p:nvPr/>
         </p:nvPicPr>
         <p:blipFill>
-          <a:blip r:embed="rId4"/>
+          <a:blip r:embed="rId5"/>
           <a:stretch>
             <a:fillRect/>
           </a:stretch>
@@ -1609,7 +1293,7 @@
           <a:bodyPr wrap="square" lIns="0" tIns="0" rIns="0" bIns="0" rtlCol="0" anchor="ctr"/>
           <a:lstStyle/>
           <a:p>
-            <a:pPr indent="0" marL="0">
+            <a:pPr marL="0" indent="0">
               <a:buNone/>
             </a:pPr>
             <a:r>
@@ -1648,7 +1332,7 @@
           <a:bodyPr wrap="square" lIns="0" tIns="0" rIns="0" bIns="0" rtlCol="0" anchor="ctr"/>
           <a:lstStyle/>
           <a:p>
-            <a:pPr indent="0" marL="0">
+            <a:pPr marL="0" indent="0">
               <a:buNone/>
             </a:pPr>
             <a:r>
@@ -1687,7 +1371,7 @@
           <a:bodyPr wrap="square" rtlCol="0" anchor="ctr"/>
           <a:lstStyle/>
           <a:p>
-            <a:pPr indent="0" marL="0">
+            <a:pPr marL="0" indent="0">
               <a:buNone/>
             </a:pPr>
             <a:r>
@@ -1726,7 +1410,7 @@
           <a:bodyPr wrap="square" rtlCol="0" anchor="ctr"/>
           <a:lstStyle/>
           <a:p>
-            <a:pPr algn="r" indent="0" marL="0">
+            <a:pPr marL="0" indent="0" algn="r">
               <a:buNone/>
             </a:pPr>
             <a:r>
@@ -1741,45 +1425,6 @@
               <a:t>Day 2 · Section 2  ·  10/12</a:t>
             </a:r>
             <a:endParaRPr lang="en-US" sz="900" dirty="0"/>
-          </a:p>
-        </p:txBody>
-      </p:sp>
-      <p:sp>
-        <p:nvSpPr>
-          <p:cNvPr id="22" name="Text 16"/>
-          <p:cNvSpPr/>
-          <p:nvPr/>
-        </p:nvSpPr>
-        <p:spPr>
-          <a:xfrm>
-            <a:off x="548640" y="4462272"/>
-            <a:ext cx="8046720" cy="274320"/>
-          </a:xfrm>
-          <a:prstGeom prst="rect">
-            <a:avLst/>
-          </a:prstGeom>
-          <a:noFill/>
-          <a:ln/>
-        </p:spPr>
-        <p:txBody>
-          <a:bodyPr wrap="square" lIns="0" tIns="0" rIns="0" bIns="0" rtlCol="0" anchor="ctr"/>
-          <a:lstStyle/>
-          <a:p>
-            <a:pPr indent="0" marL="0">
-              <a:buNone/>
-            </a:pPr>
-            <a:r>
-              <a:rPr lang="en-US" sz="1000" i="1" dirty="0">
-                <a:solidFill>
-                  <a:srgbClr val="615C52"/>
-                </a:solidFill>
-                <a:latin typeface="Inter" pitchFamily="34" charset="0"/>
-                <a:ea typeface="Inter" pitchFamily="34" charset="-122"/>
-                <a:cs typeface="Inter" pitchFamily="34" charset="-120"/>
-              </a:rPr>
-              <a:t>▸ Reach for extended thinking on genuinely hard problems — not every request.</a:t>
-            </a:r>
-            <a:endParaRPr lang="en-US" sz="1000" dirty="0"/>
           </a:p>
         </p:txBody>
       </p:sp>
@@ -1799,6 +1444,7 @@
         <a:solidFill>
           <a:srgbClr val="F0EEE6"/>
         </a:solidFill>
+        <a:effectLst/>
       </p:bgPr>
     </p:bg>
     <p:spTree>
@@ -1817,210 +1463,7 @@
       </p:grpSpPr>
       <p:pic>
         <p:nvPicPr>
-          <p:cNvPr id="2" name="Image 0" descr="preencoded.png">    </p:cNvPr>
-          <p:cNvPicPr>
-            <a:picLocks noChangeAspect="1"/>
-          </p:cNvPicPr>
-          <p:nvPr/>
-        </p:nvPicPr>
-        <p:blipFill>
-          <a:blip r:embed="rId1"/>
-          <a:stretch>
-            <a:fillRect/>
-          </a:stretch>
-        </p:blipFill>
-        <p:spPr>
-          <a:xfrm>
-            <a:off x="8321040" y="393192"/>
-            <a:ext cx="329184" cy="329184"/>
-          </a:xfrm>
-          <a:prstGeom prst="rect">
-            <a:avLst/>
-          </a:prstGeom>
-        </p:spPr>
-      </p:pic>
-      <p:sp>
-        <p:nvSpPr>
-          <p:cNvPr id="3" name="Shape 0"/>
-          <p:cNvSpPr/>
-          <p:nvPr/>
-        </p:nvSpPr>
-        <p:spPr>
-          <a:xfrm>
-            <a:off x="548640" y="822960"/>
-            <a:ext cx="3200400" cy="548640"/>
-          </a:xfrm>
-          <a:prstGeom prst="roundRect">
-            <a:avLst>
-              <a:gd name="adj" fmla="val 50000"/>
-            </a:avLst>
-          </a:prstGeom>
-          <a:solidFill>
-            <a:srgbClr val="C0392B"/>
-          </a:solidFill>
-          <a:ln/>
-        </p:spPr>
-      </p:sp>
-      <p:sp>
-        <p:nvSpPr>
-          <p:cNvPr id="4" name="Shape 1"/>
-          <p:cNvSpPr/>
-          <p:nvPr/>
-        </p:nvSpPr>
-        <p:spPr>
-          <a:xfrm>
-            <a:off x="804672" y="1014984"/>
-            <a:ext cx="164592" cy="164592"/>
-          </a:xfrm>
-          <a:prstGeom prst="ellipse">
-            <a:avLst/>
-          </a:prstGeom>
-          <a:solidFill>
-            <a:srgbClr val="FFFFFF"/>
-          </a:solidFill>
-          <a:ln/>
-        </p:spPr>
-      </p:sp>
-      <p:sp>
-        <p:nvSpPr>
-          <p:cNvPr id="5" name="Text 2"/>
-          <p:cNvSpPr/>
-          <p:nvPr/>
-        </p:nvSpPr>
-        <p:spPr>
-          <a:xfrm>
-            <a:off x="1051560" y="822960"/>
-            <a:ext cx="2560320" cy="548640"/>
-          </a:xfrm>
-          <a:prstGeom prst="rect">
-            <a:avLst/>
-          </a:prstGeom>
-          <a:noFill/>
-          <a:ln/>
-        </p:spPr>
-        <p:txBody>
-          <a:bodyPr wrap="square" lIns="0" tIns="0" rIns="0" bIns="0" rtlCol="0" anchor="ctr"/>
-          <a:lstStyle/>
-          <a:p>
-            <a:pPr indent="0" marL="0">
-              <a:buNone/>
-            </a:pPr>
-            <a:r>
-              <a:rPr lang="en-US" sz="1700" b="1" spc="100" kern="0" dirty="0">
-                <a:solidFill>
-                  <a:srgbClr val="FFFFFF"/>
-                </a:solidFill>
-                <a:latin typeface="Inter" pitchFamily="34" charset="0"/>
-                <a:ea typeface="Inter" pitchFamily="34" charset="-122"/>
-                <a:cs typeface="Inter" pitchFamily="34" charset="-120"/>
-              </a:rPr>
-              <a:t>LIVE DEMO</a:t>
-            </a:r>
-            <a:endParaRPr lang="en-US" sz="1700" dirty="0"/>
-          </a:p>
-        </p:txBody>
-      </p:sp>
-      <p:sp>
-        <p:nvSpPr>
-          <p:cNvPr id="6" name="Text 3"/>
-          <p:cNvSpPr/>
-          <p:nvPr/>
-        </p:nvSpPr>
-        <p:spPr>
-          <a:xfrm>
-            <a:off x="548640" y="1554480"/>
-            <a:ext cx="8046720" cy="457200"/>
-          </a:xfrm>
-          <a:prstGeom prst="rect">
-            <a:avLst/>
-          </a:prstGeom>
-          <a:noFill/>
-          <a:ln/>
-        </p:spPr>
-        <p:txBody>
-          <a:bodyPr wrap="square" lIns="0" tIns="0" rIns="0" bIns="0" rtlCol="0" anchor="ctr"/>
-          <a:lstStyle/>
-          <a:p>
-            <a:pPr indent="0" marL="0">
-              <a:buNone/>
-            </a:pPr>
-            <a:r>
-              <a:rPr lang="en-US" sz="2500" b="1" dirty="0">
-                <a:solidFill>
-                  <a:srgbClr val="141413"/>
-                </a:solidFill>
-                <a:latin typeface="Georgia" pitchFamily="34" charset="0"/>
-                <a:ea typeface="Georgia" pitchFamily="34" charset="-122"/>
-                <a:cs typeface="Georgia" pitchFamily="34" charset="-120"/>
-              </a:rPr>
-              <a:t>Streaming endpoint + multi-tool agent</a:t>
-            </a:r>
-            <a:endParaRPr lang="en-US" sz="2500" dirty="0"/>
-          </a:p>
-        </p:txBody>
-      </p:sp>
-      <p:sp>
-        <p:nvSpPr>
-          <p:cNvPr id="7" name="Text 4"/>
-          <p:cNvSpPr/>
-          <p:nvPr/>
-        </p:nvSpPr>
-        <p:spPr>
-          <a:xfrm>
-            <a:off x="548640" y="2029968"/>
-            <a:ext cx="8046720" cy="365760"/>
-          </a:xfrm>
-          <a:prstGeom prst="rect">
-            <a:avLst/>
-          </a:prstGeom>
-          <a:noFill/>
-          <a:ln/>
-        </p:spPr>
-        <p:txBody>
-          <a:bodyPr wrap="square" lIns="0" tIns="0" rIns="0" bIns="0" rtlCol="0" anchor="ctr"/>
-          <a:lstStyle/>
-          <a:p>
-            <a:pPr indent="0" marL="0">
-              <a:buNone/>
-            </a:pPr>
-            <a:r>
-              <a:rPr lang="en-US" sz="1500" b="1" dirty="0">
-                <a:solidFill>
-                  <a:srgbClr val="C25E40"/>
-                </a:solidFill>
-                <a:latin typeface="Inter" pitchFamily="34" charset="0"/>
-                <a:ea typeface="Inter" pitchFamily="34" charset="-122"/>
-                <a:cs typeface="Inter" pitchFamily="34" charset="-120"/>
-              </a:rPr>
-              <a:t>Watch tokens stream and tools fire in the logs</a:t>
-            </a:r>
-            <a:endParaRPr lang="en-US" sz="1500" dirty="0"/>
-          </a:p>
-        </p:txBody>
-      </p:sp>
-      <p:sp>
-        <p:nvSpPr>
-          <p:cNvPr id="8" name="Shape 5"/>
-          <p:cNvSpPr/>
-          <p:nvPr/>
-        </p:nvSpPr>
-        <p:spPr>
-          <a:xfrm>
-            <a:off x="566928" y="2596896"/>
-            <a:ext cx="274320" cy="274320"/>
-          </a:xfrm>
-          <a:prstGeom prst="ellipse">
-            <a:avLst/>
-          </a:prstGeom>
-          <a:solidFill>
-            <a:srgbClr val="C0392B"/>
-          </a:solidFill>
-          <a:ln/>
-        </p:spPr>
-      </p:sp>
-      <p:pic>
-        <p:nvPicPr>
-          <p:cNvPr id="9" name="Image 1" descr="preencoded.png">    </p:cNvPr>
+          <p:cNvPr id="2" name="Image 0" descr="preencoded.png"/>
           <p:cNvPicPr>
             <a:picLocks noChangeAspect="1"/>
           </p:cNvPicPr>
@@ -2034,8 +1477,8 @@
         </p:blipFill>
         <p:spPr>
           <a:xfrm>
-            <a:off x="638251" y="2668219"/>
-            <a:ext cx="131674" cy="131674"/>
+            <a:off x="8321040" y="393192"/>
+            <a:ext cx="329184" cy="329184"/>
           </a:xfrm>
           <a:prstGeom prst="rect">
             <a:avLst/>
@@ -2044,66 +1487,207 @@
       </p:pic>
       <p:sp>
         <p:nvSpPr>
-          <p:cNvPr id="10" name="Text 6"/>
-          <p:cNvSpPr/>
-          <p:nvPr/>
-        </p:nvSpPr>
-        <p:spPr>
-          <a:xfrm>
-            <a:off x="960120" y="2578608"/>
-            <a:ext cx="7406640" cy="310896"/>
-          </a:xfrm>
-          <a:prstGeom prst="rect">
-            <a:avLst/>
-          </a:prstGeom>
-          <a:noFill/>
-          <a:ln/>
-        </p:spPr>
-        <p:txBody>
-          <a:bodyPr wrap="square" lIns="0" tIns="0" rIns="0" bIns="0" rtlCol="0" anchor="ctr"/>
-          <a:lstStyle/>
-          <a:p>
-            <a:pPr indent="0" marL="0">
-              <a:buNone/>
-            </a:pPr>
-            <a:r>
-              <a:rPr lang="en-US" sz="1400" dirty="0">
-                <a:solidFill>
-                  <a:srgbClr val="141413"/>
-                </a:solidFill>
-                <a:latin typeface="Inter" pitchFamily="34" charset="0"/>
-                <a:ea typeface="Inter" pitchFamily="34" charset="-122"/>
-                <a:cs typeface="Inter" pitchFamily="34" charset="-120"/>
-              </a:rPr>
-              <a:t>Hit the live streaming endpoint</a:t>
-            </a:r>
-            <a:endParaRPr lang="en-US" sz="1400" dirty="0"/>
-          </a:p>
-        </p:txBody>
-      </p:sp>
-      <p:sp>
-        <p:nvSpPr>
-          <p:cNvPr id="11" name="Shape 7"/>
-          <p:cNvSpPr/>
-          <p:nvPr/>
-        </p:nvSpPr>
-        <p:spPr>
-          <a:xfrm>
-            <a:off x="566928" y="2944368"/>
-            <a:ext cx="274320" cy="274320"/>
-          </a:xfrm>
-          <a:prstGeom prst="ellipse">
-            <a:avLst/>
+          <p:cNvPr id="3" name="Shape 0"/>
+          <p:cNvSpPr/>
+          <p:nvPr/>
+        </p:nvSpPr>
+        <p:spPr>
+          <a:xfrm>
+            <a:off x="548640" y="822960"/>
+            <a:ext cx="3200400" cy="548640"/>
+          </a:xfrm>
+          <a:prstGeom prst="roundRect">
+            <a:avLst>
+              <a:gd name="adj" fmla="val 50000"/>
+            </a:avLst>
           </a:prstGeom>
           <a:solidFill>
             <a:srgbClr val="C0392B"/>
           </a:solidFill>
           <a:ln/>
         </p:spPr>
+        <p:txBody>
+          <a:bodyPr/>
+          <a:lstStyle/>
+          <a:p>
+            <a:endParaRPr lang="en-US"/>
+          </a:p>
+        </p:txBody>
+      </p:sp>
+      <p:sp>
+        <p:nvSpPr>
+          <p:cNvPr id="4" name="Shape 1"/>
+          <p:cNvSpPr/>
+          <p:nvPr/>
+        </p:nvSpPr>
+        <p:spPr>
+          <a:xfrm>
+            <a:off x="804672" y="1014984"/>
+            <a:ext cx="164592" cy="164592"/>
+          </a:xfrm>
+          <a:prstGeom prst="ellipse">
+            <a:avLst/>
+          </a:prstGeom>
+          <a:solidFill>
+            <a:srgbClr val="FFFFFF"/>
+          </a:solidFill>
+          <a:ln/>
+        </p:spPr>
+        <p:txBody>
+          <a:bodyPr/>
+          <a:lstStyle/>
+          <a:p>
+            <a:endParaRPr lang="en-US"/>
+          </a:p>
+        </p:txBody>
+      </p:sp>
+      <p:sp>
+        <p:nvSpPr>
+          <p:cNvPr id="5" name="Text 2"/>
+          <p:cNvSpPr/>
+          <p:nvPr/>
+        </p:nvSpPr>
+        <p:spPr>
+          <a:xfrm>
+            <a:off x="1051560" y="822960"/>
+            <a:ext cx="2560320" cy="548640"/>
+          </a:xfrm>
+          <a:prstGeom prst="rect">
+            <a:avLst/>
+          </a:prstGeom>
+          <a:noFill/>
+          <a:ln/>
+        </p:spPr>
+        <p:txBody>
+          <a:bodyPr wrap="square" lIns="0" tIns="0" rIns="0" bIns="0" rtlCol="0" anchor="ctr"/>
+          <a:lstStyle/>
+          <a:p>
+            <a:pPr marL="0" indent="0">
+              <a:buNone/>
+            </a:pPr>
+            <a:r>
+              <a:rPr lang="en-US" sz="1700" b="1" kern="0" spc="100" dirty="0">
+                <a:solidFill>
+                  <a:srgbClr val="FFFFFF"/>
+                </a:solidFill>
+                <a:latin typeface="Inter" pitchFamily="34" charset="0"/>
+                <a:ea typeface="Inter" pitchFamily="34" charset="-122"/>
+                <a:cs typeface="Inter" pitchFamily="34" charset="-120"/>
+              </a:rPr>
+              <a:t>LIVE DEMO</a:t>
+            </a:r>
+            <a:endParaRPr lang="en-US" sz="1700" dirty="0"/>
+          </a:p>
+        </p:txBody>
+      </p:sp>
+      <p:sp>
+        <p:nvSpPr>
+          <p:cNvPr id="6" name="Text 3"/>
+          <p:cNvSpPr/>
+          <p:nvPr/>
+        </p:nvSpPr>
+        <p:spPr>
+          <a:xfrm>
+            <a:off x="548640" y="1554480"/>
+            <a:ext cx="8046720" cy="457200"/>
+          </a:xfrm>
+          <a:prstGeom prst="rect">
+            <a:avLst/>
+          </a:prstGeom>
+          <a:noFill/>
+          <a:ln/>
+        </p:spPr>
+        <p:txBody>
+          <a:bodyPr wrap="square" lIns="0" tIns="0" rIns="0" bIns="0" rtlCol="0" anchor="ctr"/>
+          <a:lstStyle/>
+          <a:p>
+            <a:pPr marL="0" indent="0">
+              <a:buNone/>
+            </a:pPr>
+            <a:r>
+              <a:rPr lang="en-US" sz="2500" b="1" dirty="0">
+                <a:solidFill>
+                  <a:srgbClr val="141413"/>
+                </a:solidFill>
+                <a:latin typeface="Georgia" pitchFamily="34" charset="0"/>
+                <a:ea typeface="Georgia" pitchFamily="34" charset="-122"/>
+                <a:cs typeface="Georgia" pitchFamily="34" charset="-120"/>
+              </a:rPr>
+              <a:t>Streaming endpoint + multi-tool agent</a:t>
+            </a:r>
+            <a:endParaRPr lang="en-US" sz="2500" dirty="0"/>
+          </a:p>
+        </p:txBody>
+      </p:sp>
+      <p:sp>
+        <p:nvSpPr>
+          <p:cNvPr id="7" name="Text 4"/>
+          <p:cNvSpPr/>
+          <p:nvPr/>
+        </p:nvSpPr>
+        <p:spPr>
+          <a:xfrm>
+            <a:off x="548640" y="2029968"/>
+            <a:ext cx="8046720" cy="365760"/>
+          </a:xfrm>
+          <a:prstGeom prst="rect">
+            <a:avLst/>
+          </a:prstGeom>
+          <a:noFill/>
+          <a:ln/>
+        </p:spPr>
+        <p:txBody>
+          <a:bodyPr wrap="square" lIns="0" tIns="0" rIns="0" bIns="0" rtlCol="0" anchor="ctr"/>
+          <a:lstStyle/>
+          <a:p>
+            <a:pPr marL="0" indent="0">
+              <a:buNone/>
+            </a:pPr>
+            <a:r>
+              <a:rPr lang="en-US" sz="1500" b="1" dirty="0">
+                <a:solidFill>
+                  <a:srgbClr val="C25E40"/>
+                </a:solidFill>
+                <a:latin typeface="Inter" pitchFamily="34" charset="0"/>
+                <a:ea typeface="Inter" pitchFamily="34" charset="-122"/>
+                <a:cs typeface="Inter" pitchFamily="34" charset="-120"/>
+              </a:rPr>
+              <a:t>Watch tokens stream and tools fire in the logs</a:t>
+            </a:r>
+            <a:endParaRPr lang="en-US" sz="1500" dirty="0"/>
+          </a:p>
+        </p:txBody>
+      </p:sp>
+      <p:sp>
+        <p:nvSpPr>
+          <p:cNvPr id="8" name="Shape 5"/>
+          <p:cNvSpPr/>
+          <p:nvPr/>
+        </p:nvSpPr>
+        <p:spPr>
+          <a:xfrm>
+            <a:off x="566928" y="2596896"/>
+            <a:ext cx="274320" cy="274320"/>
+          </a:xfrm>
+          <a:prstGeom prst="ellipse">
+            <a:avLst/>
+          </a:prstGeom>
+          <a:solidFill>
+            <a:srgbClr val="C0392B"/>
+          </a:solidFill>
+          <a:ln/>
+        </p:spPr>
+        <p:txBody>
+          <a:bodyPr/>
+          <a:lstStyle/>
+          <a:p>
+            <a:endParaRPr lang="en-US"/>
+          </a:p>
+        </p:txBody>
       </p:sp>
       <p:pic>
         <p:nvPicPr>
-          <p:cNvPr id="12" name="Image 2" descr="preencoded.png">    </p:cNvPr>
+          <p:cNvPr id="9" name="Image 1" descr="preencoded.png"/>
           <p:cNvPicPr>
             <a:picLocks noChangeAspect="1"/>
           </p:cNvPicPr>
@@ -2117,7 +1701,7 @@
         </p:blipFill>
         <p:spPr>
           <a:xfrm>
-            <a:off x="638251" y="3015691"/>
+            <a:off x="638251" y="2668219"/>
             <a:ext cx="131674" cy="131674"/>
           </a:xfrm>
           <a:prstGeom prst="rect">
@@ -2127,13 +1711,13 @@
       </p:pic>
       <p:sp>
         <p:nvSpPr>
-          <p:cNvPr id="13" name="Text 8"/>
-          <p:cNvSpPr/>
-          <p:nvPr/>
-        </p:nvSpPr>
-        <p:spPr>
-          <a:xfrm>
-            <a:off x="960120" y="2926080"/>
+          <p:cNvPr id="10" name="Text 6"/>
+          <p:cNvSpPr/>
+          <p:nvPr/>
+        </p:nvSpPr>
+        <p:spPr>
+          <a:xfrm>
+            <a:off x="960120" y="2578608"/>
             <a:ext cx="7406640" cy="310896"/>
           </a:xfrm>
           <a:prstGeom prst="rect">
@@ -2146,7 +1730,7 @@
           <a:bodyPr wrap="square" lIns="0" tIns="0" rIns="0" bIns="0" rtlCol="0" anchor="ctr"/>
           <a:lstStyle/>
           <a:p>
-            <a:pPr indent="0" marL="0">
+            <a:pPr marL="0" indent="0">
               <a:buNone/>
             </a:pPr>
             <a:r>
@@ -2158,7 +1742,7 @@
                 <a:ea typeface="Inter" pitchFamily="34" charset="-122"/>
                 <a:cs typeface="Inter" pitchFamily="34" charset="-120"/>
               </a:rPr>
-              <a:t>Run an agent that makes 2+ tool calls</a:t>
+              <a:t>Hit the live streaming endpoint</a:t>
             </a:r>
             <a:endParaRPr lang="en-US" sz="1400" dirty="0"/>
           </a:p>
@@ -2166,13 +1750,13 @@
       </p:sp>
       <p:sp>
         <p:nvSpPr>
-          <p:cNvPr id="14" name="Shape 9"/>
-          <p:cNvSpPr/>
-          <p:nvPr/>
-        </p:nvSpPr>
-        <p:spPr>
-          <a:xfrm>
-            <a:off x="566928" y="3291840"/>
+          <p:cNvPr id="11" name="Shape 7"/>
+          <p:cNvSpPr/>
+          <p:nvPr/>
+        </p:nvSpPr>
+        <p:spPr>
+          <a:xfrm>
+            <a:off x="566928" y="2944368"/>
             <a:ext cx="274320" cy="274320"/>
           </a:xfrm>
           <a:prstGeom prst="ellipse">
@@ -2183,10 +1767,226 @@
           </a:solidFill>
           <a:ln/>
         </p:spPr>
+        <p:txBody>
+          <a:bodyPr/>
+          <a:lstStyle/>
+          <a:p>
+            <a:endParaRPr lang="en-US"/>
+          </a:p>
+        </p:txBody>
       </p:sp>
       <p:pic>
         <p:nvPicPr>
-          <p:cNvPr id="15" name="Image 3" descr="preencoded.png">    </p:cNvPr>
+          <p:cNvPr id="12" name="Image 2" descr="preencoded.png"/>
+          <p:cNvPicPr>
+            <a:picLocks noChangeAspect="1"/>
+          </p:cNvPicPr>
+          <p:nvPr/>
+        </p:nvPicPr>
+        <p:blipFill>
+          <a:blip r:embed="rId3"/>
+          <a:stretch>
+            <a:fillRect/>
+          </a:stretch>
+        </p:blipFill>
+        <p:spPr>
+          <a:xfrm>
+            <a:off x="638251" y="3015691"/>
+            <a:ext cx="131674" cy="131674"/>
+          </a:xfrm>
+          <a:prstGeom prst="rect">
+            <a:avLst/>
+          </a:prstGeom>
+        </p:spPr>
+      </p:pic>
+      <p:sp>
+        <p:nvSpPr>
+          <p:cNvPr id="13" name="Text 8"/>
+          <p:cNvSpPr/>
+          <p:nvPr/>
+        </p:nvSpPr>
+        <p:spPr>
+          <a:xfrm>
+            <a:off x="960120" y="2926080"/>
+            <a:ext cx="7406640" cy="310896"/>
+          </a:xfrm>
+          <a:prstGeom prst="rect">
+            <a:avLst/>
+          </a:prstGeom>
+          <a:noFill/>
+          <a:ln/>
+        </p:spPr>
+        <p:txBody>
+          <a:bodyPr wrap="square" lIns="0" tIns="0" rIns="0" bIns="0" rtlCol="0" anchor="ctr"/>
+          <a:lstStyle/>
+          <a:p>
+            <a:pPr marL="0" indent="0">
+              <a:buNone/>
+            </a:pPr>
+            <a:r>
+              <a:rPr lang="en-US" sz="1400" dirty="0">
+                <a:solidFill>
+                  <a:srgbClr val="141413"/>
+                </a:solidFill>
+                <a:latin typeface="Inter" pitchFamily="34" charset="0"/>
+                <a:ea typeface="Inter" pitchFamily="34" charset="-122"/>
+                <a:cs typeface="Inter" pitchFamily="34" charset="-120"/>
+              </a:rPr>
+              <a:t>Run an agent that makes 2+ tool calls</a:t>
+            </a:r>
+            <a:endParaRPr lang="en-US" sz="1400" dirty="0"/>
+          </a:p>
+        </p:txBody>
+      </p:sp>
+      <p:sp>
+        <p:nvSpPr>
+          <p:cNvPr id="14" name="Shape 9"/>
+          <p:cNvSpPr/>
+          <p:nvPr/>
+        </p:nvSpPr>
+        <p:spPr>
+          <a:xfrm>
+            <a:off x="566928" y="3291840"/>
+            <a:ext cx="274320" cy="274320"/>
+          </a:xfrm>
+          <a:prstGeom prst="ellipse">
+            <a:avLst/>
+          </a:prstGeom>
+          <a:solidFill>
+            <a:srgbClr val="C0392B"/>
+          </a:solidFill>
+          <a:ln/>
+        </p:spPr>
+        <p:txBody>
+          <a:bodyPr/>
+          <a:lstStyle/>
+          <a:p>
+            <a:endParaRPr lang="en-US"/>
+          </a:p>
+        </p:txBody>
+      </p:sp>
+      <p:pic>
+        <p:nvPicPr>
+          <p:cNvPr id="15" name="Image 3" descr="preencoded.png"/>
+          <p:cNvPicPr>
+            <a:picLocks noChangeAspect="1"/>
+          </p:cNvPicPr>
+          <p:nvPr/>
+        </p:nvPicPr>
+        <p:blipFill>
+          <a:blip r:embed="rId3"/>
+          <a:stretch>
+            <a:fillRect/>
+          </a:stretch>
+        </p:blipFill>
+        <p:spPr>
+          <a:xfrm>
+            <a:off x="638251" y="3363163"/>
+            <a:ext cx="131674" cy="131674"/>
+          </a:xfrm>
+          <a:prstGeom prst="rect">
+            <a:avLst/>
+          </a:prstGeom>
+        </p:spPr>
+      </p:pic>
+      <p:sp>
+        <p:nvSpPr>
+          <p:cNvPr id="16" name="Text 10"/>
+          <p:cNvSpPr/>
+          <p:nvPr/>
+        </p:nvSpPr>
+        <p:spPr>
+          <a:xfrm>
+            <a:off x="960120" y="3273552"/>
+            <a:ext cx="7406640" cy="310896"/>
+          </a:xfrm>
+          <a:prstGeom prst="rect">
+            <a:avLst/>
+          </a:prstGeom>
+          <a:noFill/>
+          <a:ln/>
+        </p:spPr>
+        <p:txBody>
+          <a:bodyPr wrap="square" lIns="0" tIns="0" rIns="0" bIns="0" rtlCol="0" anchor="ctr"/>
+          <a:lstStyle/>
+          <a:p>
+            <a:pPr marL="0" indent="0">
+              <a:buNone/>
+            </a:pPr>
+            <a:r>
+              <a:rPr lang="en-US" sz="1400" dirty="0">
+                <a:solidFill>
+                  <a:srgbClr val="141413"/>
+                </a:solidFill>
+                <a:latin typeface="Inter" pitchFamily="34" charset="0"/>
+                <a:ea typeface="Inter" pitchFamily="34" charset="-122"/>
+                <a:cs typeface="Inter" pitchFamily="34" charset="-120"/>
+              </a:rPr>
+              <a:t>Trace each tool call in the logs</a:t>
+            </a:r>
+            <a:endParaRPr lang="en-US" sz="1400" dirty="0"/>
+          </a:p>
+        </p:txBody>
+      </p:sp>
+      <p:sp>
+        <p:nvSpPr>
+          <p:cNvPr id="17" name="Shape 11"/>
+          <p:cNvSpPr/>
+          <p:nvPr/>
+        </p:nvSpPr>
+        <p:spPr>
+          <a:xfrm>
+            <a:off x="548640" y="3703320"/>
+            <a:ext cx="8046720" cy="658368"/>
+          </a:xfrm>
+          <a:prstGeom prst="roundRect">
+            <a:avLst>
+              <a:gd name="adj" fmla="val 11111"/>
+            </a:avLst>
+          </a:prstGeom>
+          <a:solidFill>
+            <a:srgbClr val="F4E4DC"/>
+          </a:solidFill>
+          <a:ln/>
+        </p:spPr>
+        <p:txBody>
+          <a:bodyPr/>
+          <a:lstStyle/>
+          <a:p>
+            <a:endParaRPr lang="en-US"/>
+          </a:p>
+        </p:txBody>
+      </p:sp>
+      <p:sp>
+        <p:nvSpPr>
+          <p:cNvPr id="18" name="Shape 12"/>
+          <p:cNvSpPr/>
+          <p:nvPr/>
+        </p:nvSpPr>
+        <p:spPr>
+          <a:xfrm>
+            <a:off x="749808" y="3822192"/>
+            <a:ext cx="420624" cy="420624"/>
+          </a:xfrm>
+          <a:prstGeom prst="ellipse">
+            <a:avLst/>
+          </a:prstGeom>
+          <a:solidFill>
+            <a:srgbClr val="D97757"/>
+          </a:solidFill>
+          <a:ln/>
+        </p:spPr>
+        <p:txBody>
+          <a:bodyPr/>
+          <a:lstStyle/>
+          <a:p>
+            <a:endParaRPr lang="en-US"/>
+          </a:p>
+        </p:txBody>
+      </p:sp>
+      <p:pic>
+        <p:nvPicPr>
+          <p:cNvPr id="19" name="Image 4" descr="preencoded.png"/>
           <p:cNvPicPr>
             <a:picLocks noChangeAspect="1"/>
           </p:cNvPicPr>
@@ -2200,111 +2000,6 @@
         </p:blipFill>
         <p:spPr>
           <a:xfrm>
-            <a:off x="638251" y="3363163"/>
-            <a:ext cx="131674" cy="131674"/>
-          </a:xfrm>
-          <a:prstGeom prst="rect">
-            <a:avLst/>
-          </a:prstGeom>
-        </p:spPr>
-      </p:pic>
-      <p:sp>
-        <p:nvSpPr>
-          <p:cNvPr id="16" name="Text 10"/>
-          <p:cNvSpPr/>
-          <p:nvPr/>
-        </p:nvSpPr>
-        <p:spPr>
-          <a:xfrm>
-            <a:off x="960120" y="3273552"/>
-            <a:ext cx="7406640" cy="310896"/>
-          </a:xfrm>
-          <a:prstGeom prst="rect">
-            <a:avLst/>
-          </a:prstGeom>
-          <a:noFill/>
-          <a:ln/>
-        </p:spPr>
-        <p:txBody>
-          <a:bodyPr wrap="square" lIns="0" tIns="0" rIns="0" bIns="0" rtlCol="0" anchor="ctr"/>
-          <a:lstStyle/>
-          <a:p>
-            <a:pPr indent="0" marL="0">
-              <a:buNone/>
-            </a:pPr>
-            <a:r>
-              <a:rPr lang="en-US" sz="1400" dirty="0">
-                <a:solidFill>
-                  <a:srgbClr val="141413"/>
-                </a:solidFill>
-                <a:latin typeface="Inter" pitchFamily="34" charset="0"/>
-                <a:ea typeface="Inter" pitchFamily="34" charset="-122"/>
-                <a:cs typeface="Inter" pitchFamily="34" charset="-120"/>
-              </a:rPr>
-              <a:t>Trace each tool call in the logs</a:t>
-            </a:r>
-            <a:endParaRPr lang="en-US" sz="1400" dirty="0"/>
-          </a:p>
-        </p:txBody>
-      </p:sp>
-      <p:sp>
-        <p:nvSpPr>
-          <p:cNvPr id="17" name="Shape 11"/>
-          <p:cNvSpPr/>
-          <p:nvPr/>
-        </p:nvSpPr>
-        <p:spPr>
-          <a:xfrm>
-            <a:off x="548640" y="3703320"/>
-            <a:ext cx="8046720" cy="658368"/>
-          </a:xfrm>
-          <a:prstGeom prst="roundRect">
-            <a:avLst>
-              <a:gd name="adj" fmla="val 11111"/>
-            </a:avLst>
-          </a:prstGeom>
-          <a:solidFill>
-            <a:srgbClr val="F4E4DC"/>
-          </a:solidFill>
-          <a:ln/>
-        </p:spPr>
-      </p:sp>
-      <p:sp>
-        <p:nvSpPr>
-          <p:cNvPr id="18" name="Shape 12"/>
-          <p:cNvSpPr/>
-          <p:nvPr/>
-        </p:nvSpPr>
-        <p:spPr>
-          <a:xfrm>
-            <a:off x="749808" y="3822192"/>
-            <a:ext cx="420624" cy="420624"/>
-          </a:xfrm>
-          <a:prstGeom prst="ellipse">
-            <a:avLst/>
-          </a:prstGeom>
-          <a:solidFill>
-            <a:srgbClr val="D97757"/>
-          </a:solidFill>
-          <a:ln/>
-        </p:spPr>
-      </p:sp>
-      <p:pic>
-        <p:nvPicPr>
-          <p:cNvPr id="19" name="Image 4" descr="preencoded.png">    </p:cNvPr>
-          <p:cNvPicPr>
-            <a:picLocks noChangeAspect="1"/>
-          </p:cNvPicPr>
-          <p:nvPr/>
-        </p:nvPicPr>
-        <p:blipFill>
-          <a:blip r:embed="rId5"/>
-          <a:stretch>
-            <a:fillRect/>
-          </a:stretch>
-        </p:blipFill>
-        <p:spPr>
-          <a:xfrm>
             <a:off x="859170" y="3931554"/>
             <a:ext cx="201900" cy="201900"/>
           </a:xfrm>
@@ -2334,7 +2029,7 @@
           <a:bodyPr wrap="square" lIns="0" tIns="0" rIns="0" bIns="0" rtlCol="0" anchor="ctr"/>
           <a:lstStyle/>
           <a:p>
-            <a:pPr indent="0" marL="0">
+            <a:pPr marL="0" indent="0">
               <a:buNone/>
             </a:pPr>
             <a:r>
@@ -2348,9 +2043,6 @@
               </a:rPr>
               <a:t>Same host/tool idea as MCP — </a:t>
             </a:r>
-            <a:pPr indent="0" marL="0">
-              <a:buNone/>
-            </a:pPr>
             <a:r>
               <a:rPr lang="en-US" sz="1300" dirty="0">
                 <a:solidFill>
@@ -2387,7 +2079,7 @@
           <a:bodyPr wrap="square" rtlCol="0" anchor="ctr"/>
           <a:lstStyle/>
           <a:p>
-            <a:pPr indent="0" marL="0">
+            <a:pPr marL="0" indent="0">
               <a:buNone/>
             </a:pPr>
             <a:r>
@@ -2426,7 +2118,7 @@
           <a:bodyPr wrap="square" rtlCol="0" anchor="ctr"/>
           <a:lstStyle/>
           <a:p>
-            <a:pPr algn="r" indent="0" marL="0">
+            <a:pPr marL="0" indent="0" algn="r">
               <a:buNone/>
             </a:pPr>
             <a:r>
@@ -2441,45 +2133,6 @@
               <a:t>Day 2 · Section 2  ·  11/12</a:t>
             </a:r>
             <a:endParaRPr lang="en-US" sz="900" dirty="0"/>
-          </a:p>
-        </p:txBody>
-      </p:sp>
-      <p:sp>
-        <p:nvSpPr>
-          <p:cNvPr id="23" name="Text 16"/>
-          <p:cNvSpPr/>
-          <p:nvPr/>
-        </p:nvSpPr>
-        <p:spPr>
-          <a:xfrm>
-            <a:off x="548640" y="4462272"/>
-            <a:ext cx="8046720" cy="274320"/>
-          </a:xfrm>
-          <a:prstGeom prst="rect">
-            <a:avLst/>
-          </a:prstGeom>
-          <a:noFill/>
-          <a:ln/>
-        </p:spPr>
-        <p:txBody>
-          <a:bodyPr wrap="square" lIns="0" tIns="0" rIns="0" bIns="0" rtlCol="0" anchor="ctr"/>
-          <a:lstStyle/>
-          <a:p>
-            <a:pPr indent="0" marL="0">
-              <a:buNone/>
-            </a:pPr>
-            <a:r>
-              <a:rPr lang="en-US" sz="1000" i="1" dirty="0">
-                <a:solidFill>
-                  <a:srgbClr val="615C52"/>
-                </a:solidFill>
-                <a:latin typeface="Inter" pitchFamily="34" charset="0"/>
-                <a:ea typeface="Inter" pitchFamily="34" charset="-122"/>
-                <a:cs typeface="Inter" pitchFamily="34" charset="-120"/>
-              </a:rPr>
-              <a:t>▸ Make the log lines visible — the tool calls are the proof the loop is running.</a:t>
-            </a:r>
-            <a:endParaRPr lang="en-US" sz="1000" dirty="0"/>
           </a:p>
         </p:txBody>
       </p:sp>
@@ -2499,6 +2152,7 @@
         <a:solidFill>
           <a:srgbClr val="F0EEE6"/>
         </a:solidFill>
+        <a:effectLst/>
       </p:bgPr>
     </p:bg>
     <p:spTree>
@@ -2517,60 +2171,7 @@
       </p:grpSpPr>
       <p:pic>
         <p:nvPicPr>
-          <p:cNvPr id="2" name="Image 0" descr="preencoded.png">    </p:cNvPr>
-          <p:cNvPicPr>
-            <a:picLocks noChangeAspect="1"/>
-          </p:cNvPicPr>
-          <p:nvPr/>
-        </p:nvPicPr>
-        <p:blipFill>
-          <a:blip r:embed="rId1"/>
-          <a:stretch>
-            <a:fillRect/>
-          </a:stretch>
-        </p:blipFill>
-        <p:spPr>
-          <a:xfrm>
-            <a:off x="8321040" y="393192"/>
-            <a:ext cx="329184" cy="329184"/>
-          </a:xfrm>
-          <a:prstGeom prst="rect">
-            <a:avLst/>
-          </a:prstGeom>
-        </p:spPr>
-      </p:pic>
-      <p:sp>
-        <p:nvSpPr>
-          <p:cNvPr id="3" name="Shape 0"/>
-          <p:cNvSpPr/>
-          <p:nvPr/>
-        </p:nvSpPr>
-        <p:spPr>
-          <a:xfrm>
-            <a:off x="548640" y="822960"/>
-            <a:ext cx="3154680" cy="3429000"/>
-          </a:xfrm>
-          <a:prstGeom prst="roundRect">
-            <a:avLst>
-              <a:gd name="adj" fmla="val 3478"/>
-            </a:avLst>
-          </a:prstGeom>
-          <a:solidFill>
-            <a:srgbClr val="D97757"/>
-          </a:solidFill>
-          <a:ln/>
-          <a:effectLst>
-            <a:outerShdw sx="100000" sy="100000" kx="0" ky="0" algn="bl" rotWithShape="0" blurRad="88900" dist="38100" dir="5400000">
-              <a:srgbClr val="000000">
-                <a:alpha val="10000"/>
-              </a:srgbClr>
-            </a:outerShdw>
-          </a:effectLst>
-        </p:spPr>
-      </p:sp>
-      <p:pic>
-        <p:nvPicPr>
-          <p:cNvPr id="4" name="Image 1" descr="preencoded.png">    </p:cNvPr>
+          <p:cNvPr id="2" name="Image 0" descr="preencoded.png"/>
           <p:cNvPicPr>
             <a:picLocks noChangeAspect="1"/>
           </p:cNvPicPr>
@@ -2584,6 +2185,66 @@
         </p:blipFill>
         <p:spPr>
           <a:xfrm>
+            <a:off x="8321040" y="393192"/>
+            <a:ext cx="329184" cy="329184"/>
+          </a:xfrm>
+          <a:prstGeom prst="rect">
+            <a:avLst/>
+          </a:prstGeom>
+        </p:spPr>
+      </p:pic>
+      <p:sp>
+        <p:nvSpPr>
+          <p:cNvPr id="3" name="Shape 0"/>
+          <p:cNvSpPr/>
+          <p:nvPr/>
+        </p:nvSpPr>
+        <p:spPr>
+          <a:xfrm>
+            <a:off x="548640" y="822960"/>
+            <a:ext cx="3154680" cy="3429000"/>
+          </a:xfrm>
+          <a:prstGeom prst="roundRect">
+            <a:avLst>
+              <a:gd name="adj" fmla="val 3478"/>
+            </a:avLst>
+          </a:prstGeom>
+          <a:solidFill>
+            <a:srgbClr val="D97757"/>
+          </a:solidFill>
+          <a:ln/>
+          <a:effectLst>
+            <a:outerShdw blurRad="88900" dist="38100" dir="5400000" algn="bl" rotWithShape="0">
+              <a:srgbClr val="000000">
+                <a:alpha val="10000"/>
+              </a:srgbClr>
+            </a:outerShdw>
+          </a:effectLst>
+        </p:spPr>
+        <p:txBody>
+          <a:bodyPr/>
+          <a:lstStyle/>
+          <a:p>
+            <a:endParaRPr lang="en-US"/>
+          </a:p>
+        </p:txBody>
+      </p:sp>
+      <p:pic>
+        <p:nvPicPr>
+          <p:cNvPr id="4" name="Image 1" descr="preencoded.png"/>
+          <p:cNvPicPr>
+            <a:picLocks noChangeAspect="1"/>
+          </p:cNvPicPr>
+          <p:nvPr/>
+        </p:nvPicPr>
+        <p:blipFill>
+          <a:blip r:embed="rId3"/>
+          <a:stretch>
+            <a:fillRect/>
+          </a:stretch>
+        </p:blipFill>
+        <p:spPr>
+          <a:xfrm>
             <a:off x="868680" y="1133856"/>
             <a:ext cx="548640" cy="548640"/>
           </a:xfrm>
@@ -2613,7 +2274,7 @@
           <a:bodyPr wrap="square" lIns="0" tIns="0" rIns="0" bIns="0" rtlCol="0" anchor="ctr"/>
           <a:lstStyle/>
           <a:p>
-            <a:pPr indent="0" marL="0">
+            <a:pPr marL="0" indent="0">
               <a:buNone/>
             </a:pPr>
             <a:r>
@@ -2652,7 +2313,7 @@
           <a:bodyPr wrap="square" lIns="0" tIns="0" rIns="0" bIns="0" rtlCol="0" anchor="ctr"/>
           <a:lstStyle/>
           <a:p>
-            <a:pPr indent="0" marL="0">
+            <a:pPr marL="0" indent="0">
               <a:buNone/>
             </a:pPr>
             <a:r>
@@ -2692,6 +2353,13 @@
             <a:prstDash val="solid"/>
           </a:ln>
         </p:spPr>
+        <p:txBody>
+          <a:bodyPr/>
+          <a:lstStyle/>
+          <a:p>
+            <a:endParaRPr lang="en-US"/>
+          </a:p>
+        </p:txBody>
       </p:sp>
       <p:sp>
         <p:nvSpPr>
@@ -2714,11 +2382,11 @@
           <a:bodyPr wrap="square" lIns="0" tIns="0" rIns="0" bIns="0" rtlCol="0" anchor="ctr"/>
           <a:lstStyle/>
           <a:p>
-            <a:pPr indent="0" marL="0">
-              <a:buNone/>
-            </a:pPr>
-            <a:r>
-              <a:rPr lang="en-US" sz="1100" b="1" spc="100" kern="0" dirty="0">
+            <a:pPr marL="0" indent="0">
+              <a:buNone/>
+            </a:pPr>
+            <a:r>
+              <a:rPr lang="en-US" sz="1100" b="1" kern="0" spc="100" dirty="0">
                 <a:solidFill>
                   <a:srgbClr val="FBE9E2"/>
                 </a:solidFill>
@@ -2753,7 +2421,7 @@
           <a:bodyPr wrap="square" lIns="0" tIns="0" rIns="0" bIns="0" rtlCol="0" anchor="ctr"/>
           <a:lstStyle/>
           <a:p>
-            <a:pPr indent="0" marL="0">
+            <a:pPr marL="0" indent="0">
               <a:buNone/>
             </a:pPr>
             <a:r>
@@ -2792,11 +2460,11 @@
           <a:bodyPr wrap="square" lIns="0" tIns="0" rIns="0" bIns="0" rtlCol="0" anchor="ctr"/>
           <a:lstStyle/>
           <a:p>
-            <a:pPr indent="0" marL="0">
-              <a:buNone/>
-            </a:pPr>
-            <a:r>
-              <a:rPr lang="en-US" sz="1100" b="1" spc="200" kern="0" dirty="0">
+            <a:pPr marL="0" indent="0">
+              <a:buNone/>
+            </a:pPr>
+            <a:r>
+              <a:rPr lang="en-US" sz="1100" b="1" kern="0" spc="200" dirty="0">
                 <a:solidFill>
                   <a:srgbClr val="C25E40"/>
                 </a:solidFill>
@@ -2829,6 +2497,13 @@
           </a:solidFill>
           <a:ln/>
         </p:spPr>
+        <p:txBody>
+          <a:bodyPr/>
+          <a:lstStyle/>
+          <a:p>
+            <a:endParaRPr lang="en-US"/>
+          </a:p>
+        </p:txBody>
       </p:sp>
       <p:sp>
         <p:nvSpPr>
@@ -2851,7 +2526,7 @@
           <a:bodyPr wrap="square" lIns="0" tIns="0" rIns="0" bIns="0" rtlCol="0" anchor="ctr"/>
           <a:lstStyle/>
           <a:p>
-            <a:pPr algn="ctr" indent="0" marL="0">
+            <a:pPr marL="0" indent="0" algn="ctr">
               <a:buNone/>
             </a:pPr>
             <a:r>
@@ -2890,7 +2565,7 @@
           <a:bodyPr wrap="square" lIns="0" tIns="0" rIns="0" bIns="0" rtlCol="0" anchor="ctr"/>
           <a:lstStyle/>
           <a:p>
-            <a:pPr indent="0" marL="0">
+            <a:pPr marL="0" indent="0">
               <a:buNone/>
             </a:pPr>
             <a:r>
@@ -2927,6 +2602,13 @@
           </a:solidFill>
           <a:ln/>
         </p:spPr>
+        <p:txBody>
+          <a:bodyPr/>
+          <a:lstStyle/>
+          <a:p>
+            <a:endParaRPr lang="en-US"/>
+          </a:p>
+        </p:txBody>
       </p:sp>
       <p:sp>
         <p:nvSpPr>
@@ -2949,7 +2631,7 @@
           <a:bodyPr wrap="square" lIns="0" tIns="0" rIns="0" bIns="0" rtlCol="0" anchor="ctr"/>
           <a:lstStyle/>
           <a:p>
-            <a:pPr algn="ctr" indent="0" marL="0">
+            <a:pPr marL="0" indent="0" algn="ctr">
               <a:buNone/>
             </a:pPr>
             <a:r>
@@ -2988,7 +2670,7 @@
           <a:bodyPr wrap="square" lIns="0" tIns="0" rIns="0" bIns="0" rtlCol="0" anchor="ctr"/>
           <a:lstStyle/>
           <a:p>
-            <a:pPr indent="0" marL="0">
+            <a:pPr marL="0" indent="0">
               <a:buNone/>
             </a:pPr>
             <a:r>
@@ -3032,6 +2714,13 @@
             <a:prstDash val="solid"/>
           </a:ln>
         </p:spPr>
+        <p:txBody>
+          <a:bodyPr/>
+          <a:lstStyle/>
+          <a:p>
+            <a:endParaRPr lang="en-US"/>
+          </a:p>
+        </p:txBody>
       </p:sp>
       <p:sp>
         <p:nvSpPr>
@@ -3054,11 +2743,11 @@
           <a:bodyPr wrap="square" lIns="0" tIns="0" rIns="0" bIns="0" rtlCol="0" anchor="ctr"/>
           <a:lstStyle/>
           <a:p>
-            <a:pPr indent="0" marL="0">
-              <a:buNone/>
-            </a:pPr>
-            <a:r>
-              <a:rPr lang="en-US" sz="1050" b="1" spc="100" kern="0" dirty="0">
+            <a:pPr marL="0" indent="0">
+              <a:buNone/>
+            </a:pPr>
+            <a:r>
+              <a:rPr lang="en-US" sz="1050" b="1" kern="0" spc="100" dirty="0">
                 <a:solidFill>
                   <a:srgbClr val="615C52"/>
                 </a:solidFill>
@@ -3074,70 +2763,7 @@
       </p:sp>
       <p:pic>
         <p:nvPicPr>
-          <p:cNvPr id="19" name="Image 2" descr="preencoded.png">    </p:cNvPr>
-          <p:cNvPicPr>
-            <a:picLocks noChangeAspect="1"/>
-          </p:cNvPicPr>
-          <p:nvPr/>
-        </p:nvPicPr>
-        <p:blipFill>
-          <a:blip r:embed="rId3"/>
-          <a:stretch>
-            <a:fillRect/>
-          </a:stretch>
-        </p:blipFill>
-        <p:spPr>
-          <a:xfrm>
-            <a:off x="4297680" y="2642616"/>
-            <a:ext cx="182880" cy="182880"/>
-          </a:xfrm>
-          <a:prstGeom prst="rect">
-            <a:avLst/>
-          </a:prstGeom>
-        </p:spPr>
-      </p:pic>
-      <p:sp>
-        <p:nvSpPr>
-          <p:cNvPr id="20" name="Text 15"/>
-          <p:cNvSpPr/>
-          <p:nvPr/>
-        </p:nvSpPr>
-        <p:spPr>
-          <a:xfrm>
-            <a:off x="4572000" y="2596896"/>
-            <a:ext cx="3931920" cy="256032"/>
-          </a:xfrm>
-          <a:prstGeom prst="rect">
-            <a:avLst/>
-          </a:prstGeom>
-          <a:noFill/>
-          <a:ln/>
-        </p:spPr>
-        <p:txBody>
-          <a:bodyPr wrap="square" lIns="0" tIns="0" rIns="0" bIns="0" rtlCol="0" anchor="ctr"/>
-          <a:lstStyle/>
-          <a:p>
-            <a:pPr indent="0" marL="0">
-              <a:buNone/>
-            </a:pPr>
-            <a:r>
-              <a:rPr lang="en-US" sz="1250" dirty="0">
-                <a:solidFill>
-                  <a:srgbClr val="141413"/>
-                </a:solidFill>
-                <a:latin typeface="Inter" pitchFamily="34" charset="0"/>
-                <a:ea typeface="Inter" pitchFamily="34" charset="-122"/>
-                <a:cs typeface="Inter" pitchFamily="34" charset="-120"/>
-              </a:rPr>
-              <a:t>Tokens emit incrementally</a:t>
-            </a:r>
-            <a:endParaRPr lang="en-US" sz="1250" dirty="0"/>
-          </a:p>
-        </p:txBody>
-      </p:sp>
-      <p:pic>
-        <p:nvPicPr>
-          <p:cNvPr id="21" name="Image 3" descr="preencoded.png">    </p:cNvPr>
+          <p:cNvPr id="19" name="Image 2" descr="preencoded.png"/>
           <p:cNvPicPr>
             <a:picLocks noChangeAspect="1"/>
           </p:cNvPicPr>
@@ -3151,7 +2777,7 @@
         </p:blipFill>
         <p:spPr>
           <a:xfrm>
-            <a:off x="4297680" y="2953512"/>
+            <a:off x="4297680" y="2642616"/>
             <a:ext cx="182880" cy="182880"/>
           </a:xfrm>
           <a:prstGeom prst="rect">
@@ -3161,13 +2787,13 @@
       </p:pic>
       <p:sp>
         <p:nvSpPr>
-          <p:cNvPr id="22" name="Text 16"/>
-          <p:cNvSpPr/>
-          <p:nvPr/>
-        </p:nvSpPr>
-        <p:spPr>
-          <a:xfrm>
-            <a:off x="4572000" y="2907792"/>
+          <p:cNvPr id="20" name="Text 15"/>
+          <p:cNvSpPr/>
+          <p:nvPr/>
+        </p:nvSpPr>
+        <p:spPr>
+          <a:xfrm>
+            <a:off x="4572000" y="2596896"/>
             <a:ext cx="3931920" cy="256032"/>
           </a:xfrm>
           <a:prstGeom prst="rect">
@@ -3180,7 +2806,7 @@
           <a:bodyPr wrap="square" lIns="0" tIns="0" rIns="0" bIns="0" rtlCol="0" anchor="ctr"/>
           <a:lstStyle/>
           <a:p>
-            <a:pPr indent="0" marL="0">
+            <a:pPr marL="0" indent="0">
               <a:buNone/>
             </a:pPr>
             <a:r>
@@ -3192,7 +2818,7 @@
                 <a:ea typeface="Inter" pitchFamily="34" charset="-122"/>
                 <a:cs typeface="Inter" pitchFamily="34" charset="-120"/>
               </a:rPr>
-              <a:t>Agent makes 2+ tool calls first</a:t>
+              <a:t>Tokens emit incrementally</a:t>
             </a:r>
             <a:endParaRPr lang="en-US" sz="1250" dirty="0"/>
           </a:p>
@@ -3200,20 +2826,83 @@
       </p:sp>
       <p:pic>
         <p:nvPicPr>
-          <p:cNvPr id="23" name="Image 4" descr="preencoded.png">    </p:cNvPr>
+          <p:cNvPr id="21" name="Image 3" descr="preencoded.png"/>
           <p:cNvPicPr>
             <a:picLocks noChangeAspect="1"/>
           </p:cNvPicPr>
           <p:nvPr/>
         </p:nvPicPr>
         <p:blipFill>
-          <a:blip r:embed="rId5"/>
+          <a:blip r:embed="rId4"/>
           <a:stretch>
             <a:fillRect/>
           </a:stretch>
         </p:blipFill>
         <p:spPr>
           <a:xfrm>
+            <a:off x="4297680" y="2953512"/>
+            <a:ext cx="182880" cy="182880"/>
+          </a:xfrm>
+          <a:prstGeom prst="rect">
+            <a:avLst/>
+          </a:prstGeom>
+        </p:spPr>
+      </p:pic>
+      <p:sp>
+        <p:nvSpPr>
+          <p:cNvPr id="22" name="Text 16"/>
+          <p:cNvSpPr/>
+          <p:nvPr/>
+        </p:nvSpPr>
+        <p:spPr>
+          <a:xfrm>
+            <a:off x="4572000" y="2907792"/>
+            <a:ext cx="3931920" cy="256032"/>
+          </a:xfrm>
+          <a:prstGeom prst="rect">
+            <a:avLst/>
+          </a:prstGeom>
+          <a:noFill/>
+          <a:ln/>
+        </p:spPr>
+        <p:txBody>
+          <a:bodyPr wrap="square" lIns="0" tIns="0" rIns="0" bIns="0" rtlCol="0" anchor="ctr"/>
+          <a:lstStyle/>
+          <a:p>
+            <a:pPr marL="0" indent="0">
+              <a:buNone/>
+            </a:pPr>
+            <a:r>
+              <a:rPr lang="en-US" sz="1250" dirty="0">
+                <a:solidFill>
+                  <a:srgbClr val="141413"/>
+                </a:solidFill>
+                <a:latin typeface="Inter" pitchFamily="34" charset="0"/>
+                <a:ea typeface="Inter" pitchFamily="34" charset="-122"/>
+                <a:cs typeface="Inter" pitchFamily="34" charset="-120"/>
+              </a:rPr>
+              <a:t>Agent makes 2+ tool calls first</a:t>
+            </a:r>
+            <a:endParaRPr lang="en-US" sz="1250" dirty="0"/>
+          </a:p>
+        </p:txBody>
+      </p:sp>
+      <p:pic>
+        <p:nvPicPr>
+          <p:cNvPr id="23" name="Image 4" descr="preencoded.png"/>
+          <p:cNvPicPr>
+            <a:picLocks noChangeAspect="1"/>
+          </p:cNvPicPr>
+          <p:nvPr/>
+        </p:nvPicPr>
+        <p:blipFill>
+          <a:blip r:embed="rId4"/>
+          <a:stretch>
+            <a:fillRect/>
+          </a:stretch>
+        </p:blipFill>
+        <p:spPr>
+          <a:xfrm>
             <a:off x="4297680" y="3264408"/>
             <a:ext cx="182880" cy="182880"/>
           </a:xfrm>
@@ -3243,7 +2932,7 @@
           <a:bodyPr wrap="square" lIns="0" tIns="0" rIns="0" bIns="0" rtlCol="0" anchor="ctr"/>
           <a:lstStyle/>
           <a:p>
-            <a:pPr indent="0" marL="0">
+            <a:pPr marL="0" indent="0">
               <a:buNone/>
             </a:pPr>
             <a:r>
@@ -3282,7 +2971,7 @@
           <a:bodyPr wrap="square" rtlCol="0" anchor="ctr"/>
           <a:lstStyle/>
           <a:p>
-            <a:pPr indent="0" marL="0">
+            <a:pPr marL="0" indent="0">
               <a:buNone/>
             </a:pPr>
             <a:r>
@@ -3321,7 +3010,7 @@
           <a:bodyPr wrap="square" rtlCol="0" anchor="ctr"/>
           <a:lstStyle/>
           <a:p>
-            <a:pPr algn="r" indent="0" marL="0">
+            <a:pPr marL="0" indent="0" algn="r">
               <a:buNone/>
             </a:pPr>
             <a:r>
@@ -3336,45 +3025,6 @@
               <a:t>Day 2 · Section 2  ·  12/12</a:t>
             </a:r>
             <a:endParaRPr lang="en-US" sz="900" dirty="0"/>
-          </a:p>
-        </p:txBody>
-      </p:sp>
-      <p:sp>
-        <p:nvSpPr>
-          <p:cNvPr id="27" name="Text 20"/>
-          <p:cNvSpPr/>
-          <p:nvPr/>
-        </p:nvSpPr>
-        <p:spPr>
-          <a:xfrm>
-            <a:off x="548640" y="4462272"/>
-            <a:ext cx="8046720" cy="274320"/>
-          </a:xfrm>
-          <a:prstGeom prst="rect">
-            <a:avLst/>
-          </a:prstGeom>
-          <a:noFill/>
-          <a:ln/>
-        </p:spPr>
-        <p:txBody>
-          <a:bodyPr wrap="square" lIns="0" tIns="0" rIns="0" bIns="0" rtlCol="0" anchor="ctr"/>
-          <a:lstStyle/>
-          <a:p>
-            <a:pPr indent="0" marL="0">
-              <a:buNone/>
-            </a:pPr>
-            <a:r>
-              <a:rPr lang="en-US" sz="1000" i="1" dirty="0">
-                <a:solidFill>
-                  <a:srgbClr val="615C52"/>
-                </a:solidFill>
-                <a:latin typeface="Inter" pitchFamily="34" charset="0"/>
-                <a:ea typeface="Inter" pitchFamily="34" charset="-122"/>
-                <a:cs typeface="Inter" pitchFamily="34" charset="-120"/>
-              </a:rPr>
-              <a:t>▸ Done = incremental tokens plus an agent that calls 2+ real tools before replying.</a:t>
-            </a:r>
-            <a:endParaRPr lang="en-US" sz="1000" dirty="0"/>
           </a:p>
         </p:txBody>
       </p:sp>
@@ -3394,6 +3044,7 @@
         <a:solidFill>
           <a:srgbClr val="F0EEE6"/>
         </a:solidFill>
+        <a:effectLst/>
       </p:bgPr>
     </p:bg>
     <p:spTree>
@@ -3431,11 +3082,11 @@
           <a:bodyPr wrap="square" lIns="0" tIns="0" rIns="0" bIns="0" rtlCol="0" anchor="ctr"/>
           <a:lstStyle/>
           <a:p>
-            <a:pPr indent="0" marL="0">
-              <a:buNone/>
-            </a:pPr>
-            <a:r>
-              <a:rPr lang="en-US" sz="1100" b="1" spc="200" kern="0" dirty="0">
+            <a:pPr marL="0" indent="0">
+              <a:buNone/>
+            </a:pPr>
+            <a:r>
+              <a:rPr lang="en-US" sz="1100" b="1" kern="0" spc="200" dirty="0">
                 <a:solidFill>
                   <a:srgbClr val="C25E40"/>
                 </a:solidFill>
@@ -3470,7 +3121,7 @@
           <a:bodyPr wrap="square" lIns="0" tIns="0" rIns="0" bIns="0" rtlCol="0" anchor="ctr"/>
           <a:lstStyle/>
           <a:p>
-            <a:pPr indent="0" marL="0">
+            <a:pPr marL="0" indent="0">
               <a:buNone/>
             </a:pPr>
             <a:r>
@@ -3490,51 +3141,7 @@
       </p:sp>
       <p:pic>
         <p:nvPicPr>
-          <p:cNvPr id="4" name="Image 0" descr="preencoded.png">    </p:cNvPr>
-          <p:cNvPicPr>
-            <a:picLocks noChangeAspect="1"/>
-          </p:cNvPicPr>
-          <p:nvPr/>
-        </p:nvPicPr>
-        <p:blipFill>
-          <a:blip r:embed="rId1"/>
-          <a:stretch>
-            <a:fillRect/>
-          </a:stretch>
-        </p:blipFill>
-        <p:spPr>
-          <a:xfrm>
-            <a:off x="8321040" y="393192"/>
-            <a:ext cx="329184" cy="329184"/>
-          </a:xfrm>
-          <a:prstGeom prst="rect">
-            <a:avLst/>
-          </a:prstGeom>
-        </p:spPr>
-      </p:pic>
-      <p:sp>
-        <p:nvSpPr>
-          <p:cNvPr id="5" name="Shape 2"/>
-          <p:cNvSpPr/>
-          <p:nvPr/>
-        </p:nvSpPr>
-        <p:spPr>
-          <a:xfrm>
-            <a:off x="566928" y="1499616"/>
-            <a:ext cx="329184" cy="329184"/>
-          </a:xfrm>
-          <a:prstGeom prst="ellipse">
-            <a:avLst/>
-          </a:prstGeom>
-          <a:solidFill>
-            <a:srgbClr val="D97757"/>
-          </a:solidFill>
-          <a:ln/>
-        </p:spPr>
-      </p:sp>
-      <p:pic>
-        <p:nvPicPr>
-          <p:cNvPr id="6" name="Image 1" descr="preencoded.png">    </p:cNvPr>
+          <p:cNvPr id="4" name="Image 0" descr="preencoded.png"/>
           <p:cNvPicPr>
             <a:picLocks noChangeAspect="1"/>
           </p:cNvPicPr>
@@ -3548,8 +3155,8 @@
         </p:blipFill>
         <p:spPr>
           <a:xfrm>
-            <a:off x="652516" y="1585204"/>
-            <a:ext cx="158008" cy="158008"/>
+            <a:off x="8321040" y="393192"/>
+            <a:ext cx="329184" cy="329184"/>
           </a:xfrm>
           <a:prstGeom prst="rect">
             <a:avLst/>
@@ -3558,52 +3165,13 @@
       </p:pic>
       <p:sp>
         <p:nvSpPr>
-          <p:cNvPr id="7" name="Text 3"/>
-          <p:cNvSpPr/>
-          <p:nvPr/>
-        </p:nvSpPr>
-        <p:spPr>
-          <a:xfrm>
-            <a:off x="1051560" y="1463040"/>
-            <a:ext cx="7406640" cy="475488"/>
-          </a:xfrm>
-          <a:prstGeom prst="rect">
-            <a:avLst/>
-          </a:prstGeom>
-          <a:noFill/>
-          <a:ln/>
-        </p:spPr>
-        <p:txBody>
-          <a:bodyPr wrap="square" lIns="0" tIns="0" rIns="0" bIns="0" rtlCol="0" anchor="ctr"/>
-          <a:lstStyle/>
-          <a:p>
-            <a:pPr indent="0" marL="0">
-              <a:buNone/>
-            </a:pPr>
-            <a:r>
-              <a:rPr lang="en-US" sz="1650" dirty="0">
-                <a:solidFill>
-                  <a:srgbClr val="141413"/>
-                </a:solidFill>
-                <a:latin typeface="Inter" pitchFamily="34" charset="0"/>
-                <a:ea typeface="Inter" pitchFamily="34" charset="-122"/>
-                <a:cs typeface="Inter" pitchFamily="34" charset="-120"/>
-              </a:rPr>
-              <a:t>Stream responses to the client with SSE</a:t>
-            </a:r>
-            <a:endParaRPr lang="en-US" sz="1650" dirty="0"/>
-          </a:p>
-        </p:txBody>
-      </p:sp>
-      <p:sp>
-        <p:nvSpPr>
-          <p:cNvPr id="8" name="Shape 4"/>
-          <p:cNvSpPr/>
-          <p:nvPr/>
-        </p:nvSpPr>
-        <p:spPr>
-          <a:xfrm>
-            <a:off x="566928" y="1975104"/>
+          <p:cNvPr id="5" name="Shape 2"/>
+          <p:cNvSpPr/>
+          <p:nvPr/>
+        </p:nvSpPr>
+        <p:spPr>
+          <a:xfrm>
+            <a:off x="566928" y="1499616"/>
             <a:ext cx="329184" cy="329184"/>
           </a:xfrm>
           <a:prstGeom prst="ellipse">
@@ -3614,10 +3182,17 @@
           </a:solidFill>
           <a:ln/>
         </p:spPr>
+        <p:txBody>
+          <a:bodyPr/>
+          <a:lstStyle/>
+          <a:p>
+            <a:endParaRPr lang="en-US"/>
+          </a:p>
+        </p:txBody>
       </p:sp>
       <p:pic>
         <p:nvPicPr>
-          <p:cNvPr id="9" name="Image 2" descr="preencoded.png">    </p:cNvPr>
+          <p:cNvPr id="6" name="Image 1" descr="preencoded.png"/>
           <p:cNvPicPr>
             <a:picLocks noChangeAspect="1"/>
           </p:cNvPicPr>
@@ -3631,7 +3206,7 @@
         </p:blipFill>
         <p:spPr>
           <a:xfrm>
-            <a:off x="652516" y="2060692"/>
+            <a:off x="652516" y="1585204"/>
             <a:ext cx="158008" cy="158008"/>
           </a:xfrm>
           <a:prstGeom prst="rect">
@@ -3641,13 +3216,13 @@
       </p:pic>
       <p:sp>
         <p:nvSpPr>
-          <p:cNvPr id="10" name="Text 5"/>
-          <p:cNvSpPr/>
-          <p:nvPr/>
-        </p:nvSpPr>
-        <p:spPr>
-          <a:xfrm>
-            <a:off x="1051560" y="1938528"/>
+          <p:cNvPr id="7" name="Text 3"/>
+          <p:cNvSpPr/>
+          <p:nvPr/>
+        </p:nvSpPr>
+        <p:spPr>
+          <a:xfrm>
+            <a:off x="1051560" y="1463040"/>
             <a:ext cx="7406640" cy="475488"/>
           </a:xfrm>
           <a:prstGeom prst="rect">
@@ -3660,7 +3235,7 @@
           <a:bodyPr wrap="square" lIns="0" tIns="0" rIns="0" bIns="0" rtlCol="0" anchor="ctr"/>
           <a:lstStyle/>
           <a:p>
-            <a:pPr indent="0" marL="0">
+            <a:pPr marL="0" indent="0">
               <a:buNone/>
             </a:pPr>
             <a:r>
@@ -3672,7 +3247,7 @@
                 <a:ea typeface="Inter" pitchFamily="34" charset="-122"/>
                 <a:cs typeface="Inter" pitchFamily="34" charset="-120"/>
               </a:rPr>
-              <a:t>Define typed tools Claude can call</a:t>
+              <a:t>Stream responses to the client with SSE</a:t>
             </a:r>
             <a:endParaRPr lang="en-US" sz="1650" dirty="0"/>
           </a:p>
@@ -3680,13 +3255,13 @@
       </p:sp>
       <p:sp>
         <p:nvSpPr>
-          <p:cNvPr id="11" name="Shape 6"/>
-          <p:cNvSpPr/>
-          <p:nvPr/>
-        </p:nvSpPr>
-        <p:spPr>
-          <a:xfrm>
-            <a:off x="566928" y="2450592"/>
+          <p:cNvPr id="8" name="Shape 4"/>
+          <p:cNvSpPr/>
+          <p:nvPr/>
+        </p:nvSpPr>
+        <p:spPr>
+          <a:xfrm>
+            <a:off x="566928" y="1975104"/>
             <a:ext cx="329184" cy="329184"/>
           </a:xfrm>
           <a:prstGeom prst="ellipse">
@@ -3697,24 +3272,31 @@
           </a:solidFill>
           <a:ln/>
         </p:spPr>
+        <p:txBody>
+          <a:bodyPr/>
+          <a:lstStyle/>
+          <a:p>
+            <a:endParaRPr lang="en-US"/>
+          </a:p>
+        </p:txBody>
       </p:sp>
       <p:pic>
         <p:nvPicPr>
-          <p:cNvPr id="12" name="Image 3" descr="preencoded.png">    </p:cNvPr>
+          <p:cNvPr id="9" name="Image 2" descr="preencoded.png"/>
           <p:cNvPicPr>
             <a:picLocks noChangeAspect="1"/>
           </p:cNvPicPr>
           <p:nvPr/>
         </p:nvPicPr>
         <p:blipFill>
-          <a:blip r:embed="rId4"/>
+          <a:blip r:embed="rId3"/>
           <a:stretch>
             <a:fillRect/>
           </a:stretch>
         </p:blipFill>
         <p:spPr>
           <a:xfrm>
-            <a:off x="652516" y="2536180"/>
+            <a:off x="652516" y="2060692"/>
             <a:ext cx="158008" cy="158008"/>
           </a:xfrm>
           <a:prstGeom prst="rect">
@@ -3724,13 +3306,13 @@
       </p:pic>
       <p:sp>
         <p:nvSpPr>
-          <p:cNvPr id="13" name="Text 7"/>
-          <p:cNvSpPr/>
-          <p:nvPr/>
-        </p:nvSpPr>
-        <p:spPr>
-          <a:xfrm>
-            <a:off x="1051560" y="2414016"/>
+          <p:cNvPr id="10" name="Text 5"/>
+          <p:cNvSpPr/>
+          <p:nvPr/>
+        </p:nvSpPr>
+        <p:spPr>
+          <a:xfrm>
+            <a:off x="1051560" y="1938528"/>
             <a:ext cx="7406640" cy="475488"/>
           </a:xfrm>
           <a:prstGeom prst="rect">
@@ -3743,7 +3325,7 @@
           <a:bodyPr wrap="square" lIns="0" tIns="0" rIns="0" bIns="0" rtlCol="0" anchor="ctr"/>
           <a:lstStyle/>
           <a:p>
-            <a:pPr indent="0" marL="0">
+            <a:pPr marL="0" indent="0">
               <a:buNone/>
             </a:pPr>
             <a:r>
@@ -3755,7 +3337,7 @@
                 <a:ea typeface="Inter" pitchFamily="34" charset="-122"/>
                 <a:cs typeface="Inter" pitchFamily="34" charset="-120"/>
               </a:rPr>
-              <a:t>Implement the agent loop</a:t>
+              <a:t>Define typed tools Claude can call</a:t>
             </a:r>
             <a:endParaRPr lang="en-US" sz="1650" dirty="0"/>
           </a:p>
@@ -3763,13 +3345,13 @@
       </p:sp>
       <p:sp>
         <p:nvSpPr>
-          <p:cNvPr id="14" name="Shape 8"/>
-          <p:cNvSpPr/>
-          <p:nvPr/>
-        </p:nvSpPr>
-        <p:spPr>
-          <a:xfrm>
-            <a:off x="566928" y="2926080"/>
+          <p:cNvPr id="11" name="Shape 6"/>
+          <p:cNvSpPr/>
+          <p:nvPr/>
+        </p:nvSpPr>
+        <p:spPr>
+          <a:xfrm>
+            <a:off x="566928" y="2450592"/>
             <a:ext cx="329184" cy="329184"/>
           </a:xfrm>
           <a:prstGeom prst="ellipse">
@@ -3780,24 +3362,31 @@
           </a:solidFill>
           <a:ln/>
         </p:spPr>
+        <p:txBody>
+          <a:bodyPr/>
+          <a:lstStyle/>
+          <a:p>
+            <a:endParaRPr lang="en-US"/>
+          </a:p>
+        </p:txBody>
       </p:sp>
       <p:pic>
         <p:nvPicPr>
-          <p:cNvPr id="15" name="Image 4" descr="preencoded.png">    </p:cNvPr>
+          <p:cNvPr id="12" name="Image 3" descr="preencoded.png"/>
           <p:cNvPicPr>
             <a:picLocks noChangeAspect="1"/>
           </p:cNvPicPr>
           <p:nvPr/>
         </p:nvPicPr>
         <p:blipFill>
-          <a:blip r:embed="rId5"/>
+          <a:blip r:embed="rId3"/>
           <a:stretch>
             <a:fillRect/>
           </a:stretch>
         </p:blipFill>
         <p:spPr>
           <a:xfrm>
-            <a:off x="652516" y="3011668"/>
+            <a:off x="652516" y="2536180"/>
             <a:ext cx="158008" cy="158008"/>
           </a:xfrm>
           <a:prstGeom prst="rect">
@@ -3807,13 +3396,13 @@
       </p:pic>
       <p:sp>
         <p:nvSpPr>
-          <p:cNvPr id="16" name="Text 9"/>
-          <p:cNvSpPr/>
-          <p:nvPr/>
-        </p:nvSpPr>
-        <p:spPr>
-          <a:xfrm>
-            <a:off x="1051560" y="2889504"/>
+          <p:cNvPr id="13" name="Text 7"/>
+          <p:cNvSpPr/>
+          <p:nvPr/>
+        </p:nvSpPr>
+        <p:spPr>
+          <a:xfrm>
+            <a:off x="1051560" y="2414016"/>
             <a:ext cx="7406640" cy="475488"/>
           </a:xfrm>
           <a:prstGeom prst="rect">
@@ -3826,7 +3415,7 @@
           <a:bodyPr wrap="square" lIns="0" tIns="0" rIns="0" bIns="0" rtlCol="0" anchor="ctr"/>
           <a:lstStyle/>
           <a:p>
-            <a:pPr indent="0" marL="0">
+            <a:pPr marL="0" indent="0">
               <a:buNone/>
             </a:pPr>
             <a:r>
@@ -3838,7 +3427,7 @@
                 <a:ea typeface="Inter" pitchFamily="34" charset="-122"/>
                 <a:cs typeface="Inter" pitchFamily="34" charset="-120"/>
               </a:rPr>
-              <a:t>Wire tools to real BookTracker data</a:t>
+              <a:t>Implement the agent loop</a:t>
             </a:r>
             <a:endParaRPr lang="en-US" sz="1650" dirty="0"/>
           </a:p>
@@ -3846,13 +3435,13 @@
       </p:sp>
       <p:sp>
         <p:nvSpPr>
-          <p:cNvPr id="17" name="Shape 10"/>
-          <p:cNvSpPr/>
-          <p:nvPr/>
-        </p:nvSpPr>
-        <p:spPr>
-          <a:xfrm>
-            <a:off x="566928" y="3401568"/>
+          <p:cNvPr id="14" name="Shape 8"/>
+          <p:cNvSpPr/>
+          <p:nvPr/>
+        </p:nvSpPr>
+        <p:spPr>
+          <a:xfrm>
+            <a:off x="566928" y="2926080"/>
             <a:ext cx="329184" cy="329184"/>
           </a:xfrm>
           <a:prstGeom prst="ellipse">
@@ -3863,23 +3452,120 @@
           </a:solidFill>
           <a:ln/>
         </p:spPr>
+        <p:txBody>
+          <a:bodyPr/>
+          <a:lstStyle/>
+          <a:p>
+            <a:endParaRPr lang="en-US"/>
+          </a:p>
+        </p:txBody>
       </p:sp>
       <p:pic>
         <p:nvPicPr>
-          <p:cNvPr id="18" name="Image 5" descr="preencoded.png">    </p:cNvPr>
+          <p:cNvPr id="15" name="Image 4" descr="preencoded.png"/>
           <p:cNvPicPr>
             <a:picLocks noChangeAspect="1"/>
           </p:cNvPicPr>
           <p:nvPr/>
         </p:nvPicPr>
         <p:blipFill>
-          <a:blip r:embed="rId6"/>
+          <a:blip r:embed="rId3"/>
           <a:stretch>
             <a:fillRect/>
           </a:stretch>
         </p:blipFill>
         <p:spPr>
           <a:xfrm>
+            <a:off x="652516" y="3011668"/>
+            <a:ext cx="158008" cy="158008"/>
+          </a:xfrm>
+          <a:prstGeom prst="rect">
+            <a:avLst/>
+          </a:prstGeom>
+        </p:spPr>
+      </p:pic>
+      <p:sp>
+        <p:nvSpPr>
+          <p:cNvPr id="16" name="Text 9"/>
+          <p:cNvSpPr/>
+          <p:nvPr/>
+        </p:nvSpPr>
+        <p:spPr>
+          <a:xfrm>
+            <a:off x="1051560" y="2889504"/>
+            <a:ext cx="7406640" cy="475488"/>
+          </a:xfrm>
+          <a:prstGeom prst="rect">
+            <a:avLst/>
+          </a:prstGeom>
+          <a:noFill/>
+          <a:ln/>
+        </p:spPr>
+        <p:txBody>
+          <a:bodyPr wrap="square" lIns="0" tIns="0" rIns="0" bIns="0" rtlCol="0" anchor="ctr"/>
+          <a:lstStyle/>
+          <a:p>
+            <a:pPr marL="0" indent="0">
+              <a:buNone/>
+            </a:pPr>
+            <a:r>
+              <a:rPr lang="en-US" sz="1650" dirty="0">
+                <a:solidFill>
+                  <a:srgbClr val="141413"/>
+                </a:solidFill>
+                <a:latin typeface="Inter" pitchFamily="34" charset="0"/>
+                <a:ea typeface="Inter" pitchFamily="34" charset="-122"/>
+                <a:cs typeface="Inter" pitchFamily="34" charset="-120"/>
+              </a:rPr>
+              <a:t>Wire tools to real BookTracker data</a:t>
+            </a:r>
+            <a:endParaRPr lang="en-US" sz="1650" dirty="0"/>
+          </a:p>
+        </p:txBody>
+      </p:sp>
+      <p:sp>
+        <p:nvSpPr>
+          <p:cNvPr id="17" name="Shape 10"/>
+          <p:cNvSpPr/>
+          <p:nvPr/>
+        </p:nvSpPr>
+        <p:spPr>
+          <a:xfrm>
+            <a:off x="566928" y="3401568"/>
+            <a:ext cx="329184" cy="329184"/>
+          </a:xfrm>
+          <a:prstGeom prst="ellipse">
+            <a:avLst/>
+          </a:prstGeom>
+          <a:solidFill>
+            <a:srgbClr val="D97757"/>
+          </a:solidFill>
+          <a:ln/>
+        </p:spPr>
+        <p:txBody>
+          <a:bodyPr/>
+          <a:lstStyle/>
+          <a:p>
+            <a:endParaRPr lang="en-US"/>
+          </a:p>
+        </p:txBody>
+      </p:sp>
+      <p:pic>
+        <p:nvPicPr>
+          <p:cNvPr id="18" name="Image 5" descr="preencoded.png"/>
+          <p:cNvPicPr>
+            <a:picLocks noChangeAspect="1"/>
+          </p:cNvPicPr>
+          <p:nvPr/>
+        </p:nvPicPr>
+        <p:blipFill>
+          <a:blip r:embed="rId3"/>
+          <a:stretch>
+            <a:fillRect/>
+          </a:stretch>
+        </p:blipFill>
+        <p:spPr>
+          <a:xfrm>
             <a:off x="652516" y="3487156"/>
             <a:ext cx="158008" cy="158008"/>
           </a:xfrm>
@@ -3909,7 +3595,7 @@
           <a:bodyPr wrap="square" lIns="0" tIns="0" rIns="0" bIns="0" rtlCol="0" anchor="ctr"/>
           <a:lstStyle/>
           <a:p>
-            <a:pPr indent="0" marL="0">
+            <a:pPr marL="0" indent="0">
               <a:buNone/>
             </a:pPr>
             <a:r>
@@ -3948,7 +3634,7 @@
           <a:bodyPr wrap="square" rtlCol="0" anchor="ctr"/>
           <a:lstStyle/>
           <a:p>
-            <a:pPr indent="0" marL="0">
+            <a:pPr marL="0" indent="0">
               <a:buNone/>
             </a:pPr>
             <a:r>
@@ -3987,7 +3673,7 @@
           <a:bodyPr wrap="square" rtlCol="0" anchor="ctr"/>
           <a:lstStyle/>
           <a:p>
-            <a:pPr algn="r" indent="0" marL="0">
+            <a:pPr marL="0" indent="0" algn="r">
               <a:buNone/>
             </a:pPr>
             <a:r>
@@ -4002,45 +3688,6 @@
               <a:t>Day 2 · Section 2  ·  2/12</a:t>
             </a:r>
             <a:endParaRPr lang="en-US" sz="900" dirty="0"/>
-          </a:p>
-        </p:txBody>
-      </p:sp>
-      <p:sp>
-        <p:nvSpPr>
-          <p:cNvPr id="22" name="Text 14"/>
-          <p:cNvSpPr/>
-          <p:nvPr/>
-        </p:nvSpPr>
-        <p:spPr>
-          <a:xfrm>
-            <a:off x="548640" y="4462272"/>
-            <a:ext cx="8046720" cy="274320"/>
-          </a:xfrm>
-          <a:prstGeom prst="rect">
-            <a:avLst/>
-          </a:prstGeom>
-          <a:noFill/>
-          <a:ln/>
-        </p:spPr>
-        <p:txBody>
-          <a:bodyPr wrap="square" lIns="0" tIns="0" rIns="0" bIns="0" rtlCol="0" anchor="ctr"/>
-          <a:lstStyle/>
-          <a:p>
-            <a:pPr indent="0" marL="0">
-              <a:buNone/>
-            </a:pPr>
-            <a:r>
-              <a:rPr lang="en-US" sz="1000" i="1" dirty="0">
-                <a:solidFill>
-                  <a:srgbClr val="615C52"/>
-                </a:solidFill>
-                <a:latin typeface="Inter" pitchFamily="34" charset="0"/>
-                <a:ea typeface="Inter" pitchFamily="34" charset="-122"/>
-                <a:cs typeface="Inter" pitchFamily="34" charset="-120"/>
-              </a:rPr>
-              <a:t>▸ Five objectives — stream, define tools, loop, wire to data, then extended thinking.</a:t>
-            </a:r>
-            <a:endParaRPr lang="en-US" sz="1000" dirty="0"/>
           </a:p>
         </p:txBody>
       </p:sp>
@@ -4060,6 +3707,7 @@
         <a:solidFill>
           <a:srgbClr val="F0EEE6"/>
         </a:solidFill>
+        <a:effectLst/>
       </p:bgPr>
     </p:bg>
     <p:spTree>
@@ -4097,11 +3745,11 @@
           <a:bodyPr wrap="square" lIns="0" tIns="0" rIns="0" bIns="0" rtlCol="0" anchor="ctr"/>
           <a:lstStyle/>
           <a:p>
-            <a:pPr indent="0" marL="0">
-              <a:buNone/>
-            </a:pPr>
-            <a:r>
-              <a:rPr lang="en-US" sz="1100" b="1" spc="200" kern="0" dirty="0">
+            <a:pPr marL="0" indent="0">
+              <a:buNone/>
+            </a:pPr>
+            <a:r>
+              <a:rPr lang="en-US" sz="1100" b="1" kern="0" spc="200" dirty="0">
                 <a:solidFill>
                   <a:srgbClr val="C25E40"/>
                 </a:solidFill>
@@ -4136,7 +3784,7 @@
           <a:bodyPr wrap="square" lIns="0" tIns="0" rIns="0" bIns="0" rtlCol="0" anchor="ctr"/>
           <a:lstStyle/>
           <a:p>
-            <a:pPr indent="0" marL="0">
+            <a:pPr marL="0" indent="0">
               <a:buNone/>
             </a:pPr>
             <a:r>
@@ -4156,51 +3804,7 @@
       </p:sp>
       <p:pic>
         <p:nvPicPr>
-          <p:cNvPr id="4" name="Image 0" descr="preencoded.png">    </p:cNvPr>
-          <p:cNvPicPr>
-            <a:picLocks noChangeAspect="1"/>
-          </p:cNvPicPr>
-          <p:nvPr/>
-        </p:nvPicPr>
-        <p:blipFill>
-          <a:blip r:embed="rId1"/>
-          <a:stretch>
-            <a:fillRect/>
-          </a:stretch>
-        </p:blipFill>
-        <p:spPr>
-          <a:xfrm>
-            <a:off x="8321040" y="393192"/>
-            <a:ext cx="329184" cy="329184"/>
-          </a:xfrm>
-          <a:prstGeom prst="rect">
-            <a:avLst/>
-          </a:prstGeom>
-        </p:spPr>
-      </p:pic>
-      <p:sp>
-        <p:nvSpPr>
-          <p:cNvPr id="5" name="Shape 2"/>
-          <p:cNvSpPr/>
-          <p:nvPr/>
-        </p:nvSpPr>
-        <p:spPr>
-          <a:xfrm>
-            <a:off x="548640" y="1554480"/>
-            <a:ext cx="640080" cy="640080"/>
-          </a:xfrm>
-          <a:prstGeom prst="ellipse">
-            <a:avLst/>
-          </a:prstGeom>
-          <a:solidFill>
-            <a:srgbClr val="D97757"/>
-          </a:solidFill>
-          <a:ln/>
-        </p:spPr>
-      </p:sp>
-      <p:pic>
-        <p:nvPicPr>
-          <p:cNvPr id="6" name="Image 1" descr="preencoded.png">    </p:cNvPr>
+          <p:cNvPr id="4" name="Image 0" descr="preencoded.png"/>
           <p:cNvPicPr>
             <a:picLocks noChangeAspect="1"/>
           </p:cNvPicPr>
@@ -4214,6 +3818,57 @@
         </p:blipFill>
         <p:spPr>
           <a:xfrm>
+            <a:off x="8321040" y="393192"/>
+            <a:ext cx="329184" cy="329184"/>
+          </a:xfrm>
+          <a:prstGeom prst="rect">
+            <a:avLst/>
+          </a:prstGeom>
+        </p:spPr>
+      </p:pic>
+      <p:sp>
+        <p:nvSpPr>
+          <p:cNvPr id="5" name="Shape 2"/>
+          <p:cNvSpPr/>
+          <p:nvPr/>
+        </p:nvSpPr>
+        <p:spPr>
+          <a:xfrm>
+            <a:off x="548640" y="1554480"/>
+            <a:ext cx="640080" cy="640080"/>
+          </a:xfrm>
+          <a:prstGeom prst="ellipse">
+            <a:avLst/>
+          </a:prstGeom>
+          <a:solidFill>
+            <a:srgbClr val="D97757"/>
+          </a:solidFill>
+          <a:ln/>
+        </p:spPr>
+        <p:txBody>
+          <a:bodyPr/>
+          <a:lstStyle/>
+          <a:p>
+            <a:endParaRPr lang="en-US"/>
+          </a:p>
+        </p:txBody>
+      </p:sp>
+      <p:pic>
+        <p:nvPicPr>
+          <p:cNvPr id="6" name="Image 1" descr="preencoded.png"/>
+          <p:cNvPicPr>
+            <a:picLocks noChangeAspect="1"/>
+          </p:cNvPicPr>
+          <p:nvPr/>
+        </p:nvPicPr>
+        <p:blipFill>
+          <a:blip r:embed="rId3"/>
+          <a:stretch>
+            <a:fillRect/>
+          </a:stretch>
+        </p:blipFill>
+        <p:spPr>
+          <a:xfrm>
             <a:off x="715061" y="1720901"/>
             <a:ext cx="307238" cy="307238"/>
           </a:xfrm>
@@ -4243,7 +3898,7 @@
           <a:bodyPr wrap="square" lIns="0" tIns="0" rIns="0" bIns="0" rtlCol="0" anchor="ctr"/>
           <a:lstStyle/>
           <a:p>
-            <a:pPr indent="0" marL="0">
+            <a:pPr marL="0" indent="0">
               <a:buNone/>
             </a:pPr>
             <a:r>
@@ -4257,9 +3912,6 @@
               </a:rPr>
               <a:t>Tokens arrive </a:t>
             </a:r>
-            <a:pPr indent="0" marL="0">
-              <a:buNone/>
-            </a:pPr>
             <a:r>
               <a:rPr lang="en-US" sz="2600" b="1" dirty="0">
                 <a:solidFill>
@@ -4271,9 +3923,6 @@
               </a:rPr>
               <a:t>live</a:t>
             </a:r>
-            <a:pPr indent="0" marL="0">
-              <a:buNone/>
-            </a:pPr>
             <a:r>
               <a:rPr lang="en-US" sz="2600" b="1" dirty="0">
                 <a:solidFill>
@@ -4315,13 +3964,20 @@
             <a:prstDash val="solid"/>
           </a:ln>
           <a:effectLst>
-            <a:outerShdw sx="100000" sy="100000" kx="0" ky="0" algn="bl" rotWithShape="0" blurRad="88900" dist="38100" dir="5400000">
+            <a:outerShdw blurRad="88900" dist="38100" dir="5400000" algn="bl" rotWithShape="0">
               <a:srgbClr val="000000">
                 <a:alpha val="10000"/>
               </a:srgbClr>
             </a:outerShdw>
           </a:effectLst>
         </p:spPr>
+        <p:txBody>
+          <a:bodyPr/>
+          <a:lstStyle/>
+          <a:p>
+            <a:endParaRPr lang="en-US"/>
+          </a:p>
+        </p:txBody>
       </p:sp>
       <p:sp>
         <p:nvSpPr>
@@ -4342,17 +3998,24 @@
           </a:solidFill>
           <a:ln/>
         </p:spPr>
+        <p:txBody>
+          <a:bodyPr/>
+          <a:lstStyle/>
+          <a:p>
+            <a:endParaRPr lang="en-US"/>
+          </a:p>
+        </p:txBody>
       </p:sp>
       <p:pic>
         <p:nvPicPr>
-          <p:cNvPr id="10" name="Image 2" descr="preencoded.png">    </p:cNvPr>
+          <p:cNvPr id="10" name="Image 2" descr="preencoded.png"/>
           <p:cNvPicPr>
             <a:picLocks noChangeAspect="1"/>
           </p:cNvPicPr>
           <p:nvPr/>
         </p:nvPicPr>
         <p:blipFill>
-          <a:blip r:embed="rId3"/>
+          <a:blip r:embed="rId4"/>
           <a:stretch>
             <a:fillRect/>
           </a:stretch>
@@ -4388,7 +4051,7 @@
           <a:bodyPr wrap="square" lIns="0" tIns="0" rIns="0" bIns="0" rtlCol="0" anchor="ctr"/>
           <a:lstStyle/>
           <a:p>
-            <a:pPr indent="0" marL="0">
+            <a:pPr marL="0" indent="0">
               <a:buNone/>
             </a:pPr>
             <a:r>
@@ -4427,7 +4090,7 @@
           <a:bodyPr wrap="square" lIns="0" tIns="0" rIns="0" bIns="0" rtlCol="0" anchor="ctr"/>
           <a:lstStyle/>
           <a:p>
-            <a:pPr indent="0" marL="0">
+            <a:pPr marL="0" indent="0">
               <a:buNone/>
             </a:pPr>
             <a:r>
@@ -4471,13 +4134,20 @@
             <a:prstDash val="solid"/>
           </a:ln>
           <a:effectLst>
-            <a:outerShdw sx="100000" sy="100000" kx="0" ky="0" algn="bl" rotWithShape="0" blurRad="88900" dist="38100" dir="5400000">
+            <a:outerShdw blurRad="88900" dist="38100" dir="5400000" algn="bl" rotWithShape="0">
               <a:srgbClr val="000000">
                 <a:alpha val="10000"/>
               </a:srgbClr>
             </a:outerShdw>
           </a:effectLst>
         </p:spPr>
+        <p:txBody>
+          <a:bodyPr/>
+          <a:lstStyle/>
+          <a:p>
+            <a:endParaRPr lang="en-US"/>
+          </a:p>
+        </p:txBody>
       </p:sp>
       <p:sp>
         <p:nvSpPr>
@@ -4498,17 +4168,24 @@
           </a:solidFill>
           <a:ln/>
         </p:spPr>
+        <p:txBody>
+          <a:bodyPr/>
+          <a:lstStyle/>
+          <a:p>
+            <a:endParaRPr lang="en-US"/>
+          </a:p>
+        </p:txBody>
       </p:sp>
       <p:pic>
         <p:nvPicPr>
-          <p:cNvPr id="15" name="Image 3" descr="preencoded.png">    </p:cNvPr>
+          <p:cNvPr id="15" name="Image 3" descr="preencoded.png"/>
           <p:cNvPicPr>
             <a:picLocks noChangeAspect="1"/>
           </p:cNvPicPr>
           <p:nvPr/>
         </p:nvPicPr>
         <p:blipFill>
-          <a:blip r:embed="rId4"/>
+          <a:blip r:embed="rId3"/>
           <a:stretch>
             <a:fillRect/>
           </a:stretch>
@@ -4544,7 +4221,7 @@
           <a:bodyPr wrap="square" lIns="0" tIns="0" rIns="0" bIns="0" rtlCol="0" anchor="ctr"/>
           <a:lstStyle/>
           <a:p>
-            <a:pPr indent="0" marL="0">
+            <a:pPr marL="0" indent="0">
               <a:buNone/>
             </a:pPr>
             <a:r>
@@ -4583,7 +4260,7 @@
           <a:bodyPr wrap="square" lIns="0" tIns="0" rIns="0" bIns="0" rtlCol="0" anchor="ctr"/>
           <a:lstStyle/>
           <a:p>
-            <a:pPr indent="0" marL="0">
+            <a:pPr marL="0" indent="0">
               <a:buNone/>
             </a:pPr>
             <a:r>
@@ -4622,7 +4299,7 @@
           <a:bodyPr wrap="square" rtlCol="0" anchor="ctr"/>
           <a:lstStyle/>
           <a:p>
-            <a:pPr indent="0" marL="0">
+            <a:pPr marL="0" indent="0">
               <a:buNone/>
             </a:pPr>
             <a:r>
@@ -4661,7 +4338,7 @@
           <a:bodyPr wrap="square" rtlCol="0" anchor="ctr"/>
           <a:lstStyle/>
           <a:p>
-            <a:pPr algn="r" indent="0" marL="0">
+            <a:pPr marL="0" indent="0" algn="r">
               <a:buNone/>
             </a:pPr>
             <a:r>
@@ -4676,45 +4353,6 @@
               <a:t>Day 2 · Section 2  ·  3/12</a:t>
             </a:r>
             <a:endParaRPr lang="en-US" sz="900" dirty="0"/>
-          </a:p>
-        </p:txBody>
-      </p:sp>
-      <p:sp>
-        <p:nvSpPr>
-          <p:cNvPr id="20" name="Text 14"/>
-          <p:cNvSpPr/>
-          <p:nvPr/>
-        </p:nvSpPr>
-        <p:spPr>
-          <a:xfrm>
-            <a:off x="548640" y="4462272"/>
-            <a:ext cx="8046720" cy="274320"/>
-          </a:xfrm>
-          <a:prstGeom prst="rect">
-            <a:avLst/>
-          </a:prstGeom>
-          <a:noFill/>
-          <a:ln/>
-        </p:spPr>
-        <p:txBody>
-          <a:bodyPr wrap="square" lIns="0" tIns="0" rIns="0" bIns="0" rtlCol="0" anchor="ctr"/>
-          <a:lstStyle/>
-          <a:p>
-            <a:pPr indent="0" marL="0">
-              <a:buNone/>
-            </a:pPr>
-            <a:r>
-              <a:rPr lang="en-US" sz="1000" i="1" dirty="0">
-                <a:solidFill>
-                  <a:srgbClr val="615C52"/>
-                </a:solidFill>
-                <a:latin typeface="Inter" pitchFamily="34" charset="0"/>
-                <a:ea typeface="Inter" pitchFamily="34" charset="-122"/>
-                <a:cs typeface="Inter" pitchFamily="34" charset="-120"/>
-              </a:rPr>
-              <a:t>▸ Same total time — but streaming changes how fast it feels, which is what users judge.</a:t>
-            </a:r>
-            <a:endParaRPr lang="en-US" sz="1000" dirty="0"/>
           </a:p>
         </p:txBody>
       </p:sp>
@@ -4734,6 +4372,7 @@
         <a:solidFill>
           <a:srgbClr val="F0EEE6"/>
         </a:solidFill>
+        <a:effectLst/>
       </p:bgPr>
     </p:bg>
     <p:spTree>
@@ -4771,11 +4410,11 @@
           <a:bodyPr wrap="square" lIns="0" tIns="0" rIns="0" bIns="0" rtlCol="0" anchor="ctr"/>
           <a:lstStyle/>
           <a:p>
-            <a:pPr indent="0" marL="0">
-              <a:buNone/>
-            </a:pPr>
-            <a:r>
-              <a:rPr lang="en-US" sz="1100" b="1" spc="200" kern="0" dirty="0">
+            <a:pPr marL="0" indent="0">
+              <a:buNone/>
+            </a:pPr>
+            <a:r>
+              <a:rPr lang="en-US" sz="1100" b="1" kern="0" spc="200" dirty="0">
                 <a:solidFill>
                   <a:srgbClr val="C25E40"/>
                 </a:solidFill>
@@ -4810,7 +4449,7 @@
           <a:bodyPr wrap="square" lIns="0" tIns="0" rIns="0" bIns="0" rtlCol="0" anchor="ctr"/>
           <a:lstStyle/>
           <a:p>
-            <a:pPr indent="0" marL="0">
+            <a:pPr marL="0" indent="0">
               <a:buNone/>
             </a:pPr>
             <a:r>
@@ -4830,389 +4469,7 @@
       </p:sp>
       <p:pic>
         <p:nvPicPr>
-          <p:cNvPr id="4" name="Image 0" descr="preencoded.png">    </p:cNvPr>
-          <p:cNvPicPr>
-            <a:picLocks noChangeAspect="1"/>
-          </p:cNvPicPr>
-          <p:nvPr/>
-        </p:nvPicPr>
-        <p:blipFill>
-          <a:blip r:embed="rId1"/>
-          <a:stretch>
-            <a:fillRect/>
-          </a:stretch>
-        </p:blipFill>
-        <p:spPr>
-          <a:xfrm>
-            <a:off x="8321040" y="393192"/>
-            <a:ext cx="329184" cy="329184"/>
-          </a:xfrm>
-          <a:prstGeom prst="rect">
-            <a:avLst/>
-          </a:prstGeom>
-        </p:spPr>
-      </p:pic>
-      <p:sp>
-        <p:nvSpPr>
-          <p:cNvPr id="5" name="Shape 2"/>
-          <p:cNvSpPr/>
-          <p:nvPr/>
-        </p:nvSpPr>
-        <p:spPr>
-          <a:xfrm>
-            <a:off x="548640" y="1371600"/>
-            <a:ext cx="5212080" cy="2880360"/>
-          </a:xfrm>
-          <a:prstGeom prst="roundRect">
-            <a:avLst>
-              <a:gd name="adj" fmla="val 2540"/>
-            </a:avLst>
-          </a:prstGeom>
-          <a:solidFill>
-            <a:srgbClr val="1F1E1D"/>
-          </a:solidFill>
-          <a:ln/>
-          <a:effectLst>
-            <a:outerShdw sx="100000" sy="100000" kx="0" ky="0" algn="bl" rotWithShape="0" blurRad="88900" dist="38100" dir="5400000">
-              <a:srgbClr val="000000">
-                <a:alpha val="10000"/>
-              </a:srgbClr>
-            </a:outerShdw>
-          </a:effectLst>
-        </p:spPr>
-      </p:sp>
-      <p:sp>
-        <p:nvSpPr>
-          <p:cNvPr id="6" name="Text 3"/>
-          <p:cNvSpPr/>
-          <p:nvPr/>
-        </p:nvSpPr>
-        <p:spPr>
-          <a:xfrm>
-            <a:off x="822960" y="1517904"/>
-            <a:ext cx="4663440" cy="256032"/>
-          </a:xfrm>
-          <a:prstGeom prst="rect">
-            <a:avLst/>
-          </a:prstGeom>
-          <a:noFill/>
-          <a:ln/>
-        </p:spPr>
-        <p:txBody>
-          <a:bodyPr wrap="square" lIns="0" tIns="0" rIns="0" bIns="0" rtlCol="0" anchor="ctr"/>
-          <a:lstStyle/>
-          <a:p>
-            <a:pPr indent="0" marL="0">
-              <a:buNone/>
-            </a:pPr>
-            <a:r>
-              <a:rPr lang="en-US" sz="1050" b="1" spc="50" kern="0" dirty="0">
-                <a:solidFill>
-                  <a:srgbClr val="D97757"/>
-                </a:solidFill>
-                <a:latin typeface="Courier New" pitchFamily="34" charset="0"/>
-                <a:ea typeface="Courier New" pitchFamily="34" charset="-122"/>
-                <a:cs typeface="Courier New" pitchFamily="34" charset="-120"/>
-              </a:rPr>
-              <a:t>// StreamingService → endpoint</a:t>
-            </a:r>
-            <a:endParaRPr lang="en-US" sz="1050" dirty="0"/>
-          </a:p>
-        </p:txBody>
-      </p:sp>
-      <p:sp>
-        <p:nvSpPr>
-          <p:cNvPr id="7" name="Text 4"/>
-          <p:cNvSpPr/>
-          <p:nvPr/>
-        </p:nvSpPr>
-        <p:spPr>
-          <a:xfrm>
-            <a:off x="841248" y="1828800"/>
-            <a:ext cx="4663440" cy="2240280"/>
-          </a:xfrm>
-          <a:prstGeom prst="rect">
-            <a:avLst/>
-          </a:prstGeom>
-          <a:noFill/>
-          <a:ln/>
-        </p:spPr>
-        <p:txBody>
-          <a:bodyPr wrap="square" lIns="0" tIns="0" rIns="0" bIns="0" rtlCol="0" anchor="t"/>
-          <a:lstStyle/>
-          <a:p>
-            <a:pPr indent="0" marL="0">
-              <a:lnSpc>
-                <a:spcPct val="128000"/>
-              </a:lnSpc>
-              <a:buNone/>
-            </a:pPr>
-            <a:r>
-              <a:rPr lang="en-US" sz="1200" dirty="0">
-                <a:solidFill>
-                  <a:srgbClr val="E9E5DD"/>
-                </a:solidFill>
-                <a:latin typeface="Courier New" pitchFamily="34" charset="0"/>
-                <a:ea typeface="Courier New" pitchFamily="34" charset="-122"/>
-                <a:cs typeface="Courier New" pitchFamily="34" charset="-120"/>
-              </a:rPr>
-              <a:t>Response.ContentType =</a:t>
-            </a:r>
-            <a:endParaRPr lang="en-US" sz="1200" dirty="0"/>
-          </a:p>
-          <a:p>
-            <a:pPr indent="0" marL="0">
-              <a:lnSpc>
-                <a:spcPct val="128000"/>
-              </a:lnSpc>
-              <a:buNone/>
-            </a:pPr>
-            <a:r>
-              <a:rPr lang="en-US" sz="1200" dirty="0">
-                <a:solidFill>
-                  <a:srgbClr val="E9E5DD"/>
-                </a:solidFill>
-                <a:latin typeface="Courier New" pitchFamily="34" charset="0"/>
-                <a:ea typeface="Courier New" pitchFamily="34" charset="-122"/>
-                <a:cs typeface="Courier New" pitchFamily="34" charset="-120"/>
-              </a:rPr>
-              <a:t>  </a:t>
-            </a:r>
-            <a:pPr indent="0" marL="0">
-              <a:lnSpc>
-                <a:spcPct val="128000"/>
-              </a:lnSpc>
-              <a:buNone/>
-            </a:pPr>
-            <a:r>
-              <a:rPr lang="en-US" sz="1200" dirty="0">
-                <a:solidFill>
-                  <a:srgbClr val="E0A04A"/>
-                </a:solidFill>
-                <a:latin typeface="Courier New" pitchFamily="34" charset="0"/>
-                <a:ea typeface="Courier New" pitchFamily="34" charset="-122"/>
-                <a:cs typeface="Courier New" pitchFamily="34" charset="-120"/>
-              </a:rPr>
-              <a:t>"text/event-stream";</a:t>
-            </a:r>
-            <a:endParaRPr lang="en-US" sz="1200" dirty="0"/>
-          </a:p>
-          <a:p>
-            <a:pPr indent="0" marL="0">
-              <a:lnSpc>
-                <a:spcPct val="128000"/>
-              </a:lnSpc>
-              <a:buNone/>
-            </a:pPr>
-            <a:r>
-              <a:rPr lang="en-US" sz="1200" dirty="0">
-                <a:solidFill>
-                  <a:srgbClr val="C58FE0"/>
-                </a:solidFill>
-                <a:latin typeface="Courier New" pitchFamily="34" charset="0"/>
-                <a:ea typeface="Courier New" pitchFamily="34" charset="-122"/>
-                <a:cs typeface="Courier New" pitchFamily="34" charset="-120"/>
-              </a:rPr>
-              <a:t>await foreach</a:t>
-            </a:r>
-            <a:pPr indent="0" marL="0">
-              <a:lnSpc>
-                <a:spcPct val="128000"/>
-              </a:lnSpc>
-              <a:buNone/>
-            </a:pPr>
-            <a:r>
-              <a:rPr lang="en-US" sz="1200" dirty="0">
-                <a:solidFill>
-                  <a:srgbClr val="E9E5DD"/>
-                </a:solidFill>
-                <a:latin typeface="Courier New" pitchFamily="34" charset="0"/>
-                <a:ea typeface="Courier New" pitchFamily="34" charset="-122"/>
-                <a:cs typeface="Courier New" pitchFamily="34" charset="-120"/>
-              </a:rPr>
-              <a:t> (var delta in</a:t>
-            </a:r>
-            <a:endParaRPr lang="en-US" sz="1200" dirty="0"/>
-          </a:p>
-          <a:p>
-            <a:pPr indent="0" marL="0">
-              <a:lnSpc>
-                <a:spcPct val="128000"/>
-              </a:lnSpc>
-              <a:buNone/>
-            </a:pPr>
-            <a:r>
-              <a:rPr lang="en-US" sz="1200" dirty="0">
-                <a:solidFill>
-                  <a:srgbClr val="E9E5DD"/>
-                </a:solidFill>
-                <a:latin typeface="Courier New" pitchFamily="34" charset="0"/>
-                <a:ea typeface="Courier New" pitchFamily="34" charset="-122"/>
-                <a:cs typeface="Courier New" pitchFamily="34" charset="-120"/>
-              </a:rPr>
-              <a:t>        svc.StreamAsync(req))</a:t>
-            </a:r>
-            <a:endParaRPr lang="en-US" sz="1200" dirty="0"/>
-          </a:p>
-          <a:p>
-            <a:pPr indent="0" marL="0">
-              <a:lnSpc>
-                <a:spcPct val="128000"/>
-              </a:lnSpc>
-              <a:buNone/>
-            </a:pPr>
-            <a:r>
-              <a:rPr lang="en-US" sz="1200" dirty="0">
-                <a:solidFill>
-                  <a:srgbClr val="E9E5DD"/>
-                </a:solidFill>
-                <a:latin typeface="Courier New" pitchFamily="34" charset="0"/>
-                <a:ea typeface="Courier New" pitchFamily="34" charset="-122"/>
-                <a:cs typeface="Courier New" pitchFamily="34" charset="-120"/>
-              </a:rPr>
-              <a:t>{</a:t>
-            </a:r>
-            <a:endParaRPr lang="en-US" sz="1200" dirty="0"/>
-          </a:p>
-          <a:p>
-            <a:pPr indent="0" marL="0">
-              <a:lnSpc>
-                <a:spcPct val="128000"/>
-              </a:lnSpc>
-              <a:buNone/>
-            </a:pPr>
-            <a:r>
-              <a:rPr lang="en-US" sz="1200" dirty="0">
-                <a:solidFill>
-                  <a:srgbClr val="E9E5DD"/>
-                </a:solidFill>
-                <a:latin typeface="Courier New" pitchFamily="34" charset="0"/>
-                <a:ea typeface="Courier New" pitchFamily="34" charset="-122"/>
-                <a:cs typeface="Courier New" pitchFamily="34" charset="-120"/>
-              </a:rPr>
-              <a:t>  await Response.WriteAsync(</a:t>
-            </a:r>
-            <a:endParaRPr lang="en-US" sz="1200" dirty="0"/>
-          </a:p>
-          <a:p>
-            <a:pPr indent="0" marL="0">
-              <a:lnSpc>
-                <a:spcPct val="128000"/>
-              </a:lnSpc>
-              <a:buNone/>
-            </a:pPr>
-            <a:r>
-              <a:rPr lang="en-US" sz="1200" dirty="0">
-                <a:solidFill>
-                  <a:srgbClr val="E9E5DD"/>
-                </a:solidFill>
-                <a:latin typeface="Courier New" pitchFamily="34" charset="0"/>
-                <a:ea typeface="Courier New" pitchFamily="34" charset="-122"/>
-                <a:cs typeface="Courier New" pitchFamily="34" charset="-120"/>
-              </a:rPr>
-              <a:t>    $</a:t>
-            </a:r>
-            <a:pPr indent="0" marL="0">
-              <a:lnSpc>
-                <a:spcPct val="128000"/>
-              </a:lnSpc>
-              <a:buNone/>
-            </a:pPr>
-            <a:r>
-              <a:rPr lang="en-US" sz="1200" dirty="0">
-                <a:solidFill>
-                  <a:srgbClr val="E0A04A"/>
-                </a:solidFill>
-                <a:latin typeface="Courier New" pitchFamily="34" charset="0"/>
-                <a:ea typeface="Courier New" pitchFamily="34" charset="-122"/>
-                <a:cs typeface="Courier New" pitchFamily="34" charset="-120"/>
-              </a:rPr>
-              <a:t>"data: {delta}\n\n"</a:t>
-            </a:r>
-            <a:pPr indent="0" marL="0">
-              <a:lnSpc>
-                <a:spcPct val="128000"/>
-              </a:lnSpc>
-              <a:buNone/>
-            </a:pPr>
-            <a:r>
-              <a:rPr lang="en-US" sz="1200" dirty="0">
-                <a:solidFill>
-                  <a:srgbClr val="E9E5DD"/>
-                </a:solidFill>
-                <a:latin typeface="Courier New" pitchFamily="34" charset="0"/>
-                <a:ea typeface="Courier New" pitchFamily="34" charset="-122"/>
-                <a:cs typeface="Courier New" pitchFamily="34" charset="-120"/>
-              </a:rPr>
-              <a:t>);</a:t>
-            </a:r>
-            <a:endParaRPr lang="en-US" sz="1200" dirty="0"/>
-          </a:p>
-          <a:p>
-            <a:pPr indent="0" marL="0">
-              <a:lnSpc>
-                <a:spcPct val="128000"/>
-              </a:lnSpc>
-              <a:buNone/>
-            </a:pPr>
-            <a:r>
-              <a:rPr lang="en-US" sz="1200" dirty="0">
-                <a:solidFill>
-                  <a:srgbClr val="E9E5DD"/>
-                </a:solidFill>
-                <a:latin typeface="Courier New" pitchFamily="34" charset="0"/>
-                <a:ea typeface="Courier New" pitchFamily="34" charset="-122"/>
-                <a:cs typeface="Courier New" pitchFamily="34" charset="-120"/>
-              </a:rPr>
-              <a:t>  await Response.Body.FlushAsync();</a:t>
-            </a:r>
-            <a:endParaRPr lang="en-US" sz="1200" dirty="0"/>
-          </a:p>
-          <a:p>
-            <a:pPr indent="0" marL="0">
-              <a:lnSpc>
-                <a:spcPct val="128000"/>
-              </a:lnSpc>
-              <a:buNone/>
-            </a:pPr>
-            <a:r>
-              <a:rPr lang="en-US" sz="1200" dirty="0">
-                <a:solidFill>
-                  <a:srgbClr val="E9E5DD"/>
-                </a:solidFill>
-                <a:latin typeface="Courier New" pitchFamily="34" charset="0"/>
-                <a:ea typeface="Courier New" pitchFamily="34" charset="-122"/>
-                <a:cs typeface="Courier New" pitchFamily="34" charset="-120"/>
-              </a:rPr>
-              <a:t>}</a:t>
-            </a:r>
-            <a:endParaRPr lang="en-US" sz="1200" dirty="0"/>
-          </a:p>
-        </p:txBody>
-      </p:sp>
-      <p:sp>
-        <p:nvSpPr>
-          <p:cNvPr id="8" name="Shape 5"/>
-          <p:cNvSpPr/>
-          <p:nvPr/>
-        </p:nvSpPr>
-        <p:spPr>
-          <a:xfrm>
-            <a:off x="5989320" y="1417320"/>
-            <a:ext cx="384048" cy="384048"/>
-          </a:xfrm>
-          <a:prstGeom prst="ellipse">
-            <a:avLst/>
-          </a:prstGeom>
-          <a:solidFill>
-            <a:srgbClr val="D97757"/>
-          </a:solidFill>
-          <a:ln/>
-        </p:spPr>
-      </p:sp>
-      <p:pic>
-        <p:nvPicPr>
-          <p:cNvPr id="9" name="Image 1" descr="preencoded.png">    </p:cNvPr>
+          <p:cNvPr id="4" name="Image 0" descr="preencoded.png"/>
           <p:cNvPicPr>
             <a:picLocks noChangeAspect="1"/>
           </p:cNvPicPr>
@@ -5226,8 +4483,8 @@
         </p:blipFill>
         <p:spPr>
           <a:xfrm>
-            <a:off x="6089172" y="1517172"/>
-            <a:ext cx="184343" cy="184343"/>
+            <a:off x="8321040" y="393192"/>
+            <a:ext cx="329184" cy="329184"/>
           </a:xfrm>
           <a:prstGeom prst="rect">
             <a:avLst/>
@@ -5236,91 +4493,334 @@
       </p:pic>
       <p:sp>
         <p:nvSpPr>
-          <p:cNvPr id="10" name="Text 6"/>
-          <p:cNvSpPr/>
-          <p:nvPr/>
-        </p:nvSpPr>
-        <p:spPr>
-          <a:xfrm>
-            <a:off x="6519672" y="1371600"/>
-            <a:ext cx="2697480" cy="274320"/>
-          </a:xfrm>
-          <a:prstGeom prst="rect">
-            <a:avLst/>
-          </a:prstGeom>
-          <a:noFill/>
-          <a:ln/>
-        </p:spPr>
-        <p:txBody>
-          <a:bodyPr wrap="square" lIns="0" tIns="0" rIns="0" bIns="0" rtlCol="0" anchor="ctr"/>
-          <a:lstStyle/>
-          <a:p>
-            <a:pPr indent="0" marL="0">
-              <a:buNone/>
-            </a:pPr>
-            <a:r>
-              <a:rPr lang="en-US" sz="1250" b="1" dirty="0">
-                <a:solidFill>
-                  <a:srgbClr val="141413"/>
+          <p:cNvPr id="5" name="Shape 2"/>
+          <p:cNvSpPr/>
+          <p:nvPr/>
+        </p:nvSpPr>
+        <p:spPr>
+          <a:xfrm>
+            <a:off x="548640" y="1371600"/>
+            <a:ext cx="5212080" cy="2880360"/>
+          </a:xfrm>
+          <a:prstGeom prst="roundRect">
+            <a:avLst>
+              <a:gd name="adj" fmla="val 2540"/>
+            </a:avLst>
+          </a:prstGeom>
+          <a:solidFill>
+            <a:srgbClr val="1F1E1D"/>
+          </a:solidFill>
+          <a:ln/>
+          <a:effectLst>
+            <a:outerShdw blurRad="88900" dist="38100" dir="5400000" algn="bl" rotWithShape="0">
+              <a:srgbClr val="000000">
+                <a:alpha val="10000"/>
+              </a:srgbClr>
+            </a:outerShdw>
+          </a:effectLst>
+        </p:spPr>
+        <p:txBody>
+          <a:bodyPr/>
+          <a:lstStyle/>
+          <a:p>
+            <a:endParaRPr lang="en-US"/>
+          </a:p>
+        </p:txBody>
+      </p:sp>
+      <p:sp>
+        <p:nvSpPr>
+          <p:cNvPr id="6" name="Text 3"/>
+          <p:cNvSpPr/>
+          <p:nvPr/>
+        </p:nvSpPr>
+        <p:spPr>
+          <a:xfrm>
+            <a:off x="822960" y="1517904"/>
+            <a:ext cx="4663440" cy="256032"/>
+          </a:xfrm>
+          <a:prstGeom prst="rect">
+            <a:avLst/>
+          </a:prstGeom>
+          <a:noFill/>
+          <a:ln/>
+        </p:spPr>
+        <p:txBody>
+          <a:bodyPr wrap="square" lIns="0" tIns="0" rIns="0" bIns="0" rtlCol="0" anchor="ctr"/>
+          <a:lstStyle/>
+          <a:p>
+            <a:pPr marL="0" indent="0">
+              <a:buNone/>
+            </a:pPr>
+            <a:r>
+              <a:rPr lang="en-US" sz="1050" b="1" kern="0" spc="50" dirty="0">
+                <a:solidFill>
+                  <a:srgbClr val="D97757"/>
                 </a:solidFill>
                 <a:latin typeface="Courier New" pitchFamily="34" charset="0"/>
                 <a:ea typeface="Courier New" pitchFamily="34" charset="-122"/>
                 <a:cs typeface="Courier New" pitchFamily="34" charset="-120"/>
               </a:rPr>
-              <a:t>text/event-stream</a:t>
-            </a:r>
-            <a:endParaRPr lang="en-US" sz="1250" dirty="0"/>
-          </a:p>
-        </p:txBody>
-      </p:sp>
-      <p:sp>
-        <p:nvSpPr>
-          <p:cNvPr id="11" name="Text 7"/>
-          <p:cNvSpPr/>
-          <p:nvPr/>
-        </p:nvSpPr>
-        <p:spPr>
-          <a:xfrm>
-            <a:off x="6519672" y="1636776"/>
-            <a:ext cx="2697480" cy="274320"/>
-          </a:xfrm>
-          <a:prstGeom prst="rect">
-            <a:avLst/>
-          </a:prstGeom>
-          <a:noFill/>
-          <a:ln/>
-        </p:spPr>
-        <p:txBody>
-          <a:bodyPr wrap="square" lIns="0" tIns="0" rIns="0" bIns="0" rtlCol="0" anchor="ctr"/>
-          <a:lstStyle/>
-          <a:p>
-            <a:pPr indent="0" marL="0">
-              <a:buNone/>
-            </a:pPr>
-            <a:r>
-              <a:rPr lang="en-US" sz="1100" dirty="0">
-                <a:solidFill>
-                  <a:srgbClr val="615C52"/>
-                </a:solidFill>
-                <a:latin typeface="Inter" pitchFamily="34" charset="0"/>
-                <a:ea typeface="Inter" pitchFamily="34" charset="-122"/>
-                <a:cs typeface="Inter" pitchFamily="34" charset="-120"/>
-              </a:rPr>
-              <a:t>Set the SSE content type</a:t>
-            </a:r>
-            <a:endParaRPr lang="en-US" sz="1100" dirty="0"/>
-          </a:p>
-        </p:txBody>
-      </p:sp>
-      <p:sp>
-        <p:nvSpPr>
-          <p:cNvPr id="12" name="Shape 8"/>
-          <p:cNvSpPr/>
-          <p:nvPr/>
-        </p:nvSpPr>
-        <p:spPr>
-          <a:xfrm>
-            <a:off x="5989320" y="2112264"/>
+              <a:t>// StreamingService → endpoint</a:t>
+            </a:r>
+            <a:endParaRPr lang="en-US" sz="1050" dirty="0"/>
+          </a:p>
+        </p:txBody>
+      </p:sp>
+      <p:sp>
+        <p:nvSpPr>
+          <p:cNvPr id="7" name="Text 4"/>
+          <p:cNvSpPr/>
+          <p:nvPr/>
+        </p:nvSpPr>
+        <p:spPr>
+          <a:xfrm>
+            <a:off x="841248" y="1828800"/>
+            <a:ext cx="4663440" cy="2240280"/>
+          </a:xfrm>
+          <a:prstGeom prst="rect">
+            <a:avLst/>
+          </a:prstGeom>
+          <a:noFill/>
+          <a:ln/>
+        </p:spPr>
+        <p:txBody>
+          <a:bodyPr wrap="square" lIns="0" tIns="0" rIns="0" bIns="0" rtlCol="0" anchor="t"/>
+          <a:lstStyle/>
+          <a:p>
+            <a:pPr marL="0" indent="0">
+              <a:lnSpc>
+                <a:spcPct val="128000"/>
+              </a:lnSpc>
+              <a:buNone/>
+            </a:pPr>
+            <a:r>
+              <a:rPr lang="en-US" sz="1200" dirty="0">
+                <a:solidFill>
+                  <a:srgbClr val="E9E5DD"/>
+                </a:solidFill>
+                <a:latin typeface="Courier New" pitchFamily="34" charset="0"/>
+                <a:ea typeface="Courier New" pitchFamily="34" charset="-122"/>
+                <a:cs typeface="Courier New" pitchFamily="34" charset="-120"/>
+              </a:rPr>
+              <a:t>Response.ContentType =</a:t>
+            </a:r>
+            <a:endParaRPr lang="en-US" sz="1200" dirty="0"/>
+          </a:p>
+          <a:p>
+            <a:pPr marL="0" indent="0">
+              <a:lnSpc>
+                <a:spcPct val="128000"/>
+              </a:lnSpc>
+              <a:buNone/>
+            </a:pPr>
+            <a:r>
+              <a:rPr lang="en-US" sz="1200" dirty="0">
+                <a:solidFill>
+                  <a:srgbClr val="E9E5DD"/>
+                </a:solidFill>
+                <a:latin typeface="Courier New" pitchFamily="34" charset="0"/>
+                <a:ea typeface="Courier New" pitchFamily="34" charset="-122"/>
+                <a:cs typeface="Courier New" pitchFamily="34" charset="-120"/>
+              </a:rPr>
+              <a:t>  </a:t>
+            </a:r>
+            <a:r>
+              <a:rPr lang="en-US" sz="1200" dirty="0">
+                <a:solidFill>
+                  <a:srgbClr val="E0A04A"/>
+                </a:solidFill>
+                <a:latin typeface="Courier New" pitchFamily="34" charset="0"/>
+                <a:ea typeface="Courier New" pitchFamily="34" charset="-122"/>
+                <a:cs typeface="Courier New" pitchFamily="34" charset="-120"/>
+              </a:rPr>
+              <a:t>"text/event-stream";</a:t>
+            </a:r>
+            <a:endParaRPr lang="en-US" sz="1200" dirty="0"/>
+          </a:p>
+          <a:p>
+            <a:pPr marL="0" indent="0">
+              <a:lnSpc>
+                <a:spcPct val="128000"/>
+              </a:lnSpc>
+              <a:buNone/>
+            </a:pPr>
+            <a:r>
+              <a:rPr lang="en-US" sz="1200" dirty="0">
+                <a:solidFill>
+                  <a:srgbClr val="C58FE0"/>
+                </a:solidFill>
+                <a:latin typeface="Courier New" pitchFamily="34" charset="0"/>
+                <a:ea typeface="Courier New" pitchFamily="34" charset="-122"/>
+                <a:cs typeface="Courier New" pitchFamily="34" charset="-120"/>
+              </a:rPr>
+              <a:t>await foreach</a:t>
+            </a:r>
+            <a:r>
+              <a:rPr lang="en-US" sz="1200" dirty="0">
+                <a:solidFill>
+                  <a:srgbClr val="E9E5DD"/>
+                </a:solidFill>
+                <a:latin typeface="Courier New" pitchFamily="34" charset="0"/>
+                <a:ea typeface="Courier New" pitchFamily="34" charset="-122"/>
+                <a:cs typeface="Courier New" pitchFamily="34" charset="-120"/>
+              </a:rPr>
+              <a:t> (var delta in</a:t>
+            </a:r>
+            <a:endParaRPr lang="en-US" sz="1200" dirty="0"/>
+          </a:p>
+          <a:p>
+            <a:pPr marL="0" indent="0">
+              <a:lnSpc>
+                <a:spcPct val="128000"/>
+              </a:lnSpc>
+              <a:buNone/>
+            </a:pPr>
+            <a:r>
+              <a:rPr lang="en-US" sz="1200" dirty="0">
+                <a:solidFill>
+                  <a:srgbClr val="E9E5DD"/>
+                </a:solidFill>
+                <a:latin typeface="Courier New" pitchFamily="34" charset="0"/>
+                <a:ea typeface="Courier New" pitchFamily="34" charset="-122"/>
+                <a:cs typeface="Courier New" pitchFamily="34" charset="-120"/>
+              </a:rPr>
+              <a:t>        svc.StreamAsync(req))</a:t>
+            </a:r>
+            <a:endParaRPr lang="en-US" sz="1200" dirty="0"/>
+          </a:p>
+          <a:p>
+            <a:pPr marL="0" indent="0">
+              <a:lnSpc>
+                <a:spcPct val="128000"/>
+              </a:lnSpc>
+              <a:buNone/>
+            </a:pPr>
+            <a:r>
+              <a:rPr lang="en-US" sz="1200" dirty="0">
+                <a:solidFill>
+                  <a:srgbClr val="E9E5DD"/>
+                </a:solidFill>
+                <a:latin typeface="Courier New" pitchFamily="34" charset="0"/>
+                <a:ea typeface="Courier New" pitchFamily="34" charset="-122"/>
+                <a:cs typeface="Courier New" pitchFamily="34" charset="-120"/>
+              </a:rPr>
+              <a:t>{</a:t>
+            </a:r>
+            <a:endParaRPr lang="en-US" sz="1200" dirty="0"/>
+          </a:p>
+          <a:p>
+            <a:pPr marL="0" indent="0">
+              <a:lnSpc>
+                <a:spcPct val="128000"/>
+              </a:lnSpc>
+              <a:buNone/>
+            </a:pPr>
+            <a:r>
+              <a:rPr lang="en-US" sz="1200" dirty="0">
+                <a:solidFill>
+                  <a:srgbClr val="E9E5DD"/>
+                </a:solidFill>
+                <a:latin typeface="Courier New" pitchFamily="34" charset="0"/>
+                <a:ea typeface="Courier New" pitchFamily="34" charset="-122"/>
+                <a:cs typeface="Courier New" pitchFamily="34" charset="-120"/>
+              </a:rPr>
+              <a:t>  await Response.WriteAsync(</a:t>
+            </a:r>
+            <a:endParaRPr lang="en-US" sz="1200" dirty="0"/>
+          </a:p>
+          <a:p>
+            <a:pPr marL="0" indent="0">
+              <a:lnSpc>
+                <a:spcPct val="128000"/>
+              </a:lnSpc>
+              <a:buNone/>
+            </a:pPr>
+            <a:r>
+              <a:rPr lang="en-US" sz="1200" dirty="0">
+                <a:solidFill>
+                  <a:srgbClr val="E9E5DD"/>
+                </a:solidFill>
+                <a:latin typeface="Courier New" pitchFamily="34" charset="0"/>
+                <a:ea typeface="Courier New" pitchFamily="34" charset="-122"/>
+                <a:cs typeface="Courier New" pitchFamily="34" charset="-120"/>
+              </a:rPr>
+              <a:t>    $</a:t>
+            </a:r>
+            <a:r>
+              <a:rPr lang="en-US" sz="1200" dirty="0">
+                <a:solidFill>
+                  <a:srgbClr val="E0A04A"/>
+                </a:solidFill>
+                <a:latin typeface="Courier New" pitchFamily="34" charset="0"/>
+                <a:ea typeface="Courier New" pitchFamily="34" charset="-122"/>
+                <a:cs typeface="Courier New" pitchFamily="34" charset="-120"/>
+              </a:rPr>
+              <a:t>"data: {delta}\n\n"</a:t>
+            </a:r>
+            <a:r>
+              <a:rPr lang="en-US" sz="1200" dirty="0">
+                <a:solidFill>
+                  <a:srgbClr val="E9E5DD"/>
+                </a:solidFill>
+                <a:latin typeface="Courier New" pitchFamily="34" charset="0"/>
+                <a:ea typeface="Courier New" pitchFamily="34" charset="-122"/>
+                <a:cs typeface="Courier New" pitchFamily="34" charset="-120"/>
+              </a:rPr>
+              <a:t>);</a:t>
+            </a:r>
+            <a:endParaRPr lang="en-US" sz="1200" dirty="0"/>
+          </a:p>
+          <a:p>
+            <a:pPr marL="0" indent="0">
+              <a:lnSpc>
+                <a:spcPct val="128000"/>
+              </a:lnSpc>
+              <a:buNone/>
+            </a:pPr>
+            <a:r>
+              <a:rPr lang="en-US" sz="1200" dirty="0">
+                <a:solidFill>
+                  <a:srgbClr val="E9E5DD"/>
+                </a:solidFill>
+                <a:latin typeface="Courier New" pitchFamily="34" charset="0"/>
+                <a:ea typeface="Courier New" pitchFamily="34" charset="-122"/>
+                <a:cs typeface="Courier New" pitchFamily="34" charset="-120"/>
+              </a:rPr>
+              <a:t>  await Response.Body.FlushAsync();</a:t>
+            </a:r>
+            <a:endParaRPr lang="en-US" sz="1200" dirty="0"/>
+          </a:p>
+          <a:p>
+            <a:pPr marL="0" indent="0">
+              <a:lnSpc>
+                <a:spcPct val="128000"/>
+              </a:lnSpc>
+              <a:buNone/>
+            </a:pPr>
+            <a:r>
+              <a:rPr lang="en-US" sz="1200" dirty="0">
+                <a:solidFill>
+                  <a:srgbClr val="E9E5DD"/>
+                </a:solidFill>
+                <a:latin typeface="Courier New" pitchFamily="34" charset="0"/>
+                <a:ea typeface="Courier New" pitchFamily="34" charset="-122"/>
+                <a:cs typeface="Courier New" pitchFamily="34" charset="-120"/>
+              </a:rPr>
+              <a:t>}</a:t>
+            </a:r>
+            <a:endParaRPr lang="en-US" sz="1200" dirty="0"/>
+          </a:p>
+        </p:txBody>
+      </p:sp>
+      <p:sp>
+        <p:nvSpPr>
+          <p:cNvPr id="8" name="Shape 5"/>
+          <p:cNvSpPr/>
+          <p:nvPr/>
+        </p:nvSpPr>
+        <p:spPr>
+          <a:xfrm>
+            <a:off x="5989320" y="1417320"/>
             <a:ext cx="384048" cy="384048"/>
           </a:xfrm>
           <a:prstGeom prst="ellipse">
@@ -5331,10 +4831,17 @@
           </a:solidFill>
           <a:ln/>
         </p:spPr>
+        <p:txBody>
+          <a:bodyPr/>
+          <a:lstStyle/>
+          <a:p>
+            <a:endParaRPr lang="en-US"/>
+          </a:p>
+        </p:txBody>
       </p:sp>
       <p:pic>
         <p:nvPicPr>
-          <p:cNvPr id="13" name="Image 2" descr="preencoded.png">    </p:cNvPr>
+          <p:cNvPr id="9" name="Image 1" descr="preencoded.png"/>
           <p:cNvPicPr>
             <a:picLocks noChangeAspect="1"/>
           </p:cNvPicPr>
@@ -5348,7 +4855,7 @@
         </p:blipFill>
         <p:spPr>
           <a:xfrm>
-            <a:off x="6089172" y="2212116"/>
+            <a:off x="6089172" y="1517172"/>
             <a:ext cx="184343" cy="184343"/>
           </a:xfrm>
           <a:prstGeom prst="rect">
@@ -5358,13 +4865,13 @@
       </p:pic>
       <p:sp>
         <p:nvSpPr>
-          <p:cNvPr id="14" name="Text 9"/>
-          <p:cNvSpPr/>
-          <p:nvPr/>
-        </p:nvSpPr>
-        <p:spPr>
-          <a:xfrm>
-            <a:off x="6519672" y="2066544"/>
+          <p:cNvPr id="10" name="Text 6"/>
+          <p:cNvSpPr/>
+          <p:nvPr/>
+        </p:nvSpPr>
+        <p:spPr>
+          <a:xfrm>
+            <a:off x="6519672" y="1371600"/>
             <a:ext cx="2697480" cy="274320"/>
           </a:xfrm>
           <a:prstGeom prst="rect">
@@ -5377,7 +4884,7 @@
           <a:bodyPr wrap="square" lIns="0" tIns="0" rIns="0" bIns="0" rtlCol="0" anchor="ctr"/>
           <a:lstStyle/>
           <a:p>
-            <a:pPr indent="0" marL="0">
+            <a:pPr marL="0" indent="0">
               <a:buNone/>
             </a:pPr>
             <a:r>
@@ -5389,7 +4896,7 @@
                 <a:ea typeface="Courier New" pitchFamily="34" charset="-122"/>
                 <a:cs typeface="Courier New" pitchFamily="34" charset="-120"/>
               </a:rPr>
-              <a:t>data: frames</a:t>
+              <a:t>text/event-stream</a:t>
             </a:r>
             <a:endParaRPr lang="en-US" sz="1250" dirty="0"/>
           </a:p>
@@ -5397,13 +4904,13 @@
       </p:sp>
       <p:sp>
         <p:nvSpPr>
-          <p:cNvPr id="15" name="Text 10"/>
-          <p:cNvSpPr/>
-          <p:nvPr/>
-        </p:nvSpPr>
-        <p:spPr>
-          <a:xfrm>
-            <a:off x="6519672" y="2331720"/>
+          <p:cNvPr id="11" name="Text 7"/>
+          <p:cNvSpPr/>
+          <p:nvPr/>
+        </p:nvSpPr>
+        <p:spPr>
+          <a:xfrm>
+            <a:off x="6519672" y="1636776"/>
             <a:ext cx="2697480" cy="274320"/>
           </a:xfrm>
           <a:prstGeom prst="rect">
@@ -5416,7 +4923,7 @@
           <a:bodyPr wrap="square" lIns="0" tIns="0" rIns="0" bIns="0" rtlCol="0" anchor="ctr"/>
           <a:lstStyle/>
           <a:p>
-            <a:pPr indent="0" marL="0">
+            <a:pPr marL="0" indent="0">
               <a:buNone/>
             </a:pPr>
             <a:r>
@@ -5428,7 +4935,7 @@
                 <a:ea typeface="Inter" pitchFamily="34" charset="-122"/>
                 <a:cs typeface="Inter" pitchFamily="34" charset="-120"/>
               </a:rPr>
-              <a:t>One frame per chunk</a:t>
+              <a:t>Set the SSE content type</a:t>
             </a:r>
             <a:endParaRPr lang="en-US" sz="1100" dirty="0"/>
           </a:p>
@@ -5436,13 +4943,13 @@
       </p:sp>
       <p:sp>
         <p:nvSpPr>
-          <p:cNvPr id="16" name="Shape 11"/>
-          <p:cNvSpPr/>
-          <p:nvPr/>
-        </p:nvSpPr>
-        <p:spPr>
-          <a:xfrm>
-            <a:off x="5989320" y="2807208"/>
+          <p:cNvPr id="12" name="Shape 8"/>
+          <p:cNvSpPr/>
+          <p:nvPr/>
+        </p:nvSpPr>
+        <p:spPr>
+          <a:xfrm>
+            <a:off x="5989320" y="2112264"/>
             <a:ext cx="384048" cy="384048"/>
           </a:xfrm>
           <a:prstGeom prst="ellipse">
@@ -5453,10 +4960,17 @@
           </a:solidFill>
           <a:ln/>
         </p:spPr>
+        <p:txBody>
+          <a:bodyPr/>
+          <a:lstStyle/>
+          <a:p>
+            <a:endParaRPr lang="en-US"/>
+          </a:p>
+        </p:txBody>
       </p:sp>
       <p:pic>
         <p:nvPicPr>
-          <p:cNvPr id="17" name="Image 3" descr="preencoded.png">    </p:cNvPr>
+          <p:cNvPr id="13" name="Image 2" descr="preencoded.png"/>
           <p:cNvPicPr>
             <a:picLocks noChangeAspect="1"/>
           </p:cNvPicPr>
@@ -5470,7 +4984,7 @@
         </p:blipFill>
         <p:spPr>
           <a:xfrm>
-            <a:off x="6089172" y="2907060"/>
+            <a:off x="6089172" y="2212116"/>
             <a:ext cx="184343" cy="184343"/>
           </a:xfrm>
           <a:prstGeom prst="rect">
@@ -5480,13 +4994,13 @@
       </p:pic>
       <p:sp>
         <p:nvSpPr>
-          <p:cNvPr id="18" name="Text 12"/>
-          <p:cNvSpPr/>
-          <p:nvPr/>
-        </p:nvSpPr>
-        <p:spPr>
-          <a:xfrm>
-            <a:off x="6519672" y="2761488"/>
+          <p:cNvPr id="14" name="Text 9"/>
+          <p:cNvSpPr/>
+          <p:nvPr/>
+        </p:nvSpPr>
+        <p:spPr>
+          <a:xfrm>
+            <a:off x="6519672" y="2066544"/>
             <a:ext cx="2697480" cy="274320"/>
           </a:xfrm>
           <a:prstGeom prst="rect">
@@ -5499,7 +5013,7 @@
           <a:bodyPr wrap="square" lIns="0" tIns="0" rIns="0" bIns="0" rtlCol="0" anchor="ctr"/>
           <a:lstStyle/>
           <a:p>
-            <a:pPr indent="0" marL="0">
+            <a:pPr marL="0" indent="0">
               <a:buNone/>
             </a:pPr>
             <a:r>
@@ -5511,7 +5025,7 @@
                 <a:ea typeface="Courier New" pitchFamily="34" charset="-122"/>
                 <a:cs typeface="Courier New" pitchFamily="34" charset="-120"/>
               </a:rPr>
-              <a:t>Flush per chunk</a:t>
+              <a:t>data: frames</a:t>
             </a:r>
             <a:endParaRPr lang="en-US" sz="1250" dirty="0"/>
           </a:p>
@@ -5519,13 +5033,13 @@
       </p:sp>
       <p:sp>
         <p:nvSpPr>
-          <p:cNvPr id="19" name="Text 13"/>
-          <p:cNvSpPr/>
-          <p:nvPr/>
-        </p:nvSpPr>
-        <p:spPr>
-          <a:xfrm>
-            <a:off x="6519672" y="3026664"/>
+          <p:cNvPr id="15" name="Text 10"/>
+          <p:cNvSpPr/>
+          <p:nvPr/>
+        </p:nvSpPr>
+        <p:spPr>
+          <a:xfrm>
+            <a:off x="6519672" y="2331720"/>
             <a:ext cx="2697480" cy="274320"/>
           </a:xfrm>
           <a:prstGeom prst="rect">
@@ -5538,7 +5052,7 @@
           <a:bodyPr wrap="square" lIns="0" tIns="0" rIns="0" bIns="0" rtlCol="0" anchor="ctr"/>
           <a:lstStyle/>
           <a:p>
-            <a:pPr indent="0" marL="0">
+            <a:pPr marL="0" indent="0">
               <a:buNone/>
             </a:pPr>
             <a:r>
@@ -5550,7 +5064,7 @@
                 <a:ea typeface="Inter" pitchFamily="34" charset="-122"/>
                 <a:cs typeface="Inter" pitchFamily="34" charset="-120"/>
               </a:rPr>
-              <a:t>Push each token immediately</a:t>
+              <a:t>One frame per chunk</a:t>
             </a:r>
             <a:endParaRPr lang="en-US" sz="1100" dirty="0"/>
           </a:p>
@@ -5558,13 +5072,13 @@
       </p:sp>
       <p:sp>
         <p:nvSpPr>
-          <p:cNvPr id="20" name="Shape 14"/>
-          <p:cNvSpPr/>
-          <p:nvPr/>
-        </p:nvSpPr>
-        <p:spPr>
-          <a:xfrm>
-            <a:off x="5989320" y="3502152"/>
+          <p:cNvPr id="16" name="Shape 11"/>
+          <p:cNvSpPr/>
+          <p:nvPr/>
+        </p:nvSpPr>
+        <p:spPr>
+          <a:xfrm>
+            <a:off x="5989320" y="2807208"/>
             <a:ext cx="384048" cy="384048"/>
           </a:xfrm>
           <a:prstGeom prst="ellipse">
@@ -5575,10 +5089,17 @@
           </a:solidFill>
           <a:ln/>
         </p:spPr>
+        <p:txBody>
+          <a:bodyPr/>
+          <a:lstStyle/>
+          <a:p>
+            <a:endParaRPr lang="en-US"/>
+          </a:p>
+        </p:txBody>
       </p:sp>
       <p:pic>
         <p:nvPicPr>
-          <p:cNvPr id="21" name="Image 4" descr="preencoded.png">    </p:cNvPr>
+          <p:cNvPr id="17" name="Image 3" descr="preencoded.png"/>
           <p:cNvPicPr>
             <a:picLocks noChangeAspect="1"/>
           </p:cNvPicPr>
@@ -5592,7 +5113,7 @@
         </p:blipFill>
         <p:spPr>
           <a:xfrm>
-            <a:off x="6089172" y="3602004"/>
+            <a:off x="6089172" y="2907060"/>
             <a:ext cx="184343" cy="184343"/>
           </a:xfrm>
           <a:prstGeom prst="rect">
@@ -5602,13 +5123,13 @@
       </p:pic>
       <p:sp>
         <p:nvSpPr>
-          <p:cNvPr id="22" name="Text 15"/>
-          <p:cNvSpPr/>
-          <p:nvPr/>
-        </p:nvSpPr>
-        <p:spPr>
-          <a:xfrm>
-            <a:off x="6519672" y="3456432"/>
+          <p:cNvPr id="18" name="Text 12"/>
+          <p:cNvSpPr/>
+          <p:nvPr/>
+        </p:nvSpPr>
+        <p:spPr>
+          <a:xfrm>
+            <a:off x="6519672" y="2761488"/>
             <a:ext cx="2697480" cy="274320"/>
           </a:xfrm>
           <a:prstGeom prst="rect">
@@ -5621,7 +5142,7 @@
           <a:bodyPr wrap="square" lIns="0" tIns="0" rIns="0" bIns="0" rtlCol="0" anchor="ctr"/>
           <a:lstStyle/>
           <a:p>
-            <a:pPr indent="0" marL="0">
+            <a:pPr marL="0" indent="0">
               <a:buNone/>
             </a:pPr>
             <a:r>
@@ -5633,6 +5154,135 @@
                 <a:ea typeface="Courier New" pitchFamily="34" charset="-122"/>
                 <a:cs typeface="Courier New" pitchFamily="34" charset="-120"/>
               </a:rPr>
+              <a:t>Flush per chunk</a:t>
+            </a:r>
+            <a:endParaRPr lang="en-US" sz="1250" dirty="0"/>
+          </a:p>
+        </p:txBody>
+      </p:sp>
+      <p:sp>
+        <p:nvSpPr>
+          <p:cNvPr id="19" name="Text 13"/>
+          <p:cNvSpPr/>
+          <p:nvPr/>
+        </p:nvSpPr>
+        <p:spPr>
+          <a:xfrm>
+            <a:off x="6519672" y="3026664"/>
+            <a:ext cx="2697480" cy="274320"/>
+          </a:xfrm>
+          <a:prstGeom prst="rect">
+            <a:avLst/>
+          </a:prstGeom>
+          <a:noFill/>
+          <a:ln/>
+        </p:spPr>
+        <p:txBody>
+          <a:bodyPr wrap="square" lIns="0" tIns="0" rIns="0" bIns="0" rtlCol="0" anchor="ctr"/>
+          <a:lstStyle/>
+          <a:p>
+            <a:pPr marL="0" indent="0">
+              <a:buNone/>
+            </a:pPr>
+            <a:r>
+              <a:rPr lang="en-US" sz="1100" dirty="0">
+                <a:solidFill>
+                  <a:srgbClr val="615C52"/>
+                </a:solidFill>
+                <a:latin typeface="Inter" pitchFamily="34" charset="0"/>
+                <a:ea typeface="Inter" pitchFamily="34" charset="-122"/>
+                <a:cs typeface="Inter" pitchFamily="34" charset="-120"/>
+              </a:rPr>
+              <a:t>Push each token immediately</a:t>
+            </a:r>
+            <a:endParaRPr lang="en-US" sz="1100" dirty="0"/>
+          </a:p>
+        </p:txBody>
+      </p:sp>
+      <p:sp>
+        <p:nvSpPr>
+          <p:cNvPr id="20" name="Shape 14"/>
+          <p:cNvSpPr/>
+          <p:nvPr/>
+        </p:nvSpPr>
+        <p:spPr>
+          <a:xfrm>
+            <a:off x="5989320" y="3502152"/>
+            <a:ext cx="384048" cy="384048"/>
+          </a:xfrm>
+          <a:prstGeom prst="ellipse">
+            <a:avLst/>
+          </a:prstGeom>
+          <a:solidFill>
+            <a:srgbClr val="D97757"/>
+          </a:solidFill>
+          <a:ln/>
+        </p:spPr>
+        <p:txBody>
+          <a:bodyPr/>
+          <a:lstStyle/>
+          <a:p>
+            <a:endParaRPr lang="en-US"/>
+          </a:p>
+        </p:txBody>
+      </p:sp>
+      <p:pic>
+        <p:nvPicPr>
+          <p:cNvPr id="21" name="Image 4" descr="preencoded.png"/>
+          <p:cNvPicPr>
+            <a:picLocks noChangeAspect="1"/>
+          </p:cNvPicPr>
+          <p:nvPr/>
+        </p:nvPicPr>
+        <p:blipFill>
+          <a:blip r:embed="rId6"/>
+          <a:stretch>
+            <a:fillRect/>
+          </a:stretch>
+        </p:blipFill>
+        <p:spPr>
+          <a:xfrm>
+            <a:off x="6089172" y="3602004"/>
+            <a:ext cx="184343" cy="184343"/>
+          </a:xfrm>
+          <a:prstGeom prst="rect">
+            <a:avLst/>
+          </a:prstGeom>
+        </p:spPr>
+      </p:pic>
+      <p:sp>
+        <p:nvSpPr>
+          <p:cNvPr id="22" name="Text 15"/>
+          <p:cNvSpPr/>
+          <p:nvPr/>
+        </p:nvSpPr>
+        <p:spPr>
+          <a:xfrm>
+            <a:off x="6519672" y="3456432"/>
+            <a:ext cx="2697480" cy="274320"/>
+          </a:xfrm>
+          <a:prstGeom prst="rect">
+            <a:avLst/>
+          </a:prstGeom>
+          <a:noFill/>
+          <a:ln/>
+        </p:spPr>
+        <p:txBody>
+          <a:bodyPr wrap="square" lIns="0" tIns="0" rIns="0" bIns="0" rtlCol="0" anchor="ctr"/>
+          <a:lstStyle/>
+          <a:p>
+            <a:pPr marL="0" indent="0">
+              <a:buNone/>
+            </a:pPr>
+            <a:r>
+              <a:rPr lang="en-US" sz="1250" b="1" dirty="0">
+                <a:solidFill>
+                  <a:srgbClr val="141413"/>
+                </a:solidFill>
+                <a:latin typeface="Courier New" pitchFamily="34" charset="0"/>
+                <a:ea typeface="Courier New" pitchFamily="34" charset="-122"/>
+                <a:cs typeface="Courier New" pitchFamily="34" charset="-120"/>
+              </a:rPr>
               <a:t>IAsyncEnumerable</a:t>
             </a:r>
             <a:endParaRPr lang="en-US" sz="1250" dirty="0"/>
@@ -5660,7 +5310,7 @@
           <a:bodyPr wrap="square" lIns="0" tIns="0" rIns="0" bIns="0" rtlCol="0" anchor="ctr"/>
           <a:lstStyle/>
           <a:p>
-            <a:pPr indent="0" marL="0">
+            <a:pPr marL="0" indent="0">
               <a:buNone/>
             </a:pPr>
             <a:r>
@@ -5699,7 +5349,7 @@
           <a:bodyPr wrap="square" rtlCol="0" anchor="ctr"/>
           <a:lstStyle/>
           <a:p>
-            <a:pPr indent="0" marL="0">
+            <a:pPr marL="0" indent="0">
               <a:buNone/>
             </a:pPr>
             <a:r>
@@ -5738,7 +5388,7 @@
           <a:bodyPr wrap="square" rtlCol="0" anchor="ctr"/>
           <a:lstStyle/>
           <a:p>
-            <a:pPr algn="r" indent="0" marL="0">
+            <a:pPr marL="0" indent="0" algn="r">
               <a:buNone/>
             </a:pPr>
             <a:r>
@@ -5753,45 +5403,6 @@
               <a:t>Day 2 · Section 2  ·  4/12</a:t>
             </a:r>
             <a:endParaRPr lang="en-US" sz="900" dirty="0"/>
-          </a:p>
-        </p:txBody>
-      </p:sp>
-      <p:sp>
-        <p:nvSpPr>
-          <p:cNvPr id="26" name="Text 19"/>
-          <p:cNvSpPr/>
-          <p:nvPr/>
-        </p:nvSpPr>
-        <p:spPr>
-          <a:xfrm>
-            <a:off x="548640" y="4462272"/>
-            <a:ext cx="8046720" cy="274320"/>
-          </a:xfrm>
-          <a:prstGeom prst="rect">
-            <a:avLst/>
-          </a:prstGeom>
-          <a:noFill/>
-          <a:ln/>
-        </p:spPr>
-        <p:txBody>
-          <a:bodyPr wrap="square" lIns="0" tIns="0" rIns="0" bIns="0" rtlCol="0" anchor="ctr"/>
-          <a:lstStyle/>
-          <a:p>
-            <a:pPr indent="0" marL="0">
-              <a:buNone/>
-            </a:pPr>
-            <a:r>
-              <a:rPr lang="en-US" sz="1000" i="1" dirty="0">
-                <a:solidFill>
-                  <a:srgbClr val="615C52"/>
-                </a:solidFill>
-                <a:latin typeface="Inter" pitchFamily="34" charset="0"/>
-                <a:ea typeface="Inter" pitchFamily="34" charset="-122"/>
-                <a:cs typeface="Inter" pitchFamily="34" charset="-120"/>
-              </a:rPr>
-              <a:t>▸ await foreach over the service, write a data: frame, flush — that's the whole loop.</a:t>
-            </a:r>
-            <a:endParaRPr lang="en-US" sz="1000" dirty="0"/>
           </a:p>
         </p:txBody>
       </p:sp>
@@ -5811,6 +5422,7 @@
         <a:solidFill>
           <a:srgbClr val="F0EEE6"/>
         </a:solidFill>
+        <a:effectLst/>
       </p:bgPr>
     </p:bg>
     <p:spTree>
@@ -5848,11 +5460,11 @@
           <a:bodyPr wrap="square" lIns="0" tIns="0" rIns="0" bIns="0" rtlCol="0" anchor="ctr"/>
           <a:lstStyle/>
           <a:p>
-            <a:pPr indent="0" marL="0">
-              <a:buNone/>
-            </a:pPr>
-            <a:r>
-              <a:rPr lang="en-US" sz="1100" b="1" spc="200" kern="0" dirty="0">
+            <a:pPr marL="0" indent="0">
+              <a:buNone/>
+            </a:pPr>
+            <a:r>
+              <a:rPr lang="en-US" sz="1100" b="1" kern="0" spc="200" dirty="0">
                 <a:solidFill>
                   <a:srgbClr val="C25E40"/>
                 </a:solidFill>
@@ -5887,7 +5499,7 @@
           <a:bodyPr wrap="square" lIns="0" tIns="0" rIns="0" bIns="0" rtlCol="0" anchor="ctr"/>
           <a:lstStyle/>
           <a:p>
-            <a:pPr indent="0" marL="0">
+            <a:pPr marL="0" indent="0">
               <a:buNone/>
             </a:pPr>
             <a:r>
@@ -5907,382 +5519,7 @@
       </p:sp>
       <p:pic>
         <p:nvPicPr>
-          <p:cNvPr id="4" name="Image 0" descr="preencoded.png">    </p:cNvPr>
-          <p:cNvPicPr>
-            <a:picLocks noChangeAspect="1"/>
-          </p:cNvPicPr>
-          <p:nvPr/>
-        </p:nvPicPr>
-        <p:blipFill>
-          <a:blip r:embed="rId1"/>
-          <a:stretch>
-            <a:fillRect/>
-          </a:stretch>
-        </p:blipFill>
-        <p:spPr>
-          <a:xfrm>
-            <a:off x="8321040" y="393192"/>
-            <a:ext cx="329184" cy="329184"/>
-          </a:xfrm>
-          <a:prstGeom prst="rect">
-            <a:avLst/>
-          </a:prstGeom>
-        </p:spPr>
-      </p:pic>
-      <p:sp>
-        <p:nvSpPr>
-          <p:cNvPr id="5" name="Shape 2"/>
-          <p:cNvSpPr/>
-          <p:nvPr/>
-        </p:nvSpPr>
-        <p:spPr>
-          <a:xfrm>
-            <a:off x="548640" y="1371600"/>
-            <a:ext cx="4160520" cy="1371600"/>
-          </a:xfrm>
-          <a:prstGeom prst="roundRect">
-            <a:avLst>
-              <a:gd name="adj" fmla="val 5333"/>
-            </a:avLst>
-          </a:prstGeom>
-          <a:solidFill>
-            <a:srgbClr val="1F1E1D"/>
-          </a:solidFill>
-          <a:ln/>
-          <a:effectLst>
-            <a:outerShdw sx="100000" sy="100000" kx="0" ky="0" algn="bl" rotWithShape="0" blurRad="88900" dist="38100" dir="5400000">
-              <a:srgbClr val="000000">
-                <a:alpha val="10000"/>
-              </a:srgbClr>
-            </a:outerShdw>
-          </a:effectLst>
-        </p:spPr>
-      </p:sp>
-      <p:sp>
-        <p:nvSpPr>
-          <p:cNvPr id="6" name="Text 3"/>
-          <p:cNvSpPr/>
-          <p:nvPr/>
-        </p:nvSpPr>
-        <p:spPr>
-          <a:xfrm>
-            <a:off x="822960" y="1517904"/>
-            <a:ext cx="3611880" cy="256032"/>
-          </a:xfrm>
-          <a:prstGeom prst="rect">
-            <a:avLst/>
-          </a:prstGeom>
-          <a:noFill/>
-          <a:ln/>
-        </p:spPr>
-        <p:txBody>
-          <a:bodyPr wrap="square" lIns="0" tIns="0" rIns="0" bIns="0" rtlCol="0" anchor="ctr"/>
-          <a:lstStyle/>
-          <a:p>
-            <a:pPr indent="0" marL="0">
-              <a:buNone/>
-            </a:pPr>
-            <a:r>
-              <a:rPr lang="en-US" sz="1050" b="1" spc="50" kern="0" dirty="0">
-                <a:solidFill>
-                  <a:srgbClr val="D97757"/>
-                </a:solidFill>
-                <a:latin typeface="Courier New" pitchFamily="34" charset="0"/>
-                <a:ea typeface="Courier New" pitchFamily="34" charset="-122"/>
-                <a:cs typeface="Courier New" pitchFamily="34" charset="-120"/>
-              </a:rPr>
-              <a:t>// curl — watch frames land</a:t>
-            </a:r>
-            <a:endParaRPr lang="en-US" sz="1050" dirty="0"/>
-          </a:p>
-        </p:txBody>
-      </p:sp>
-      <p:sp>
-        <p:nvSpPr>
-          <p:cNvPr id="7" name="Text 4"/>
-          <p:cNvSpPr/>
-          <p:nvPr/>
-        </p:nvSpPr>
-        <p:spPr>
-          <a:xfrm>
-            <a:off x="841248" y="1828800"/>
-            <a:ext cx="3611880" cy="731520"/>
-          </a:xfrm>
-          <a:prstGeom prst="rect">
-            <a:avLst/>
-          </a:prstGeom>
-          <a:noFill/>
-          <a:ln/>
-        </p:spPr>
-        <p:txBody>
-          <a:bodyPr wrap="square" lIns="0" tIns="0" rIns="0" bIns="0" rtlCol="0" anchor="t"/>
-          <a:lstStyle/>
-          <a:p>
-            <a:pPr indent="0" marL="0">
-              <a:lnSpc>
-                <a:spcPct val="128000"/>
-              </a:lnSpc>
-              <a:buNone/>
-            </a:pPr>
-            <a:r>
-              <a:rPr lang="en-US" sz="1250" b="1" dirty="0">
-                <a:solidFill>
-                  <a:srgbClr val="D97757"/>
-                </a:solidFill>
-                <a:latin typeface="Courier New" pitchFamily="34" charset="0"/>
-                <a:ea typeface="Courier New" pitchFamily="34" charset="-122"/>
-                <a:cs typeface="Courier New" pitchFamily="34" charset="-120"/>
-              </a:rPr>
-              <a:t>$ </a:t>
-            </a:r>
-            <a:pPr indent="0" marL="0">
-              <a:lnSpc>
-                <a:spcPct val="128000"/>
-              </a:lnSpc>
-              <a:buNone/>
-            </a:pPr>
-            <a:r>
-              <a:rPr lang="en-US" sz="1250" dirty="0">
-                <a:solidFill>
-                  <a:srgbClr val="E9E5DD"/>
-                </a:solidFill>
-                <a:latin typeface="Courier New" pitchFamily="34" charset="0"/>
-                <a:ea typeface="Courier New" pitchFamily="34" charset="-122"/>
-                <a:cs typeface="Courier New" pitchFamily="34" charset="-120"/>
-              </a:rPr>
-              <a:t>curl -N \</a:t>
-            </a:r>
-            <a:endParaRPr lang="en-US" sz="1250" dirty="0"/>
-          </a:p>
-          <a:p>
-            <a:pPr indent="0" marL="0">
-              <a:lnSpc>
-                <a:spcPct val="128000"/>
-              </a:lnSpc>
-              <a:buNone/>
-            </a:pPr>
-            <a:r>
-              <a:rPr lang="en-US" sz="1250" dirty="0">
-                <a:solidFill>
-                  <a:srgbClr val="E0A04A"/>
-                </a:solidFill>
-                <a:latin typeface="Courier New" pitchFamily="34" charset="0"/>
-                <a:ea typeface="Courier New" pitchFamily="34" charset="-122"/>
-                <a:cs typeface="Courier New" pitchFamily="34" charset="-120"/>
-              </a:rPr>
-              <a:t>   localhost:5000/api/chat/stream</a:t>
-            </a:r>
-            <a:endParaRPr lang="en-US" sz="1250" dirty="0"/>
-          </a:p>
-        </p:txBody>
-      </p:sp>
-      <p:sp>
-        <p:nvSpPr>
-          <p:cNvPr id="8" name="Shape 5"/>
-          <p:cNvSpPr/>
-          <p:nvPr/>
-        </p:nvSpPr>
-        <p:spPr>
-          <a:xfrm>
-            <a:off x="548640" y="2880360"/>
-            <a:ext cx="4160520" cy="1234440"/>
-          </a:xfrm>
-          <a:prstGeom prst="roundRect">
-            <a:avLst>
-              <a:gd name="adj" fmla="val 5926"/>
-            </a:avLst>
-          </a:prstGeom>
-          <a:solidFill>
-            <a:srgbClr val="1F1E1D"/>
-          </a:solidFill>
-          <a:ln/>
-          <a:effectLst>
-            <a:outerShdw sx="100000" sy="100000" kx="0" ky="0" algn="bl" rotWithShape="0" blurRad="88900" dist="38100" dir="5400000">
-              <a:srgbClr val="000000">
-                <a:alpha val="10000"/>
-              </a:srgbClr>
-            </a:outerShdw>
-          </a:effectLst>
-        </p:spPr>
-      </p:sp>
-      <p:sp>
-        <p:nvSpPr>
-          <p:cNvPr id="9" name="Text 6"/>
-          <p:cNvSpPr/>
-          <p:nvPr/>
-        </p:nvSpPr>
-        <p:spPr>
-          <a:xfrm>
-            <a:off x="822960" y="3026664"/>
-            <a:ext cx="3611880" cy="256032"/>
-          </a:xfrm>
-          <a:prstGeom prst="rect">
-            <a:avLst/>
-          </a:prstGeom>
-          <a:noFill/>
-          <a:ln/>
-        </p:spPr>
-        <p:txBody>
-          <a:bodyPr wrap="square" lIns="0" tIns="0" rIns="0" bIns="0" rtlCol="0" anchor="ctr"/>
-          <a:lstStyle/>
-          <a:p>
-            <a:pPr indent="0" marL="0">
-              <a:buNone/>
-            </a:pPr>
-            <a:r>
-              <a:rPr lang="en-US" sz="1050" b="1" spc="50" kern="0" dirty="0">
-                <a:solidFill>
-                  <a:srgbClr val="D97757"/>
-                </a:solidFill>
-                <a:latin typeface="Courier New" pitchFamily="34" charset="0"/>
-                <a:ea typeface="Courier New" pitchFamily="34" charset="-122"/>
-                <a:cs typeface="Courier New" pitchFamily="34" charset="-120"/>
-              </a:rPr>
-              <a:t>// browser — EventSource</a:t>
-            </a:r>
-            <a:endParaRPr lang="en-US" sz="1050" dirty="0"/>
-          </a:p>
-        </p:txBody>
-      </p:sp>
-      <p:sp>
-        <p:nvSpPr>
-          <p:cNvPr id="10" name="Text 7"/>
-          <p:cNvSpPr/>
-          <p:nvPr/>
-        </p:nvSpPr>
-        <p:spPr>
-          <a:xfrm>
-            <a:off x="841248" y="3337560"/>
-            <a:ext cx="3611880" cy="594360"/>
-          </a:xfrm>
-          <a:prstGeom prst="rect">
-            <a:avLst/>
-          </a:prstGeom>
-          <a:noFill/>
-          <a:ln/>
-        </p:spPr>
-        <p:txBody>
-          <a:bodyPr wrap="square" lIns="0" tIns="0" rIns="0" bIns="0" rtlCol="0" anchor="t"/>
-          <a:lstStyle/>
-          <a:p>
-            <a:pPr indent="0" marL="0">
-              <a:lnSpc>
-                <a:spcPct val="128000"/>
-              </a:lnSpc>
-              <a:buNone/>
-            </a:pPr>
-            <a:r>
-              <a:rPr lang="en-US" sz="1250" dirty="0">
-                <a:solidFill>
-                  <a:srgbClr val="C58FE0"/>
-                </a:solidFill>
-                <a:latin typeface="Courier New" pitchFamily="34" charset="0"/>
-                <a:ea typeface="Courier New" pitchFamily="34" charset="-122"/>
-                <a:cs typeface="Courier New" pitchFamily="34" charset="-120"/>
-              </a:rPr>
-              <a:t>new </a:t>
-            </a:r>
-            <a:pPr indent="0" marL="0">
-              <a:lnSpc>
-                <a:spcPct val="128000"/>
-              </a:lnSpc>
-              <a:buNone/>
-            </a:pPr>
-            <a:r>
-              <a:rPr lang="en-US" sz="1250" dirty="0">
-                <a:solidFill>
-                  <a:srgbClr val="9FC3E0"/>
-                </a:solidFill>
-                <a:latin typeface="Courier New" pitchFamily="34" charset="0"/>
-                <a:ea typeface="Courier New" pitchFamily="34" charset="-122"/>
-                <a:cs typeface="Courier New" pitchFamily="34" charset="-120"/>
-              </a:rPr>
-              <a:t>EventSource</a:t>
-            </a:r>
-            <a:pPr indent="0" marL="0">
-              <a:lnSpc>
-                <a:spcPct val="128000"/>
-              </a:lnSpc>
-              <a:buNone/>
-            </a:pPr>
-            <a:r>
-              <a:rPr lang="en-US" sz="1250" dirty="0">
-                <a:solidFill>
-                  <a:srgbClr val="E9E5DD"/>
-                </a:solidFill>
-                <a:latin typeface="Courier New" pitchFamily="34" charset="0"/>
-                <a:ea typeface="Courier New" pitchFamily="34" charset="-122"/>
-                <a:cs typeface="Courier New" pitchFamily="34" charset="-120"/>
-              </a:rPr>
-              <a:t>(url)</a:t>
-            </a:r>
-            <a:endParaRPr lang="en-US" sz="1250" dirty="0"/>
-          </a:p>
-          <a:p>
-            <a:pPr indent="0" marL="0">
-              <a:lnSpc>
-                <a:spcPct val="128000"/>
-              </a:lnSpc>
-              <a:buNone/>
-            </a:pPr>
-            <a:r>
-              <a:rPr lang="en-US" sz="1250" dirty="0">
-                <a:solidFill>
-                  <a:srgbClr val="E9E5DD"/>
-                </a:solidFill>
-                <a:latin typeface="Courier New" pitchFamily="34" charset="0"/>
-                <a:ea typeface="Courier New" pitchFamily="34" charset="-122"/>
-                <a:cs typeface="Courier New" pitchFamily="34" charset="-120"/>
-              </a:rPr>
-              <a:t> .onmessage = e =&gt;</a:t>
-            </a:r>
-            <a:endParaRPr lang="en-US" sz="1250" dirty="0"/>
-          </a:p>
-          <a:p>
-            <a:pPr indent="0" marL="0">
-              <a:lnSpc>
-                <a:spcPct val="128000"/>
-              </a:lnSpc>
-              <a:buNone/>
-            </a:pPr>
-            <a:r>
-              <a:rPr lang="en-US" sz="1250" dirty="0">
-                <a:solidFill>
-                  <a:srgbClr val="E9E5DD"/>
-                </a:solidFill>
-                <a:latin typeface="Courier New" pitchFamily="34" charset="0"/>
-                <a:ea typeface="Courier New" pitchFamily="34" charset="-122"/>
-                <a:cs typeface="Courier New" pitchFamily="34" charset="-120"/>
-              </a:rPr>
-              <a:t>    append(e.data);</a:t>
-            </a:r>
-            <a:endParaRPr lang="en-US" sz="1250" dirty="0"/>
-          </a:p>
-        </p:txBody>
-      </p:sp>
-      <p:sp>
-        <p:nvSpPr>
-          <p:cNvPr id="11" name="Shape 8"/>
-          <p:cNvSpPr/>
-          <p:nvPr/>
-        </p:nvSpPr>
-        <p:spPr>
-          <a:xfrm>
-            <a:off x="5029200" y="1463040"/>
-            <a:ext cx="420624" cy="420624"/>
-          </a:xfrm>
-          <a:prstGeom prst="ellipse">
-            <a:avLst/>
-          </a:prstGeom>
-          <a:solidFill>
-            <a:srgbClr val="D97757"/>
-          </a:solidFill>
-          <a:ln/>
-        </p:spPr>
-      </p:sp>
-      <p:pic>
-        <p:nvPicPr>
-          <p:cNvPr id="12" name="Image 1" descr="preencoded.png">    </p:cNvPr>
+          <p:cNvPr id="4" name="Image 0" descr="preencoded.png"/>
           <p:cNvPicPr>
             <a:picLocks noChangeAspect="1"/>
           </p:cNvPicPr>
@@ -6296,8 +5533,8 @@
         </p:blipFill>
         <p:spPr>
           <a:xfrm>
-            <a:off x="5138562" y="1572402"/>
-            <a:ext cx="201900" cy="201900"/>
+            <a:off x="8321040" y="393192"/>
+            <a:ext cx="329184" cy="329184"/>
           </a:xfrm>
           <a:prstGeom prst="rect">
             <a:avLst/>
@@ -6306,91 +5543,340 @@
       </p:pic>
       <p:sp>
         <p:nvSpPr>
-          <p:cNvPr id="13" name="Text 9"/>
-          <p:cNvSpPr/>
-          <p:nvPr/>
-        </p:nvSpPr>
-        <p:spPr>
-          <a:xfrm>
-            <a:off x="5596128" y="1426464"/>
-            <a:ext cx="3017520" cy="292608"/>
-          </a:xfrm>
-          <a:prstGeom prst="rect">
-            <a:avLst/>
-          </a:prstGeom>
-          <a:noFill/>
-          <a:ln/>
-        </p:spPr>
-        <p:txBody>
-          <a:bodyPr wrap="square" lIns="0" tIns="0" rIns="0" bIns="0" rtlCol="0" anchor="ctr"/>
-          <a:lstStyle/>
-          <a:p>
-            <a:pPr indent="0" marL="0">
-              <a:buNone/>
-            </a:pPr>
-            <a:r>
-              <a:rPr lang="en-US" sz="1350" b="1" dirty="0">
-                <a:solidFill>
-                  <a:srgbClr val="141413"/>
+          <p:cNvPr id="5" name="Shape 2"/>
+          <p:cNvSpPr/>
+          <p:nvPr/>
+        </p:nvSpPr>
+        <p:spPr>
+          <a:xfrm>
+            <a:off x="548640" y="1371600"/>
+            <a:ext cx="4160520" cy="1371600"/>
+          </a:xfrm>
+          <a:prstGeom prst="roundRect">
+            <a:avLst>
+              <a:gd name="adj" fmla="val 5333"/>
+            </a:avLst>
+          </a:prstGeom>
+          <a:solidFill>
+            <a:srgbClr val="1F1E1D"/>
+          </a:solidFill>
+          <a:ln/>
+          <a:effectLst>
+            <a:outerShdw blurRad="88900" dist="38100" dir="5400000" algn="bl" rotWithShape="0">
+              <a:srgbClr val="000000">
+                <a:alpha val="10000"/>
+              </a:srgbClr>
+            </a:outerShdw>
+          </a:effectLst>
+        </p:spPr>
+        <p:txBody>
+          <a:bodyPr/>
+          <a:lstStyle/>
+          <a:p>
+            <a:endParaRPr lang="en-US"/>
+          </a:p>
+        </p:txBody>
+      </p:sp>
+      <p:sp>
+        <p:nvSpPr>
+          <p:cNvPr id="6" name="Text 3"/>
+          <p:cNvSpPr/>
+          <p:nvPr/>
+        </p:nvSpPr>
+        <p:spPr>
+          <a:xfrm>
+            <a:off x="822960" y="1517904"/>
+            <a:ext cx="3611880" cy="256032"/>
+          </a:xfrm>
+          <a:prstGeom prst="rect">
+            <a:avLst/>
+          </a:prstGeom>
+          <a:noFill/>
+          <a:ln/>
+        </p:spPr>
+        <p:txBody>
+          <a:bodyPr wrap="square" lIns="0" tIns="0" rIns="0" bIns="0" rtlCol="0" anchor="ctr"/>
+          <a:lstStyle/>
+          <a:p>
+            <a:pPr marL="0" indent="0">
+              <a:buNone/>
+            </a:pPr>
+            <a:r>
+              <a:rPr lang="en-US" sz="1050" b="1" kern="0" spc="50" dirty="0">
+                <a:solidFill>
+                  <a:srgbClr val="D97757"/>
                 </a:solidFill>
                 <a:latin typeface="Courier New" pitchFamily="34" charset="0"/>
                 <a:ea typeface="Courier New" pitchFamily="34" charset="-122"/>
                 <a:cs typeface="Courier New" pitchFamily="34" charset="-120"/>
               </a:rPr>
-              <a:t>curl -N</a:t>
-            </a:r>
-            <a:endParaRPr lang="en-US" sz="1350" dirty="0"/>
-          </a:p>
-        </p:txBody>
-      </p:sp>
-      <p:sp>
-        <p:nvSpPr>
-          <p:cNvPr id="14" name="Text 10"/>
-          <p:cNvSpPr/>
-          <p:nvPr/>
-        </p:nvSpPr>
-        <p:spPr>
-          <a:xfrm>
-            <a:off x="5596128" y="1709928"/>
-            <a:ext cx="3108960" cy="457200"/>
-          </a:xfrm>
-          <a:prstGeom prst="rect">
-            <a:avLst/>
-          </a:prstGeom>
-          <a:noFill/>
-          <a:ln/>
-        </p:spPr>
-        <p:txBody>
-          <a:bodyPr wrap="square" lIns="0" tIns="0" rIns="0" bIns="0" rtlCol="0" anchor="ctr"/>
-          <a:lstStyle/>
-          <a:p>
-            <a:pPr indent="0" marL="0">
-              <a:buNone/>
-            </a:pPr>
-            <a:r>
-              <a:rPr lang="en-US" sz="1150" dirty="0">
-                <a:solidFill>
-                  <a:srgbClr val="615C52"/>
-                </a:solidFill>
-                <a:latin typeface="Inter" pitchFamily="34" charset="0"/>
-                <a:ea typeface="Inter" pitchFamily="34" charset="-122"/>
-                <a:cs typeface="Inter" pitchFamily="34" charset="-120"/>
-              </a:rPr>
-              <a:t>Disables buffering — see frames live</a:t>
-            </a:r>
-            <a:endParaRPr lang="en-US" sz="1150" dirty="0"/>
-          </a:p>
-        </p:txBody>
-      </p:sp>
-      <p:sp>
-        <p:nvSpPr>
-          <p:cNvPr id="15" name="Shape 11"/>
-          <p:cNvSpPr/>
-          <p:nvPr/>
-        </p:nvSpPr>
-        <p:spPr>
-          <a:xfrm>
-            <a:off x="5029200" y="2331720"/>
+              <a:t>// curl — watch frames land</a:t>
+            </a:r>
+            <a:endParaRPr lang="en-US" sz="1050" dirty="0"/>
+          </a:p>
+        </p:txBody>
+      </p:sp>
+      <p:sp>
+        <p:nvSpPr>
+          <p:cNvPr id="7" name="Text 4"/>
+          <p:cNvSpPr/>
+          <p:nvPr/>
+        </p:nvSpPr>
+        <p:spPr>
+          <a:xfrm>
+            <a:off x="841248" y="1828800"/>
+            <a:ext cx="3611880" cy="731520"/>
+          </a:xfrm>
+          <a:prstGeom prst="rect">
+            <a:avLst/>
+          </a:prstGeom>
+          <a:noFill/>
+          <a:ln/>
+        </p:spPr>
+        <p:txBody>
+          <a:bodyPr wrap="square" lIns="0" tIns="0" rIns="0" bIns="0" rtlCol="0" anchor="t"/>
+          <a:lstStyle/>
+          <a:p>
+            <a:pPr marL="0" indent="0">
+              <a:lnSpc>
+                <a:spcPct val="128000"/>
+              </a:lnSpc>
+              <a:buNone/>
+            </a:pPr>
+            <a:r>
+              <a:rPr lang="en-US" sz="1250" b="1" dirty="0">
+                <a:solidFill>
+                  <a:srgbClr val="D97757"/>
+                </a:solidFill>
+                <a:latin typeface="Courier New" pitchFamily="34" charset="0"/>
+                <a:ea typeface="Courier New" pitchFamily="34" charset="-122"/>
+                <a:cs typeface="Courier New" pitchFamily="34" charset="-120"/>
+              </a:rPr>
+              <a:t>$ </a:t>
+            </a:r>
+            <a:r>
+              <a:rPr lang="en-US" sz="1250" dirty="0">
+                <a:solidFill>
+                  <a:srgbClr val="E9E5DD"/>
+                </a:solidFill>
+                <a:latin typeface="Courier New" pitchFamily="34" charset="0"/>
+                <a:ea typeface="Courier New" pitchFamily="34" charset="-122"/>
+                <a:cs typeface="Courier New" pitchFamily="34" charset="-120"/>
+              </a:rPr>
+              <a:t>curl -N \</a:t>
+            </a:r>
+            <a:endParaRPr lang="en-US" sz="1250" dirty="0"/>
+          </a:p>
+          <a:p>
+            <a:pPr marL="0" indent="0">
+              <a:lnSpc>
+                <a:spcPct val="128000"/>
+              </a:lnSpc>
+              <a:buNone/>
+            </a:pPr>
+            <a:r>
+              <a:rPr lang="en-US" sz="1250" dirty="0">
+                <a:solidFill>
+                  <a:srgbClr val="E0A04A"/>
+                </a:solidFill>
+                <a:latin typeface="Courier New" pitchFamily="34" charset="0"/>
+                <a:ea typeface="Courier New" pitchFamily="34" charset="-122"/>
+                <a:cs typeface="Courier New" pitchFamily="34" charset="-120"/>
+              </a:rPr>
+              <a:t>   localhost:5000/api/chat/stream</a:t>
+            </a:r>
+            <a:endParaRPr lang="en-US" sz="1250" dirty="0"/>
+          </a:p>
+        </p:txBody>
+      </p:sp>
+      <p:sp>
+        <p:nvSpPr>
+          <p:cNvPr id="8" name="Shape 5"/>
+          <p:cNvSpPr/>
+          <p:nvPr/>
+        </p:nvSpPr>
+        <p:spPr>
+          <a:xfrm>
+            <a:off x="548640" y="2880360"/>
+            <a:ext cx="4160520" cy="1234440"/>
+          </a:xfrm>
+          <a:prstGeom prst="roundRect">
+            <a:avLst>
+              <a:gd name="adj" fmla="val 5926"/>
+            </a:avLst>
+          </a:prstGeom>
+          <a:solidFill>
+            <a:srgbClr val="1F1E1D"/>
+          </a:solidFill>
+          <a:ln/>
+          <a:effectLst>
+            <a:outerShdw blurRad="88900" dist="38100" dir="5400000" algn="bl" rotWithShape="0">
+              <a:srgbClr val="000000">
+                <a:alpha val="10000"/>
+              </a:srgbClr>
+            </a:outerShdw>
+          </a:effectLst>
+        </p:spPr>
+        <p:txBody>
+          <a:bodyPr/>
+          <a:lstStyle/>
+          <a:p>
+            <a:endParaRPr lang="en-US"/>
+          </a:p>
+        </p:txBody>
+      </p:sp>
+      <p:sp>
+        <p:nvSpPr>
+          <p:cNvPr id="9" name="Text 6"/>
+          <p:cNvSpPr/>
+          <p:nvPr/>
+        </p:nvSpPr>
+        <p:spPr>
+          <a:xfrm>
+            <a:off x="822960" y="3026664"/>
+            <a:ext cx="3611880" cy="256032"/>
+          </a:xfrm>
+          <a:prstGeom prst="rect">
+            <a:avLst/>
+          </a:prstGeom>
+          <a:noFill/>
+          <a:ln/>
+        </p:spPr>
+        <p:txBody>
+          <a:bodyPr wrap="square" lIns="0" tIns="0" rIns="0" bIns="0" rtlCol="0" anchor="ctr"/>
+          <a:lstStyle/>
+          <a:p>
+            <a:pPr marL="0" indent="0">
+              <a:buNone/>
+            </a:pPr>
+            <a:r>
+              <a:rPr lang="en-US" sz="1050" b="1" kern="0" spc="50" dirty="0">
+                <a:solidFill>
+                  <a:srgbClr val="D97757"/>
+                </a:solidFill>
+                <a:latin typeface="Courier New" pitchFamily="34" charset="0"/>
+                <a:ea typeface="Courier New" pitchFamily="34" charset="-122"/>
+                <a:cs typeface="Courier New" pitchFamily="34" charset="-120"/>
+              </a:rPr>
+              <a:t>// browser — EventSource</a:t>
+            </a:r>
+            <a:endParaRPr lang="en-US" sz="1050" dirty="0"/>
+          </a:p>
+        </p:txBody>
+      </p:sp>
+      <p:sp>
+        <p:nvSpPr>
+          <p:cNvPr id="10" name="Text 7"/>
+          <p:cNvSpPr/>
+          <p:nvPr/>
+        </p:nvSpPr>
+        <p:spPr>
+          <a:xfrm>
+            <a:off x="841248" y="3337560"/>
+            <a:ext cx="3611880" cy="594360"/>
+          </a:xfrm>
+          <a:prstGeom prst="rect">
+            <a:avLst/>
+          </a:prstGeom>
+          <a:noFill/>
+          <a:ln/>
+        </p:spPr>
+        <p:txBody>
+          <a:bodyPr wrap="square" lIns="0" tIns="0" rIns="0" bIns="0" rtlCol="0" anchor="t"/>
+          <a:lstStyle/>
+          <a:p>
+            <a:pPr marL="0" indent="0">
+              <a:lnSpc>
+                <a:spcPct val="128000"/>
+              </a:lnSpc>
+              <a:buNone/>
+            </a:pPr>
+            <a:r>
+              <a:rPr lang="en-US" sz="1250" dirty="0">
+                <a:solidFill>
+                  <a:srgbClr val="C58FE0"/>
+                </a:solidFill>
+                <a:latin typeface="Courier New" pitchFamily="34" charset="0"/>
+                <a:ea typeface="Courier New" pitchFamily="34" charset="-122"/>
+                <a:cs typeface="Courier New" pitchFamily="34" charset="-120"/>
+              </a:rPr>
+              <a:t>new </a:t>
+            </a:r>
+            <a:r>
+              <a:rPr lang="en-US" sz="1250" dirty="0">
+                <a:solidFill>
+                  <a:srgbClr val="9FC3E0"/>
+                </a:solidFill>
+                <a:latin typeface="Courier New" pitchFamily="34" charset="0"/>
+                <a:ea typeface="Courier New" pitchFamily="34" charset="-122"/>
+                <a:cs typeface="Courier New" pitchFamily="34" charset="-120"/>
+              </a:rPr>
+              <a:t>EventSource</a:t>
+            </a:r>
+            <a:r>
+              <a:rPr lang="en-US" sz="1250" dirty="0">
+                <a:solidFill>
+                  <a:srgbClr val="E9E5DD"/>
+                </a:solidFill>
+                <a:latin typeface="Courier New" pitchFamily="34" charset="0"/>
+                <a:ea typeface="Courier New" pitchFamily="34" charset="-122"/>
+                <a:cs typeface="Courier New" pitchFamily="34" charset="-120"/>
+              </a:rPr>
+              <a:t>(url)</a:t>
+            </a:r>
+            <a:endParaRPr lang="en-US" sz="1250" dirty="0"/>
+          </a:p>
+          <a:p>
+            <a:pPr marL="0" indent="0">
+              <a:lnSpc>
+                <a:spcPct val="128000"/>
+              </a:lnSpc>
+              <a:buNone/>
+            </a:pPr>
+            <a:r>
+              <a:rPr lang="en-US" sz="1250" dirty="0">
+                <a:solidFill>
+                  <a:srgbClr val="E9E5DD"/>
+                </a:solidFill>
+                <a:latin typeface="Courier New" pitchFamily="34" charset="0"/>
+                <a:ea typeface="Courier New" pitchFamily="34" charset="-122"/>
+                <a:cs typeface="Courier New" pitchFamily="34" charset="-120"/>
+              </a:rPr>
+              <a:t> .onmessage = e =&gt;</a:t>
+            </a:r>
+            <a:endParaRPr lang="en-US" sz="1250" dirty="0"/>
+          </a:p>
+          <a:p>
+            <a:pPr marL="0" indent="0">
+              <a:lnSpc>
+                <a:spcPct val="128000"/>
+              </a:lnSpc>
+              <a:buNone/>
+            </a:pPr>
+            <a:r>
+              <a:rPr lang="en-US" sz="1250" dirty="0">
+                <a:solidFill>
+                  <a:srgbClr val="E9E5DD"/>
+                </a:solidFill>
+                <a:latin typeface="Courier New" pitchFamily="34" charset="0"/>
+                <a:ea typeface="Courier New" pitchFamily="34" charset="-122"/>
+                <a:cs typeface="Courier New" pitchFamily="34" charset="-120"/>
+              </a:rPr>
+              <a:t>    append(e.data);</a:t>
+            </a:r>
+            <a:endParaRPr lang="en-US" sz="1250" dirty="0"/>
+          </a:p>
+        </p:txBody>
+      </p:sp>
+      <p:sp>
+        <p:nvSpPr>
+          <p:cNvPr id="11" name="Shape 8"/>
+          <p:cNvSpPr/>
+          <p:nvPr/>
+        </p:nvSpPr>
+        <p:spPr>
+          <a:xfrm>
+            <a:off x="5029200" y="1463040"/>
             <a:ext cx="420624" cy="420624"/>
           </a:xfrm>
           <a:prstGeom prst="ellipse">
@@ -6401,10 +5887,17 @@
           </a:solidFill>
           <a:ln/>
         </p:spPr>
+        <p:txBody>
+          <a:bodyPr/>
+          <a:lstStyle/>
+          <a:p>
+            <a:endParaRPr lang="en-US"/>
+          </a:p>
+        </p:txBody>
       </p:sp>
       <p:pic>
         <p:nvPicPr>
-          <p:cNvPr id="16" name="Image 2" descr="preencoded.png">    </p:cNvPr>
+          <p:cNvPr id="12" name="Image 1" descr="preencoded.png"/>
           <p:cNvPicPr>
             <a:picLocks noChangeAspect="1"/>
           </p:cNvPicPr>
@@ -6418,7 +5911,7 @@
         </p:blipFill>
         <p:spPr>
           <a:xfrm>
-            <a:off x="5138562" y="2441082"/>
+            <a:off x="5138562" y="1572402"/>
             <a:ext cx="201900" cy="201900"/>
           </a:xfrm>
           <a:prstGeom prst="rect">
@@ -6428,13 +5921,13 @@
       </p:pic>
       <p:sp>
         <p:nvSpPr>
-          <p:cNvPr id="17" name="Text 12"/>
-          <p:cNvSpPr/>
-          <p:nvPr/>
-        </p:nvSpPr>
-        <p:spPr>
-          <a:xfrm>
-            <a:off x="5596128" y="2295144"/>
+          <p:cNvPr id="13" name="Text 9"/>
+          <p:cNvSpPr/>
+          <p:nvPr/>
+        </p:nvSpPr>
+        <p:spPr>
+          <a:xfrm>
+            <a:off x="5596128" y="1426464"/>
             <a:ext cx="3017520" cy="292608"/>
           </a:xfrm>
           <a:prstGeom prst="rect">
@@ -6447,7 +5940,7 @@
           <a:bodyPr wrap="square" lIns="0" tIns="0" rIns="0" bIns="0" rtlCol="0" anchor="ctr"/>
           <a:lstStyle/>
           <a:p>
-            <a:pPr indent="0" marL="0">
+            <a:pPr marL="0" indent="0">
               <a:buNone/>
             </a:pPr>
             <a:r>
@@ -6459,7 +5952,7 @@
                 <a:ea typeface="Courier New" pitchFamily="34" charset="-122"/>
                 <a:cs typeface="Courier New" pitchFamily="34" charset="-120"/>
               </a:rPr>
-              <a:t>EventSource</a:t>
+              <a:t>curl -N</a:t>
             </a:r>
             <a:endParaRPr lang="en-US" sz="1350" dirty="0"/>
           </a:p>
@@ -6467,13 +5960,13 @@
       </p:sp>
       <p:sp>
         <p:nvSpPr>
-          <p:cNvPr id="18" name="Text 13"/>
-          <p:cNvSpPr/>
-          <p:nvPr/>
-        </p:nvSpPr>
-        <p:spPr>
-          <a:xfrm>
-            <a:off x="5596128" y="2578608"/>
+          <p:cNvPr id="14" name="Text 10"/>
+          <p:cNvSpPr/>
+          <p:nvPr/>
+        </p:nvSpPr>
+        <p:spPr>
+          <a:xfrm>
+            <a:off x="5596128" y="1709928"/>
             <a:ext cx="3108960" cy="457200"/>
           </a:xfrm>
           <a:prstGeom prst="rect">
@@ -6486,7 +5979,7 @@
           <a:bodyPr wrap="square" lIns="0" tIns="0" rIns="0" bIns="0" rtlCol="0" anchor="ctr"/>
           <a:lstStyle/>
           <a:p>
-            <a:pPr indent="0" marL="0">
+            <a:pPr marL="0" indent="0">
               <a:buNone/>
             </a:pPr>
             <a:r>
@@ -6498,7 +5991,7 @@
                 <a:ea typeface="Inter" pitchFamily="34" charset="-122"/>
                 <a:cs typeface="Inter" pitchFamily="34" charset="-120"/>
               </a:rPr>
-              <a:t>Browser's built-in SSE client</a:t>
+              <a:t>Disables buffering — see frames live</a:t>
             </a:r>
             <a:endParaRPr lang="en-US" sz="1150" dirty="0"/>
           </a:p>
@@ -6506,13 +5999,13 @@
       </p:sp>
       <p:sp>
         <p:nvSpPr>
-          <p:cNvPr id="19" name="Shape 14"/>
-          <p:cNvSpPr/>
-          <p:nvPr/>
-        </p:nvSpPr>
-        <p:spPr>
-          <a:xfrm>
-            <a:off x="5029200" y="3200400"/>
+          <p:cNvPr id="15" name="Shape 11"/>
+          <p:cNvSpPr/>
+          <p:nvPr/>
+        </p:nvSpPr>
+        <p:spPr>
+          <a:xfrm>
+            <a:off x="5029200" y="2331720"/>
             <a:ext cx="420624" cy="420624"/>
           </a:xfrm>
           <a:prstGeom prst="ellipse">
@@ -6523,10 +6016,17 @@
           </a:solidFill>
           <a:ln/>
         </p:spPr>
+        <p:txBody>
+          <a:bodyPr/>
+          <a:lstStyle/>
+          <a:p>
+            <a:endParaRPr lang="en-US"/>
+          </a:p>
+        </p:txBody>
       </p:sp>
       <p:pic>
         <p:nvPicPr>
-          <p:cNvPr id="20" name="Image 3" descr="preencoded.png">    </p:cNvPr>
+          <p:cNvPr id="16" name="Image 2" descr="preencoded.png"/>
           <p:cNvPicPr>
             <a:picLocks noChangeAspect="1"/>
           </p:cNvPicPr>
@@ -6540,7 +6040,7 @@
         </p:blipFill>
         <p:spPr>
           <a:xfrm>
-            <a:off x="5138562" y="3309762"/>
+            <a:off x="5138562" y="2441082"/>
             <a:ext cx="201900" cy="201900"/>
           </a:xfrm>
           <a:prstGeom prst="rect">
@@ -6550,13 +6050,13 @@
       </p:pic>
       <p:sp>
         <p:nvSpPr>
-          <p:cNvPr id="21" name="Text 15"/>
-          <p:cNvSpPr/>
-          <p:nvPr/>
-        </p:nvSpPr>
-        <p:spPr>
-          <a:xfrm>
-            <a:off x="5596128" y="3163824"/>
+          <p:cNvPr id="17" name="Text 12"/>
+          <p:cNvSpPr/>
+          <p:nvPr/>
+        </p:nvSpPr>
+        <p:spPr>
+          <a:xfrm>
+            <a:off x="5596128" y="2295144"/>
             <a:ext cx="3017520" cy="292608"/>
           </a:xfrm>
           <a:prstGeom prst="rect">
@@ -6569,7 +6069,7 @@
           <a:bodyPr wrap="square" lIns="0" tIns="0" rIns="0" bIns="0" rtlCol="0" anchor="ctr"/>
           <a:lstStyle/>
           <a:p>
-            <a:pPr indent="0" marL="0">
+            <a:pPr marL="0" indent="0">
               <a:buNone/>
             </a:pPr>
             <a:r>
@@ -6581,6 +6081,135 @@
                 <a:ea typeface="Courier New" pitchFamily="34" charset="-122"/>
                 <a:cs typeface="Courier New" pitchFamily="34" charset="-120"/>
               </a:rPr>
+              <a:t>EventSource</a:t>
+            </a:r>
+            <a:endParaRPr lang="en-US" sz="1350" dirty="0"/>
+          </a:p>
+        </p:txBody>
+      </p:sp>
+      <p:sp>
+        <p:nvSpPr>
+          <p:cNvPr id="18" name="Text 13"/>
+          <p:cNvSpPr/>
+          <p:nvPr/>
+        </p:nvSpPr>
+        <p:spPr>
+          <a:xfrm>
+            <a:off x="5596128" y="2578608"/>
+            <a:ext cx="3108960" cy="457200"/>
+          </a:xfrm>
+          <a:prstGeom prst="rect">
+            <a:avLst/>
+          </a:prstGeom>
+          <a:noFill/>
+          <a:ln/>
+        </p:spPr>
+        <p:txBody>
+          <a:bodyPr wrap="square" lIns="0" tIns="0" rIns="0" bIns="0" rtlCol="0" anchor="ctr"/>
+          <a:lstStyle/>
+          <a:p>
+            <a:pPr marL="0" indent="0">
+              <a:buNone/>
+            </a:pPr>
+            <a:r>
+              <a:rPr lang="en-US" sz="1150" dirty="0">
+                <a:solidFill>
+                  <a:srgbClr val="615C52"/>
+                </a:solidFill>
+                <a:latin typeface="Inter" pitchFamily="34" charset="0"/>
+                <a:ea typeface="Inter" pitchFamily="34" charset="-122"/>
+                <a:cs typeface="Inter" pitchFamily="34" charset="-120"/>
+              </a:rPr>
+              <a:t>Browser's built-in SSE client</a:t>
+            </a:r>
+            <a:endParaRPr lang="en-US" sz="1150" dirty="0"/>
+          </a:p>
+        </p:txBody>
+      </p:sp>
+      <p:sp>
+        <p:nvSpPr>
+          <p:cNvPr id="19" name="Shape 14"/>
+          <p:cNvSpPr/>
+          <p:nvPr/>
+        </p:nvSpPr>
+        <p:spPr>
+          <a:xfrm>
+            <a:off x="5029200" y="3200400"/>
+            <a:ext cx="420624" cy="420624"/>
+          </a:xfrm>
+          <a:prstGeom prst="ellipse">
+            <a:avLst/>
+          </a:prstGeom>
+          <a:solidFill>
+            <a:srgbClr val="D97757"/>
+          </a:solidFill>
+          <a:ln/>
+        </p:spPr>
+        <p:txBody>
+          <a:bodyPr/>
+          <a:lstStyle/>
+          <a:p>
+            <a:endParaRPr lang="en-US"/>
+          </a:p>
+        </p:txBody>
+      </p:sp>
+      <p:pic>
+        <p:nvPicPr>
+          <p:cNvPr id="20" name="Image 3" descr="preencoded.png"/>
+          <p:cNvPicPr>
+            <a:picLocks noChangeAspect="1"/>
+          </p:cNvPicPr>
+          <p:nvPr/>
+        </p:nvPicPr>
+        <p:blipFill>
+          <a:blip r:embed="rId5"/>
+          <a:stretch>
+            <a:fillRect/>
+          </a:stretch>
+        </p:blipFill>
+        <p:spPr>
+          <a:xfrm>
+            <a:off x="5138562" y="3309762"/>
+            <a:ext cx="201900" cy="201900"/>
+          </a:xfrm>
+          <a:prstGeom prst="rect">
+            <a:avLst/>
+          </a:prstGeom>
+        </p:spPr>
+      </p:pic>
+      <p:sp>
+        <p:nvSpPr>
+          <p:cNvPr id="21" name="Text 15"/>
+          <p:cNvSpPr/>
+          <p:nvPr/>
+        </p:nvSpPr>
+        <p:spPr>
+          <a:xfrm>
+            <a:off x="5596128" y="3163824"/>
+            <a:ext cx="3017520" cy="292608"/>
+          </a:xfrm>
+          <a:prstGeom prst="rect">
+            <a:avLst/>
+          </a:prstGeom>
+          <a:noFill/>
+          <a:ln/>
+        </p:spPr>
+        <p:txBody>
+          <a:bodyPr wrap="square" lIns="0" tIns="0" rIns="0" bIns="0" rtlCol="0" anchor="ctr"/>
+          <a:lstStyle/>
+          <a:p>
+            <a:pPr marL="0" indent="0">
+              <a:buNone/>
+            </a:pPr>
+            <a:r>
+              <a:rPr lang="en-US" sz="1350" b="1" dirty="0">
+                <a:solidFill>
+                  <a:srgbClr val="141413"/>
+                </a:solidFill>
+                <a:latin typeface="Courier New" pitchFamily="34" charset="0"/>
+                <a:ea typeface="Courier New" pitchFamily="34" charset="-122"/>
+                <a:cs typeface="Courier New" pitchFamily="34" charset="-120"/>
+              </a:rPr>
               <a:t>Tokens arrive</a:t>
             </a:r>
             <a:endParaRPr lang="en-US" sz="1350" dirty="0"/>
@@ -6608,7 +6237,7 @@
           <a:bodyPr wrap="square" lIns="0" tIns="0" rIns="0" bIns="0" rtlCol="0" anchor="ctr"/>
           <a:lstStyle/>
           <a:p>
-            <a:pPr indent="0" marL="0">
+            <a:pPr marL="0" indent="0">
               <a:buNone/>
             </a:pPr>
             <a:r>
@@ -6647,7 +6276,7 @@
           <a:bodyPr wrap="square" rtlCol="0" anchor="ctr"/>
           <a:lstStyle/>
           <a:p>
-            <a:pPr indent="0" marL="0">
+            <a:pPr marL="0" indent="0">
               <a:buNone/>
             </a:pPr>
             <a:r>
@@ -6686,7 +6315,7 @@
           <a:bodyPr wrap="square" rtlCol="0" anchor="ctr"/>
           <a:lstStyle/>
           <a:p>
-            <a:pPr algn="r" indent="0" marL="0">
+            <a:pPr marL="0" indent="0" algn="r">
               <a:buNone/>
             </a:pPr>
             <a:r>
@@ -6701,45 +6330,6 @@
               <a:t>Day 2 · Section 2  ·  5/12</a:t>
             </a:r>
             <a:endParaRPr lang="en-US" sz="900" dirty="0"/>
-          </a:p>
-        </p:txBody>
-      </p:sp>
-      <p:sp>
-        <p:nvSpPr>
-          <p:cNvPr id="25" name="Text 19"/>
-          <p:cNvSpPr/>
-          <p:nvPr/>
-        </p:nvSpPr>
-        <p:spPr>
-          <a:xfrm>
-            <a:off x="548640" y="4462272"/>
-            <a:ext cx="8046720" cy="274320"/>
-          </a:xfrm>
-          <a:prstGeom prst="rect">
-            <a:avLst/>
-          </a:prstGeom>
-          <a:noFill/>
-          <a:ln/>
-        </p:spPr>
-        <p:txBody>
-          <a:bodyPr wrap="square" lIns="0" tIns="0" rIns="0" bIns="0" rtlCol="0" anchor="ctr"/>
-          <a:lstStyle/>
-          <a:p>
-            <a:pPr indent="0" marL="0">
-              <a:buNone/>
-            </a:pPr>
-            <a:r>
-              <a:rPr lang="en-US" sz="1000" i="1" dirty="0">
-                <a:solidFill>
-                  <a:srgbClr val="615C52"/>
-                </a:solidFill>
-                <a:latin typeface="Inter" pitchFamily="34" charset="0"/>
-                <a:ea typeface="Inter" pitchFamily="34" charset="-122"/>
-                <a:cs typeface="Inter" pitchFamily="34" charset="-120"/>
-              </a:rPr>
-              <a:t>▸ Show both: curl -N in a terminal and EventSource in a browser tab.</a:t>
-            </a:r>
-            <a:endParaRPr lang="en-US" sz="1000" dirty="0"/>
           </a:p>
         </p:txBody>
       </p:sp>
@@ -6759,6 +6349,7 @@
         <a:solidFill>
           <a:srgbClr val="F0EEE6"/>
         </a:solidFill>
+        <a:effectLst/>
       </p:bgPr>
     </p:bg>
     <p:spTree>
@@ -6796,11 +6387,11 @@
           <a:bodyPr wrap="square" lIns="0" tIns="0" rIns="0" bIns="0" rtlCol="0" anchor="ctr"/>
           <a:lstStyle/>
           <a:p>
-            <a:pPr indent="0" marL="0">
-              <a:buNone/>
-            </a:pPr>
-            <a:r>
-              <a:rPr lang="en-US" sz="1100" b="1" spc="200" kern="0" dirty="0">
+            <a:pPr marL="0" indent="0">
+              <a:buNone/>
+            </a:pPr>
+            <a:r>
+              <a:rPr lang="en-US" sz="1100" b="1" kern="0" spc="200" dirty="0">
                 <a:solidFill>
                   <a:srgbClr val="C25E40"/>
                 </a:solidFill>
@@ -6835,7 +6426,7 @@
           <a:bodyPr wrap="square" lIns="0" tIns="0" rIns="0" bIns="0" rtlCol="0" anchor="ctr"/>
           <a:lstStyle/>
           <a:p>
-            <a:pPr indent="0" marL="0">
+            <a:pPr marL="0" indent="0">
               <a:buNone/>
             </a:pPr>
             <a:r>
@@ -6855,14 +6446,14 @@
       </p:sp>
       <p:pic>
         <p:nvPicPr>
-          <p:cNvPr id="4" name="Image 0" descr="preencoded.png">    </p:cNvPr>
+          <p:cNvPr id="4" name="Image 0" descr="preencoded.png"/>
           <p:cNvPicPr>
             <a:picLocks noChangeAspect="1"/>
           </p:cNvPicPr>
           <p:nvPr/>
         </p:nvPicPr>
         <p:blipFill>
-          <a:blip r:embed="rId1"/>
+          <a:blip r:embed="rId2"/>
           <a:stretch>
             <a:fillRect/>
           </a:stretch>
@@ -6903,13 +6494,20 @@
             <a:prstDash val="solid"/>
           </a:ln>
           <a:effectLst>
-            <a:outerShdw sx="100000" sy="100000" kx="0" ky="0" algn="bl" rotWithShape="0" blurRad="88900" dist="38100" dir="5400000">
+            <a:outerShdw blurRad="88900" dist="38100" dir="5400000" algn="bl" rotWithShape="0">
               <a:srgbClr val="000000">
                 <a:alpha val="10000"/>
               </a:srgbClr>
             </a:outerShdw>
           </a:effectLst>
         </p:spPr>
+        <p:txBody>
+          <a:bodyPr/>
+          <a:lstStyle/>
+          <a:p>
+            <a:endParaRPr lang="en-US"/>
+          </a:p>
+        </p:txBody>
       </p:sp>
       <p:sp>
         <p:nvSpPr>
@@ -6930,17 +6528,24 @@
           </a:solidFill>
           <a:ln/>
         </p:spPr>
+        <p:txBody>
+          <a:bodyPr/>
+          <a:lstStyle/>
+          <a:p>
+            <a:endParaRPr lang="en-US"/>
+          </a:p>
+        </p:txBody>
       </p:sp>
       <p:pic>
         <p:nvPicPr>
-          <p:cNvPr id="7" name="Image 1" descr="preencoded.png">    </p:cNvPr>
+          <p:cNvPr id="7" name="Image 1" descr="preencoded.png"/>
           <p:cNvPicPr>
             <a:picLocks noChangeAspect="1"/>
           </p:cNvPicPr>
           <p:nvPr/>
         </p:nvPicPr>
         <p:blipFill>
-          <a:blip r:embed="rId2"/>
+          <a:blip r:embed="rId3"/>
           <a:stretch>
             <a:fillRect/>
           </a:stretch>
@@ -6976,7 +6581,7 @@
           <a:bodyPr wrap="square" lIns="0" tIns="0" rIns="0" bIns="0" rtlCol="0" anchor="ctr"/>
           <a:lstStyle/>
           <a:p>
-            <a:pPr indent="0" marL="0">
+            <a:pPr marL="0" indent="0">
               <a:buNone/>
             </a:pPr>
             <a:r>
@@ -7015,7 +6620,7 @@
           <a:bodyPr wrap="square" lIns="0" tIns="0" rIns="0" bIns="0" rtlCol="0" anchor="ctr"/>
           <a:lstStyle/>
           <a:p>
-            <a:pPr indent="0" marL="0">
+            <a:pPr marL="0" indent="0">
               <a:buNone/>
             </a:pPr>
             <a:r>
@@ -7059,13 +6664,20 @@
             <a:prstDash val="solid"/>
           </a:ln>
           <a:effectLst>
-            <a:outerShdw sx="100000" sy="100000" kx="0" ky="0" algn="bl" rotWithShape="0" blurRad="88900" dist="38100" dir="5400000">
+            <a:outerShdw blurRad="88900" dist="38100" dir="5400000" algn="bl" rotWithShape="0">
               <a:srgbClr val="000000">
                 <a:alpha val="10000"/>
               </a:srgbClr>
             </a:outerShdw>
           </a:effectLst>
         </p:spPr>
+        <p:txBody>
+          <a:bodyPr/>
+          <a:lstStyle/>
+          <a:p>
+            <a:endParaRPr lang="en-US"/>
+          </a:p>
+        </p:txBody>
       </p:sp>
       <p:sp>
         <p:nvSpPr>
@@ -7086,17 +6698,24 @@
           </a:solidFill>
           <a:ln/>
         </p:spPr>
+        <p:txBody>
+          <a:bodyPr/>
+          <a:lstStyle/>
+          <a:p>
+            <a:endParaRPr lang="en-US"/>
+          </a:p>
+        </p:txBody>
       </p:sp>
       <p:pic>
         <p:nvPicPr>
-          <p:cNvPr id="12" name="Image 2" descr="preencoded.png">    </p:cNvPr>
+          <p:cNvPr id="12" name="Image 2" descr="preencoded.png"/>
           <p:cNvPicPr>
             <a:picLocks noChangeAspect="1"/>
           </p:cNvPicPr>
           <p:nvPr/>
         </p:nvPicPr>
         <p:blipFill>
-          <a:blip r:embed="rId3"/>
+          <a:blip r:embed="rId4"/>
           <a:stretch>
             <a:fillRect/>
           </a:stretch>
@@ -7132,7 +6751,7 @@
           <a:bodyPr wrap="square" lIns="0" tIns="0" rIns="0" bIns="0" rtlCol="0" anchor="ctr"/>
           <a:lstStyle/>
           <a:p>
-            <a:pPr indent="0" marL="0">
+            <a:pPr marL="0" indent="0">
               <a:buNone/>
             </a:pPr>
             <a:r>
@@ -7171,7 +6790,7 @@
           <a:bodyPr wrap="square" lIns="0" tIns="0" rIns="0" bIns="0" rtlCol="0" anchor="ctr"/>
           <a:lstStyle/>
           <a:p>
-            <a:pPr indent="0" marL="0">
+            <a:pPr marL="0" indent="0">
               <a:buNone/>
             </a:pPr>
             <a:r>
@@ -7215,13 +6834,20 @@
             <a:prstDash val="solid"/>
           </a:ln>
           <a:effectLst>
-            <a:outerShdw sx="100000" sy="100000" kx="0" ky="0" algn="bl" rotWithShape="0" blurRad="88900" dist="38100" dir="5400000">
+            <a:outerShdw blurRad="88900" dist="38100" dir="5400000" algn="bl" rotWithShape="0">
               <a:srgbClr val="000000">
                 <a:alpha val="10000"/>
               </a:srgbClr>
             </a:outerShdw>
           </a:effectLst>
         </p:spPr>
+        <p:txBody>
+          <a:bodyPr/>
+          <a:lstStyle/>
+          <a:p>
+            <a:endParaRPr lang="en-US"/>
+          </a:p>
+        </p:txBody>
       </p:sp>
       <p:sp>
         <p:nvSpPr>
@@ -7242,10 +6868,182 @@
           </a:solidFill>
           <a:ln/>
         </p:spPr>
+        <p:txBody>
+          <a:bodyPr/>
+          <a:lstStyle/>
+          <a:p>
+            <a:endParaRPr lang="en-US"/>
+          </a:p>
+        </p:txBody>
       </p:sp>
       <p:pic>
         <p:nvPicPr>
-          <p:cNvPr id="17" name="Image 3" descr="preencoded.png">    </p:cNvPr>
+          <p:cNvPr id="17" name="Image 3" descr="preencoded.png"/>
+          <p:cNvPicPr>
+            <a:picLocks noChangeAspect="1"/>
+          </p:cNvPicPr>
+          <p:nvPr/>
+        </p:nvPicPr>
+        <p:blipFill>
+          <a:blip r:embed="rId5"/>
+          <a:stretch>
+            <a:fillRect/>
+          </a:stretch>
+        </p:blipFill>
+        <p:spPr>
+          <a:xfrm>
+            <a:off x="6496812" y="1856232"/>
+            <a:ext cx="219456" cy="219456"/>
+          </a:xfrm>
+          <a:prstGeom prst="rect">
+            <a:avLst/>
+          </a:prstGeom>
+        </p:spPr>
+      </p:pic>
+      <p:sp>
+        <p:nvSpPr>
+          <p:cNvPr id="18" name="Text 12"/>
+          <p:cNvSpPr/>
+          <p:nvPr/>
+        </p:nvSpPr>
+        <p:spPr>
+          <a:xfrm>
+            <a:off x="6990588" y="1719072"/>
+            <a:ext cx="1554480" cy="365760"/>
+          </a:xfrm>
+          <a:prstGeom prst="rect">
+            <a:avLst/>
+          </a:prstGeom>
+          <a:noFill/>
+          <a:ln/>
+        </p:spPr>
+        <p:txBody>
+          <a:bodyPr wrap="square" lIns="0" tIns="0" rIns="0" bIns="0" rtlCol="0" anchor="ctr"/>
+          <a:lstStyle/>
+          <a:p>
+            <a:pPr marL="0" indent="0">
+              <a:buNone/>
+            </a:pPr>
+            <a:r>
+              <a:rPr lang="en-US" sz="1500" b="1" dirty="0">
+                <a:solidFill>
+                  <a:srgbClr val="141413"/>
+                </a:solidFill>
+                <a:latin typeface="Courier New" pitchFamily="34" charset="0"/>
+                <a:ea typeface="Courier New" pitchFamily="34" charset="-122"/>
+                <a:cs typeface="Courier New" pitchFamily="34" charset="-120"/>
+              </a:rPr>
+              <a:t>input schema</a:t>
+            </a:r>
+            <a:endParaRPr lang="en-US" sz="1500" dirty="0"/>
+          </a:p>
+        </p:txBody>
+      </p:sp>
+      <p:sp>
+        <p:nvSpPr>
+          <p:cNvPr id="19" name="Text 13"/>
+          <p:cNvSpPr/>
+          <p:nvPr/>
+        </p:nvSpPr>
+        <p:spPr>
+          <a:xfrm>
+            <a:off x="6396228" y="2212848"/>
+            <a:ext cx="2011680" cy="548640"/>
+          </a:xfrm>
+          <a:prstGeom prst="rect">
+            <a:avLst/>
+          </a:prstGeom>
+          <a:noFill/>
+          <a:ln/>
+        </p:spPr>
+        <p:txBody>
+          <a:bodyPr wrap="square" lIns="0" tIns="0" rIns="0" bIns="0" rtlCol="0" anchor="ctr"/>
+          <a:lstStyle/>
+          <a:p>
+            <a:pPr marL="0" indent="0">
+              <a:buNone/>
+            </a:pPr>
+            <a:r>
+              <a:rPr lang="en-US" sz="1200" dirty="0">
+                <a:solidFill>
+                  <a:srgbClr val="615C52"/>
+                </a:solidFill>
+                <a:latin typeface="Inter" pitchFamily="34" charset="0"/>
+                <a:ea typeface="Inter" pitchFamily="34" charset="-122"/>
+                <a:cs typeface="Inter" pitchFamily="34" charset="-120"/>
+              </a:rPr>
+              <a:t>Typed JSON parameters</a:t>
+            </a:r>
+            <a:endParaRPr lang="en-US" sz="1200" dirty="0"/>
+          </a:p>
+        </p:txBody>
+      </p:sp>
+      <p:sp>
+        <p:nvSpPr>
+          <p:cNvPr id="20" name="Shape 14"/>
+          <p:cNvSpPr/>
+          <p:nvPr/>
+        </p:nvSpPr>
+        <p:spPr>
+          <a:xfrm>
+            <a:off x="548640" y="3154680"/>
+            <a:ext cx="8046720" cy="914400"/>
+          </a:xfrm>
+          <a:prstGeom prst="roundRect">
+            <a:avLst>
+              <a:gd name="adj" fmla="val 10000"/>
+            </a:avLst>
+          </a:prstGeom>
+          <a:solidFill>
+            <a:srgbClr val="F4E4DC"/>
+          </a:solidFill>
+          <a:ln/>
+          <a:effectLst>
+            <a:outerShdw blurRad="88900" dist="38100" dir="5400000" algn="bl" rotWithShape="0">
+              <a:srgbClr val="000000">
+                <a:alpha val="10000"/>
+              </a:srgbClr>
+            </a:outerShdw>
+          </a:effectLst>
+        </p:spPr>
+        <p:txBody>
+          <a:bodyPr/>
+          <a:lstStyle/>
+          <a:p>
+            <a:endParaRPr lang="en-US"/>
+          </a:p>
+        </p:txBody>
+      </p:sp>
+      <p:sp>
+        <p:nvSpPr>
+          <p:cNvPr id="21" name="Shape 15"/>
+          <p:cNvSpPr/>
+          <p:nvPr/>
+        </p:nvSpPr>
+        <p:spPr>
+          <a:xfrm>
+            <a:off x="822960" y="3364992"/>
+            <a:ext cx="502920" cy="502920"/>
+          </a:xfrm>
+          <a:prstGeom prst="ellipse">
+            <a:avLst/>
+          </a:prstGeom>
+          <a:solidFill>
+            <a:srgbClr val="D97757"/>
+          </a:solidFill>
+          <a:ln/>
+        </p:spPr>
+        <p:txBody>
+          <a:bodyPr/>
+          <a:lstStyle/>
+          <a:p>
+            <a:endParaRPr lang="en-US"/>
+          </a:p>
+        </p:txBody>
+      </p:sp>
+      <p:pic>
+        <p:nvPicPr>
+          <p:cNvPr id="22" name="Image 4" descr="preencoded.png"/>
           <p:cNvPicPr>
             <a:picLocks noChangeAspect="1"/>
           </p:cNvPicPr>
@@ -7259,157 +7057,6 @@
         </p:blipFill>
         <p:spPr>
           <a:xfrm>
-            <a:off x="6496812" y="1856232"/>
-            <a:ext cx="219456" cy="219456"/>
-          </a:xfrm>
-          <a:prstGeom prst="rect">
-            <a:avLst/>
-          </a:prstGeom>
-        </p:spPr>
-      </p:pic>
-      <p:sp>
-        <p:nvSpPr>
-          <p:cNvPr id="18" name="Text 12"/>
-          <p:cNvSpPr/>
-          <p:nvPr/>
-        </p:nvSpPr>
-        <p:spPr>
-          <a:xfrm>
-            <a:off x="6990588" y="1719072"/>
-            <a:ext cx="1554480" cy="365760"/>
-          </a:xfrm>
-          <a:prstGeom prst="rect">
-            <a:avLst/>
-          </a:prstGeom>
-          <a:noFill/>
-          <a:ln/>
-        </p:spPr>
-        <p:txBody>
-          <a:bodyPr wrap="square" lIns="0" tIns="0" rIns="0" bIns="0" rtlCol="0" anchor="ctr"/>
-          <a:lstStyle/>
-          <a:p>
-            <a:pPr indent="0" marL="0">
-              <a:buNone/>
-            </a:pPr>
-            <a:r>
-              <a:rPr lang="en-US" sz="1500" b="1" dirty="0">
-                <a:solidFill>
-                  <a:srgbClr val="141413"/>
-                </a:solidFill>
-                <a:latin typeface="Courier New" pitchFamily="34" charset="0"/>
-                <a:ea typeface="Courier New" pitchFamily="34" charset="-122"/>
-                <a:cs typeface="Courier New" pitchFamily="34" charset="-120"/>
-              </a:rPr>
-              <a:t>input schema</a:t>
-            </a:r>
-            <a:endParaRPr lang="en-US" sz="1500" dirty="0"/>
-          </a:p>
-        </p:txBody>
-      </p:sp>
-      <p:sp>
-        <p:nvSpPr>
-          <p:cNvPr id="19" name="Text 13"/>
-          <p:cNvSpPr/>
-          <p:nvPr/>
-        </p:nvSpPr>
-        <p:spPr>
-          <a:xfrm>
-            <a:off x="6396228" y="2212848"/>
-            <a:ext cx="2011680" cy="548640"/>
-          </a:xfrm>
-          <a:prstGeom prst="rect">
-            <a:avLst/>
-          </a:prstGeom>
-          <a:noFill/>
-          <a:ln/>
-        </p:spPr>
-        <p:txBody>
-          <a:bodyPr wrap="square" lIns="0" tIns="0" rIns="0" bIns="0" rtlCol="0" anchor="ctr"/>
-          <a:lstStyle/>
-          <a:p>
-            <a:pPr indent="0" marL="0">
-              <a:buNone/>
-            </a:pPr>
-            <a:r>
-              <a:rPr lang="en-US" sz="1200" dirty="0">
-                <a:solidFill>
-                  <a:srgbClr val="615C52"/>
-                </a:solidFill>
-                <a:latin typeface="Inter" pitchFamily="34" charset="0"/>
-                <a:ea typeface="Inter" pitchFamily="34" charset="-122"/>
-                <a:cs typeface="Inter" pitchFamily="34" charset="-120"/>
-              </a:rPr>
-              <a:t>Typed JSON parameters</a:t>
-            </a:r>
-            <a:endParaRPr lang="en-US" sz="1200" dirty="0"/>
-          </a:p>
-        </p:txBody>
-      </p:sp>
-      <p:sp>
-        <p:nvSpPr>
-          <p:cNvPr id="20" name="Shape 14"/>
-          <p:cNvSpPr/>
-          <p:nvPr/>
-        </p:nvSpPr>
-        <p:spPr>
-          <a:xfrm>
-            <a:off x="548640" y="3154680"/>
-            <a:ext cx="8046720" cy="914400"/>
-          </a:xfrm>
-          <a:prstGeom prst="roundRect">
-            <a:avLst>
-              <a:gd name="adj" fmla="val 10000"/>
-            </a:avLst>
-          </a:prstGeom>
-          <a:solidFill>
-            <a:srgbClr val="F4E4DC"/>
-          </a:solidFill>
-          <a:ln/>
-          <a:effectLst>
-            <a:outerShdw sx="100000" sy="100000" kx="0" ky="0" algn="bl" rotWithShape="0" blurRad="88900" dist="38100" dir="5400000">
-              <a:srgbClr val="000000">
-                <a:alpha val="10000"/>
-              </a:srgbClr>
-            </a:outerShdw>
-          </a:effectLst>
-        </p:spPr>
-      </p:sp>
-      <p:sp>
-        <p:nvSpPr>
-          <p:cNvPr id="21" name="Shape 15"/>
-          <p:cNvSpPr/>
-          <p:nvPr/>
-        </p:nvSpPr>
-        <p:spPr>
-          <a:xfrm>
-            <a:off x="822960" y="3364992"/>
-            <a:ext cx="502920" cy="502920"/>
-          </a:xfrm>
-          <a:prstGeom prst="ellipse">
-            <a:avLst/>
-          </a:prstGeom>
-          <a:solidFill>
-            <a:srgbClr val="D97757"/>
-          </a:solidFill>
-          <a:ln/>
-        </p:spPr>
-      </p:sp>
-      <p:pic>
-        <p:nvPicPr>
-          <p:cNvPr id="22" name="Image 4" descr="preencoded.png">    </p:cNvPr>
-          <p:cNvPicPr>
-            <a:picLocks noChangeAspect="1"/>
-          </p:cNvPicPr>
-          <p:nvPr/>
-        </p:nvPicPr>
-        <p:blipFill>
-          <a:blip r:embed="rId5"/>
-          <a:stretch>
-            <a:fillRect/>
-          </a:stretch>
-        </p:blipFill>
-        <p:spPr>
-          <a:xfrm>
             <a:off x="953719" y="3495751"/>
             <a:ext cx="241402" cy="241402"/>
           </a:xfrm>
@@ -7439,7 +7086,7 @@
           <a:bodyPr wrap="square" lIns="0" tIns="0" rIns="0" bIns="0" rtlCol="0" anchor="ctr"/>
           <a:lstStyle/>
           <a:p>
-            <a:pPr indent="0" marL="0">
+            <a:pPr marL="0" indent="0">
               <a:buNone/>
             </a:pPr>
             <a:r>
@@ -7453,9 +7100,6 @@
               </a:rPr>
               <a:t>The description makes the tool reliable. </a:t>
             </a:r>
-            <a:pPr indent="0" marL="0">
-              <a:buNone/>
-            </a:pPr>
             <a:r>
               <a:rPr lang="en-US" sz="1500" dirty="0">
                 <a:solidFill>
@@ -7492,7 +7136,7 @@
           <a:bodyPr wrap="square" rtlCol="0" anchor="ctr"/>
           <a:lstStyle/>
           <a:p>
-            <a:pPr indent="0" marL="0">
+            <a:pPr marL="0" indent="0">
               <a:buNone/>
             </a:pPr>
             <a:r>
@@ -7531,7 +7175,7 @@
           <a:bodyPr wrap="square" rtlCol="0" anchor="ctr"/>
           <a:lstStyle/>
           <a:p>
-            <a:pPr algn="r" indent="0" marL="0">
+            <a:pPr marL="0" indent="0" algn="r">
               <a:buNone/>
             </a:pPr>
             <a:r>
@@ -7546,45 +7190,6 @@
               <a:t>Day 2 · Section 2  ·  6/12</a:t>
             </a:r>
             <a:endParaRPr lang="en-US" sz="900" dirty="0"/>
-          </a:p>
-        </p:txBody>
-      </p:sp>
-      <p:sp>
-        <p:nvSpPr>
-          <p:cNvPr id="26" name="Text 19"/>
-          <p:cNvSpPr/>
-          <p:nvPr/>
-        </p:nvSpPr>
-        <p:spPr>
-          <a:xfrm>
-            <a:off x="548640" y="4462272"/>
-            <a:ext cx="8046720" cy="274320"/>
-          </a:xfrm>
-          <a:prstGeom prst="rect">
-            <a:avLst/>
-          </a:prstGeom>
-          <a:noFill/>
-          <a:ln/>
-        </p:spPr>
-        <p:txBody>
-          <a:bodyPr wrap="square" lIns="0" tIns="0" rIns="0" bIns="0" rtlCol="0" anchor="ctr"/>
-          <a:lstStyle/>
-          <a:p>
-            <a:pPr indent="0" marL="0">
-              <a:buNone/>
-            </a:pPr>
-            <a:r>
-              <a:rPr lang="en-US" sz="1000" i="1" dirty="0">
-                <a:solidFill>
-                  <a:srgbClr val="615C52"/>
-                </a:solidFill>
-                <a:latin typeface="Inter" pitchFamily="34" charset="0"/>
-                <a:ea typeface="Inter" pitchFamily="34" charset="-122"/>
-                <a:cs typeface="Inter" pitchFamily="34" charset="-120"/>
-              </a:rPr>
-              <a:t>▸ The description is the contract — vague text means the model picks the wrong tool.</a:t>
-            </a:r>
-            <a:endParaRPr lang="en-US" sz="1000" dirty="0"/>
           </a:p>
         </p:txBody>
       </p:sp>
@@ -7604,6 +7209,7 @@
         <a:solidFill>
           <a:srgbClr val="F0EEE6"/>
         </a:solidFill>
+        <a:effectLst/>
       </p:bgPr>
     </p:bg>
     <p:spTree>
@@ -7641,11 +7247,11 @@
           <a:bodyPr wrap="square" lIns="0" tIns="0" rIns="0" bIns="0" rtlCol="0" anchor="ctr"/>
           <a:lstStyle/>
           <a:p>
-            <a:pPr indent="0" marL="0">
-              <a:buNone/>
-            </a:pPr>
-            <a:r>
-              <a:rPr lang="en-US" sz="1100" b="1" spc="200" kern="0" dirty="0">
+            <a:pPr marL="0" indent="0">
+              <a:buNone/>
+            </a:pPr>
+            <a:r>
+              <a:rPr lang="en-US" sz="1100" b="1" kern="0" spc="200" dirty="0">
                 <a:solidFill>
                   <a:srgbClr val="C25E40"/>
                 </a:solidFill>
@@ -7680,7 +7286,7 @@
           <a:bodyPr wrap="square" lIns="0" tIns="0" rIns="0" bIns="0" rtlCol="0" anchor="ctr"/>
           <a:lstStyle/>
           <a:p>
-            <a:pPr indent="0" marL="0">
+            <a:pPr marL="0" indent="0">
               <a:buNone/>
             </a:pPr>
             <a:r>
@@ -7700,14 +7306,14 @@
       </p:sp>
       <p:pic>
         <p:nvPicPr>
-          <p:cNvPr id="4" name="Image 0" descr="preencoded.png">    </p:cNvPr>
+          <p:cNvPr id="4" name="Image 0" descr="preencoded.png"/>
           <p:cNvPicPr>
             <a:picLocks noChangeAspect="1"/>
           </p:cNvPicPr>
           <p:nvPr/>
         </p:nvPicPr>
         <p:blipFill>
-          <a:blip r:embed="rId1"/>
+          <a:blip r:embed="rId2"/>
           <a:stretch>
             <a:fillRect/>
           </a:stretch>
@@ -7748,13 +7354,20 @@
             <a:prstDash val="solid"/>
           </a:ln>
           <a:effectLst>
-            <a:outerShdw sx="100000" sy="100000" kx="0" ky="0" algn="bl" rotWithShape="0" blurRad="88900" dist="38100" dir="5400000">
+            <a:outerShdw blurRad="88900" dist="38100" dir="5400000" algn="bl" rotWithShape="0">
               <a:srgbClr val="000000">
                 <a:alpha val="10000"/>
               </a:srgbClr>
             </a:outerShdw>
           </a:effectLst>
         </p:spPr>
+        <p:txBody>
+          <a:bodyPr/>
+          <a:lstStyle/>
+          <a:p>
+            <a:endParaRPr lang="en-US"/>
+          </a:p>
+        </p:txBody>
       </p:sp>
       <p:sp>
         <p:nvSpPr>
@@ -7775,17 +7388,24 @@
           </a:solidFill>
           <a:ln/>
         </p:spPr>
+        <p:txBody>
+          <a:bodyPr/>
+          <a:lstStyle/>
+          <a:p>
+            <a:endParaRPr lang="en-US"/>
+          </a:p>
+        </p:txBody>
       </p:sp>
       <p:pic>
         <p:nvPicPr>
-          <p:cNvPr id="7" name="Image 1" descr="preencoded.png">    </p:cNvPr>
+          <p:cNvPr id="7" name="Image 1" descr="preencoded.png"/>
           <p:cNvPicPr>
             <a:picLocks noChangeAspect="1"/>
           </p:cNvPicPr>
           <p:nvPr/>
         </p:nvPicPr>
         <p:blipFill>
-          <a:blip r:embed="rId2"/>
+          <a:blip r:embed="rId3"/>
           <a:stretch>
             <a:fillRect/>
           </a:stretch>
@@ -7821,7 +7441,7 @@
           <a:bodyPr wrap="square" lIns="0" tIns="0" rIns="0" bIns="0" rtlCol="0" anchor="ctr"/>
           <a:lstStyle/>
           <a:p>
-            <a:pPr algn="ctr" indent="0" marL="0">
+            <a:pPr marL="0" indent="0" algn="ctr">
               <a:buNone/>
             </a:pPr>
             <a:r>
@@ -7860,7 +7480,7 @@
           <a:bodyPr wrap="square" lIns="0" tIns="0" rIns="0" bIns="0" rtlCol="0" anchor="ctr"/>
           <a:lstStyle/>
           <a:p>
-            <a:pPr algn="ctr" indent="0" marL="0">
+            <a:pPr marL="0" indent="0" algn="ctr">
               <a:buNone/>
             </a:pPr>
             <a:r>
@@ -7899,7 +7519,7 @@
           <a:bodyPr wrap="square" lIns="0" tIns="0" rIns="0" bIns="0" rtlCol="0" anchor="ctr"/>
           <a:lstStyle/>
           <a:p>
-            <a:pPr algn="ctr" indent="0" marL="0">
+            <a:pPr marL="0" indent="0" algn="ctr">
               <a:buNone/>
             </a:pPr>
             <a:r>
@@ -7943,13 +7563,20 @@
             <a:prstDash val="solid"/>
           </a:ln>
           <a:effectLst>
-            <a:outerShdw sx="100000" sy="100000" kx="0" ky="0" algn="bl" rotWithShape="0" blurRad="88900" dist="38100" dir="5400000">
+            <a:outerShdw blurRad="88900" dist="38100" dir="5400000" algn="bl" rotWithShape="0">
               <a:srgbClr val="000000">
                 <a:alpha val="10000"/>
               </a:srgbClr>
             </a:outerShdw>
           </a:effectLst>
         </p:spPr>
+        <p:txBody>
+          <a:bodyPr/>
+          <a:lstStyle/>
+          <a:p>
+            <a:endParaRPr lang="en-US"/>
+          </a:p>
+        </p:txBody>
       </p:sp>
       <p:sp>
         <p:nvSpPr>
@@ -7970,17 +7597,24 @@
           </a:solidFill>
           <a:ln/>
         </p:spPr>
+        <p:txBody>
+          <a:bodyPr/>
+          <a:lstStyle/>
+          <a:p>
+            <a:endParaRPr lang="en-US"/>
+          </a:p>
+        </p:txBody>
       </p:sp>
       <p:pic>
         <p:nvPicPr>
-          <p:cNvPr id="13" name="Image 2" descr="preencoded.png">    </p:cNvPr>
+          <p:cNvPr id="13" name="Image 2" descr="preencoded.png"/>
           <p:cNvPicPr>
             <a:picLocks noChangeAspect="1"/>
           </p:cNvPicPr>
           <p:nvPr/>
         </p:nvPicPr>
         <p:blipFill>
-          <a:blip r:embed="rId3"/>
+          <a:blip r:embed="rId4"/>
           <a:stretch>
             <a:fillRect/>
           </a:stretch>
@@ -8016,7 +7650,7 @@
           <a:bodyPr wrap="square" lIns="0" tIns="0" rIns="0" bIns="0" rtlCol="0" anchor="ctr"/>
           <a:lstStyle/>
           <a:p>
-            <a:pPr algn="ctr" indent="0" marL="0">
+            <a:pPr marL="0" indent="0" algn="ctr">
               <a:buNone/>
             </a:pPr>
             <a:r>
@@ -8055,7 +7689,7 @@
           <a:bodyPr wrap="square" lIns="0" tIns="0" rIns="0" bIns="0" rtlCol="0" anchor="ctr"/>
           <a:lstStyle/>
           <a:p>
-            <a:pPr algn="ctr" indent="0" marL="0">
+            <a:pPr marL="0" indent="0" algn="ctr">
               <a:buNone/>
             </a:pPr>
             <a:r>
@@ -8094,7 +7728,7 @@
           <a:bodyPr wrap="square" lIns="0" tIns="0" rIns="0" bIns="0" rtlCol="0" anchor="ctr"/>
           <a:lstStyle/>
           <a:p>
-            <a:pPr algn="ctr" indent="0" marL="0">
+            <a:pPr marL="0" indent="0" algn="ctr">
               <a:buNone/>
             </a:pPr>
             <a:r>
@@ -8138,13 +7772,20 @@
             <a:prstDash val="solid"/>
           </a:ln>
           <a:effectLst>
-            <a:outerShdw sx="100000" sy="100000" kx="0" ky="0" algn="bl" rotWithShape="0" blurRad="88900" dist="38100" dir="5400000">
+            <a:outerShdw blurRad="88900" dist="38100" dir="5400000" algn="bl" rotWithShape="0">
               <a:srgbClr val="000000">
                 <a:alpha val="10000"/>
               </a:srgbClr>
             </a:outerShdw>
           </a:effectLst>
         </p:spPr>
+        <p:txBody>
+          <a:bodyPr/>
+          <a:lstStyle/>
+          <a:p>
+            <a:endParaRPr lang="en-US"/>
+          </a:p>
+        </p:txBody>
       </p:sp>
       <p:sp>
         <p:nvSpPr>
@@ -8165,17 +7806,24 @@
           </a:solidFill>
           <a:ln/>
         </p:spPr>
+        <p:txBody>
+          <a:bodyPr/>
+          <a:lstStyle/>
+          <a:p>
+            <a:endParaRPr lang="en-US"/>
+          </a:p>
+        </p:txBody>
       </p:sp>
       <p:pic>
         <p:nvPicPr>
-          <p:cNvPr id="19" name="Image 3" descr="preencoded.png">    </p:cNvPr>
+          <p:cNvPr id="19" name="Image 3" descr="preencoded.png"/>
           <p:cNvPicPr>
             <a:picLocks noChangeAspect="1"/>
           </p:cNvPicPr>
           <p:nvPr/>
         </p:nvPicPr>
         <p:blipFill>
-          <a:blip r:embed="rId4"/>
+          <a:blip r:embed="rId5"/>
           <a:stretch>
             <a:fillRect/>
           </a:stretch>
@@ -8211,7 +7859,7 @@
           <a:bodyPr wrap="square" lIns="0" tIns="0" rIns="0" bIns="0" rtlCol="0" anchor="ctr"/>
           <a:lstStyle/>
           <a:p>
-            <a:pPr algn="ctr" indent="0" marL="0">
+            <a:pPr marL="0" indent="0" algn="ctr">
               <a:buNone/>
             </a:pPr>
             <a:r>
@@ -8250,7 +7898,7 @@
           <a:bodyPr wrap="square" lIns="0" tIns="0" rIns="0" bIns="0" rtlCol="0" anchor="ctr"/>
           <a:lstStyle/>
           <a:p>
-            <a:pPr algn="ctr" indent="0" marL="0">
+            <a:pPr marL="0" indent="0" algn="ctr">
               <a:buNone/>
             </a:pPr>
             <a:r>
@@ -8289,7 +7937,7 @@
           <a:bodyPr wrap="square" lIns="0" tIns="0" rIns="0" bIns="0" rtlCol="0" anchor="ctr"/>
           <a:lstStyle/>
           <a:p>
-            <a:pPr algn="ctr" indent="0" marL="0">
+            <a:pPr marL="0" indent="0" algn="ctr">
               <a:buNone/>
             </a:pPr>
             <a:r>
@@ -8333,13 +7981,20 @@
             <a:prstDash val="solid"/>
           </a:ln>
           <a:effectLst>
-            <a:outerShdw sx="100000" sy="100000" kx="0" ky="0" algn="bl" rotWithShape="0" blurRad="88900" dist="38100" dir="5400000">
+            <a:outerShdw blurRad="88900" dist="38100" dir="5400000" algn="bl" rotWithShape="0">
               <a:srgbClr val="000000">
                 <a:alpha val="10000"/>
               </a:srgbClr>
             </a:outerShdw>
           </a:effectLst>
         </p:spPr>
+        <p:txBody>
+          <a:bodyPr/>
+          <a:lstStyle/>
+          <a:p>
+            <a:endParaRPr lang="en-US"/>
+          </a:p>
+        </p:txBody>
       </p:sp>
       <p:sp>
         <p:nvSpPr>
@@ -8360,173 +8015,17 @@
           </a:solidFill>
           <a:ln/>
         </p:spPr>
+        <p:txBody>
+          <a:bodyPr/>
+          <a:lstStyle/>
+          <a:p>
+            <a:endParaRPr lang="en-US"/>
+          </a:p>
+        </p:txBody>
       </p:sp>
       <p:pic>
         <p:nvPicPr>
-          <p:cNvPr id="25" name="Image 4" descr="preencoded.png">    </p:cNvPr>
-          <p:cNvPicPr>
-            <a:picLocks noChangeAspect="1"/>
-          </p:cNvPicPr>
-          <p:nvPr/>
-        </p:nvPicPr>
-        <p:blipFill>
-          <a:blip r:embed="rId5"/>
-          <a:stretch>
-            <a:fillRect/>
-          </a:stretch>
-        </p:blipFill>
-        <p:spPr>
-          <a:xfrm>
-            <a:off x="7441387" y="2023567"/>
-            <a:ext cx="241402" cy="241402"/>
-          </a:xfrm>
-          <a:prstGeom prst="rect">
-            <a:avLst/>
-          </a:prstGeom>
-        </p:spPr>
-      </p:pic>
-      <p:sp>
-        <p:nvSpPr>
-          <p:cNvPr id="26" name="Text 19"/>
-          <p:cNvSpPr/>
-          <p:nvPr/>
-        </p:nvSpPr>
-        <p:spPr>
-          <a:xfrm>
-            <a:off x="6693408" y="2441448"/>
-            <a:ext cx="1737360" cy="292608"/>
-          </a:xfrm>
-          <a:prstGeom prst="rect">
-            <a:avLst/>
-          </a:prstGeom>
-          <a:noFill/>
-          <a:ln/>
-        </p:spPr>
-        <p:txBody>
-          <a:bodyPr wrap="square" lIns="0" tIns="0" rIns="0" bIns="0" rtlCol="0" anchor="ctr"/>
-          <a:lstStyle/>
-          <a:p>
-            <a:pPr algn="ctr" indent="0" marL="0">
-              <a:buNone/>
-            </a:pPr>
-            <a:r>
-              <a:rPr lang="en-US" sz="1250" b="1" dirty="0">
-                <a:solidFill>
-                  <a:srgbClr val="141413"/>
-                </a:solidFill>
-                <a:latin typeface="Inter" pitchFamily="34" charset="0"/>
-                <a:ea typeface="Inter" pitchFamily="34" charset="-122"/>
-                <a:cs typeface="Inter" pitchFamily="34" charset="-120"/>
-              </a:rPr>
-              <a:t>Claude continues</a:t>
-            </a:r>
-            <a:endParaRPr lang="en-US" sz="1250" dirty="0"/>
-          </a:p>
-        </p:txBody>
-      </p:sp>
-      <p:sp>
-        <p:nvSpPr>
-          <p:cNvPr id="27" name="Text 20"/>
-          <p:cNvSpPr/>
-          <p:nvPr/>
-        </p:nvSpPr>
-        <p:spPr>
-          <a:xfrm>
-            <a:off x="6693408" y="2715768"/>
-            <a:ext cx="1737360" cy="274320"/>
-          </a:xfrm>
-          <a:prstGeom prst="rect">
-            <a:avLst/>
-          </a:prstGeom>
-          <a:noFill/>
-          <a:ln/>
-        </p:spPr>
-        <p:txBody>
-          <a:bodyPr wrap="square" lIns="0" tIns="0" rIns="0" bIns="0" rtlCol="0" anchor="ctr"/>
-          <a:lstStyle/>
-          <a:p>
-            <a:pPr algn="ctr" indent="0" marL="0">
-              <a:buNone/>
-            </a:pPr>
-            <a:r>
-              <a:rPr lang="en-US" sz="1050" dirty="0">
-                <a:solidFill>
-                  <a:srgbClr val="615C52"/>
-                </a:solidFill>
-                <a:latin typeface="Inter" pitchFamily="34" charset="0"/>
-                <a:ea typeface="Inter" pitchFamily="34" charset="-122"/>
-                <a:cs typeface="Inter" pitchFamily="34" charset="-120"/>
-              </a:rPr>
-              <a:t>…or asks again</a:t>
-            </a:r>
-            <a:endParaRPr lang="en-US" sz="1050" dirty="0"/>
-          </a:p>
-        </p:txBody>
-      </p:sp>
-      <p:sp>
-        <p:nvSpPr>
-          <p:cNvPr id="28" name="Text 21"/>
-          <p:cNvSpPr/>
-          <p:nvPr/>
-        </p:nvSpPr>
-        <p:spPr>
-          <a:xfrm>
-            <a:off x="548640" y="3154680"/>
-            <a:ext cx="5303520" cy="365760"/>
-          </a:xfrm>
-          <a:prstGeom prst="rect">
-            <a:avLst/>
-          </a:prstGeom>
-          <a:noFill/>
-          <a:ln/>
-        </p:spPr>
-        <p:txBody>
-          <a:bodyPr wrap="square" lIns="0" tIns="0" rIns="0" bIns="0" rtlCol="0" anchor="ctr"/>
-          <a:lstStyle/>
-          <a:p>
-            <a:pPr indent="0" marL="0">
-              <a:buNone/>
-            </a:pPr>
-            <a:r>
-              <a:rPr lang="en-US" sz="1400" i="1" dirty="0">
-                <a:solidFill>
-                  <a:srgbClr val="615C52"/>
-                </a:solidFill>
-                <a:latin typeface="Inter" pitchFamily="34" charset="0"/>
-                <a:ea typeface="Inter" pitchFamily="34" charset="-122"/>
-                <a:cs typeface="Inter" pitchFamily="34" charset="-120"/>
-              </a:rPr>
-              <a:t>↻  repeats until Claude is done</a:t>
-            </a:r>
-            <a:endParaRPr lang="en-US" sz="1400" dirty="0"/>
-          </a:p>
-        </p:txBody>
-      </p:sp>
-      <p:sp>
-        <p:nvSpPr>
-          <p:cNvPr id="29" name="Shape 22"/>
-          <p:cNvSpPr/>
-          <p:nvPr/>
-        </p:nvSpPr>
-        <p:spPr>
-          <a:xfrm>
-            <a:off x="5943600" y="3090672"/>
-            <a:ext cx="2651760" cy="502920"/>
-          </a:xfrm>
-          <a:prstGeom prst="roundRect">
-            <a:avLst>
-              <a:gd name="adj" fmla="val 49091"/>
-            </a:avLst>
-          </a:prstGeom>
-          <a:solidFill>
-            <a:srgbClr val="D97757"/>
-          </a:solidFill>
-          <a:ln/>
-        </p:spPr>
-      </p:sp>
-      <p:pic>
-        <p:nvPicPr>
-          <p:cNvPr id="30" name="Image 5" descr="preencoded.png">    </p:cNvPr>
+          <p:cNvPr id="25" name="Image 4" descr="preencoded.png"/>
           <p:cNvPicPr>
             <a:picLocks noChangeAspect="1"/>
           </p:cNvPicPr>
@@ -8540,6 +8039,176 @@
         </p:blipFill>
         <p:spPr>
           <a:xfrm>
+            <a:off x="7441387" y="2023567"/>
+            <a:ext cx="241402" cy="241402"/>
+          </a:xfrm>
+          <a:prstGeom prst="rect">
+            <a:avLst/>
+          </a:prstGeom>
+        </p:spPr>
+      </p:pic>
+      <p:sp>
+        <p:nvSpPr>
+          <p:cNvPr id="26" name="Text 19"/>
+          <p:cNvSpPr/>
+          <p:nvPr/>
+        </p:nvSpPr>
+        <p:spPr>
+          <a:xfrm>
+            <a:off x="6693408" y="2441448"/>
+            <a:ext cx="1737360" cy="292608"/>
+          </a:xfrm>
+          <a:prstGeom prst="rect">
+            <a:avLst/>
+          </a:prstGeom>
+          <a:noFill/>
+          <a:ln/>
+        </p:spPr>
+        <p:txBody>
+          <a:bodyPr wrap="square" lIns="0" tIns="0" rIns="0" bIns="0" rtlCol="0" anchor="ctr"/>
+          <a:lstStyle/>
+          <a:p>
+            <a:pPr marL="0" indent="0" algn="ctr">
+              <a:buNone/>
+            </a:pPr>
+            <a:r>
+              <a:rPr lang="en-US" sz="1250" b="1" dirty="0">
+                <a:solidFill>
+                  <a:srgbClr val="141413"/>
+                </a:solidFill>
+                <a:latin typeface="Inter" pitchFamily="34" charset="0"/>
+                <a:ea typeface="Inter" pitchFamily="34" charset="-122"/>
+                <a:cs typeface="Inter" pitchFamily="34" charset="-120"/>
+              </a:rPr>
+              <a:t>Claude continues</a:t>
+            </a:r>
+            <a:endParaRPr lang="en-US" sz="1250" dirty="0"/>
+          </a:p>
+        </p:txBody>
+      </p:sp>
+      <p:sp>
+        <p:nvSpPr>
+          <p:cNvPr id="27" name="Text 20"/>
+          <p:cNvSpPr/>
+          <p:nvPr/>
+        </p:nvSpPr>
+        <p:spPr>
+          <a:xfrm>
+            <a:off x="6693408" y="2715768"/>
+            <a:ext cx="1737360" cy="274320"/>
+          </a:xfrm>
+          <a:prstGeom prst="rect">
+            <a:avLst/>
+          </a:prstGeom>
+          <a:noFill/>
+          <a:ln/>
+        </p:spPr>
+        <p:txBody>
+          <a:bodyPr wrap="square" lIns="0" tIns="0" rIns="0" bIns="0" rtlCol="0" anchor="ctr"/>
+          <a:lstStyle/>
+          <a:p>
+            <a:pPr marL="0" indent="0" algn="ctr">
+              <a:buNone/>
+            </a:pPr>
+            <a:r>
+              <a:rPr lang="en-US" sz="1050" dirty="0">
+                <a:solidFill>
+                  <a:srgbClr val="615C52"/>
+                </a:solidFill>
+                <a:latin typeface="Inter" pitchFamily="34" charset="0"/>
+                <a:ea typeface="Inter" pitchFamily="34" charset="-122"/>
+                <a:cs typeface="Inter" pitchFamily="34" charset="-120"/>
+              </a:rPr>
+              <a:t>…or asks again</a:t>
+            </a:r>
+            <a:endParaRPr lang="en-US" sz="1050" dirty="0"/>
+          </a:p>
+        </p:txBody>
+      </p:sp>
+      <p:sp>
+        <p:nvSpPr>
+          <p:cNvPr id="28" name="Text 21"/>
+          <p:cNvSpPr/>
+          <p:nvPr/>
+        </p:nvSpPr>
+        <p:spPr>
+          <a:xfrm>
+            <a:off x="548640" y="3154680"/>
+            <a:ext cx="5303520" cy="365760"/>
+          </a:xfrm>
+          <a:prstGeom prst="rect">
+            <a:avLst/>
+          </a:prstGeom>
+          <a:noFill/>
+          <a:ln/>
+        </p:spPr>
+        <p:txBody>
+          <a:bodyPr wrap="square" lIns="0" tIns="0" rIns="0" bIns="0" rtlCol="0" anchor="ctr"/>
+          <a:lstStyle/>
+          <a:p>
+            <a:pPr marL="0" indent="0">
+              <a:buNone/>
+            </a:pPr>
+            <a:r>
+              <a:rPr lang="en-US" sz="1400" i="1" dirty="0">
+                <a:solidFill>
+                  <a:srgbClr val="615C52"/>
+                </a:solidFill>
+                <a:latin typeface="Inter" pitchFamily="34" charset="0"/>
+                <a:ea typeface="Inter" pitchFamily="34" charset="-122"/>
+                <a:cs typeface="Inter" pitchFamily="34" charset="-120"/>
+              </a:rPr>
+              <a:t>↻  repeats until Claude is done</a:t>
+            </a:r>
+            <a:endParaRPr lang="en-US" sz="1400" dirty="0"/>
+          </a:p>
+        </p:txBody>
+      </p:sp>
+      <p:sp>
+        <p:nvSpPr>
+          <p:cNvPr id="29" name="Shape 22"/>
+          <p:cNvSpPr/>
+          <p:nvPr/>
+        </p:nvSpPr>
+        <p:spPr>
+          <a:xfrm>
+            <a:off x="5943600" y="3090672"/>
+            <a:ext cx="2651760" cy="502920"/>
+          </a:xfrm>
+          <a:prstGeom prst="roundRect">
+            <a:avLst>
+              <a:gd name="adj" fmla="val 49091"/>
+            </a:avLst>
+          </a:prstGeom>
+          <a:solidFill>
+            <a:srgbClr val="D97757"/>
+          </a:solidFill>
+          <a:ln/>
+        </p:spPr>
+        <p:txBody>
+          <a:bodyPr/>
+          <a:lstStyle/>
+          <a:p>
+            <a:endParaRPr lang="en-US"/>
+          </a:p>
+        </p:txBody>
+      </p:sp>
+      <p:pic>
+        <p:nvPicPr>
+          <p:cNvPr id="30" name="Image 5" descr="preencoded.png"/>
+          <p:cNvPicPr>
+            <a:picLocks noChangeAspect="1"/>
+          </p:cNvPicPr>
+          <p:nvPr/>
+        </p:nvPicPr>
+        <p:blipFill>
+          <a:blip r:embed="rId7"/>
+          <a:stretch>
+            <a:fillRect/>
+          </a:stretch>
+        </p:blipFill>
+        <p:spPr>
+          <a:xfrm>
             <a:off x="6199632" y="3227832"/>
             <a:ext cx="219456" cy="219456"/>
           </a:xfrm>
@@ -8569,7 +8238,7 @@
           <a:bodyPr wrap="square" lIns="0" tIns="0" rIns="0" bIns="0" rtlCol="0" anchor="ctr"/>
           <a:lstStyle/>
           <a:p>
-            <a:pPr indent="0" marL="0">
+            <a:pPr marL="0" indent="0">
               <a:buNone/>
             </a:pPr>
             <a:r>
@@ -8608,6 +8277,13 @@
           </a:solidFill>
           <a:ln/>
         </p:spPr>
+        <p:txBody>
+          <a:bodyPr/>
+          <a:lstStyle/>
+          <a:p>
+            <a:endParaRPr lang="en-US"/>
+          </a:p>
+        </p:txBody>
       </p:sp>
       <p:sp>
         <p:nvSpPr>
@@ -8630,7 +8306,7 @@
           <a:bodyPr wrap="square" lIns="0" tIns="0" rIns="0" bIns="0" rtlCol="0" anchor="ctr"/>
           <a:lstStyle/>
           <a:p>
-            <a:pPr indent="0" marL="0">
+            <a:pPr marL="0" indent="0">
               <a:buNone/>
             </a:pPr>
             <a:r>
@@ -8644,9 +8320,6 @@
               </a:rPr>
               <a:t>Implement it as a loop, </a:t>
             </a:r>
-            <a:pPr indent="0" marL="0">
-              <a:buNone/>
-            </a:pPr>
             <a:r>
               <a:rPr lang="en-US" sz="1400" dirty="0">
                 <a:solidFill>
@@ -8683,7 +8356,7 @@
           <a:bodyPr wrap="square" rtlCol="0" anchor="ctr"/>
           <a:lstStyle/>
           <a:p>
-            <a:pPr indent="0" marL="0">
+            <a:pPr marL="0" indent="0">
               <a:buNone/>
             </a:pPr>
             <a:r>
@@ -8722,7 +8395,7 @@
           <a:bodyPr wrap="square" rtlCol="0" anchor="ctr"/>
           <a:lstStyle/>
           <a:p>
-            <a:pPr algn="r" indent="0" marL="0">
+            <a:pPr marL="0" indent="0" algn="r">
               <a:buNone/>
             </a:pPr>
             <a:r>
@@ -8737,45 +8410,6 @@
               <a:t>Day 2 · Section 2  ·  7/12</a:t>
             </a:r>
             <a:endParaRPr lang="en-US" sz="900" dirty="0"/>
-          </a:p>
-        </p:txBody>
-      </p:sp>
-      <p:sp>
-        <p:nvSpPr>
-          <p:cNvPr id="36" name="Text 28"/>
-          <p:cNvSpPr/>
-          <p:nvPr/>
-        </p:nvSpPr>
-        <p:spPr>
-          <a:xfrm>
-            <a:off x="548640" y="4462272"/>
-            <a:ext cx="8046720" cy="274320"/>
-          </a:xfrm>
-          <a:prstGeom prst="rect">
-            <a:avLst/>
-          </a:prstGeom>
-          <a:noFill/>
-          <a:ln/>
-        </p:spPr>
-        <p:txBody>
-          <a:bodyPr wrap="square" lIns="0" tIns="0" rIns="0" bIns="0" rtlCol="0" anchor="ctr"/>
-          <a:lstStyle/>
-          <a:p>
-            <a:pPr indent="0" marL="0">
-              <a:buNone/>
-            </a:pPr>
-            <a:r>
-              <a:rPr lang="en-US" sz="1000" i="1" dirty="0">
-                <a:solidFill>
-                  <a:srgbClr val="615C52"/>
-                </a:solidFill>
-                <a:latin typeface="Inter" pitchFamily="34" charset="0"/>
-                <a:ea typeface="Inter" pitchFamily="34" charset="-122"/>
-                <a:cs typeface="Inter" pitchFamily="34" charset="-120"/>
-              </a:rPr>
-              <a:t>▸ The mental shift: one user turn can be many model↔tool round-trips.</a:t>
-            </a:r>
-            <a:endParaRPr lang="en-US" sz="1000" dirty="0"/>
           </a:p>
         </p:txBody>
       </p:sp>
@@ -8795,6 +8429,7 @@
         <a:solidFill>
           <a:srgbClr val="F0EEE6"/>
         </a:solidFill>
+        <a:effectLst/>
       </p:bgPr>
     </p:bg>
     <p:spTree>
@@ -8832,11 +8467,11 @@
           <a:bodyPr wrap="square" lIns="0" tIns="0" rIns="0" bIns="0" rtlCol="0" anchor="ctr"/>
           <a:lstStyle/>
           <a:p>
-            <a:pPr indent="0" marL="0">
-              <a:buNone/>
-            </a:pPr>
-            <a:r>
-              <a:rPr lang="en-US" sz="1100" b="1" spc="200" kern="0" dirty="0">
+            <a:pPr marL="0" indent="0">
+              <a:buNone/>
+            </a:pPr>
+            <a:r>
+              <a:rPr lang="en-US" sz="1100" b="1" kern="0" spc="200" dirty="0">
                 <a:solidFill>
                   <a:srgbClr val="C25E40"/>
                 </a:solidFill>
@@ -8871,7 +8506,7 @@
           <a:bodyPr wrap="square" lIns="0" tIns="0" rIns="0" bIns="0" rtlCol="0" anchor="ctr"/>
           <a:lstStyle/>
           <a:p>
-            <a:pPr indent="0" marL="0">
+            <a:pPr marL="0" indent="0">
               <a:buNone/>
             </a:pPr>
             <a:r>
@@ -8891,363 +8526,7 @@
       </p:sp>
       <p:pic>
         <p:nvPicPr>
-          <p:cNvPr id="4" name="Image 0" descr="preencoded.png">    </p:cNvPr>
-          <p:cNvPicPr>
-            <a:picLocks noChangeAspect="1"/>
-          </p:cNvPicPr>
-          <p:nvPr/>
-        </p:nvPicPr>
-        <p:blipFill>
-          <a:blip r:embed="rId1"/>
-          <a:stretch>
-            <a:fillRect/>
-          </a:stretch>
-        </p:blipFill>
-        <p:spPr>
-          <a:xfrm>
-            <a:off x="8321040" y="393192"/>
-            <a:ext cx="329184" cy="329184"/>
-          </a:xfrm>
-          <a:prstGeom prst="rect">
-            <a:avLst/>
-          </a:prstGeom>
-        </p:spPr>
-      </p:pic>
-      <p:sp>
-        <p:nvSpPr>
-          <p:cNvPr id="5" name="Shape 2"/>
-          <p:cNvSpPr/>
-          <p:nvPr/>
-        </p:nvSpPr>
-        <p:spPr>
-          <a:xfrm>
-            <a:off x="548640" y="1371600"/>
-            <a:ext cx="4937760" cy="2468880"/>
-          </a:xfrm>
-          <a:prstGeom prst="roundRect">
-            <a:avLst>
-              <a:gd name="adj" fmla="val 2963"/>
-            </a:avLst>
-          </a:prstGeom>
-          <a:solidFill>
-            <a:srgbClr val="1F1E1D"/>
-          </a:solidFill>
-          <a:ln/>
-          <a:effectLst>
-            <a:outerShdw sx="100000" sy="100000" kx="0" ky="0" algn="bl" rotWithShape="0" blurRad="88900" dist="38100" dir="5400000">
-              <a:srgbClr val="000000">
-                <a:alpha val="10000"/>
-              </a:srgbClr>
-            </a:outerShdw>
-          </a:effectLst>
-        </p:spPr>
-      </p:sp>
-      <p:sp>
-        <p:nvSpPr>
-          <p:cNvPr id="6" name="Text 3"/>
-          <p:cNvSpPr/>
-          <p:nvPr/>
-        </p:nvSpPr>
-        <p:spPr>
-          <a:xfrm>
-            <a:off x="822960" y="1517904"/>
-            <a:ext cx="4389120" cy="256032"/>
-          </a:xfrm>
-          <a:prstGeom prst="rect">
-            <a:avLst/>
-          </a:prstGeom>
-          <a:noFill/>
-          <a:ln/>
-        </p:spPr>
-        <p:txBody>
-          <a:bodyPr wrap="square" lIns="0" tIns="0" rIns="0" bIns="0" rtlCol="0" anchor="ctr"/>
-          <a:lstStyle/>
-          <a:p>
-            <a:pPr indent="0" marL="0">
-              <a:buNone/>
-            </a:pPr>
-            <a:r>
-              <a:rPr lang="en-US" sz="1050" b="1" spc="50" kern="0" dirty="0">
-                <a:solidFill>
-                  <a:srgbClr val="D97757"/>
-                </a:solidFill>
-                <a:latin typeface="Courier New" pitchFamily="34" charset="0"/>
-                <a:ea typeface="Courier New" pitchFamily="34" charset="-122"/>
-                <a:cs typeface="Courier New" pitchFamily="34" charset="-120"/>
-              </a:rPr>
-              <a:t>// tool → service call</a:t>
-            </a:r>
-            <a:endParaRPr lang="en-US" sz="1050" dirty="0"/>
-          </a:p>
-        </p:txBody>
-      </p:sp>
-      <p:sp>
-        <p:nvSpPr>
-          <p:cNvPr id="7" name="Text 4"/>
-          <p:cNvSpPr/>
-          <p:nvPr/>
-        </p:nvSpPr>
-        <p:spPr>
-          <a:xfrm>
-            <a:off x="841248" y="1828800"/>
-            <a:ext cx="4389120" cy="1828800"/>
-          </a:xfrm>
-          <a:prstGeom prst="rect">
-            <a:avLst/>
-          </a:prstGeom>
-          <a:noFill/>
-          <a:ln/>
-        </p:spPr>
-        <p:txBody>
-          <a:bodyPr wrap="square" lIns="0" tIns="0" rIns="0" bIns="0" rtlCol="0" anchor="t"/>
-          <a:lstStyle/>
-          <a:p>
-            <a:pPr indent="0" marL="0">
-              <a:lnSpc>
-                <a:spcPct val="128000"/>
-              </a:lnSpc>
-              <a:buNone/>
-            </a:pPr>
-            <a:r>
-              <a:rPr lang="en-US" sz="1250" dirty="0">
-                <a:solidFill>
-                  <a:srgbClr val="E9E5DD"/>
-                </a:solidFill>
-                <a:latin typeface="Courier New" pitchFamily="34" charset="0"/>
-                <a:ea typeface="Courier New" pitchFamily="34" charset="-122"/>
-                <a:cs typeface="Courier New" pitchFamily="34" charset="-120"/>
-              </a:rPr>
-              <a:t>[</a:t>
-            </a:r>
-            <a:pPr indent="0" marL="0">
-              <a:lnSpc>
-                <a:spcPct val="128000"/>
-              </a:lnSpc>
-              <a:buNone/>
-            </a:pPr>
-            <a:r>
-              <a:rPr lang="en-US" sz="1250" dirty="0">
-                <a:solidFill>
-                  <a:srgbClr val="9FC3E0"/>
-                </a:solidFill>
-                <a:latin typeface="Courier New" pitchFamily="34" charset="0"/>
-                <a:ea typeface="Courier New" pitchFamily="34" charset="-122"/>
-                <a:cs typeface="Courier New" pitchFamily="34" charset="-120"/>
-              </a:rPr>
-              <a:t>Tool</a:t>
-            </a:r>
-            <a:pPr indent="0" marL="0">
-              <a:lnSpc>
-                <a:spcPct val="128000"/>
-              </a:lnSpc>
-              <a:buNone/>
-            </a:pPr>
-            <a:r>
-              <a:rPr lang="en-US" sz="1250" dirty="0">
-                <a:solidFill>
-                  <a:srgbClr val="E9E5DD"/>
-                </a:solidFill>
-                <a:latin typeface="Courier New" pitchFamily="34" charset="0"/>
-                <a:ea typeface="Courier New" pitchFamily="34" charset="-122"/>
-                <a:cs typeface="Courier New" pitchFamily="34" charset="-120"/>
-              </a:rPr>
-              <a:t>(</a:t>
-            </a:r>
-            <a:pPr indent="0" marL="0">
-              <a:lnSpc>
-                <a:spcPct val="128000"/>
-              </a:lnSpc>
-              <a:buNone/>
-            </a:pPr>
-            <a:r>
-              <a:rPr lang="en-US" sz="1250" dirty="0">
-                <a:solidFill>
-                  <a:srgbClr val="E0A04A"/>
-                </a:solidFill>
-                <a:latin typeface="Courier New" pitchFamily="34" charset="0"/>
-                <a:ea typeface="Courier New" pitchFamily="34" charset="-122"/>
-                <a:cs typeface="Courier New" pitchFamily="34" charset="-120"/>
-              </a:rPr>
-              <a:t>"update_progress"</a:t>
-            </a:r>
-            <a:pPr indent="0" marL="0">
-              <a:lnSpc>
-                <a:spcPct val="128000"/>
-              </a:lnSpc>
-              <a:buNone/>
-            </a:pPr>
-            <a:r>
-              <a:rPr lang="en-US" sz="1250" dirty="0">
-                <a:solidFill>
-                  <a:srgbClr val="E9E5DD"/>
-                </a:solidFill>
-                <a:latin typeface="Courier New" pitchFamily="34" charset="0"/>
-                <a:ea typeface="Courier New" pitchFamily="34" charset="-122"/>
-                <a:cs typeface="Courier New" pitchFamily="34" charset="-120"/>
-              </a:rPr>
-              <a:t>)]</a:t>
-            </a:r>
-            <a:endParaRPr lang="en-US" sz="1250" dirty="0"/>
-          </a:p>
-          <a:p>
-            <a:pPr indent="0" marL="0">
-              <a:lnSpc>
-                <a:spcPct val="128000"/>
-              </a:lnSpc>
-              <a:buNone/>
-            </a:pPr>
-            <a:r>
-              <a:rPr lang="en-US" sz="1250" dirty="0">
-                <a:solidFill>
-                  <a:srgbClr val="E9E5DD"/>
-                </a:solidFill>
-                <a:latin typeface="Courier New" pitchFamily="34" charset="0"/>
-                <a:ea typeface="Courier New" pitchFamily="34" charset="-122"/>
-                <a:cs typeface="Courier New" pitchFamily="34" charset="-120"/>
-              </a:rPr>
-              <a:t>Task&lt;string&gt; </a:t>
-            </a:r>
-            <a:pPr indent="0" marL="0">
-              <a:lnSpc>
-                <a:spcPct val="128000"/>
-              </a:lnSpc>
-              <a:buNone/>
-            </a:pPr>
-            <a:r>
-              <a:rPr lang="en-US" sz="1250" dirty="0">
-                <a:solidFill>
-                  <a:srgbClr val="9FC3E0"/>
-                </a:solidFill>
-                <a:latin typeface="Courier New" pitchFamily="34" charset="0"/>
-                <a:ea typeface="Courier New" pitchFamily="34" charset="-122"/>
-                <a:cs typeface="Courier New" pitchFamily="34" charset="-120"/>
-              </a:rPr>
-              <a:t>UpdateProgress</a:t>
-            </a:r>
-            <a:pPr indent="0" marL="0">
-              <a:lnSpc>
-                <a:spcPct val="128000"/>
-              </a:lnSpc>
-              <a:buNone/>
-            </a:pPr>
-            <a:r>
-              <a:rPr lang="en-US" sz="1250" dirty="0">
-                <a:solidFill>
-                  <a:srgbClr val="E9E5DD"/>
-                </a:solidFill>
-                <a:latin typeface="Courier New" pitchFamily="34" charset="0"/>
-                <a:ea typeface="Courier New" pitchFamily="34" charset="-122"/>
-                <a:cs typeface="Courier New" pitchFamily="34" charset="-120"/>
-              </a:rPr>
-              <a:t>(</a:t>
-            </a:r>
-            <a:endParaRPr lang="en-US" sz="1250" dirty="0"/>
-          </a:p>
-          <a:p>
-            <a:pPr indent="0" marL="0">
-              <a:lnSpc>
-                <a:spcPct val="128000"/>
-              </a:lnSpc>
-              <a:buNone/>
-            </a:pPr>
-            <a:r>
-              <a:rPr lang="en-US" sz="1250" dirty="0">
-                <a:solidFill>
-                  <a:srgbClr val="E9E5DD"/>
-                </a:solidFill>
-                <a:latin typeface="Courier New" pitchFamily="34" charset="0"/>
-                <a:ea typeface="Courier New" pitchFamily="34" charset="-122"/>
-                <a:cs typeface="Courier New" pitchFamily="34" charset="-120"/>
-              </a:rPr>
-              <a:t>    int bookId, int page) =&gt;</a:t>
-            </a:r>
-            <a:endParaRPr lang="en-US" sz="1250" dirty="0"/>
-          </a:p>
-          <a:p>
-            <a:pPr indent="0" marL="0">
-              <a:lnSpc>
-                <a:spcPct val="128000"/>
-              </a:lnSpc>
-              <a:buNone/>
-            </a:pPr>
-            <a:r>
-              <a:rPr lang="en-US" sz="1250" dirty="0">
-                <a:solidFill>
-                  <a:srgbClr val="E9E5DD"/>
-                </a:solidFill>
-                <a:latin typeface="Courier New" pitchFamily="34" charset="0"/>
-                <a:ea typeface="Courier New" pitchFamily="34" charset="-122"/>
-                <a:cs typeface="Courier New" pitchFamily="34" charset="-120"/>
-              </a:rPr>
-              <a:t>  _books.SetProgress(</a:t>
-            </a:r>
-            <a:endParaRPr lang="en-US" sz="1250" dirty="0"/>
-          </a:p>
-          <a:p>
-            <a:pPr indent="0" marL="0">
-              <a:lnSpc>
-                <a:spcPct val="128000"/>
-              </a:lnSpc>
-              <a:buNone/>
-            </a:pPr>
-            <a:r>
-              <a:rPr lang="en-US" sz="1250" dirty="0">
-                <a:solidFill>
-                  <a:srgbClr val="E9E5DD"/>
-                </a:solidFill>
-                <a:latin typeface="Courier New" pitchFamily="34" charset="0"/>
-                <a:ea typeface="Courier New" pitchFamily="34" charset="-122"/>
-                <a:cs typeface="Courier New" pitchFamily="34" charset="-120"/>
-              </a:rPr>
-              <a:t>     bookId, page);</a:t>
-            </a:r>
-            <a:endParaRPr lang="en-US" sz="1250" dirty="0"/>
-          </a:p>
-          <a:p>
-            <a:pPr indent="0" marL="0">
-              <a:lnSpc>
-                <a:spcPct val="128000"/>
-              </a:lnSpc>
-              <a:buNone/>
-            </a:pPr>
-            <a:r>
-              <a:rPr lang="en-US" sz="1250" dirty="0">
-                <a:solidFill>
-                  <a:srgbClr val="9A958B"/>
-                </a:solidFill>
-                <a:latin typeface="Courier New" pitchFamily="34" charset="0"/>
-                <a:ea typeface="Courier New" pitchFamily="34" charset="-122"/>
-                <a:cs typeface="Courier New" pitchFamily="34" charset="-120"/>
-              </a:rPr>
-              <a:t>// reads &amp; writes the real DB</a:t>
-            </a:r>
-            <a:endParaRPr lang="en-US" sz="1250" dirty="0"/>
-          </a:p>
-        </p:txBody>
-      </p:sp>
-      <p:sp>
-        <p:nvSpPr>
-          <p:cNvPr id="8" name="Shape 5"/>
-          <p:cNvSpPr/>
-          <p:nvPr/>
-        </p:nvSpPr>
-        <p:spPr>
-          <a:xfrm>
-            <a:off x="5715000" y="1463040"/>
-            <a:ext cx="420624" cy="420624"/>
-          </a:xfrm>
-          <a:prstGeom prst="ellipse">
-            <a:avLst/>
-          </a:prstGeom>
-          <a:solidFill>
-            <a:srgbClr val="D97757"/>
-          </a:solidFill>
-          <a:ln/>
-        </p:spPr>
-      </p:sp>
-      <p:pic>
-        <p:nvPicPr>
-          <p:cNvPr id="9" name="Image 1" descr="preencoded.png">    </p:cNvPr>
+          <p:cNvPr id="4" name="Image 0" descr="preencoded.png"/>
           <p:cNvPicPr>
             <a:picLocks noChangeAspect="1"/>
           </p:cNvPicPr>
@@ -9261,8 +8540,8 @@
         </p:blipFill>
         <p:spPr>
           <a:xfrm>
-            <a:off x="5824362" y="1572402"/>
-            <a:ext cx="201900" cy="201900"/>
+            <a:off x="8321040" y="393192"/>
+            <a:ext cx="329184" cy="329184"/>
           </a:xfrm>
           <a:prstGeom prst="rect">
             <a:avLst/>
@@ -9271,91 +8550,296 @@
       </p:pic>
       <p:sp>
         <p:nvSpPr>
-          <p:cNvPr id="10" name="Text 6"/>
-          <p:cNvSpPr/>
-          <p:nvPr/>
-        </p:nvSpPr>
-        <p:spPr>
-          <a:xfrm>
-            <a:off x="6281928" y="1426464"/>
-            <a:ext cx="2834640" cy="292608"/>
-          </a:xfrm>
-          <a:prstGeom prst="rect">
-            <a:avLst/>
-          </a:prstGeom>
-          <a:noFill/>
-          <a:ln/>
-        </p:spPr>
-        <p:txBody>
-          <a:bodyPr wrap="square" lIns="0" tIns="0" rIns="0" bIns="0" rtlCol="0" anchor="ctr"/>
-          <a:lstStyle/>
-          <a:p>
-            <a:pPr indent="0" marL="0">
-              <a:buNone/>
-            </a:pPr>
-            <a:r>
-              <a:rPr lang="en-US" sz="1400" b="1" dirty="0">
-                <a:solidFill>
-                  <a:srgbClr val="141413"/>
-                </a:solidFill>
-                <a:latin typeface="Inter" pitchFamily="34" charset="0"/>
-                <a:ea typeface="Inter" pitchFamily="34" charset="-122"/>
-                <a:cs typeface="Inter" pitchFamily="34" charset="-120"/>
-              </a:rPr>
-              <a:t>Look up books</a:t>
-            </a:r>
-            <a:endParaRPr lang="en-US" sz="1400" dirty="0"/>
-          </a:p>
-        </p:txBody>
-      </p:sp>
-      <p:sp>
-        <p:nvSpPr>
-          <p:cNvPr id="11" name="Text 7"/>
-          <p:cNvSpPr/>
-          <p:nvPr/>
-        </p:nvSpPr>
-        <p:spPr>
-          <a:xfrm>
-            <a:off x="6281928" y="1709928"/>
-            <a:ext cx="2880360" cy="411480"/>
-          </a:xfrm>
-          <a:prstGeom prst="rect">
-            <a:avLst/>
-          </a:prstGeom>
-          <a:noFill/>
-          <a:ln/>
-        </p:spPr>
-        <p:txBody>
-          <a:bodyPr wrap="square" lIns="0" tIns="0" rIns="0" bIns="0" rtlCol="0" anchor="ctr"/>
-          <a:lstStyle/>
-          <a:p>
-            <a:pPr indent="0" marL="0">
-              <a:buNone/>
-            </a:pPr>
-            <a:r>
-              <a:rPr lang="en-US" sz="1150" dirty="0">
-                <a:solidFill>
-                  <a:srgbClr val="615C52"/>
-                </a:solidFill>
-                <a:latin typeface="Inter" pitchFamily="34" charset="0"/>
-                <a:ea typeface="Inter" pitchFamily="34" charset="-122"/>
-                <a:cs typeface="Inter" pitchFamily="34" charset="-120"/>
-              </a:rPr>
-              <a:t>Query the catalog by title or id</a:t>
-            </a:r>
-            <a:endParaRPr lang="en-US" sz="1150" dirty="0"/>
-          </a:p>
-        </p:txBody>
-      </p:sp>
-      <p:sp>
-        <p:nvSpPr>
-          <p:cNvPr id="12" name="Shape 8"/>
-          <p:cNvSpPr/>
-          <p:nvPr/>
-        </p:nvSpPr>
-        <p:spPr>
-          <a:xfrm>
-            <a:off x="5715000" y="2240280"/>
+          <p:cNvPr id="5" name="Shape 2"/>
+          <p:cNvSpPr/>
+          <p:nvPr/>
+        </p:nvSpPr>
+        <p:spPr>
+          <a:xfrm>
+            <a:off x="548640" y="1371600"/>
+            <a:ext cx="4937760" cy="2468880"/>
+          </a:xfrm>
+          <a:prstGeom prst="roundRect">
+            <a:avLst>
+              <a:gd name="adj" fmla="val 2963"/>
+            </a:avLst>
+          </a:prstGeom>
+          <a:solidFill>
+            <a:srgbClr val="1F1E1D"/>
+          </a:solidFill>
+          <a:ln/>
+          <a:effectLst>
+            <a:outerShdw blurRad="88900" dist="38100" dir="5400000" algn="bl" rotWithShape="0">
+              <a:srgbClr val="000000">
+                <a:alpha val="10000"/>
+              </a:srgbClr>
+            </a:outerShdw>
+          </a:effectLst>
+        </p:spPr>
+        <p:txBody>
+          <a:bodyPr/>
+          <a:lstStyle/>
+          <a:p>
+            <a:endParaRPr lang="en-US"/>
+          </a:p>
+        </p:txBody>
+      </p:sp>
+      <p:sp>
+        <p:nvSpPr>
+          <p:cNvPr id="6" name="Text 3"/>
+          <p:cNvSpPr/>
+          <p:nvPr/>
+        </p:nvSpPr>
+        <p:spPr>
+          <a:xfrm>
+            <a:off x="822960" y="1517904"/>
+            <a:ext cx="4389120" cy="256032"/>
+          </a:xfrm>
+          <a:prstGeom prst="rect">
+            <a:avLst/>
+          </a:prstGeom>
+          <a:noFill/>
+          <a:ln/>
+        </p:spPr>
+        <p:txBody>
+          <a:bodyPr wrap="square" lIns="0" tIns="0" rIns="0" bIns="0" rtlCol="0" anchor="ctr"/>
+          <a:lstStyle/>
+          <a:p>
+            <a:pPr marL="0" indent="0">
+              <a:buNone/>
+            </a:pPr>
+            <a:r>
+              <a:rPr lang="en-US" sz="1050" b="1" kern="0" spc="50" dirty="0">
+                <a:solidFill>
+                  <a:srgbClr val="D97757"/>
+                </a:solidFill>
+                <a:latin typeface="Courier New" pitchFamily="34" charset="0"/>
+                <a:ea typeface="Courier New" pitchFamily="34" charset="-122"/>
+                <a:cs typeface="Courier New" pitchFamily="34" charset="-120"/>
+              </a:rPr>
+              <a:t>// tool → service call</a:t>
+            </a:r>
+            <a:endParaRPr lang="en-US" sz="1050" dirty="0"/>
+          </a:p>
+        </p:txBody>
+      </p:sp>
+      <p:sp>
+        <p:nvSpPr>
+          <p:cNvPr id="7" name="Text 4"/>
+          <p:cNvSpPr/>
+          <p:nvPr/>
+        </p:nvSpPr>
+        <p:spPr>
+          <a:xfrm>
+            <a:off x="841248" y="1828800"/>
+            <a:ext cx="4389120" cy="1828800"/>
+          </a:xfrm>
+          <a:prstGeom prst="rect">
+            <a:avLst/>
+          </a:prstGeom>
+          <a:noFill/>
+          <a:ln/>
+        </p:spPr>
+        <p:txBody>
+          <a:bodyPr wrap="square" lIns="0" tIns="0" rIns="0" bIns="0" rtlCol="0" anchor="t"/>
+          <a:lstStyle/>
+          <a:p>
+            <a:pPr marL="0" indent="0">
+              <a:lnSpc>
+                <a:spcPct val="128000"/>
+              </a:lnSpc>
+              <a:buNone/>
+            </a:pPr>
+            <a:r>
+              <a:rPr lang="en-US" sz="1250" dirty="0">
+                <a:solidFill>
+                  <a:srgbClr val="E9E5DD"/>
+                </a:solidFill>
+                <a:latin typeface="Courier New" pitchFamily="34" charset="0"/>
+                <a:ea typeface="Courier New" pitchFamily="34" charset="-122"/>
+                <a:cs typeface="Courier New" pitchFamily="34" charset="-120"/>
+              </a:rPr>
+              <a:t>[</a:t>
+            </a:r>
+            <a:r>
+              <a:rPr lang="en-US" sz="1250" dirty="0">
+                <a:solidFill>
+                  <a:srgbClr val="9FC3E0"/>
+                </a:solidFill>
+                <a:latin typeface="Courier New" pitchFamily="34" charset="0"/>
+                <a:ea typeface="Courier New" pitchFamily="34" charset="-122"/>
+                <a:cs typeface="Courier New" pitchFamily="34" charset="-120"/>
+              </a:rPr>
+              <a:t>Tool</a:t>
+            </a:r>
+            <a:r>
+              <a:rPr lang="en-US" sz="1250" dirty="0">
+                <a:solidFill>
+                  <a:srgbClr val="E9E5DD"/>
+                </a:solidFill>
+                <a:latin typeface="Courier New" pitchFamily="34" charset="0"/>
+                <a:ea typeface="Courier New" pitchFamily="34" charset="-122"/>
+                <a:cs typeface="Courier New" pitchFamily="34" charset="-120"/>
+              </a:rPr>
+              <a:t>(</a:t>
+            </a:r>
+            <a:r>
+              <a:rPr lang="en-US" sz="1250" dirty="0">
+                <a:solidFill>
+                  <a:srgbClr val="E0A04A"/>
+                </a:solidFill>
+                <a:latin typeface="Courier New" pitchFamily="34" charset="0"/>
+                <a:ea typeface="Courier New" pitchFamily="34" charset="-122"/>
+                <a:cs typeface="Courier New" pitchFamily="34" charset="-120"/>
+              </a:rPr>
+              <a:t>"update_progress"</a:t>
+            </a:r>
+            <a:r>
+              <a:rPr lang="en-US" sz="1250" dirty="0">
+                <a:solidFill>
+                  <a:srgbClr val="E9E5DD"/>
+                </a:solidFill>
+                <a:latin typeface="Courier New" pitchFamily="34" charset="0"/>
+                <a:ea typeface="Courier New" pitchFamily="34" charset="-122"/>
+                <a:cs typeface="Courier New" pitchFamily="34" charset="-120"/>
+              </a:rPr>
+              <a:t>)]</a:t>
+            </a:r>
+            <a:endParaRPr lang="en-US" sz="1250" dirty="0"/>
+          </a:p>
+          <a:p>
+            <a:pPr marL="0" indent="0">
+              <a:lnSpc>
+                <a:spcPct val="128000"/>
+              </a:lnSpc>
+              <a:buNone/>
+            </a:pPr>
+            <a:r>
+              <a:rPr lang="en-US" sz="1250" dirty="0">
+                <a:solidFill>
+                  <a:srgbClr val="E9E5DD"/>
+                </a:solidFill>
+                <a:latin typeface="Courier New" pitchFamily="34" charset="0"/>
+                <a:ea typeface="Courier New" pitchFamily="34" charset="-122"/>
+                <a:cs typeface="Courier New" pitchFamily="34" charset="-120"/>
+              </a:rPr>
+              <a:t>Task&lt;string&gt; </a:t>
+            </a:r>
+            <a:r>
+              <a:rPr lang="en-US" sz="1250" dirty="0">
+                <a:solidFill>
+                  <a:srgbClr val="9FC3E0"/>
+                </a:solidFill>
+                <a:latin typeface="Courier New" pitchFamily="34" charset="0"/>
+                <a:ea typeface="Courier New" pitchFamily="34" charset="-122"/>
+                <a:cs typeface="Courier New" pitchFamily="34" charset="-120"/>
+              </a:rPr>
+              <a:t>UpdateProgress</a:t>
+            </a:r>
+            <a:r>
+              <a:rPr lang="en-US" sz="1250" dirty="0">
+                <a:solidFill>
+                  <a:srgbClr val="E9E5DD"/>
+                </a:solidFill>
+                <a:latin typeface="Courier New" pitchFamily="34" charset="0"/>
+                <a:ea typeface="Courier New" pitchFamily="34" charset="-122"/>
+                <a:cs typeface="Courier New" pitchFamily="34" charset="-120"/>
+              </a:rPr>
+              <a:t>(</a:t>
+            </a:r>
+            <a:endParaRPr lang="en-US" sz="1250" dirty="0"/>
+          </a:p>
+          <a:p>
+            <a:pPr marL="0" indent="0">
+              <a:lnSpc>
+                <a:spcPct val="128000"/>
+              </a:lnSpc>
+              <a:buNone/>
+            </a:pPr>
+            <a:r>
+              <a:rPr lang="en-US" sz="1250" dirty="0">
+                <a:solidFill>
+                  <a:srgbClr val="E9E5DD"/>
+                </a:solidFill>
+                <a:latin typeface="Courier New" pitchFamily="34" charset="0"/>
+                <a:ea typeface="Courier New" pitchFamily="34" charset="-122"/>
+                <a:cs typeface="Courier New" pitchFamily="34" charset="-120"/>
+              </a:rPr>
+              <a:t>    int bookId, int page) =&gt;</a:t>
+            </a:r>
+            <a:endParaRPr lang="en-US" sz="1250" dirty="0"/>
+          </a:p>
+          <a:p>
+            <a:pPr marL="0" indent="0">
+              <a:lnSpc>
+                <a:spcPct val="128000"/>
+              </a:lnSpc>
+              <a:buNone/>
+            </a:pPr>
+            <a:r>
+              <a:rPr lang="en-US" sz="1250" dirty="0">
+                <a:solidFill>
+                  <a:srgbClr val="E9E5DD"/>
+                </a:solidFill>
+                <a:latin typeface="Courier New" pitchFamily="34" charset="0"/>
+                <a:ea typeface="Courier New" pitchFamily="34" charset="-122"/>
+                <a:cs typeface="Courier New" pitchFamily="34" charset="-120"/>
+              </a:rPr>
+              <a:t>  _books.SetProgress(</a:t>
+            </a:r>
+            <a:endParaRPr lang="en-US" sz="1250" dirty="0"/>
+          </a:p>
+          <a:p>
+            <a:pPr marL="0" indent="0">
+              <a:lnSpc>
+                <a:spcPct val="128000"/>
+              </a:lnSpc>
+              <a:buNone/>
+            </a:pPr>
+            <a:r>
+              <a:rPr lang="en-US" sz="1250" dirty="0">
+                <a:solidFill>
+                  <a:srgbClr val="E9E5DD"/>
+                </a:solidFill>
+                <a:latin typeface="Courier New" pitchFamily="34" charset="0"/>
+                <a:ea typeface="Courier New" pitchFamily="34" charset="-122"/>
+                <a:cs typeface="Courier New" pitchFamily="34" charset="-120"/>
+              </a:rPr>
+              <a:t>     bookId, page);</a:t>
+            </a:r>
+            <a:endParaRPr lang="en-US" sz="1250" dirty="0"/>
+          </a:p>
+          <a:p>
+            <a:pPr marL="0" indent="0">
+              <a:lnSpc>
+                <a:spcPct val="128000"/>
+              </a:lnSpc>
+              <a:buNone/>
+            </a:pPr>
+            <a:r>
+              <a:rPr lang="en-US" sz="1250" dirty="0">
+                <a:solidFill>
+                  <a:srgbClr val="9A958B"/>
+                </a:solidFill>
+                <a:latin typeface="Courier New" pitchFamily="34" charset="0"/>
+                <a:ea typeface="Courier New" pitchFamily="34" charset="-122"/>
+                <a:cs typeface="Courier New" pitchFamily="34" charset="-120"/>
+              </a:rPr>
+              <a:t>// reads &amp; writes the real DB</a:t>
+            </a:r>
+            <a:endParaRPr lang="en-US" sz="1250" dirty="0"/>
+          </a:p>
+        </p:txBody>
+      </p:sp>
+      <p:sp>
+        <p:nvSpPr>
+          <p:cNvPr id="8" name="Shape 5"/>
+          <p:cNvSpPr/>
+          <p:nvPr/>
+        </p:nvSpPr>
+        <p:spPr>
+          <a:xfrm>
+            <a:off x="5715000" y="1463040"/>
             <a:ext cx="420624" cy="420624"/>
           </a:xfrm>
           <a:prstGeom prst="ellipse">
@@ -9366,10 +8850,17 @@
           </a:solidFill>
           <a:ln/>
         </p:spPr>
+        <p:txBody>
+          <a:bodyPr/>
+          <a:lstStyle/>
+          <a:p>
+            <a:endParaRPr lang="en-US"/>
+          </a:p>
+        </p:txBody>
       </p:sp>
       <p:pic>
         <p:nvPicPr>
-          <p:cNvPr id="13" name="Image 2" descr="preencoded.png">    </p:cNvPr>
+          <p:cNvPr id="9" name="Image 1" descr="preencoded.png"/>
           <p:cNvPicPr>
             <a:picLocks noChangeAspect="1"/>
           </p:cNvPicPr>
@@ -9383,7 +8874,7 @@
         </p:blipFill>
         <p:spPr>
           <a:xfrm>
-            <a:off x="5824362" y="2349642"/>
+            <a:off x="5824362" y="1572402"/>
             <a:ext cx="201900" cy="201900"/>
           </a:xfrm>
           <a:prstGeom prst="rect">
@@ -9393,13 +8884,13 @@
       </p:pic>
       <p:sp>
         <p:nvSpPr>
-          <p:cNvPr id="14" name="Text 9"/>
-          <p:cNvSpPr/>
-          <p:nvPr/>
-        </p:nvSpPr>
-        <p:spPr>
-          <a:xfrm>
-            <a:off x="6281928" y="2203704"/>
+          <p:cNvPr id="10" name="Text 6"/>
+          <p:cNvSpPr/>
+          <p:nvPr/>
+        </p:nvSpPr>
+        <p:spPr>
+          <a:xfrm>
+            <a:off x="6281928" y="1426464"/>
             <a:ext cx="2834640" cy="292608"/>
           </a:xfrm>
           <a:prstGeom prst="rect">
@@ -9412,7 +8903,7 @@
           <a:bodyPr wrap="square" lIns="0" tIns="0" rIns="0" bIns="0" rtlCol="0" anchor="ctr"/>
           <a:lstStyle/>
           <a:p>
-            <a:pPr indent="0" marL="0">
+            <a:pPr marL="0" indent="0">
               <a:buNone/>
             </a:pPr>
             <a:r>
@@ -9424,7 +8915,7 @@
                 <a:ea typeface="Inter" pitchFamily="34" charset="-122"/>
                 <a:cs typeface="Inter" pitchFamily="34" charset="-120"/>
               </a:rPr>
-              <a:t>Update progress</a:t>
+              <a:t>Look up books</a:t>
             </a:r>
             <a:endParaRPr lang="en-US" sz="1400" dirty="0"/>
           </a:p>
@@ -9432,13 +8923,13 @@
       </p:sp>
       <p:sp>
         <p:nvSpPr>
-          <p:cNvPr id="15" name="Text 10"/>
-          <p:cNvSpPr/>
-          <p:nvPr/>
-        </p:nvSpPr>
-        <p:spPr>
-          <a:xfrm>
-            <a:off x="6281928" y="2487168"/>
+          <p:cNvPr id="11" name="Text 7"/>
+          <p:cNvSpPr/>
+          <p:nvPr/>
+        </p:nvSpPr>
+        <p:spPr>
+          <a:xfrm>
+            <a:off x="6281928" y="1709928"/>
             <a:ext cx="2880360" cy="411480"/>
           </a:xfrm>
           <a:prstGeom prst="rect">
@@ -9451,7 +8942,7 @@
           <a:bodyPr wrap="square" lIns="0" tIns="0" rIns="0" bIns="0" rtlCol="0" anchor="ctr"/>
           <a:lstStyle/>
           <a:p>
-            <a:pPr indent="0" marL="0">
+            <a:pPr marL="0" indent="0">
               <a:buNone/>
             </a:pPr>
             <a:r>
@@ -9463,7 +8954,7 @@
                 <a:ea typeface="Inter" pitchFamily="34" charset="-122"/>
                 <a:cs typeface="Inter" pitchFamily="34" charset="-120"/>
               </a:rPr>
-              <a:t>Persist the reading position</a:t>
+              <a:t>Query the catalog by title or id</a:t>
             </a:r>
             <a:endParaRPr lang="en-US" sz="1150" dirty="0"/>
           </a:p>
@@ -9471,13 +8962,13 @@
       </p:sp>
       <p:sp>
         <p:nvSpPr>
-          <p:cNvPr id="16" name="Shape 11"/>
-          <p:cNvSpPr/>
-          <p:nvPr/>
-        </p:nvSpPr>
-        <p:spPr>
-          <a:xfrm>
-            <a:off x="5715000" y="3017520"/>
+          <p:cNvPr id="12" name="Shape 8"/>
+          <p:cNvSpPr/>
+          <p:nvPr/>
+        </p:nvSpPr>
+        <p:spPr>
+          <a:xfrm>
+            <a:off x="5715000" y="2240280"/>
             <a:ext cx="420624" cy="420624"/>
           </a:xfrm>
           <a:prstGeom prst="ellipse">
@@ -9488,10 +8979,17 @@
           </a:solidFill>
           <a:ln/>
         </p:spPr>
+        <p:txBody>
+          <a:bodyPr/>
+          <a:lstStyle/>
+          <a:p>
+            <a:endParaRPr lang="en-US"/>
+          </a:p>
+        </p:txBody>
       </p:sp>
       <p:pic>
         <p:nvPicPr>
-          <p:cNvPr id="17" name="Image 3" descr="preencoded.png">    </p:cNvPr>
+          <p:cNvPr id="13" name="Image 2" descr="preencoded.png"/>
           <p:cNvPicPr>
             <a:picLocks noChangeAspect="1"/>
           </p:cNvPicPr>
@@ -9505,6 +9003,135 @@
         </p:blipFill>
         <p:spPr>
           <a:xfrm>
+            <a:off x="5824362" y="2349642"/>
+            <a:ext cx="201900" cy="201900"/>
+          </a:xfrm>
+          <a:prstGeom prst="rect">
+            <a:avLst/>
+          </a:prstGeom>
+        </p:spPr>
+      </p:pic>
+      <p:sp>
+        <p:nvSpPr>
+          <p:cNvPr id="14" name="Text 9"/>
+          <p:cNvSpPr/>
+          <p:nvPr/>
+        </p:nvSpPr>
+        <p:spPr>
+          <a:xfrm>
+            <a:off x="6281928" y="2203704"/>
+            <a:ext cx="2834640" cy="292608"/>
+          </a:xfrm>
+          <a:prstGeom prst="rect">
+            <a:avLst/>
+          </a:prstGeom>
+          <a:noFill/>
+          <a:ln/>
+        </p:spPr>
+        <p:txBody>
+          <a:bodyPr wrap="square" lIns="0" tIns="0" rIns="0" bIns="0" rtlCol="0" anchor="ctr"/>
+          <a:lstStyle/>
+          <a:p>
+            <a:pPr marL="0" indent="0">
+              <a:buNone/>
+            </a:pPr>
+            <a:r>
+              <a:rPr lang="en-US" sz="1400" b="1" dirty="0">
+                <a:solidFill>
+                  <a:srgbClr val="141413"/>
+                </a:solidFill>
+                <a:latin typeface="Inter" pitchFamily="34" charset="0"/>
+                <a:ea typeface="Inter" pitchFamily="34" charset="-122"/>
+                <a:cs typeface="Inter" pitchFamily="34" charset="-120"/>
+              </a:rPr>
+              <a:t>Update progress</a:t>
+            </a:r>
+            <a:endParaRPr lang="en-US" sz="1400" dirty="0"/>
+          </a:p>
+        </p:txBody>
+      </p:sp>
+      <p:sp>
+        <p:nvSpPr>
+          <p:cNvPr id="15" name="Text 10"/>
+          <p:cNvSpPr/>
+          <p:nvPr/>
+        </p:nvSpPr>
+        <p:spPr>
+          <a:xfrm>
+            <a:off x="6281928" y="2487168"/>
+            <a:ext cx="2880360" cy="411480"/>
+          </a:xfrm>
+          <a:prstGeom prst="rect">
+            <a:avLst/>
+          </a:prstGeom>
+          <a:noFill/>
+          <a:ln/>
+        </p:spPr>
+        <p:txBody>
+          <a:bodyPr wrap="square" lIns="0" tIns="0" rIns="0" bIns="0" rtlCol="0" anchor="ctr"/>
+          <a:lstStyle/>
+          <a:p>
+            <a:pPr marL="0" indent="0">
+              <a:buNone/>
+            </a:pPr>
+            <a:r>
+              <a:rPr lang="en-US" sz="1150" dirty="0">
+                <a:solidFill>
+                  <a:srgbClr val="615C52"/>
+                </a:solidFill>
+                <a:latin typeface="Inter" pitchFamily="34" charset="0"/>
+                <a:ea typeface="Inter" pitchFamily="34" charset="-122"/>
+                <a:cs typeface="Inter" pitchFamily="34" charset="-120"/>
+              </a:rPr>
+              <a:t>Persist the reading position</a:t>
+            </a:r>
+            <a:endParaRPr lang="en-US" sz="1150" dirty="0"/>
+          </a:p>
+        </p:txBody>
+      </p:sp>
+      <p:sp>
+        <p:nvSpPr>
+          <p:cNvPr id="16" name="Shape 11"/>
+          <p:cNvSpPr/>
+          <p:nvPr/>
+        </p:nvSpPr>
+        <p:spPr>
+          <a:xfrm>
+            <a:off x="5715000" y="3017520"/>
+            <a:ext cx="420624" cy="420624"/>
+          </a:xfrm>
+          <a:prstGeom prst="ellipse">
+            <a:avLst/>
+          </a:prstGeom>
+          <a:solidFill>
+            <a:srgbClr val="D97757"/>
+          </a:solidFill>
+          <a:ln/>
+        </p:spPr>
+        <p:txBody>
+          <a:bodyPr/>
+          <a:lstStyle/>
+          <a:p>
+            <a:endParaRPr lang="en-US"/>
+          </a:p>
+        </p:txBody>
+      </p:sp>
+      <p:pic>
+        <p:nvPicPr>
+          <p:cNvPr id="17" name="Image 3" descr="preencoded.png"/>
+          <p:cNvPicPr>
+            <a:picLocks noChangeAspect="1"/>
+          </p:cNvPicPr>
+          <p:nvPr/>
+        </p:nvPicPr>
+        <p:blipFill>
+          <a:blip r:embed="rId5"/>
+          <a:stretch>
+            <a:fillRect/>
+          </a:stretch>
+        </p:blipFill>
+        <p:spPr>
+          <a:xfrm>
             <a:off x="5824362" y="3126882"/>
             <a:ext cx="201900" cy="201900"/>
           </a:xfrm>
@@ -9534,7 +9161,7 @@
           <a:bodyPr wrap="square" lIns="0" tIns="0" rIns="0" bIns="0" rtlCol="0" anchor="ctr"/>
           <a:lstStyle/>
           <a:p>
-            <a:pPr indent="0" marL="0">
+            <a:pPr marL="0" indent="0">
               <a:buNone/>
             </a:pPr>
             <a:r>
@@ -9573,7 +9200,7 @@
           <a:bodyPr wrap="square" lIns="0" tIns="0" rIns="0" bIns="0" rtlCol="0" anchor="ctr"/>
           <a:lstStyle/>
           <a:p>
-            <a:pPr indent="0" marL="0">
+            <a:pPr marL="0" indent="0">
               <a:buNone/>
             </a:pPr>
             <a:r>
@@ -9612,7 +9239,7 @@
           <a:bodyPr wrap="square" rtlCol="0" anchor="ctr"/>
           <a:lstStyle/>
           <a:p>
-            <a:pPr indent="0" marL="0">
+            <a:pPr marL="0" indent="0">
               <a:buNone/>
             </a:pPr>
             <a:r>
@@ -9651,7 +9278,7 @@
           <a:bodyPr wrap="square" rtlCol="0" anchor="ctr"/>
           <a:lstStyle/>
           <a:p>
-            <a:pPr algn="r" indent="0" marL="0">
+            <a:pPr marL="0" indent="0" algn="r">
               <a:buNone/>
             </a:pPr>
             <a:r>
@@ -9666,45 +9293,6 @@
               <a:t>Day 2 · Section 2  ·  8/12</a:t>
             </a:r>
             <a:endParaRPr lang="en-US" sz="900" dirty="0"/>
-          </a:p>
-        </p:txBody>
-      </p:sp>
-      <p:sp>
-        <p:nvSpPr>
-          <p:cNvPr id="22" name="Text 16"/>
-          <p:cNvSpPr/>
-          <p:nvPr/>
-        </p:nvSpPr>
-        <p:spPr>
-          <a:xfrm>
-            <a:off x="548640" y="4462272"/>
-            <a:ext cx="8046720" cy="274320"/>
-          </a:xfrm>
-          <a:prstGeom prst="rect">
-            <a:avLst/>
-          </a:prstGeom>
-          <a:noFill/>
-          <a:ln/>
-        </p:spPr>
-        <p:txBody>
-          <a:bodyPr wrap="square" lIns="0" tIns="0" rIns="0" bIns="0" rtlCol="0" anchor="ctr"/>
-          <a:lstStyle/>
-          <a:p>
-            <a:pPr indent="0" marL="0">
-              <a:buNone/>
-            </a:pPr>
-            <a:r>
-              <a:rPr lang="en-US" sz="1000" i="1" dirty="0">
-                <a:solidFill>
-                  <a:srgbClr val="615C52"/>
-                </a:solidFill>
-                <a:latin typeface="Inter" pitchFamily="34" charset="0"/>
-                <a:ea typeface="Inter" pitchFamily="34" charset="-122"/>
-                <a:cs typeface="Inter" pitchFamily="34" charset="-120"/>
-              </a:rPr>
-              <a:t>▸ Tools are just C# methods over your existing services — no special plumbing.</a:t>
-            </a:r>
-            <a:endParaRPr lang="en-US" sz="1000" dirty="0"/>
           </a:p>
         </p:txBody>
       </p:sp>
@@ -9724,6 +9312,7 @@
         <a:solidFill>
           <a:srgbClr val="F0EEE6"/>
         </a:solidFill>
+        <a:effectLst/>
       </p:bgPr>
     </p:bg>
     <p:spTree>
@@ -9761,11 +9350,11 @@
           <a:bodyPr wrap="square" lIns="0" tIns="0" rIns="0" bIns="0" rtlCol="0" anchor="ctr"/>
           <a:lstStyle/>
           <a:p>
-            <a:pPr indent="0" marL="0">
-              <a:buNone/>
-            </a:pPr>
-            <a:r>
-              <a:rPr lang="en-US" sz="1100" b="1" spc="200" kern="0" dirty="0">
+            <a:pPr marL="0" indent="0">
+              <a:buNone/>
+            </a:pPr>
+            <a:r>
+              <a:rPr lang="en-US" sz="1100" b="1" kern="0" spc="200" dirty="0">
                 <a:solidFill>
                   <a:srgbClr val="C25E40"/>
                 </a:solidFill>
@@ -9800,7 +9389,7 @@
           <a:bodyPr wrap="square" lIns="0" tIns="0" rIns="0" bIns="0" rtlCol="0" anchor="ctr"/>
           <a:lstStyle/>
           <a:p>
-            <a:pPr indent="0" marL="0">
+            <a:pPr marL="0" indent="0">
               <a:buNone/>
             </a:pPr>
             <a:r>
@@ -9820,14 +9409,14 @@
       </p:sp>
       <p:pic>
         <p:nvPicPr>
-          <p:cNvPr id="4" name="Image 0" descr="preencoded.png">    </p:cNvPr>
+          <p:cNvPr id="4" name="Image 0" descr="preencoded.png"/>
           <p:cNvPicPr>
             <a:picLocks noChangeAspect="1"/>
           </p:cNvPicPr>
           <p:nvPr/>
         </p:nvPicPr>
         <p:blipFill>
-          <a:blip r:embed="rId1"/>
+          <a:blip r:embed="rId2"/>
           <a:stretch>
             <a:fillRect/>
           </a:stretch>
@@ -9868,13 +9457,20 @@
             <a:prstDash val="solid"/>
           </a:ln>
           <a:effectLst>
-            <a:outerShdw sx="100000" sy="100000" kx="0" ky="0" algn="bl" rotWithShape="0" blurRad="88900" dist="38100" dir="5400000">
+            <a:outerShdw blurRad="88900" dist="38100" dir="5400000" algn="bl" rotWithShape="0">
               <a:srgbClr val="000000">
                 <a:alpha val="10000"/>
               </a:srgbClr>
             </a:outerShdw>
           </a:effectLst>
         </p:spPr>
+        <p:txBody>
+          <a:bodyPr/>
+          <a:lstStyle/>
+          <a:p>
+            <a:endParaRPr lang="en-US"/>
+          </a:p>
+        </p:txBody>
       </p:sp>
       <p:sp>
         <p:nvSpPr>
@@ -9895,17 +9491,24 @@
           </a:solidFill>
           <a:ln/>
         </p:spPr>
+        <p:txBody>
+          <a:bodyPr/>
+          <a:lstStyle/>
+          <a:p>
+            <a:endParaRPr lang="en-US"/>
+          </a:p>
+        </p:txBody>
       </p:sp>
       <p:pic>
         <p:nvPicPr>
-          <p:cNvPr id="7" name="Image 1" descr="preencoded.png">    </p:cNvPr>
+          <p:cNvPr id="7" name="Image 1" descr="preencoded.png"/>
           <p:cNvPicPr>
             <a:picLocks noChangeAspect="1"/>
           </p:cNvPicPr>
           <p:nvPr/>
         </p:nvPicPr>
         <p:blipFill>
-          <a:blip r:embed="rId2"/>
+          <a:blip r:embed="rId3"/>
           <a:stretch>
             <a:fillRect/>
           </a:stretch>
@@ -9941,7 +9544,7 @@
           <a:bodyPr wrap="square" lIns="0" tIns="0" rIns="0" bIns="0" rtlCol="0" anchor="ctr"/>
           <a:lstStyle/>
           <a:p>
-            <a:pPr indent="0" marL="0">
+            <a:pPr marL="0" indent="0">
               <a:buNone/>
             </a:pPr>
             <a:r>
@@ -9980,7 +9583,7 @@
           <a:bodyPr wrap="square" lIns="0" tIns="0" rIns="0" bIns="0" rtlCol="0" anchor="ctr"/>
           <a:lstStyle/>
           <a:p>
-            <a:pPr indent="0" marL="0">
+            <a:pPr marL="0" indent="0">
               <a:buNone/>
             </a:pPr>
             <a:r>
@@ -10019,7 +9622,7 @@
           <a:bodyPr wrap="square" lIns="0" tIns="0" rIns="0" bIns="0" rtlCol="0" anchor="ctr"/>
           <a:lstStyle/>
           <a:p>
-            <a:pPr indent="0" marL="0">
+            <a:pPr marL="0" indent="0">
               <a:buNone/>
             </a:pPr>
             <a:r>
@@ -10063,13 +9666,20 @@
             <a:prstDash val="solid"/>
           </a:ln>
           <a:effectLst>
-            <a:outerShdw sx="100000" sy="100000" kx="0" ky="0" algn="bl" rotWithShape="0" blurRad="88900" dist="38100" dir="5400000">
+            <a:outerShdw blurRad="88900" dist="38100" dir="5400000" algn="bl" rotWithShape="0">
               <a:srgbClr val="000000">
                 <a:alpha val="10000"/>
               </a:srgbClr>
             </a:outerShdw>
           </a:effectLst>
         </p:spPr>
+        <p:txBody>
+          <a:bodyPr/>
+          <a:lstStyle/>
+          <a:p>
+            <a:endParaRPr lang="en-US"/>
+          </a:p>
+        </p:txBody>
       </p:sp>
       <p:sp>
         <p:nvSpPr>
@@ -10090,17 +9700,24 @@
           </a:solidFill>
           <a:ln/>
         </p:spPr>
+        <p:txBody>
+          <a:bodyPr/>
+          <a:lstStyle/>
+          <a:p>
+            <a:endParaRPr lang="en-US"/>
+          </a:p>
+        </p:txBody>
       </p:sp>
       <p:pic>
         <p:nvPicPr>
-          <p:cNvPr id="13" name="Image 2" descr="preencoded.png">    </p:cNvPr>
+          <p:cNvPr id="13" name="Image 2" descr="preencoded.png"/>
           <p:cNvPicPr>
             <a:picLocks noChangeAspect="1"/>
           </p:cNvPicPr>
           <p:nvPr/>
         </p:nvPicPr>
         <p:blipFill>
-          <a:blip r:embed="rId3"/>
+          <a:blip r:embed="rId4"/>
           <a:stretch>
             <a:fillRect/>
           </a:stretch>
@@ -10136,7 +9753,7 @@
           <a:bodyPr wrap="square" lIns="0" tIns="0" rIns="0" bIns="0" rtlCol="0" anchor="ctr"/>
           <a:lstStyle/>
           <a:p>
-            <a:pPr indent="0" marL="0">
+            <a:pPr marL="0" indent="0">
               <a:buNone/>
             </a:pPr>
             <a:r>
@@ -10175,7 +9792,7 @@
           <a:bodyPr wrap="square" lIns="0" tIns="0" rIns="0" bIns="0" rtlCol="0" anchor="ctr"/>
           <a:lstStyle/>
           <a:p>
-            <a:pPr indent="0" marL="0">
+            <a:pPr marL="0" indent="0">
               <a:buNone/>
             </a:pPr>
             <a:r>
@@ -10214,7 +9831,7 @@
           <a:bodyPr wrap="square" lIns="0" tIns="0" rIns="0" bIns="0" rtlCol="0" anchor="ctr"/>
           <a:lstStyle/>
           <a:p>
-            <a:pPr indent="0" marL="0">
+            <a:pPr marL="0" indent="0">
               <a:buNone/>
             </a:pPr>
             <a:r>
@@ -10253,7 +9870,7 @@
           <a:bodyPr wrap="square" rtlCol="0" anchor="ctr"/>
           <a:lstStyle/>
           <a:p>
-            <a:pPr indent="0" marL="0">
+            <a:pPr marL="0" indent="0">
               <a:buNone/>
             </a:pPr>
             <a:r>
@@ -10292,7 +9909,7 @@
           <a:bodyPr wrap="square" rtlCol="0" anchor="ctr"/>
           <a:lstStyle/>
           <a:p>
-            <a:pPr algn="r" indent="0" marL="0">
+            <a:pPr marL="0" indent="0" algn="r">
               <a:buNone/>
             </a:pPr>
             <a:r>
@@ -10307,45 +9924,6 @@
               <a:t>Day 2 · Section 2  ·  9/12</a:t>
             </a:r>
             <a:endParaRPr lang="en-US" sz="900" dirty="0"/>
-          </a:p>
-        </p:txBody>
-      </p:sp>
-      <p:sp>
-        <p:nvSpPr>
-          <p:cNvPr id="19" name="Text 14"/>
-          <p:cNvSpPr/>
-          <p:nvPr/>
-        </p:nvSpPr>
-        <p:spPr>
-          <a:xfrm>
-            <a:off x="548640" y="4462272"/>
-            <a:ext cx="8046720" cy="274320"/>
-          </a:xfrm>
-          <a:prstGeom prst="rect">
-            <a:avLst/>
-          </a:prstGeom>
-          <a:noFill/>
-          <a:ln/>
-        </p:spPr>
-        <p:txBody>
-          <a:bodyPr wrap="square" lIns="0" tIns="0" rIns="0" bIns="0" rtlCol="0" anchor="ctr"/>
-          <a:lstStyle/>
-          <a:p>
-            <a:pPr indent="0" marL="0">
-              <a:buNone/>
-            </a:pPr>
-            <a:r>
-              <a:rPr lang="en-US" sz="1000" i="1" dirty="0">
-                <a:solidFill>
-                  <a:srgbClr val="615C52"/>
-                </a:solidFill>
-                <a:latin typeface="Inter" pitchFamily="34" charset="0"/>
-                <a:ea typeface="Inter" pitchFamily="34" charset="-122"/>
-                <a:cs typeface="Inter" pitchFamily="34" charset="-120"/>
-              </a:rPr>
-              <a:t>▸ Two guards make the loop production-safe: cap iterations, isolate tool failures.</a:t>
-            </a:r>
-            <a:endParaRPr lang="en-US" sz="1000" dirty="0"/>
           </a:p>
         </p:txBody>
       </p:sp>

--- a/decks/Day 2/Day2-Section2-Streaming-Tools-Thinking.pptx
+++ b/decks/Day 2/Day2-Section2-Streaming-Tools-Thinking.pptx
@@ -4,6 +4,9 @@
   <p:sldMasterIdLst>
     <p:sldMasterId id="2147483648" r:id="rId1"/>
   </p:sldMasterIdLst>
+  <p:notesMasterIdLst>
+    <p:notesMasterId r:id="rId14"/>
+  </p:notesMasterIdLst>
   <p:sldIdLst>
     <p:sldId id="256" r:id="rId2"/>
     <p:sldId id="257" r:id="rId3"/>
@@ -118,6 +121,1139 @@
     </p:ext>
   </p:extLst>
 </p:presentation>
+</file>
+
+<file path=ppt/notesMasters/notesMaster1.xml><?xml version="1.0" encoding="utf-8"?>
+<p:notesMaster xmlns:a="http://schemas.openxmlformats.org/drawingml/2006/main" xmlns:r="http://schemas.openxmlformats.org/officeDocument/2006/relationships" xmlns:p="http://schemas.openxmlformats.org/presentationml/2006/main">
+  <p:cSld>
+    <p:bg>
+      <p:bgRef idx="1001">
+        <a:schemeClr val="bg1"/>
+      </p:bgRef>
+    </p:bg>
+    <p:spTree>
+      <p:nvGrpSpPr>
+        <p:cNvPr id="1" name=""/>
+        <p:cNvGrpSpPr/>
+        <p:nvPr/>
+      </p:nvGrpSpPr>
+      <p:grpSpPr>
+        <a:xfrm>
+          <a:off x="0" y="0"/>
+          <a:ext cx="0" cy="0"/>
+          <a:chOff x="0" y="0"/>
+          <a:chExt cx="0" cy="0"/>
+        </a:xfrm>
+      </p:grpSpPr>
+    </p:spTree>
+    <p:extLst>
+      <p:ext uri="{BB962C8B-B14F-4D97-AF65-F5344CB8AC3E}">
+        <p14:creationId xmlns:p14="http://schemas.microsoft.com/office/powerpoint/2010/main" val="1978828533"/>
+      </p:ext>
+    </p:extLst>
+  </p:cSld>
+  <p:clrMap bg1="lt1" tx1="dk1" bg2="lt2" tx2="dk2" accent1="accent1" accent2="accent2" accent3="accent3" accent4="accent4" accent5="accent5" accent6="accent6" hlink="hlink" folHlink="folHlink"/>
+  <p:notesStyle>
+    <a:lvl1pPr marL="0" algn="l" defTabSz="914400" rtl="0" eaLnBrk="1" latinLnBrk="0" hangingPunct="1">
+      <a:defRPr sz="1200" kern="1200">
+        <a:solidFill>
+          <a:schemeClr val="tx1"/>
+        </a:solidFill>
+        <a:latin typeface="+mn-lt"/>
+        <a:ea typeface="+mn-ea"/>
+        <a:cs typeface="+mn-cs"/>
+      </a:defRPr>
+    </a:lvl1pPr>
+    <a:lvl2pPr marL="457200" algn="l" defTabSz="914400" rtl="0" eaLnBrk="1" latinLnBrk="0" hangingPunct="1">
+      <a:defRPr sz="1200" kern="1200">
+        <a:solidFill>
+          <a:schemeClr val="tx1"/>
+        </a:solidFill>
+        <a:latin typeface="+mn-lt"/>
+        <a:ea typeface="+mn-ea"/>
+        <a:cs typeface="+mn-cs"/>
+      </a:defRPr>
+    </a:lvl2pPr>
+    <a:lvl3pPr marL="914400" algn="l" defTabSz="914400" rtl="0" eaLnBrk="1" latinLnBrk="0" hangingPunct="1">
+      <a:defRPr sz="1200" kern="1200">
+        <a:solidFill>
+          <a:schemeClr val="tx1"/>
+        </a:solidFill>
+        <a:latin typeface="+mn-lt"/>
+        <a:ea typeface="+mn-ea"/>
+        <a:cs typeface="+mn-cs"/>
+      </a:defRPr>
+    </a:lvl3pPr>
+    <a:lvl4pPr marL="1371600" algn="l" defTabSz="914400" rtl="0" eaLnBrk="1" latinLnBrk="0" hangingPunct="1">
+      <a:defRPr sz="1200" kern="1200">
+        <a:solidFill>
+          <a:schemeClr val="tx1"/>
+        </a:solidFill>
+        <a:latin typeface="+mn-lt"/>
+        <a:ea typeface="+mn-ea"/>
+        <a:cs typeface="+mn-cs"/>
+      </a:defRPr>
+    </a:lvl4pPr>
+    <a:lvl5pPr marL="1828800" algn="l" defTabSz="914400" rtl="0" eaLnBrk="1" latinLnBrk="0" hangingPunct="1">
+      <a:defRPr sz="1200" kern="1200">
+        <a:solidFill>
+          <a:schemeClr val="tx1"/>
+        </a:solidFill>
+        <a:latin typeface="+mn-lt"/>
+        <a:ea typeface="+mn-ea"/>
+        <a:cs typeface="+mn-cs"/>
+      </a:defRPr>
+    </a:lvl5pPr>
+    <a:lvl6pPr marL="2286000" algn="l" defTabSz="914400" rtl="0" eaLnBrk="1" latinLnBrk="0" hangingPunct="1">
+      <a:defRPr sz="1200" kern="1200">
+        <a:solidFill>
+          <a:schemeClr val="tx1"/>
+        </a:solidFill>
+        <a:latin typeface="+mn-lt"/>
+        <a:ea typeface="+mn-ea"/>
+        <a:cs typeface="+mn-cs"/>
+      </a:defRPr>
+    </a:lvl6pPr>
+    <a:lvl7pPr marL="2743200" algn="l" defTabSz="914400" rtl="0" eaLnBrk="1" latinLnBrk="0" hangingPunct="1">
+      <a:defRPr sz="1200" kern="1200">
+        <a:solidFill>
+          <a:schemeClr val="tx1"/>
+        </a:solidFill>
+        <a:latin typeface="+mn-lt"/>
+        <a:ea typeface="+mn-ea"/>
+        <a:cs typeface="+mn-cs"/>
+      </a:defRPr>
+    </a:lvl7pPr>
+    <a:lvl8pPr marL="3200400" algn="l" defTabSz="914400" rtl="0" eaLnBrk="1" latinLnBrk="0" hangingPunct="1">
+      <a:defRPr sz="1200" kern="1200">
+        <a:solidFill>
+          <a:schemeClr val="tx1"/>
+        </a:solidFill>
+        <a:latin typeface="+mn-lt"/>
+        <a:ea typeface="+mn-ea"/>
+        <a:cs typeface="+mn-cs"/>
+      </a:defRPr>
+    </a:lvl8pPr>
+    <a:lvl9pPr marL="3657600" algn="l" defTabSz="914400" rtl="0" eaLnBrk="1" latinLnBrk="0" hangingPunct="1">
+      <a:defRPr sz="1200" kern="1200">
+        <a:solidFill>
+          <a:schemeClr val="tx1"/>
+        </a:solidFill>
+        <a:latin typeface="+mn-lt"/>
+        <a:ea typeface="+mn-ea"/>
+        <a:cs typeface="+mn-cs"/>
+      </a:defRPr>
+    </a:lvl9pPr>
+  </p:notesStyle>
+</p:notesMaster>
+</file>
+
+<file path=ppt/notesSlides/notesSlide1.xml><?xml version="1.0" encoding="utf-8"?>
+<p:notes xmlns:a="http://schemas.openxmlformats.org/drawingml/2006/main" xmlns:r="http://schemas.openxmlformats.org/officeDocument/2006/relationships" xmlns:p="http://schemas.openxmlformats.org/presentationml/2006/main">
+  <p:cSld>
+    <p:spTree>
+      <p:nvGrpSpPr>
+        <p:cNvPr id="1" name=""/>
+        <p:cNvGrpSpPr/>
+        <p:nvPr/>
+      </p:nvGrpSpPr>
+      <p:grpSpPr>
+        <a:xfrm>
+          <a:off x="0" y="0"/>
+          <a:ext cx="0" cy="0"/>
+          <a:chOff x="0" y="0"/>
+          <a:chExt cx="0" cy="0"/>
+        </a:xfrm>
+      </p:grpSpPr>
+      <p:sp>
+        <p:nvSpPr>
+          <p:cNvPr id="2" name="Slide Image Placeholder 1"/>
+          <p:cNvSpPr>
+            <a:spLocks noGrp="1" noRot="1" noChangeAspect="1"/>
+          </p:cNvSpPr>
+          <p:nvPr>
+            <p:ph type="sldImg"/>
+          </p:nvPr>
+        </p:nvSpPr>
+        <p:spPr/>
+      </p:sp>
+      <p:sp>
+        <p:nvSpPr>
+          <p:cNvPr id="3" name="Notes Placeholder 2"/>
+          <p:cNvSpPr>
+            <a:spLocks noGrp="1"/>
+          </p:cNvSpPr>
+          <p:nvPr>
+            <p:ph type="body" idx="1"/>
+          </p:nvPr>
+        </p:nvSpPr>
+        <p:spPr/>
+        <p:txBody>
+          <a:bodyPr/>
+          <a:lstStyle/>
+          <a:p>
+            <a:endParaRPr lang="en-US" dirty="0"/>
+          </a:p>
+        </p:txBody>
+      </p:sp>
+      <p:sp>
+        <p:nvSpPr>
+          <p:cNvPr id="4" name="Slide Number Placeholder 3"/>
+          <p:cNvSpPr>
+            <a:spLocks noGrp="1"/>
+          </p:cNvSpPr>
+          <p:nvPr>
+            <p:ph type="sldNum" sz="quarter" idx="10"/>
+          </p:nvPr>
+        </p:nvSpPr>
+        <p:spPr/>
+        <p:txBody>
+          <a:bodyPr/>
+          <a:lstStyle/>
+          <a:p>
+            <a:fld id="{F7021451-1387-4CA6-816F-3879F97B5CBC}" type="slidenum">
+              <a:rPr lang="en-US"/>
+              <a:t>1</a:t>
+            </a:fld>
+            <a:endParaRPr lang="en-US"/>
+          </a:p>
+        </p:txBody>
+      </p:sp>
+    </p:spTree>
+    <p:extLst>
+      <p:ext uri="{BB962C8B-B14F-4D97-AF65-F5344CB8AC3E}">
+        <p14:creationId xmlns:p14="http://schemas.microsoft.com/office/powerpoint/2010/main" val="1024086991"/>
+      </p:ext>
+    </p:extLst>
+  </p:cSld>
+  <p:clrMapOvr>
+    <a:masterClrMapping/>
+  </p:clrMapOvr>
+</p:notes>
+</file>
+
+<file path=ppt/notesSlides/notesSlide10.xml><?xml version="1.0" encoding="utf-8"?>
+<p:notes xmlns:a="http://schemas.openxmlformats.org/drawingml/2006/main" xmlns:r="http://schemas.openxmlformats.org/officeDocument/2006/relationships" xmlns:p="http://schemas.openxmlformats.org/presentationml/2006/main">
+  <p:cSld>
+    <p:spTree>
+      <p:nvGrpSpPr>
+        <p:cNvPr id="1" name=""/>
+        <p:cNvGrpSpPr/>
+        <p:nvPr/>
+      </p:nvGrpSpPr>
+      <p:grpSpPr>
+        <a:xfrm>
+          <a:off x="0" y="0"/>
+          <a:ext cx="0" cy="0"/>
+          <a:chOff x="0" y="0"/>
+          <a:chExt cx="0" cy="0"/>
+        </a:xfrm>
+      </p:grpSpPr>
+      <p:sp>
+        <p:nvSpPr>
+          <p:cNvPr id="2" name="Slide Image Placeholder 1"/>
+          <p:cNvSpPr>
+            <a:spLocks noGrp="1" noRot="1" noChangeAspect="1"/>
+          </p:cNvSpPr>
+          <p:nvPr>
+            <p:ph type="sldImg"/>
+          </p:nvPr>
+        </p:nvSpPr>
+        <p:spPr/>
+      </p:sp>
+      <p:sp>
+        <p:nvSpPr>
+          <p:cNvPr id="3" name="Notes Placeholder 2"/>
+          <p:cNvSpPr>
+            <a:spLocks noGrp="1"/>
+          </p:cNvSpPr>
+          <p:nvPr>
+            <p:ph type="body" idx="1"/>
+          </p:nvPr>
+        </p:nvSpPr>
+        <p:spPr/>
+        <p:txBody>
+          <a:bodyPr/>
+          <a:lstStyle/>
+          <a:p>
+            <a:endParaRPr lang="en-US" dirty="0"/>
+          </a:p>
+        </p:txBody>
+      </p:sp>
+      <p:sp>
+        <p:nvSpPr>
+          <p:cNvPr id="4" name="Slide Number Placeholder 3"/>
+          <p:cNvSpPr>
+            <a:spLocks noGrp="1"/>
+          </p:cNvSpPr>
+          <p:nvPr>
+            <p:ph type="sldNum" sz="quarter" idx="10"/>
+          </p:nvPr>
+        </p:nvSpPr>
+        <p:spPr/>
+        <p:txBody>
+          <a:bodyPr/>
+          <a:lstStyle/>
+          <a:p>
+            <a:fld id="{F7021451-1387-4CA6-816F-3879F97B5CBC}" type="slidenum">
+              <a:rPr lang="en-US"/>
+              <a:t>10</a:t>
+            </a:fld>
+            <a:endParaRPr lang="en-US"/>
+          </a:p>
+        </p:txBody>
+      </p:sp>
+    </p:spTree>
+    <p:extLst>
+      <p:ext uri="{BB962C8B-B14F-4D97-AF65-F5344CB8AC3E}">
+        <p14:creationId xmlns:p14="http://schemas.microsoft.com/office/powerpoint/2010/main" val="1024086991"/>
+      </p:ext>
+    </p:extLst>
+  </p:cSld>
+  <p:clrMapOvr>
+    <a:masterClrMapping/>
+  </p:clrMapOvr>
+</p:notes>
+</file>
+
+<file path=ppt/notesSlides/notesSlide11.xml><?xml version="1.0" encoding="utf-8"?>
+<p:notes xmlns:a="http://schemas.openxmlformats.org/drawingml/2006/main" xmlns:r="http://schemas.openxmlformats.org/officeDocument/2006/relationships" xmlns:p="http://schemas.openxmlformats.org/presentationml/2006/main">
+  <p:cSld>
+    <p:spTree>
+      <p:nvGrpSpPr>
+        <p:cNvPr id="1" name=""/>
+        <p:cNvGrpSpPr/>
+        <p:nvPr/>
+      </p:nvGrpSpPr>
+      <p:grpSpPr>
+        <a:xfrm>
+          <a:off x="0" y="0"/>
+          <a:ext cx="0" cy="0"/>
+          <a:chOff x="0" y="0"/>
+          <a:chExt cx="0" cy="0"/>
+        </a:xfrm>
+      </p:grpSpPr>
+      <p:sp>
+        <p:nvSpPr>
+          <p:cNvPr id="2" name="Slide Image Placeholder 1"/>
+          <p:cNvSpPr>
+            <a:spLocks noGrp="1" noRot="1" noChangeAspect="1"/>
+          </p:cNvSpPr>
+          <p:nvPr>
+            <p:ph type="sldImg"/>
+          </p:nvPr>
+        </p:nvSpPr>
+        <p:spPr/>
+      </p:sp>
+      <p:sp>
+        <p:nvSpPr>
+          <p:cNvPr id="3" name="Notes Placeholder 2"/>
+          <p:cNvSpPr>
+            <a:spLocks noGrp="1"/>
+          </p:cNvSpPr>
+          <p:nvPr>
+            <p:ph type="body" idx="1"/>
+          </p:nvPr>
+        </p:nvSpPr>
+        <p:spPr/>
+        <p:txBody>
+          <a:bodyPr/>
+          <a:lstStyle/>
+          <a:p>
+            <a:endParaRPr lang="en-US" dirty="0"/>
+          </a:p>
+        </p:txBody>
+      </p:sp>
+      <p:sp>
+        <p:nvSpPr>
+          <p:cNvPr id="4" name="Slide Number Placeholder 3"/>
+          <p:cNvSpPr>
+            <a:spLocks noGrp="1"/>
+          </p:cNvSpPr>
+          <p:nvPr>
+            <p:ph type="sldNum" sz="quarter" idx="10"/>
+          </p:nvPr>
+        </p:nvSpPr>
+        <p:spPr/>
+        <p:txBody>
+          <a:bodyPr/>
+          <a:lstStyle/>
+          <a:p>
+            <a:fld id="{F7021451-1387-4CA6-816F-3879F97B5CBC}" type="slidenum">
+              <a:rPr lang="en-US"/>
+              <a:t>11</a:t>
+            </a:fld>
+            <a:endParaRPr lang="en-US"/>
+          </a:p>
+        </p:txBody>
+      </p:sp>
+    </p:spTree>
+    <p:extLst>
+      <p:ext uri="{BB962C8B-B14F-4D97-AF65-F5344CB8AC3E}">
+        <p14:creationId xmlns:p14="http://schemas.microsoft.com/office/powerpoint/2010/main" val="1024086991"/>
+      </p:ext>
+    </p:extLst>
+  </p:cSld>
+  <p:clrMapOvr>
+    <a:masterClrMapping/>
+  </p:clrMapOvr>
+</p:notes>
+</file>
+
+<file path=ppt/notesSlides/notesSlide12.xml><?xml version="1.0" encoding="utf-8"?>
+<p:notes xmlns:a="http://schemas.openxmlformats.org/drawingml/2006/main" xmlns:r="http://schemas.openxmlformats.org/officeDocument/2006/relationships" xmlns:p="http://schemas.openxmlformats.org/presentationml/2006/main">
+  <p:cSld>
+    <p:spTree>
+      <p:nvGrpSpPr>
+        <p:cNvPr id="1" name=""/>
+        <p:cNvGrpSpPr/>
+        <p:nvPr/>
+      </p:nvGrpSpPr>
+      <p:grpSpPr>
+        <a:xfrm>
+          <a:off x="0" y="0"/>
+          <a:ext cx="0" cy="0"/>
+          <a:chOff x="0" y="0"/>
+          <a:chExt cx="0" cy="0"/>
+        </a:xfrm>
+      </p:grpSpPr>
+      <p:sp>
+        <p:nvSpPr>
+          <p:cNvPr id="2" name="Slide Image Placeholder 1"/>
+          <p:cNvSpPr>
+            <a:spLocks noGrp="1" noRot="1" noChangeAspect="1"/>
+          </p:cNvSpPr>
+          <p:nvPr>
+            <p:ph type="sldImg"/>
+          </p:nvPr>
+        </p:nvSpPr>
+        <p:spPr/>
+      </p:sp>
+      <p:sp>
+        <p:nvSpPr>
+          <p:cNvPr id="3" name="Notes Placeholder 2"/>
+          <p:cNvSpPr>
+            <a:spLocks noGrp="1"/>
+          </p:cNvSpPr>
+          <p:nvPr>
+            <p:ph type="body" idx="1"/>
+          </p:nvPr>
+        </p:nvSpPr>
+        <p:spPr/>
+        <p:txBody>
+          <a:bodyPr/>
+          <a:lstStyle/>
+          <a:p>
+            <a:endParaRPr lang="en-US" dirty="0"/>
+          </a:p>
+        </p:txBody>
+      </p:sp>
+      <p:sp>
+        <p:nvSpPr>
+          <p:cNvPr id="4" name="Slide Number Placeholder 3"/>
+          <p:cNvSpPr>
+            <a:spLocks noGrp="1"/>
+          </p:cNvSpPr>
+          <p:nvPr>
+            <p:ph type="sldNum" sz="quarter" idx="10"/>
+          </p:nvPr>
+        </p:nvSpPr>
+        <p:spPr/>
+        <p:txBody>
+          <a:bodyPr/>
+          <a:lstStyle/>
+          <a:p>
+            <a:fld id="{F7021451-1387-4CA6-816F-3879F97B5CBC}" type="slidenum">
+              <a:rPr lang="en-US"/>
+              <a:t>12</a:t>
+            </a:fld>
+            <a:endParaRPr lang="en-US"/>
+          </a:p>
+        </p:txBody>
+      </p:sp>
+    </p:spTree>
+    <p:extLst>
+      <p:ext uri="{BB962C8B-B14F-4D97-AF65-F5344CB8AC3E}">
+        <p14:creationId xmlns:p14="http://schemas.microsoft.com/office/powerpoint/2010/main" val="1024086991"/>
+      </p:ext>
+    </p:extLst>
+  </p:cSld>
+  <p:clrMapOvr>
+    <a:masterClrMapping/>
+  </p:clrMapOvr>
+</p:notes>
+</file>
+
+<file path=ppt/notesSlides/notesSlide2.xml><?xml version="1.0" encoding="utf-8"?>
+<p:notes xmlns:a="http://schemas.openxmlformats.org/drawingml/2006/main" xmlns:r="http://schemas.openxmlformats.org/officeDocument/2006/relationships" xmlns:p="http://schemas.openxmlformats.org/presentationml/2006/main">
+  <p:cSld>
+    <p:spTree>
+      <p:nvGrpSpPr>
+        <p:cNvPr id="1" name=""/>
+        <p:cNvGrpSpPr/>
+        <p:nvPr/>
+      </p:nvGrpSpPr>
+      <p:grpSpPr>
+        <a:xfrm>
+          <a:off x="0" y="0"/>
+          <a:ext cx="0" cy="0"/>
+          <a:chOff x="0" y="0"/>
+          <a:chExt cx="0" cy="0"/>
+        </a:xfrm>
+      </p:grpSpPr>
+      <p:sp>
+        <p:nvSpPr>
+          <p:cNvPr id="2" name="Slide Image Placeholder 1"/>
+          <p:cNvSpPr>
+            <a:spLocks noGrp="1" noRot="1" noChangeAspect="1"/>
+          </p:cNvSpPr>
+          <p:nvPr>
+            <p:ph type="sldImg"/>
+          </p:nvPr>
+        </p:nvSpPr>
+        <p:spPr/>
+      </p:sp>
+      <p:sp>
+        <p:nvSpPr>
+          <p:cNvPr id="3" name="Notes Placeholder 2"/>
+          <p:cNvSpPr>
+            <a:spLocks noGrp="1"/>
+          </p:cNvSpPr>
+          <p:nvPr>
+            <p:ph type="body" idx="1"/>
+          </p:nvPr>
+        </p:nvSpPr>
+        <p:spPr/>
+        <p:txBody>
+          <a:bodyPr/>
+          <a:lstStyle/>
+          <a:p>
+            <a:endParaRPr lang="en-US" dirty="0"/>
+          </a:p>
+        </p:txBody>
+      </p:sp>
+      <p:sp>
+        <p:nvSpPr>
+          <p:cNvPr id="4" name="Slide Number Placeholder 3"/>
+          <p:cNvSpPr>
+            <a:spLocks noGrp="1"/>
+          </p:cNvSpPr>
+          <p:nvPr>
+            <p:ph type="sldNum" sz="quarter" idx="10"/>
+          </p:nvPr>
+        </p:nvSpPr>
+        <p:spPr/>
+        <p:txBody>
+          <a:bodyPr/>
+          <a:lstStyle/>
+          <a:p>
+            <a:fld id="{F7021451-1387-4CA6-816F-3879F97B5CBC}" type="slidenum">
+              <a:rPr lang="en-US"/>
+              <a:t>2</a:t>
+            </a:fld>
+            <a:endParaRPr lang="en-US"/>
+          </a:p>
+        </p:txBody>
+      </p:sp>
+    </p:spTree>
+    <p:extLst>
+      <p:ext uri="{BB962C8B-B14F-4D97-AF65-F5344CB8AC3E}">
+        <p14:creationId xmlns:p14="http://schemas.microsoft.com/office/powerpoint/2010/main" val="1024086991"/>
+      </p:ext>
+    </p:extLst>
+  </p:cSld>
+  <p:clrMapOvr>
+    <a:masterClrMapping/>
+  </p:clrMapOvr>
+</p:notes>
+</file>
+
+<file path=ppt/notesSlides/notesSlide3.xml><?xml version="1.0" encoding="utf-8"?>
+<p:notes xmlns:a="http://schemas.openxmlformats.org/drawingml/2006/main" xmlns:r="http://schemas.openxmlformats.org/officeDocument/2006/relationships" xmlns:p="http://schemas.openxmlformats.org/presentationml/2006/main">
+  <p:cSld>
+    <p:spTree>
+      <p:nvGrpSpPr>
+        <p:cNvPr id="1" name=""/>
+        <p:cNvGrpSpPr/>
+        <p:nvPr/>
+      </p:nvGrpSpPr>
+      <p:grpSpPr>
+        <a:xfrm>
+          <a:off x="0" y="0"/>
+          <a:ext cx="0" cy="0"/>
+          <a:chOff x="0" y="0"/>
+          <a:chExt cx="0" cy="0"/>
+        </a:xfrm>
+      </p:grpSpPr>
+      <p:sp>
+        <p:nvSpPr>
+          <p:cNvPr id="2" name="Slide Image Placeholder 1"/>
+          <p:cNvSpPr>
+            <a:spLocks noGrp="1" noRot="1" noChangeAspect="1"/>
+          </p:cNvSpPr>
+          <p:nvPr>
+            <p:ph type="sldImg"/>
+          </p:nvPr>
+        </p:nvSpPr>
+        <p:spPr/>
+      </p:sp>
+      <p:sp>
+        <p:nvSpPr>
+          <p:cNvPr id="3" name="Notes Placeholder 2"/>
+          <p:cNvSpPr>
+            <a:spLocks noGrp="1"/>
+          </p:cNvSpPr>
+          <p:nvPr>
+            <p:ph type="body" idx="1"/>
+          </p:nvPr>
+        </p:nvSpPr>
+        <p:spPr/>
+        <p:txBody>
+          <a:bodyPr/>
+          <a:lstStyle/>
+          <a:p>
+            <a:endParaRPr lang="en-US" dirty="0"/>
+          </a:p>
+        </p:txBody>
+      </p:sp>
+      <p:sp>
+        <p:nvSpPr>
+          <p:cNvPr id="4" name="Slide Number Placeholder 3"/>
+          <p:cNvSpPr>
+            <a:spLocks noGrp="1"/>
+          </p:cNvSpPr>
+          <p:nvPr>
+            <p:ph type="sldNum" sz="quarter" idx="10"/>
+          </p:nvPr>
+        </p:nvSpPr>
+        <p:spPr/>
+        <p:txBody>
+          <a:bodyPr/>
+          <a:lstStyle/>
+          <a:p>
+            <a:fld id="{F7021451-1387-4CA6-816F-3879F97B5CBC}" type="slidenum">
+              <a:rPr lang="en-US"/>
+              <a:t>3</a:t>
+            </a:fld>
+            <a:endParaRPr lang="en-US"/>
+          </a:p>
+        </p:txBody>
+      </p:sp>
+    </p:spTree>
+    <p:extLst>
+      <p:ext uri="{BB962C8B-B14F-4D97-AF65-F5344CB8AC3E}">
+        <p14:creationId xmlns:p14="http://schemas.microsoft.com/office/powerpoint/2010/main" val="1024086991"/>
+      </p:ext>
+    </p:extLst>
+  </p:cSld>
+  <p:clrMapOvr>
+    <a:masterClrMapping/>
+  </p:clrMapOvr>
+</p:notes>
+</file>
+
+<file path=ppt/notesSlides/notesSlide4.xml><?xml version="1.0" encoding="utf-8"?>
+<p:notes xmlns:a="http://schemas.openxmlformats.org/drawingml/2006/main" xmlns:r="http://schemas.openxmlformats.org/officeDocument/2006/relationships" xmlns:p="http://schemas.openxmlformats.org/presentationml/2006/main">
+  <p:cSld>
+    <p:spTree>
+      <p:nvGrpSpPr>
+        <p:cNvPr id="1" name=""/>
+        <p:cNvGrpSpPr/>
+        <p:nvPr/>
+      </p:nvGrpSpPr>
+      <p:grpSpPr>
+        <a:xfrm>
+          <a:off x="0" y="0"/>
+          <a:ext cx="0" cy="0"/>
+          <a:chOff x="0" y="0"/>
+          <a:chExt cx="0" cy="0"/>
+        </a:xfrm>
+      </p:grpSpPr>
+      <p:sp>
+        <p:nvSpPr>
+          <p:cNvPr id="2" name="Slide Image Placeholder 1"/>
+          <p:cNvSpPr>
+            <a:spLocks noGrp="1" noRot="1" noChangeAspect="1"/>
+          </p:cNvSpPr>
+          <p:nvPr>
+            <p:ph type="sldImg"/>
+          </p:nvPr>
+        </p:nvSpPr>
+        <p:spPr/>
+      </p:sp>
+      <p:sp>
+        <p:nvSpPr>
+          <p:cNvPr id="3" name="Notes Placeholder 2"/>
+          <p:cNvSpPr>
+            <a:spLocks noGrp="1"/>
+          </p:cNvSpPr>
+          <p:nvPr>
+            <p:ph type="body" idx="1"/>
+          </p:nvPr>
+        </p:nvSpPr>
+        <p:spPr/>
+        <p:txBody>
+          <a:bodyPr/>
+          <a:lstStyle/>
+          <a:p>
+            <a:endParaRPr lang="en-US" dirty="0"/>
+          </a:p>
+        </p:txBody>
+      </p:sp>
+      <p:sp>
+        <p:nvSpPr>
+          <p:cNvPr id="4" name="Slide Number Placeholder 3"/>
+          <p:cNvSpPr>
+            <a:spLocks noGrp="1"/>
+          </p:cNvSpPr>
+          <p:nvPr>
+            <p:ph type="sldNum" sz="quarter" idx="10"/>
+          </p:nvPr>
+        </p:nvSpPr>
+        <p:spPr/>
+        <p:txBody>
+          <a:bodyPr/>
+          <a:lstStyle/>
+          <a:p>
+            <a:fld id="{F7021451-1387-4CA6-816F-3879F97B5CBC}" type="slidenum">
+              <a:rPr lang="en-US"/>
+              <a:t>4</a:t>
+            </a:fld>
+            <a:endParaRPr lang="en-US"/>
+          </a:p>
+        </p:txBody>
+      </p:sp>
+    </p:spTree>
+    <p:extLst>
+      <p:ext uri="{BB962C8B-B14F-4D97-AF65-F5344CB8AC3E}">
+        <p14:creationId xmlns:p14="http://schemas.microsoft.com/office/powerpoint/2010/main" val="1024086991"/>
+      </p:ext>
+    </p:extLst>
+  </p:cSld>
+  <p:clrMapOvr>
+    <a:masterClrMapping/>
+  </p:clrMapOvr>
+</p:notes>
+</file>
+
+<file path=ppt/notesSlides/notesSlide5.xml><?xml version="1.0" encoding="utf-8"?>
+<p:notes xmlns:a="http://schemas.openxmlformats.org/drawingml/2006/main" xmlns:r="http://schemas.openxmlformats.org/officeDocument/2006/relationships" xmlns:p="http://schemas.openxmlformats.org/presentationml/2006/main">
+  <p:cSld>
+    <p:spTree>
+      <p:nvGrpSpPr>
+        <p:cNvPr id="1" name=""/>
+        <p:cNvGrpSpPr/>
+        <p:nvPr/>
+      </p:nvGrpSpPr>
+      <p:grpSpPr>
+        <a:xfrm>
+          <a:off x="0" y="0"/>
+          <a:ext cx="0" cy="0"/>
+          <a:chOff x="0" y="0"/>
+          <a:chExt cx="0" cy="0"/>
+        </a:xfrm>
+      </p:grpSpPr>
+      <p:sp>
+        <p:nvSpPr>
+          <p:cNvPr id="2" name="Slide Image Placeholder 1"/>
+          <p:cNvSpPr>
+            <a:spLocks noGrp="1" noRot="1" noChangeAspect="1"/>
+          </p:cNvSpPr>
+          <p:nvPr>
+            <p:ph type="sldImg"/>
+          </p:nvPr>
+        </p:nvSpPr>
+        <p:spPr/>
+      </p:sp>
+      <p:sp>
+        <p:nvSpPr>
+          <p:cNvPr id="3" name="Notes Placeholder 2"/>
+          <p:cNvSpPr>
+            <a:spLocks noGrp="1"/>
+          </p:cNvSpPr>
+          <p:nvPr>
+            <p:ph type="body" idx="1"/>
+          </p:nvPr>
+        </p:nvSpPr>
+        <p:spPr/>
+        <p:txBody>
+          <a:bodyPr/>
+          <a:lstStyle/>
+          <a:p>
+            <a:endParaRPr lang="en-US" dirty="0"/>
+          </a:p>
+        </p:txBody>
+      </p:sp>
+      <p:sp>
+        <p:nvSpPr>
+          <p:cNvPr id="4" name="Slide Number Placeholder 3"/>
+          <p:cNvSpPr>
+            <a:spLocks noGrp="1"/>
+          </p:cNvSpPr>
+          <p:nvPr>
+            <p:ph type="sldNum" sz="quarter" idx="10"/>
+          </p:nvPr>
+        </p:nvSpPr>
+        <p:spPr/>
+        <p:txBody>
+          <a:bodyPr/>
+          <a:lstStyle/>
+          <a:p>
+            <a:fld id="{F7021451-1387-4CA6-816F-3879F97B5CBC}" type="slidenum">
+              <a:rPr lang="en-US"/>
+              <a:t>5</a:t>
+            </a:fld>
+            <a:endParaRPr lang="en-US"/>
+          </a:p>
+        </p:txBody>
+      </p:sp>
+    </p:spTree>
+    <p:extLst>
+      <p:ext uri="{BB962C8B-B14F-4D97-AF65-F5344CB8AC3E}">
+        <p14:creationId xmlns:p14="http://schemas.microsoft.com/office/powerpoint/2010/main" val="1024086991"/>
+      </p:ext>
+    </p:extLst>
+  </p:cSld>
+  <p:clrMapOvr>
+    <a:masterClrMapping/>
+  </p:clrMapOvr>
+</p:notes>
+</file>
+
+<file path=ppt/notesSlides/notesSlide6.xml><?xml version="1.0" encoding="utf-8"?>
+<p:notes xmlns:a="http://schemas.openxmlformats.org/drawingml/2006/main" xmlns:r="http://schemas.openxmlformats.org/officeDocument/2006/relationships" xmlns:p="http://schemas.openxmlformats.org/presentationml/2006/main">
+  <p:cSld>
+    <p:spTree>
+      <p:nvGrpSpPr>
+        <p:cNvPr id="1" name=""/>
+        <p:cNvGrpSpPr/>
+        <p:nvPr/>
+      </p:nvGrpSpPr>
+      <p:grpSpPr>
+        <a:xfrm>
+          <a:off x="0" y="0"/>
+          <a:ext cx="0" cy="0"/>
+          <a:chOff x="0" y="0"/>
+          <a:chExt cx="0" cy="0"/>
+        </a:xfrm>
+      </p:grpSpPr>
+      <p:sp>
+        <p:nvSpPr>
+          <p:cNvPr id="2" name="Slide Image Placeholder 1"/>
+          <p:cNvSpPr>
+            <a:spLocks noGrp="1" noRot="1" noChangeAspect="1"/>
+          </p:cNvSpPr>
+          <p:nvPr>
+            <p:ph type="sldImg"/>
+          </p:nvPr>
+        </p:nvSpPr>
+        <p:spPr/>
+      </p:sp>
+      <p:sp>
+        <p:nvSpPr>
+          <p:cNvPr id="3" name="Notes Placeholder 2"/>
+          <p:cNvSpPr>
+            <a:spLocks noGrp="1"/>
+          </p:cNvSpPr>
+          <p:nvPr>
+            <p:ph type="body" idx="1"/>
+          </p:nvPr>
+        </p:nvSpPr>
+        <p:spPr/>
+        <p:txBody>
+          <a:bodyPr/>
+          <a:lstStyle/>
+          <a:p>
+            <a:endParaRPr lang="en-US" dirty="0"/>
+          </a:p>
+        </p:txBody>
+      </p:sp>
+      <p:sp>
+        <p:nvSpPr>
+          <p:cNvPr id="4" name="Slide Number Placeholder 3"/>
+          <p:cNvSpPr>
+            <a:spLocks noGrp="1"/>
+          </p:cNvSpPr>
+          <p:nvPr>
+            <p:ph type="sldNum" sz="quarter" idx="10"/>
+          </p:nvPr>
+        </p:nvSpPr>
+        <p:spPr/>
+        <p:txBody>
+          <a:bodyPr/>
+          <a:lstStyle/>
+          <a:p>
+            <a:fld id="{F7021451-1387-4CA6-816F-3879F97B5CBC}" type="slidenum">
+              <a:rPr lang="en-US"/>
+              <a:t>6</a:t>
+            </a:fld>
+            <a:endParaRPr lang="en-US"/>
+          </a:p>
+        </p:txBody>
+      </p:sp>
+    </p:spTree>
+    <p:extLst>
+      <p:ext uri="{BB962C8B-B14F-4D97-AF65-F5344CB8AC3E}">
+        <p14:creationId xmlns:p14="http://schemas.microsoft.com/office/powerpoint/2010/main" val="1024086991"/>
+      </p:ext>
+    </p:extLst>
+  </p:cSld>
+  <p:clrMapOvr>
+    <a:masterClrMapping/>
+  </p:clrMapOvr>
+</p:notes>
+</file>
+
+<file path=ppt/notesSlides/notesSlide7.xml><?xml version="1.0" encoding="utf-8"?>
+<p:notes xmlns:a="http://schemas.openxmlformats.org/drawingml/2006/main" xmlns:r="http://schemas.openxmlformats.org/officeDocument/2006/relationships" xmlns:p="http://schemas.openxmlformats.org/presentationml/2006/main">
+  <p:cSld>
+    <p:spTree>
+      <p:nvGrpSpPr>
+        <p:cNvPr id="1" name=""/>
+        <p:cNvGrpSpPr/>
+        <p:nvPr/>
+      </p:nvGrpSpPr>
+      <p:grpSpPr>
+        <a:xfrm>
+          <a:off x="0" y="0"/>
+          <a:ext cx="0" cy="0"/>
+          <a:chOff x="0" y="0"/>
+          <a:chExt cx="0" cy="0"/>
+        </a:xfrm>
+      </p:grpSpPr>
+      <p:sp>
+        <p:nvSpPr>
+          <p:cNvPr id="2" name="Slide Image Placeholder 1"/>
+          <p:cNvSpPr>
+            <a:spLocks noGrp="1" noRot="1" noChangeAspect="1"/>
+          </p:cNvSpPr>
+          <p:nvPr>
+            <p:ph type="sldImg"/>
+          </p:nvPr>
+        </p:nvSpPr>
+        <p:spPr/>
+      </p:sp>
+      <p:sp>
+        <p:nvSpPr>
+          <p:cNvPr id="3" name="Notes Placeholder 2"/>
+          <p:cNvSpPr>
+            <a:spLocks noGrp="1"/>
+          </p:cNvSpPr>
+          <p:nvPr>
+            <p:ph type="body" idx="1"/>
+          </p:nvPr>
+        </p:nvSpPr>
+        <p:spPr/>
+        <p:txBody>
+          <a:bodyPr/>
+          <a:lstStyle/>
+          <a:p>
+            <a:endParaRPr lang="en-US" dirty="0"/>
+          </a:p>
+        </p:txBody>
+      </p:sp>
+      <p:sp>
+        <p:nvSpPr>
+          <p:cNvPr id="4" name="Slide Number Placeholder 3"/>
+          <p:cNvSpPr>
+            <a:spLocks noGrp="1"/>
+          </p:cNvSpPr>
+          <p:nvPr>
+            <p:ph type="sldNum" sz="quarter" idx="10"/>
+          </p:nvPr>
+        </p:nvSpPr>
+        <p:spPr/>
+        <p:txBody>
+          <a:bodyPr/>
+          <a:lstStyle/>
+          <a:p>
+            <a:fld id="{F7021451-1387-4CA6-816F-3879F97B5CBC}" type="slidenum">
+              <a:rPr lang="en-US"/>
+              <a:t>7</a:t>
+            </a:fld>
+            <a:endParaRPr lang="en-US"/>
+          </a:p>
+        </p:txBody>
+      </p:sp>
+    </p:spTree>
+    <p:extLst>
+      <p:ext uri="{BB962C8B-B14F-4D97-AF65-F5344CB8AC3E}">
+        <p14:creationId xmlns:p14="http://schemas.microsoft.com/office/powerpoint/2010/main" val="1024086991"/>
+      </p:ext>
+    </p:extLst>
+  </p:cSld>
+  <p:clrMapOvr>
+    <a:masterClrMapping/>
+  </p:clrMapOvr>
+</p:notes>
+</file>
+
+<file path=ppt/notesSlides/notesSlide8.xml><?xml version="1.0" encoding="utf-8"?>
+<p:notes xmlns:a="http://schemas.openxmlformats.org/drawingml/2006/main" xmlns:r="http://schemas.openxmlformats.org/officeDocument/2006/relationships" xmlns:p="http://schemas.openxmlformats.org/presentationml/2006/main">
+  <p:cSld>
+    <p:spTree>
+      <p:nvGrpSpPr>
+        <p:cNvPr id="1" name=""/>
+        <p:cNvGrpSpPr/>
+        <p:nvPr/>
+      </p:nvGrpSpPr>
+      <p:grpSpPr>
+        <a:xfrm>
+          <a:off x="0" y="0"/>
+          <a:ext cx="0" cy="0"/>
+          <a:chOff x="0" y="0"/>
+          <a:chExt cx="0" cy="0"/>
+        </a:xfrm>
+      </p:grpSpPr>
+      <p:sp>
+        <p:nvSpPr>
+          <p:cNvPr id="2" name="Slide Image Placeholder 1"/>
+          <p:cNvSpPr>
+            <a:spLocks noGrp="1" noRot="1" noChangeAspect="1"/>
+          </p:cNvSpPr>
+          <p:nvPr>
+            <p:ph type="sldImg"/>
+          </p:nvPr>
+        </p:nvSpPr>
+        <p:spPr/>
+      </p:sp>
+      <p:sp>
+        <p:nvSpPr>
+          <p:cNvPr id="3" name="Notes Placeholder 2"/>
+          <p:cNvSpPr>
+            <a:spLocks noGrp="1"/>
+          </p:cNvSpPr>
+          <p:nvPr>
+            <p:ph type="body" idx="1"/>
+          </p:nvPr>
+        </p:nvSpPr>
+        <p:spPr/>
+        <p:txBody>
+          <a:bodyPr/>
+          <a:lstStyle/>
+          <a:p>
+            <a:endParaRPr lang="en-US" dirty="0"/>
+          </a:p>
+        </p:txBody>
+      </p:sp>
+      <p:sp>
+        <p:nvSpPr>
+          <p:cNvPr id="4" name="Slide Number Placeholder 3"/>
+          <p:cNvSpPr>
+            <a:spLocks noGrp="1"/>
+          </p:cNvSpPr>
+          <p:nvPr>
+            <p:ph type="sldNum" sz="quarter" idx="10"/>
+          </p:nvPr>
+        </p:nvSpPr>
+        <p:spPr/>
+        <p:txBody>
+          <a:bodyPr/>
+          <a:lstStyle/>
+          <a:p>
+            <a:fld id="{F7021451-1387-4CA6-816F-3879F97B5CBC}" type="slidenum">
+              <a:rPr lang="en-US"/>
+              <a:t>8</a:t>
+            </a:fld>
+            <a:endParaRPr lang="en-US"/>
+          </a:p>
+        </p:txBody>
+      </p:sp>
+    </p:spTree>
+    <p:extLst>
+      <p:ext uri="{BB962C8B-B14F-4D97-AF65-F5344CB8AC3E}">
+        <p14:creationId xmlns:p14="http://schemas.microsoft.com/office/powerpoint/2010/main" val="1024086991"/>
+      </p:ext>
+    </p:extLst>
+  </p:cSld>
+  <p:clrMapOvr>
+    <a:masterClrMapping/>
+  </p:clrMapOvr>
+</p:notes>
+</file>
+
+<file path=ppt/notesSlides/notesSlide9.xml><?xml version="1.0" encoding="utf-8"?>
+<p:notes xmlns:a="http://schemas.openxmlformats.org/drawingml/2006/main" xmlns:r="http://schemas.openxmlformats.org/officeDocument/2006/relationships" xmlns:p="http://schemas.openxmlformats.org/presentationml/2006/main">
+  <p:cSld>
+    <p:spTree>
+      <p:nvGrpSpPr>
+        <p:cNvPr id="1" name=""/>
+        <p:cNvGrpSpPr/>
+        <p:nvPr/>
+      </p:nvGrpSpPr>
+      <p:grpSpPr>
+        <a:xfrm>
+          <a:off x="0" y="0"/>
+          <a:ext cx="0" cy="0"/>
+          <a:chOff x="0" y="0"/>
+          <a:chExt cx="0" cy="0"/>
+        </a:xfrm>
+      </p:grpSpPr>
+      <p:sp>
+        <p:nvSpPr>
+          <p:cNvPr id="2" name="Slide Image Placeholder 1"/>
+          <p:cNvSpPr>
+            <a:spLocks noGrp="1" noRot="1" noChangeAspect="1"/>
+          </p:cNvSpPr>
+          <p:nvPr>
+            <p:ph type="sldImg"/>
+          </p:nvPr>
+        </p:nvSpPr>
+        <p:spPr/>
+      </p:sp>
+      <p:sp>
+        <p:nvSpPr>
+          <p:cNvPr id="3" name="Notes Placeholder 2"/>
+          <p:cNvSpPr>
+            <a:spLocks noGrp="1"/>
+          </p:cNvSpPr>
+          <p:nvPr>
+            <p:ph type="body" idx="1"/>
+          </p:nvPr>
+        </p:nvSpPr>
+        <p:spPr/>
+        <p:txBody>
+          <a:bodyPr/>
+          <a:lstStyle/>
+          <a:p>
+            <a:endParaRPr lang="en-US" dirty="0"/>
+          </a:p>
+        </p:txBody>
+      </p:sp>
+      <p:sp>
+        <p:nvSpPr>
+          <p:cNvPr id="4" name="Slide Number Placeholder 3"/>
+          <p:cNvSpPr>
+            <a:spLocks noGrp="1"/>
+          </p:cNvSpPr>
+          <p:nvPr>
+            <p:ph type="sldNum" sz="quarter" idx="10"/>
+          </p:nvPr>
+        </p:nvSpPr>
+        <p:spPr/>
+        <p:txBody>
+          <a:bodyPr/>
+          <a:lstStyle/>
+          <a:p>
+            <a:fld id="{F7021451-1387-4CA6-816F-3879F97B5CBC}" type="slidenum">
+              <a:rPr lang="en-US"/>
+              <a:t>9</a:t>
+            </a:fld>
+            <a:endParaRPr lang="en-US"/>
+          </a:p>
+        </p:txBody>
+      </p:sp>
+    </p:spTree>
+    <p:extLst>
+      <p:ext uri="{BB962C8B-B14F-4D97-AF65-F5344CB8AC3E}">
+        <p14:creationId xmlns:p14="http://schemas.microsoft.com/office/powerpoint/2010/main" val="1024086991"/>
+      </p:ext>
+    </p:extLst>
+  </p:cSld>
+  <p:clrMapOvr>
+    <a:masterClrMapping/>
+  </p:clrMapOvr>
+</p:notes>
 </file>
 
 <file path=ppt/slideLayouts/slideLayout1.xml><?xml version="1.0" encoding="utf-8"?>
@@ -520,7 +1656,7 @@
           <p:nvPr/>
         </p:nvPicPr>
         <p:blipFill>
-          <a:blip r:embed="rId2"/>
+          <a:blip r:embed="rId3"/>
           <a:stretch>
             <a:fillRect/>
           </a:stretch>
@@ -702,6 +1838,45 @@
               <a:t>75 min  ·  40 lecture / demo  +  35 lab</a:t>
             </a:r>
             <a:endParaRPr lang="en-US" sz="1600" dirty="0"/>
+          </a:p>
+        </p:txBody>
+      </p:sp>
+      <p:sp>
+        <p:nvSpPr>
+          <p:cNvPr id="9" name="Text 6"/>
+          <p:cNvSpPr/>
+          <p:nvPr/>
+        </p:nvSpPr>
+        <p:spPr>
+          <a:xfrm>
+            <a:off x="640080" y="4462272"/>
+            <a:ext cx="8046720" cy="292608"/>
+          </a:xfrm>
+          <a:prstGeom prst="rect">
+            <a:avLst/>
+          </a:prstGeom>
+          <a:noFill/>
+          <a:ln/>
+        </p:spPr>
+        <p:txBody>
+          <a:bodyPr wrap="square" lIns="0" tIns="0" rIns="0" bIns="0" rtlCol="0" anchor="ctr"/>
+          <a:lstStyle/>
+          <a:p>
+            <a:pPr marL="0" indent="0">
+              <a:buNone/>
+            </a:pPr>
+            <a:r>
+              <a:rPr lang="en-US" sz="1000" i="1" dirty="0">
+                <a:solidFill>
+                  <a:srgbClr val="615C52"/>
+                </a:solidFill>
+                <a:latin typeface="Inter" pitchFamily="34" charset="0"/>
+                <a:ea typeface="Inter" pitchFamily="34" charset="-122"/>
+                <a:cs typeface="Inter" pitchFamily="34" charset="-120"/>
+              </a:rPr>
+              <a:t>dotnetclaude.com  ·  .NET AI with Claude Workshop</a:t>
+            </a:r>
+            <a:endParaRPr lang="en-US" sz="1000" dirty="0"/>
           </a:p>
         </p:txBody>
       </p:sp>
@@ -825,7 +2000,7 @@
           <p:nvPr/>
         </p:nvPicPr>
         <p:blipFill>
-          <a:blip r:embed="rId2"/>
+          <a:blip r:embed="rId3"/>
           <a:stretch>
             <a:fillRect/>
           </a:stretch>
@@ -917,7 +2092,7 @@
           <p:nvPr/>
         </p:nvPicPr>
         <p:blipFill>
-          <a:blip r:embed="rId3"/>
+          <a:blip r:embed="rId4"/>
           <a:stretch>
             <a:fillRect/>
           </a:stretch>
@@ -1087,7 +2262,7 @@
           <p:nvPr/>
         </p:nvPicPr>
         <p:blipFill>
-          <a:blip r:embed="rId4"/>
+          <a:blip r:embed="rId5"/>
           <a:stretch>
             <a:fillRect/>
           </a:stretch>
@@ -1257,7 +2432,7 @@
           <p:nvPr/>
         </p:nvPicPr>
         <p:blipFill>
-          <a:blip r:embed="rId5"/>
+          <a:blip r:embed="rId6"/>
           <a:stretch>
             <a:fillRect/>
           </a:stretch>
@@ -1470,7 +2645,7 @@
           <p:nvPr/>
         </p:nvPicPr>
         <p:blipFill>
-          <a:blip r:embed="rId2"/>
+          <a:blip r:embed="rId3"/>
           <a:stretch>
             <a:fillRect/>
           </a:stretch>
@@ -1694,7 +2869,7 @@
           <p:nvPr/>
         </p:nvPicPr>
         <p:blipFill>
-          <a:blip r:embed="rId3"/>
+          <a:blip r:embed="rId4"/>
           <a:stretch>
             <a:fillRect/>
           </a:stretch>
@@ -1784,7 +2959,7 @@
           <p:nvPr/>
         </p:nvPicPr>
         <p:blipFill>
-          <a:blip r:embed="rId3"/>
+          <a:blip r:embed="rId4"/>
           <a:stretch>
             <a:fillRect/>
           </a:stretch>
@@ -1874,7 +3049,7 @@
           <p:nvPr/>
         </p:nvPicPr>
         <p:blipFill>
-          <a:blip r:embed="rId3"/>
+          <a:blip r:embed="rId4"/>
           <a:stretch>
             <a:fillRect/>
           </a:stretch>
@@ -1993,7 +3168,7 @@
           <p:nvPr/>
         </p:nvPicPr>
         <p:blipFill>
-          <a:blip r:embed="rId4"/>
+          <a:blip r:embed="rId5"/>
           <a:stretch>
             <a:fillRect/>
           </a:stretch>
@@ -2178,7 +3353,7 @@
           <p:nvPr/>
         </p:nvPicPr>
         <p:blipFill>
-          <a:blip r:embed="rId2"/>
+          <a:blip r:embed="rId3"/>
           <a:stretch>
             <a:fillRect/>
           </a:stretch>
@@ -2238,7 +3413,7 @@
           <p:nvPr/>
         </p:nvPicPr>
         <p:blipFill>
-          <a:blip r:embed="rId3"/>
+          <a:blip r:embed="rId4"/>
           <a:stretch>
             <a:fillRect/>
           </a:stretch>
@@ -2770,7 +3945,7 @@
           <p:nvPr/>
         </p:nvPicPr>
         <p:blipFill>
-          <a:blip r:embed="rId4"/>
+          <a:blip r:embed="rId5"/>
           <a:stretch>
             <a:fillRect/>
           </a:stretch>
@@ -2833,7 +4008,7 @@
           <p:nvPr/>
         </p:nvPicPr>
         <p:blipFill>
-          <a:blip r:embed="rId4"/>
+          <a:blip r:embed="rId5"/>
           <a:stretch>
             <a:fillRect/>
           </a:stretch>
@@ -2896,7 +4071,7 @@
           <p:nvPr/>
         </p:nvPicPr>
         <p:blipFill>
-          <a:blip r:embed="rId4"/>
+          <a:blip r:embed="rId5"/>
           <a:stretch>
             <a:fillRect/>
           </a:stretch>
@@ -3148,7 +4323,7 @@
           <p:nvPr/>
         </p:nvPicPr>
         <p:blipFill>
-          <a:blip r:embed="rId2"/>
+          <a:blip r:embed="rId3"/>
           <a:stretch>
             <a:fillRect/>
           </a:stretch>
@@ -3199,7 +4374,7 @@
           <p:nvPr/>
         </p:nvPicPr>
         <p:blipFill>
-          <a:blip r:embed="rId3"/>
+          <a:blip r:embed="rId4"/>
           <a:stretch>
             <a:fillRect/>
           </a:stretch>
@@ -3289,7 +4464,7 @@
           <p:nvPr/>
         </p:nvPicPr>
         <p:blipFill>
-          <a:blip r:embed="rId3"/>
+          <a:blip r:embed="rId4"/>
           <a:stretch>
             <a:fillRect/>
           </a:stretch>
@@ -3379,7 +4554,7 @@
           <p:nvPr/>
         </p:nvPicPr>
         <p:blipFill>
-          <a:blip r:embed="rId3"/>
+          <a:blip r:embed="rId4"/>
           <a:stretch>
             <a:fillRect/>
           </a:stretch>
@@ -3469,7 +4644,7 @@
           <p:nvPr/>
         </p:nvPicPr>
         <p:blipFill>
-          <a:blip r:embed="rId3"/>
+          <a:blip r:embed="rId4"/>
           <a:stretch>
             <a:fillRect/>
           </a:stretch>
@@ -3559,7 +4734,7 @@
           <p:nvPr/>
         </p:nvPicPr>
         <p:blipFill>
-          <a:blip r:embed="rId3"/>
+          <a:blip r:embed="rId4"/>
           <a:stretch>
             <a:fillRect/>
           </a:stretch>
@@ -3811,7 +4986,7 @@
           <p:nvPr/>
         </p:nvPicPr>
         <p:blipFill>
-          <a:blip r:embed="rId2"/>
+          <a:blip r:embed="rId3"/>
           <a:stretch>
             <a:fillRect/>
           </a:stretch>
@@ -3862,7 +5037,7 @@
           <p:nvPr/>
         </p:nvPicPr>
         <p:blipFill>
-          <a:blip r:embed="rId3"/>
+          <a:blip r:embed="rId4"/>
           <a:stretch>
             <a:fillRect/>
           </a:stretch>
@@ -4015,7 +5190,7 @@
           <p:nvPr/>
         </p:nvPicPr>
         <p:blipFill>
-          <a:blip r:embed="rId4"/>
+          <a:blip r:embed="rId5"/>
           <a:stretch>
             <a:fillRect/>
           </a:stretch>
@@ -4185,7 +5360,7 @@
           <p:nvPr/>
         </p:nvPicPr>
         <p:blipFill>
-          <a:blip r:embed="rId3"/>
+          <a:blip r:embed="rId4"/>
           <a:stretch>
             <a:fillRect/>
           </a:stretch>
@@ -4476,7 +5651,7 @@
           <p:nvPr/>
         </p:nvPicPr>
         <p:blipFill>
-          <a:blip r:embed="rId2"/>
+          <a:blip r:embed="rId3"/>
           <a:stretch>
             <a:fillRect/>
           </a:stretch>
@@ -4848,135 +6023,6 @@
           <p:nvPr/>
         </p:nvPicPr>
         <p:blipFill>
-          <a:blip r:embed="rId3"/>
-          <a:stretch>
-            <a:fillRect/>
-          </a:stretch>
-        </p:blipFill>
-        <p:spPr>
-          <a:xfrm>
-            <a:off x="6089172" y="1517172"/>
-            <a:ext cx="184343" cy="184343"/>
-          </a:xfrm>
-          <a:prstGeom prst="rect">
-            <a:avLst/>
-          </a:prstGeom>
-        </p:spPr>
-      </p:pic>
-      <p:sp>
-        <p:nvSpPr>
-          <p:cNvPr id="10" name="Text 6"/>
-          <p:cNvSpPr/>
-          <p:nvPr/>
-        </p:nvSpPr>
-        <p:spPr>
-          <a:xfrm>
-            <a:off x="6519672" y="1371600"/>
-            <a:ext cx="2697480" cy="274320"/>
-          </a:xfrm>
-          <a:prstGeom prst="rect">
-            <a:avLst/>
-          </a:prstGeom>
-          <a:noFill/>
-          <a:ln/>
-        </p:spPr>
-        <p:txBody>
-          <a:bodyPr wrap="square" lIns="0" tIns="0" rIns="0" bIns="0" rtlCol="0" anchor="ctr"/>
-          <a:lstStyle/>
-          <a:p>
-            <a:pPr marL="0" indent="0">
-              <a:buNone/>
-            </a:pPr>
-            <a:r>
-              <a:rPr lang="en-US" sz="1250" b="1" dirty="0">
-                <a:solidFill>
-                  <a:srgbClr val="141413"/>
-                </a:solidFill>
-                <a:latin typeface="Courier New" pitchFamily="34" charset="0"/>
-                <a:ea typeface="Courier New" pitchFamily="34" charset="-122"/>
-                <a:cs typeface="Courier New" pitchFamily="34" charset="-120"/>
-              </a:rPr>
-              <a:t>text/event-stream</a:t>
-            </a:r>
-            <a:endParaRPr lang="en-US" sz="1250" dirty="0"/>
-          </a:p>
-        </p:txBody>
-      </p:sp>
-      <p:sp>
-        <p:nvSpPr>
-          <p:cNvPr id="11" name="Text 7"/>
-          <p:cNvSpPr/>
-          <p:nvPr/>
-        </p:nvSpPr>
-        <p:spPr>
-          <a:xfrm>
-            <a:off x="6519672" y="1636776"/>
-            <a:ext cx="2697480" cy="274320"/>
-          </a:xfrm>
-          <a:prstGeom prst="rect">
-            <a:avLst/>
-          </a:prstGeom>
-          <a:noFill/>
-          <a:ln/>
-        </p:spPr>
-        <p:txBody>
-          <a:bodyPr wrap="square" lIns="0" tIns="0" rIns="0" bIns="0" rtlCol="0" anchor="ctr"/>
-          <a:lstStyle/>
-          <a:p>
-            <a:pPr marL="0" indent="0">
-              <a:buNone/>
-            </a:pPr>
-            <a:r>
-              <a:rPr lang="en-US" sz="1100" dirty="0">
-                <a:solidFill>
-                  <a:srgbClr val="615C52"/>
-                </a:solidFill>
-                <a:latin typeface="Inter" pitchFamily="34" charset="0"/>
-                <a:ea typeface="Inter" pitchFamily="34" charset="-122"/>
-                <a:cs typeface="Inter" pitchFamily="34" charset="-120"/>
-              </a:rPr>
-              <a:t>Set the SSE content type</a:t>
-            </a:r>
-            <a:endParaRPr lang="en-US" sz="1100" dirty="0"/>
-          </a:p>
-        </p:txBody>
-      </p:sp>
-      <p:sp>
-        <p:nvSpPr>
-          <p:cNvPr id="12" name="Shape 8"/>
-          <p:cNvSpPr/>
-          <p:nvPr/>
-        </p:nvSpPr>
-        <p:spPr>
-          <a:xfrm>
-            <a:off x="5989320" y="2112264"/>
-            <a:ext cx="384048" cy="384048"/>
-          </a:xfrm>
-          <a:prstGeom prst="ellipse">
-            <a:avLst/>
-          </a:prstGeom>
-          <a:solidFill>
-            <a:srgbClr val="D97757"/>
-          </a:solidFill>
-          <a:ln/>
-        </p:spPr>
-        <p:txBody>
-          <a:bodyPr/>
-          <a:lstStyle/>
-          <a:p>
-            <a:endParaRPr lang="en-US"/>
-          </a:p>
-        </p:txBody>
-      </p:sp>
-      <p:pic>
-        <p:nvPicPr>
-          <p:cNvPr id="13" name="Image 2" descr="preencoded.png"/>
-          <p:cNvPicPr>
-            <a:picLocks noChangeAspect="1"/>
-          </p:cNvPicPr>
-          <p:nvPr/>
-        </p:nvPicPr>
-        <p:blipFill>
           <a:blip r:embed="rId4"/>
           <a:stretch>
             <a:fillRect/>
@@ -4984,7 +6030,7 @@
         </p:blipFill>
         <p:spPr>
           <a:xfrm>
-            <a:off x="6089172" y="2212116"/>
+            <a:off x="6089172" y="1517172"/>
             <a:ext cx="184343" cy="184343"/>
           </a:xfrm>
           <a:prstGeom prst="rect">
@@ -4994,13 +6040,13 @@
       </p:pic>
       <p:sp>
         <p:nvSpPr>
-          <p:cNvPr id="14" name="Text 9"/>
-          <p:cNvSpPr/>
-          <p:nvPr/>
-        </p:nvSpPr>
-        <p:spPr>
-          <a:xfrm>
-            <a:off x="6519672" y="2066544"/>
+          <p:cNvPr id="10" name="Text 6"/>
+          <p:cNvSpPr/>
+          <p:nvPr/>
+        </p:nvSpPr>
+        <p:spPr>
+          <a:xfrm>
+            <a:off x="6519672" y="1371600"/>
             <a:ext cx="2697480" cy="274320"/>
           </a:xfrm>
           <a:prstGeom prst="rect">
@@ -5025,7 +6071,7 @@
                 <a:ea typeface="Courier New" pitchFamily="34" charset="-122"/>
                 <a:cs typeface="Courier New" pitchFamily="34" charset="-120"/>
               </a:rPr>
-              <a:t>data: frames</a:t>
+              <a:t>text/event-stream</a:t>
             </a:r>
             <a:endParaRPr lang="en-US" sz="1250" dirty="0"/>
           </a:p>
@@ -5033,13 +6079,13 @@
       </p:sp>
       <p:sp>
         <p:nvSpPr>
-          <p:cNvPr id="15" name="Text 10"/>
-          <p:cNvSpPr/>
-          <p:nvPr/>
-        </p:nvSpPr>
-        <p:spPr>
-          <a:xfrm>
-            <a:off x="6519672" y="2331720"/>
+          <p:cNvPr id="11" name="Text 7"/>
+          <p:cNvSpPr/>
+          <p:nvPr/>
+        </p:nvSpPr>
+        <p:spPr>
+          <a:xfrm>
+            <a:off x="6519672" y="1636776"/>
             <a:ext cx="2697480" cy="274320"/>
           </a:xfrm>
           <a:prstGeom prst="rect">
@@ -5064,7 +6110,7 @@
                 <a:ea typeface="Inter" pitchFamily="34" charset="-122"/>
                 <a:cs typeface="Inter" pitchFamily="34" charset="-120"/>
               </a:rPr>
-              <a:t>One frame per chunk</a:t>
+              <a:t>Set the SSE content type</a:t>
             </a:r>
             <a:endParaRPr lang="en-US" sz="1100" dirty="0"/>
           </a:p>
@@ -5072,13 +6118,13 @@
       </p:sp>
       <p:sp>
         <p:nvSpPr>
-          <p:cNvPr id="16" name="Shape 11"/>
-          <p:cNvSpPr/>
-          <p:nvPr/>
-        </p:nvSpPr>
-        <p:spPr>
-          <a:xfrm>
-            <a:off x="5989320" y="2807208"/>
+          <p:cNvPr id="12" name="Shape 8"/>
+          <p:cNvSpPr/>
+          <p:nvPr/>
+        </p:nvSpPr>
+        <p:spPr>
+          <a:xfrm>
+            <a:off x="5989320" y="2112264"/>
             <a:ext cx="384048" cy="384048"/>
           </a:xfrm>
           <a:prstGeom prst="ellipse">
@@ -5099,7 +6145,7 @@
       </p:sp>
       <p:pic>
         <p:nvPicPr>
-          <p:cNvPr id="17" name="Image 3" descr="preencoded.png"/>
+          <p:cNvPr id="13" name="Image 2" descr="preencoded.png"/>
           <p:cNvPicPr>
             <a:picLocks noChangeAspect="1"/>
           </p:cNvPicPr>
@@ -5113,6 +6159,135 @@
         </p:blipFill>
         <p:spPr>
           <a:xfrm>
+            <a:off x="6089172" y="2212116"/>
+            <a:ext cx="184343" cy="184343"/>
+          </a:xfrm>
+          <a:prstGeom prst="rect">
+            <a:avLst/>
+          </a:prstGeom>
+        </p:spPr>
+      </p:pic>
+      <p:sp>
+        <p:nvSpPr>
+          <p:cNvPr id="14" name="Text 9"/>
+          <p:cNvSpPr/>
+          <p:nvPr/>
+        </p:nvSpPr>
+        <p:spPr>
+          <a:xfrm>
+            <a:off x="6519672" y="2066544"/>
+            <a:ext cx="2697480" cy="274320"/>
+          </a:xfrm>
+          <a:prstGeom prst="rect">
+            <a:avLst/>
+          </a:prstGeom>
+          <a:noFill/>
+          <a:ln/>
+        </p:spPr>
+        <p:txBody>
+          <a:bodyPr wrap="square" lIns="0" tIns="0" rIns="0" bIns="0" rtlCol="0" anchor="ctr"/>
+          <a:lstStyle/>
+          <a:p>
+            <a:pPr marL="0" indent="0">
+              <a:buNone/>
+            </a:pPr>
+            <a:r>
+              <a:rPr lang="en-US" sz="1250" b="1" dirty="0">
+                <a:solidFill>
+                  <a:srgbClr val="141413"/>
+                </a:solidFill>
+                <a:latin typeface="Courier New" pitchFamily="34" charset="0"/>
+                <a:ea typeface="Courier New" pitchFamily="34" charset="-122"/>
+                <a:cs typeface="Courier New" pitchFamily="34" charset="-120"/>
+              </a:rPr>
+              <a:t>data: frames</a:t>
+            </a:r>
+            <a:endParaRPr lang="en-US" sz="1250" dirty="0"/>
+          </a:p>
+        </p:txBody>
+      </p:sp>
+      <p:sp>
+        <p:nvSpPr>
+          <p:cNvPr id="15" name="Text 10"/>
+          <p:cNvSpPr/>
+          <p:nvPr/>
+        </p:nvSpPr>
+        <p:spPr>
+          <a:xfrm>
+            <a:off x="6519672" y="2331720"/>
+            <a:ext cx="2697480" cy="274320"/>
+          </a:xfrm>
+          <a:prstGeom prst="rect">
+            <a:avLst/>
+          </a:prstGeom>
+          <a:noFill/>
+          <a:ln/>
+        </p:spPr>
+        <p:txBody>
+          <a:bodyPr wrap="square" lIns="0" tIns="0" rIns="0" bIns="0" rtlCol="0" anchor="ctr"/>
+          <a:lstStyle/>
+          <a:p>
+            <a:pPr marL="0" indent="0">
+              <a:buNone/>
+            </a:pPr>
+            <a:r>
+              <a:rPr lang="en-US" sz="1100" dirty="0">
+                <a:solidFill>
+                  <a:srgbClr val="615C52"/>
+                </a:solidFill>
+                <a:latin typeface="Inter" pitchFamily="34" charset="0"/>
+                <a:ea typeface="Inter" pitchFamily="34" charset="-122"/>
+                <a:cs typeface="Inter" pitchFamily="34" charset="-120"/>
+              </a:rPr>
+              <a:t>One frame per chunk</a:t>
+            </a:r>
+            <a:endParaRPr lang="en-US" sz="1100" dirty="0"/>
+          </a:p>
+        </p:txBody>
+      </p:sp>
+      <p:sp>
+        <p:nvSpPr>
+          <p:cNvPr id="16" name="Shape 11"/>
+          <p:cNvSpPr/>
+          <p:nvPr/>
+        </p:nvSpPr>
+        <p:spPr>
+          <a:xfrm>
+            <a:off x="5989320" y="2807208"/>
+            <a:ext cx="384048" cy="384048"/>
+          </a:xfrm>
+          <a:prstGeom prst="ellipse">
+            <a:avLst/>
+          </a:prstGeom>
+          <a:solidFill>
+            <a:srgbClr val="D97757"/>
+          </a:solidFill>
+          <a:ln/>
+        </p:spPr>
+        <p:txBody>
+          <a:bodyPr/>
+          <a:lstStyle/>
+          <a:p>
+            <a:endParaRPr lang="en-US"/>
+          </a:p>
+        </p:txBody>
+      </p:sp>
+      <p:pic>
+        <p:nvPicPr>
+          <p:cNvPr id="17" name="Image 3" descr="preencoded.png"/>
+          <p:cNvPicPr>
+            <a:picLocks noChangeAspect="1"/>
+          </p:cNvPicPr>
+          <p:nvPr/>
+        </p:nvPicPr>
+        <p:blipFill>
+          <a:blip r:embed="rId6"/>
+          <a:stretch>
+            <a:fillRect/>
+          </a:stretch>
+        </p:blipFill>
+        <p:spPr>
+          <a:xfrm>
             <a:off x="6089172" y="2907060"/>
             <a:ext cx="184343" cy="184343"/>
           </a:xfrm>
@@ -5235,7 +6410,7 @@
           <p:nvPr/>
         </p:nvPicPr>
         <p:blipFill>
-          <a:blip r:embed="rId6"/>
+          <a:blip r:embed="rId7"/>
           <a:stretch>
             <a:fillRect/>
           </a:stretch>
@@ -5526,7 +6701,7 @@
           <p:nvPr/>
         </p:nvPicPr>
         <p:blipFill>
-          <a:blip r:embed="rId2"/>
+          <a:blip r:embed="rId3"/>
           <a:stretch>
             <a:fillRect/>
           </a:stretch>
@@ -5683,7 +6858,7 @@
                 <a:ea typeface="Courier New" pitchFamily="34" charset="-122"/>
                 <a:cs typeface="Courier New" pitchFamily="34" charset="-120"/>
               </a:rPr>
-              <a:t>   localhost:5000/api/chat/stream</a:t>
+              <a:t>   localhost:5255/api/chat/stream</a:t>
             </a:r>
             <a:endParaRPr lang="en-US" sz="1250" dirty="0"/>
           </a:p>
@@ -5904,7 +7079,7 @@
           <p:nvPr/>
         </p:nvPicPr>
         <p:blipFill>
-          <a:blip r:embed="rId3"/>
+          <a:blip r:embed="rId4"/>
           <a:stretch>
             <a:fillRect/>
           </a:stretch>
@@ -6033,7 +7208,7 @@
           <p:nvPr/>
         </p:nvPicPr>
         <p:blipFill>
-          <a:blip r:embed="rId4"/>
+          <a:blip r:embed="rId5"/>
           <a:stretch>
             <a:fillRect/>
           </a:stretch>
@@ -6162,7 +7337,7 @@
           <p:nvPr/>
         </p:nvPicPr>
         <p:blipFill>
-          <a:blip r:embed="rId5"/>
+          <a:blip r:embed="rId6"/>
           <a:stretch>
             <a:fillRect/>
           </a:stretch>
@@ -6453,7 +7628,7 @@
           <p:nvPr/>
         </p:nvPicPr>
         <p:blipFill>
-          <a:blip r:embed="rId2"/>
+          <a:blip r:embed="rId3"/>
           <a:stretch>
             <a:fillRect/>
           </a:stretch>
@@ -6545,7 +7720,7 @@
           <p:nvPr/>
         </p:nvPicPr>
         <p:blipFill>
-          <a:blip r:embed="rId3"/>
+          <a:blip r:embed="rId4"/>
           <a:stretch>
             <a:fillRect/>
           </a:stretch>
@@ -6715,7 +7890,7 @@
           <p:nvPr/>
         </p:nvPicPr>
         <p:blipFill>
-          <a:blip r:embed="rId4"/>
+          <a:blip r:embed="rId5"/>
           <a:stretch>
             <a:fillRect/>
           </a:stretch>
@@ -6885,7 +8060,7 @@
           <p:nvPr/>
         </p:nvPicPr>
         <p:blipFill>
-          <a:blip r:embed="rId5"/>
+          <a:blip r:embed="rId6"/>
           <a:stretch>
             <a:fillRect/>
           </a:stretch>
@@ -7050,7 +8225,7 @@
           <p:nvPr/>
         </p:nvPicPr>
         <p:blipFill>
-          <a:blip r:embed="rId4"/>
+          <a:blip r:embed="rId5"/>
           <a:stretch>
             <a:fillRect/>
           </a:stretch>
@@ -7313,7 +8488,7 @@
           <p:nvPr/>
         </p:nvPicPr>
         <p:blipFill>
-          <a:blip r:embed="rId2"/>
+          <a:blip r:embed="rId3"/>
           <a:stretch>
             <a:fillRect/>
           </a:stretch>
@@ -7405,7 +8580,7 @@
           <p:nvPr/>
         </p:nvPicPr>
         <p:blipFill>
-          <a:blip r:embed="rId3"/>
+          <a:blip r:embed="rId4"/>
           <a:stretch>
             <a:fillRect/>
           </a:stretch>
@@ -7614,7 +8789,7 @@
           <p:nvPr/>
         </p:nvPicPr>
         <p:blipFill>
-          <a:blip r:embed="rId4"/>
+          <a:blip r:embed="rId5"/>
           <a:stretch>
             <a:fillRect/>
           </a:stretch>
@@ -7823,7 +8998,7 @@
           <p:nvPr/>
         </p:nvPicPr>
         <p:blipFill>
-          <a:blip r:embed="rId5"/>
+          <a:blip r:embed="rId6"/>
           <a:stretch>
             <a:fillRect/>
           </a:stretch>
@@ -8032,7 +9207,7 @@
           <p:nvPr/>
         </p:nvPicPr>
         <p:blipFill>
-          <a:blip r:embed="rId6"/>
+          <a:blip r:embed="rId7"/>
           <a:stretch>
             <a:fillRect/>
           </a:stretch>
@@ -8202,7 +9377,7 @@
           <p:nvPr/>
         </p:nvPicPr>
         <p:blipFill>
-          <a:blip r:embed="rId7"/>
+          <a:blip r:embed="rId8"/>
           <a:stretch>
             <a:fillRect/>
           </a:stretch>
@@ -8533,7 +9708,7 @@
           <p:nvPr/>
         </p:nvPicPr>
         <p:blipFill>
-          <a:blip r:embed="rId2"/>
+          <a:blip r:embed="rId3"/>
           <a:stretch>
             <a:fillRect/>
           </a:stretch>
@@ -8867,7 +10042,7 @@
           <p:nvPr/>
         </p:nvPicPr>
         <p:blipFill>
-          <a:blip r:embed="rId3"/>
+          <a:blip r:embed="rId4"/>
           <a:stretch>
             <a:fillRect/>
           </a:stretch>
@@ -8996,7 +10171,7 @@
           <p:nvPr/>
         </p:nvPicPr>
         <p:blipFill>
-          <a:blip r:embed="rId4"/>
+          <a:blip r:embed="rId5"/>
           <a:stretch>
             <a:fillRect/>
           </a:stretch>
@@ -9125,7 +10300,7 @@
           <p:nvPr/>
         </p:nvPicPr>
         <p:blipFill>
-          <a:blip r:embed="rId5"/>
+          <a:blip r:embed="rId6"/>
           <a:stretch>
             <a:fillRect/>
           </a:stretch>
@@ -9416,7 +10591,7 @@
           <p:nvPr/>
         </p:nvPicPr>
         <p:blipFill>
-          <a:blip r:embed="rId2"/>
+          <a:blip r:embed="rId3"/>
           <a:stretch>
             <a:fillRect/>
           </a:stretch>
@@ -9508,7 +10683,7 @@
           <p:nvPr/>
         </p:nvPicPr>
         <p:blipFill>
-          <a:blip r:embed="rId3"/>
+          <a:blip r:embed="rId4"/>
           <a:stretch>
             <a:fillRect/>
           </a:stretch>
@@ -9717,7 +10892,7 @@
           <p:nvPr/>
         </p:nvPicPr>
         <p:blipFill>
-          <a:blip r:embed="rId4"/>
+          <a:blip r:embed="rId5"/>
           <a:stretch>
             <a:fillRect/>
           </a:stretch>
@@ -10228,4 +11403,319 @@
     </a:ext>
   </a:extLst>
 </a:theme>
+</file>
+
+<file path=ppt/theme/theme2.xml><?xml version="1.0" encoding="utf-8"?>
+<a:theme xmlns:a="http://schemas.openxmlformats.org/drawingml/2006/main" name="Office Theme">
+  <a:themeElements>
+    <a:clrScheme name="Office">
+      <a:dk1>
+        <a:sysClr val="windowText" lastClr="000000"/>
+      </a:dk1>
+      <a:lt1>
+        <a:sysClr val="window" lastClr="FFFFFF"/>
+      </a:lt1>
+      <a:dk2>
+        <a:srgbClr val="0E2841"/>
+      </a:dk2>
+      <a:lt2>
+        <a:srgbClr val="E8E8E8"/>
+      </a:lt2>
+      <a:accent1>
+        <a:srgbClr val="156082"/>
+      </a:accent1>
+      <a:accent2>
+        <a:srgbClr val="E97132"/>
+      </a:accent2>
+      <a:accent3>
+        <a:srgbClr val="196B24"/>
+      </a:accent3>
+      <a:accent4>
+        <a:srgbClr val="0F9ED5"/>
+      </a:accent4>
+      <a:accent5>
+        <a:srgbClr val="A02B93"/>
+      </a:accent5>
+      <a:accent6>
+        <a:srgbClr val="4EA72E"/>
+      </a:accent6>
+      <a:hlink>
+        <a:srgbClr val="467886"/>
+      </a:hlink>
+      <a:folHlink>
+        <a:srgbClr val="96607D"/>
+      </a:folHlink>
+    </a:clrScheme>
+    <a:fontScheme name="Office">
+      <a:majorFont>
+        <a:latin typeface="Aptos Display" panose="02110004020202020204"/>
+        <a:ea typeface=""/>
+        <a:cs typeface=""/>
+        <a:font script="Jpan" typeface="游ゴシック Light"/>
+        <a:font script="Hang" typeface="맑은 고딕"/>
+        <a:font script="Hans" typeface="等线 Light"/>
+        <a:font script="Hant" typeface="新細明體"/>
+        <a:font script="Arab" typeface="Times New Roman"/>
+        <a:font script="Hebr" typeface="Times New Roman"/>
+        <a:font script="Thai" typeface="Angsana New"/>
+        <a:font script="Ethi" typeface="Nyala"/>
+        <a:font script="Beng" typeface="Vrinda"/>
+        <a:font script="Gujr" typeface="Shruti"/>
+        <a:font script="Khmr" typeface="MoolBoran"/>
+        <a:font script="Knda" typeface="Tunga"/>
+        <a:font script="Guru" typeface="Raavi"/>
+        <a:font script="Cans" typeface="Euphemia"/>
+        <a:font script="Cher" typeface="Plantagenet Cherokee"/>
+        <a:font script="Yiii" typeface="Microsoft Yi Baiti"/>
+        <a:font script="Tibt" typeface="Microsoft Himalaya"/>
+        <a:font script="Thaa" typeface="MV Boli"/>
+        <a:font script="Deva" typeface="Mangal"/>
+        <a:font script="Telu" typeface="Gautami"/>
+        <a:font script="Taml" typeface="Latha"/>
+        <a:font script="Syrc" typeface="Estrangelo Edessa"/>
+        <a:font script="Orya" typeface="Kalinga"/>
+        <a:font script="Mlym" typeface="Kartika"/>
+        <a:font script="Laoo" typeface="DokChampa"/>
+        <a:font script="Sinh" typeface="Iskoola Pota"/>
+        <a:font script="Mong" typeface="Mongolian Baiti"/>
+        <a:font script="Viet" typeface="Times New Roman"/>
+        <a:font script="Uigh" typeface="Microsoft Uighur"/>
+        <a:font script="Geor" typeface="Sylfaen"/>
+        <a:font script="Armn" typeface="Arial"/>
+        <a:font script="Bugi" typeface="Leelawadee UI"/>
+        <a:font script="Bopo" typeface="Microsoft JhengHei"/>
+        <a:font script="Java" typeface="Javanese Text"/>
+        <a:font script="Lisu" typeface="Segoe UI"/>
+        <a:font script="Mymr" typeface="Myanmar Text"/>
+        <a:font script="Nkoo" typeface="Ebrima"/>
+        <a:font script="Olck" typeface="Nirmala UI"/>
+        <a:font script="Osma" typeface="Ebrima"/>
+        <a:font script="Phag" typeface="Phagspa"/>
+        <a:font script="Syrn" typeface="Estrangelo Edessa"/>
+        <a:font script="Syrj" typeface="Estrangelo Edessa"/>
+        <a:font script="Syre" typeface="Estrangelo Edessa"/>
+        <a:font script="Sora" typeface="Nirmala UI"/>
+        <a:font script="Tale" typeface="Microsoft Tai Le"/>
+        <a:font script="Talu" typeface="Microsoft New Tai Lue"/>
+        <a:font script="Tfng" typeface="Ebrima"/>
+      </a:majorFont>
+      <a:minorFont>
+        <a:latin typeface="Aptos" panose="02110004020202020204"/>
+        <a:ea typeface=""/>
+        <a:cs typeface=""/>
+        <a:font script="Jpan" typeface="游ゴシック"/>
+        <a:font script="Hang" typeface="맑은 고딕"/>
+        <a:font script="Hans" typeface="等线"/>
+        <a:font script="Hant" typeface="新細明體"/>
+        <a:font script="Arab" typeface="Arial"/>
+        <a:font script="Hebr" typeface="Arial"/>
+        <a:font script="Thai" typeface="Cordia New"/>
+        <a:font script="Ethi" typeface="Nyala"/>
+        <a:font script="Beng" typeface="Vrinda"/>
+        <a:font script="Gujr" typeface="Shruti"/>
+        <a:font script="Khmr" typeface="DaunPenh"/>
+        <a:font script="Knda" typeface="Tunga"/>
+        <a:font script="Guru" typeface="Raavi"/>
+        <a:font script="Cans" typeface="Euphemia"/>
+        <a:font script="Cher" typeface="Plantagenet Cherokee"/>
+        <a:font script="Yiii" typeface="Microsoft Yi Baiti"/>
+        <a:font script="Tibt" typeface="Microsoft Himalaya"/>
+        <a:font script="Thaa" typeface="MV Boli"/>
+        <a:font script="Deva" typeface="Mangal"/>
+        <a:font script="Telu" typeface="Gautami"/>
+        <a:font script="Taml" typeface="Latha"/>
+        <a:font script="Syrc" typeface="Estrangelo Edessa"/>
+        <a:font script="Orya" typeface="Kalinga"/>
+        <a:font script="Mlym" typeface="Kartika"/>
+        <a:font script="Laoo" typeface="DokChampa"/>
+        <a:font script="Sinh" typeface="Iskoola Pota"/>
+        <a:font script="Mong" typeface="Mongolian Baiti"/>
+        <a:font script="Viet" typeface="Arial"/>
+        <a:font script="Uigh" typeface="Microsoft Uighur"/>
+        <a:font script="Geor" typeface="Sylfaen"/>
+        <a:font script="Armn" typeface="Arial"/>
+        <a:font script="Bugi" typeface="Leelawadee UI"/>
+        <a:font script="Bopo" typeface="Microsoft JhengHei"/>
+        <a:font script="Java" typeface="Javanese Text"/>
+        <a:font script="Lisu" typeface="Segoe UI"/>
+        <a:font script="Mymr" typeface="Myanmar Text"/>
+        <a:font script="Nkoo" typeface="Ebrima"/>
+        <a:font script="Olck" typeface="Nirmala UI"/>
+        <a:font script="Osma" typeface="Ebrima"/>
+        <a:font script="Phag" typeface="Phagspa"/>
+        <a:font script="Syrn" typeface="Estrangelo Edessa"/>
+        <a:font script="Syrj" typeface="Estrangelo Edessa"/>
+        <a:font script="Syre" typeface="Estrangelo Edessa"/>
+        <a:font script="Sora" typeface="Nirmala UI"/>
+        <a:font script="Tale" typeface="Microsoft Tai Le"/>
+        <a:font script="Talu" typeface="Microsoft New Tai Lue"/>
+        <a:font script="Tfng" typeface="Ebrima"/>
+      </a:minorFont>
+    </a:fontScheme>
+    <a:fmtScheme name="Office">
+      <a:fillStyleLst>
+        <a:solidFill>
+          <a:schemeClr val="phClr"/>
+        </a:solidFill>
+        <a:gradFill rotWithShape="1">
+          <a:gsLst>
+            <a:gs pos="0">
+              <a:schemeClr val="phClr">
+                <a:lumMod val="110000"/>
+                <a:satMod val="105000"/>
+                <a:tint val="67000"/>
+              </a:schemeClr>
+            </a:gs>
+            <a:gs pos="50000">
+              <a:schemeClr val="phClr">
+                <a:lumMod val="105000"/>
+                <a:satMod val="103000"/>
+                <a:tint val="73000"/>
+              </a:schemeClr>
+            </a:gs>
+            <a:gs pos="100000">
+              <a:schemeClr val="phClr">
+                <a:lumMod val="105000"/>
+                <a:satMod val="109000"/>
+                <a:tint val="81000"/>
+              </a:schemeClr>
+            </a:gs>
+          </a:gsLst>
+          <a:lin ang="5400000" scaled="0"/>
+        </a:gradFill>
+        <a:gradFill rotWithShape="1">
+          <a:gsLst>
+            <a:gs pos="0">
+              <a:schemeClr val="phClr">
+                <a:satMod val="103000"/>
+                <a:lumMod val="102000"/>
+                <a:tint val="94000"/>
+              </a:schemeClr>
+            </a:gs>
+            <a:gs pos="50000">
+              <a:schemeClr val="phClr">
+                <a:satMod val="110000"/>
+                <a:lumMod val="100000"/>
+                <a:shade val="100000"/>
+              </a:schemeClr>
+            </a:gs>
+            <a:gs pos="100000">
+              <a:schemeClr val="phClr">
+                <a:lumMod val="99000"/>
+                <a:satMod val="120000"/>
+                <a:shade val="78000"/>
+              </a:schemeClr>
+            </a:gs>
+          </a:gsLst>
+          <a:lin ang="5400000" scaled="0"/>
+        </a:gradFill>
+      </a:fillStyleLst>
+      <a:lnStyleLst>
+        <a:ln w="12700" cap="flat" cmpd="sng" algn="ctr">
+          <a:solidFill>
+            <a:schemeClr val="phClr"/>
+          </a:solidFill>
+          <a:prstDash val="solid"/>
+          <a:miter lim="800000"/>
+        </a:ln>
+        <a:ln w="19050" cap="flat" cmpd="sng" algn="ctr">
+          <a:solidFill>
+            <a:schemeClr val="phClr"/>
+          </a:solidFill>
+          <a:prstDash val="solid"/>
+          <a:miter lim="800000"/>
+        </a:ln>
+        <a:ln w="25400" cap="flat" cmpd="sng" algn="ctr">
+          <a:solidFill>
+            <a:schemeClr val="phClr"/>
+          </a:solidFill>
+          <a:prstDash val="solid"/>
+          <a:miter lim="800000"/>
+        </a:ln>
+      </a:lnStyleLst>
+      <a:effectStyleLst>
+        <a:effectStyle>
+          <a:effectLst/>
+        </a:effectStyle>
+        <a:effectStyle>
+          <a:effectLst/>
+        </a:effectStyle>
+        <a:effectStyle>
+          <a:effectLst>
+            <a:outerShdw blurRad="57150" dist="19050" dir="5400000" algn="ctr" rotWithShape="0">
+              <a:srgbClr val="000000">
+                <a:alpha val="63000"/>
+              </a:srgbClr>
+            </a:outerShdw>
+          </a:effectLst>
+        </a:effectStyle>
+      </a:effectStyleLst>
+      <a:bgFillStyleLst>
+        <a:solidFill>
+          <a:schemeClr val="phClr"/>
+        </a:solidFill>
+        <a:solidFill>
+          <a:schemeClr val="phClr">
+            <a:tint val="95000"/>
+            <a:satMod val="170000"/>
+          </a:schemeClr>
+        </a:solidFill>
+        <a:gradFill rotWithShape="1">
+          <a:gsLst>
+            <a:gs pos="0">
+              <a:schemeClr val="phClr">
+                <a:tint val="93000"/>
+                <a:satMod val="150000"/>
+                <a:shade val="98000"/>
+                <a:lumMod val="102000"/>
+              </a:schemeClr>
+            </a:gs>
+            <a:gs pos="50000">
+              <a:schemeClr val="phClr">
+                <a:tint val="98000"/>
+                <a:satMod val="130000"/>
+                <a:shade val="90000"/>
+                <a:lumMod val="103000"/>
+              </a:schemeClr>
+            </a:gs>
+            <a:gs pos="100000">
+              <a:schemeClr val="phClr">
+                <a:shade val="63000"/>
+                <a:satMod val="120000"/>
+              </a:schemeClr>
+            </a:gs>
+          </a:gsLst>
+          <a:lin ang="5400000" scaled="0"/>
+        </a:gradFill>
+      </a:bgFillStyleLst>
+    </a:fmtScheme>
+  </a:themeElements>
+  <a:objectDefaults>
+    <a:lnDef>
+      <a:spPr/>
+      <a:bodyPr/>
+      <a:lstStyle/>
+      <a:style>
+        <a:lnRef idx="2">
+          <a:schemeClr val="accent1"/>
+        </a:lnRef>
+        <a:fillRef idx="0">
+          <a:schemeClr val="accent1"/>
+        </a:fillRef>
+        <a:effectRef idx="1">
+          <a:schemeClr val="accent1"/>
+        </a:effectRef>
+        <a:fontRef idx="minor">
+          <a:schemeClr val="tx1"/>
+        </a:fontRef>
+      </a:style>
+    </a:lnDef>
+  </a:objectDefaults>
+  <a:extraClrSchemeLst/>
+  <a:extLst>
+    <a:ext uri="{05A4C25C-085E-4340-85A3-A5531E510DB2}">
+      <thm15:themeFamily xmlns:thm15="http://schemas.microsoft.com/office/thememl/2012/main" name="Office Theme" id="{2E142A2C-CD16-42D6-873A-C26D2A0506FA}" vid="{1BDDFF52-6CD6-40A5-AB3C-68EB2F1E4D0A}"/>
+    </a:ext>
+  </a:extLst>
+</a:theme>
 </file>
--- a/decks/Day 2/Day2-Section2-Streaming-Tools-Thinking.pptx
+++ b/decks/Day 2/Day2-Section2-Streaming-Tools-Thinking.pptx
@@ -1799,45 +1799,6 @@
           <a:lstStyle/>
           <a:p>
             <a:endParaRPr lang="en-US"/>
-          </a:p>
-        </p:txBody>
-      </p:sp>
-      <p:sp>
-        <p:nvSpPr>
-          <p:cNvPr id="8" name="Text 5"/>
-          <p:cNvSpPr/>
-          <p:nvPr/>
-        </p:nvSpPr>
-        <p:spPr>
-          <a:xfrm>
-            <a:off x="640080" y="3611880"/>
-            <a:ext cx="7315200" cy="365760"/>
-          </a:xfrm>
-          <a:prstGeom prst="rect">
-            <a:avLst/>
-          </a:prstGeom>
-          <a:noFill/>
-          <a:ln/>
-        </p:spPr>
-        <p:txBody>
-          <a:bodyPr wrap="square" lIns="0" tIns="0" rIns="0" bIns="0" rtlCol="0" anchor="ctr"/>
-          <a:lstStyle/>
-          <a:p>
-            <a:pPr marL="0" indent="0">
-              <a:buNone/>
-            </a:pPr>
-            <a:r>
-              <a:rPr lang="en-US" sz="1600" dirty="0">
-                <a:solidFill>
-                  <a:srgbClr val="615C52"/>
-                </a:solidFill>
-                <a:latin typeface="Inter" pitchFamily="34" charset="0"/>
-                <a:ea typeface="Inter" pitchFamily="34" charset="-122"/>
-                <a:cs typeface="Inter" pitchFamily="34" charset="-120"/>
-              </a:rPr>
-              <a:t>75 min  ·  40 lecture / demo  +  35 lab</a:t>
-            </a:r>
-            <a:endParaRPr lang="en-US" sz="1600" dirty="0"/>
           </a:p>
         </p:txBody>
       </p:sp>
